--- a/submission/EvalCall决赛提交包-20260715/01_EvalCall决赛PPT-最终提交版.pptx
+++ b/submission/EvalCall决赛提交包-20260715/01_EvalCall决赛PPT-最终提交版.pptx
@@ -2,21 +2,21 @@
 <file path=ppt/presentation.xml><?xml version="1.0" encoding="utf-8"?>
 <p:presentation xmlns:p="http://schemas.openxmlformats.org/presentationml/2006/main">
   <p:sldMasterIdLst>
-    <p:sldMasterId xmlns:r="http://schemas.openxmlformats.org/officeDocument/2006/relationships" id="2147483648" r:id="R2b2ca94065394660"/>
+    <p:sldMasterId xmlns:r="http://schemas.openxmlformats.org/officeDocument/2006/relationships" id="2147483648" r:id="Rfe9f91867e2b4350"/>
   </p:sldMasterIdLst>
   <p:notesMasterIdLst>
-    <p:notesMasterId xmlns:r="http://schemas.openxmlformats.org/officeDocument/2006/relationships" r:id="R565ef908c3dc4453"/>
+    <p:notesMasterId xmlns:r="http://schemas.openxmlformats.org/officeDocument/2006/relationships" r:id="Ra05e5ddf8fc148e1"/>
   </p:notesMasterIdLst>
   <p:sldIdLst>
-    <p:sldId xmlns:r="http://schemas.openxmlformats.org/officeDocument/2006/relationships" id="256" r:id="R56b97a46dcc34a81"/>
-    <p:sldId xmlns:r="http://schemas.openxmlformats.org/officeDocument/2006/relationships" id="257" r:id="Ra2c52791f5cf4014"/>
-    <p:sldId xmlns:r="http://schemas.openxmlformats.org/officeDocument/2006/relationships" id="258" r:id="Rf722ad1b95b14c54"/>
-    <p:sldId xmlns:r="http://schemas.openxmlformats.org/officeDocument/2006/relationships" id="259" r:id="R4b9486ec61bf4979"/>
-    <p:sldId xmlns:r="http://schemas.openxmlformats.org/officeDocument/2006/relationships" id="260" r:id="R8dca7a5cd4404d68"/>
-    <p:sldId xmlns:r="http://schemas.openxmlformats.org/officeDocument/2006/relationships" id="261" r:id="R45fa4e0bf62d4278"/>
-    <p:sldId xmlns:r="http://schemas.openxmlformats.org/officeDocument/2006/relationships" id="262" r:id="R75e81ca76f1740c9"/>
-    <p:sldId xmlns:r="http://schemas.openxmlformats.org/officeDocument/2006/relationships" id="263" r:id="Rd9e8ffa89b7e4cb6"/>
-    <p:sldId xmlns:r="http://schemas.openxmlformats.org/officeDocument/2006/relationships" id="264" r:id="R7b8399960b3f48a2"/>
+    <p:sldId xmlns:r="http://schemas.openxmlformats.org/officeDocument/2006/relationships" id="256" r:id="R3ec07cfae2b84cfe"/>
+    <p:sldId xmlns:r="http://schemas.openxmlformats.org/officeDocument/2006/relationships" id="257" r:id="Rfdd8f2a0fe4f4a10"/>
+    <p:sldId xmlns:r="http://schemas.openxmlformats.org/officeDocument/2006/relationships" id="258" r:id="Rf4bd7e9e826e4513"/>
+    <p:sldId xmlns:r="http://schemas.openxmlformats.org/officeDocument/2006/relationships" id="259" r:id="R4b1c180705564481"/>
+    <p:sldId xmlns:r="http://schemas.openxmlformats.org/officeDocument/2006/relationships" id="260" r:id="R56d139750c214727"/>
+    <p:sldId xmlns:r="http://schemas.openxmlformats.org/officeDocument/2006/relationships" id="261" r:id="Rc67adf09bcd34757"/>
+    <p:sldId xmlns:r="http://schemas.openxmlformats.org/officeDocument/2006/relationships" id="262" r:id="R7d5c7607607a448c"/>
+    <p:sldId xmlns:r="http://schemas.openxmlformats.org/officeDocument/2006/relationships" id="263" r:id="Rccdd674f480040c6"/>
+    <p:sldId xmlns:r="http://schemas.openxmlformats.org/officeDocument/2006/relationships" id="264" r:id="R39ce073740c04d56"/>
   </p:sldIdLst>
   <p:sldSz cx="12192000" cy="6858000"/>
   <p:notesSz cx="6858000" cy="9144000"/>
@@ -1238,7 +1238,7 @@
   </p:cSld>
   <p:clrMap bg1="lt1" tx1="dk1" bg2="lt2" tx2="dk2" accent1="accent1" accent2="accent2" accent3="accent3" accent4="accent4" accent5="accent5" accent6="accent6" hlink="hlink" folHlink="folHlink"/>
   <p:sldLayoutIdLst>
-    <p:sldLayoutId xmlns:r="http://schemas.openxmlformats.org/officeDocument/2006/relationships" id="2147483649" r:id="R7a600d5d3fee4261"/>
+    <p:sldLayoutId xmlns:r="http://schemas.openxmlformats.org/officeDocument/2006/relationships" id="2147483649" r:id="R7bbd6a40754d496a"/>
   </p:sldLayoutIdLst>
   <p:txStyles>
     <p:titleStyle>
@@ -1793,7 +1793,7 @@
           <p:nvPr/>
         </p:nvPicPr>
         <p:blipFill>
-          <a:blip xmlns:r="http://schemas.openxmlformats.org/officeDocument/2006/relationships" xmlns:a="http://schemas.openxmlformats.org/drawingml/2006/main" r:embed="Rc1847968d84a4d94"/>
+          <a:blip xmlns:r="http://schemas.openxmlformats.org/officeDocument/2006/relationships" xmlns:a="http://schemas.openxmlformats.org/drawingml/2006/main" r:embed="R26c7083d0dc14c01"/>
           <a:srcRect xmlns:a="http://schemas.openxmlformats.org/drawingml/2006/main" l="0" t="27" r="0" b="27"/>
           <a:stretch xmlns:a="http://schemas.openxmlformats.org/drawingml/2006/main">
             <a:fillRect l="0" t="0" r="0" b="0"/>
@@ -1825,7 +1825,7 @@
     <p:bg>
       <p:bgPr>
         <a:solidFill xmlns:a="http://schemas.openxmlformats.org/drawingml/2006/main">
-          <a:srgbClr val="FFFFFF"/>
+          <a:srgbClr val="FCFCFB"/>
         </a:solidFill>
       </p:bgPr>
     </p:bg>
@@ -1840,57 +1840,50 @@
       </p:grpSpPr>
       <p:sp>
         <p:nvSpPr>
-          <p:cNvPr id="1" name="kicker">
-            <a:extLst xmlns:a="http://schemas.openxmlformats.org/drawingml/2006/main">
-              <a:ext uri="{FF2B5EF4-FFF2-40B4-BE49-F238E27FC236}">
-                <a16:creationId xmlns:a16="http://schemas.microsoft.com/office/drawing/2014/main" id="{AEFFADB3-C24B-464A-A482-53E431FC053A}"/>
-              </a:ext>
-            </a:extLst>
-          </p:cNvPr>
-          <p:cNvSpPr>
-            <a:spLocks xmlns:a="http://schemas.openxmlformats.org/drawingml/2006/main" noGrp="1"/>
-          </p:cNvSpPr>
-          <p:nvPr/>
-        </p:nvSpPr>
-        <p:spPr>
-          <a:xfrm xmlns:a="http://schemas.openxmlformats.org/drawingml/2006/main">
-            <a:off x="533400" y="323850"/>
-            <a:ext cx="6858000" cy="266700"/>
-          </a:xfrm>
-          <a:prstGeom xmlns:a="http://schemas.openxmlformats.org/drawingml/2006/main" prst="rect">
-            <a:avLst/>
-          </a:prstGeom>
-          <a:noFill xmlns:a="http://schemas.openxmlformats.org/drawingml/2006/main"/>
-          <a:ln xmlns:a="http://schemas.openxmlformats.org/drawingml/2006/main" w="0">
-            <a:noFill/>
-            <a:prstDash val="solid"/>
-          </a:ln>
-        </p:spPr>
-        <p:txBody>
-          <a:bodyPr xmlns:a="http://schemas.openxmlformats.org/drawingml/2006/main" anchor="t">
-            <a:normAutofit fontScale="95833"/>
+          <p:cNvPr id="1" name="eyebrow">
+            <a:extLst xmlns:a="http://schemas.openxmlformats.org/drawingml/2006/main">
+              <a:ext uri="{FF2B5EF4-FFF2-40B4-BE49-F238E27FC236}">
+                <a16:creationId xmlns:a16="http://schemas.microsoft.com/office/drawing/2014/main" id="{F4816FD2-B8C3-4D5A-970F-955CAB32A0DD}"/>
+              </a:ext>
+            </a:extLst>
+          </p:cNvPr>
+          <p:cNvSpPr>
+            <a:spLocks xmlns:a="http://schemas.openxmlformats.org/drawingml/2006/main" noGrp="1"/>
+          </p:cNvSpPr>
+          <p:nvPr/>
+        </p:nvSpPr>
+        <p:spPr>
+          <a:xfrm xmlns:a="http://schemas.openxmlformats.org/drawingml/2006/main">
+            <a:off x="533400" y="257175"/>
+            <a:ext cx="3238500" cy="228600"/>
+          </a:xfrm>
+          <a:prstGeom xmlns:a="http://schemas.openxmlformats.org/drawingml/2006/main" prst="rect">
+            <a:avLst/>
+          </a:prstGeom>
+          <a:noFill xmlns:a="http://schemas.openxmlformats.org/drawingml/2006/main"/>
+          <a:ln xmlns:a="http://schemas.openxmlformats.org/drawingml/2006/main" w="0">
+            <a:noFill/>
+            <a:prstDash val="solid"/>
+          </a:ln>
+        </p:spPr>
+        <p:txBody>
+          <a:bodyPr xmlns:a="http://schemas.openxmlformats.org/drawingml/2006/main" wrap="square" lIns="0" tIns="0" rIns="0" bIns="0" anchor="ctr">
+            <a:normAutofit fontScale="100000"/>
           </a:bodyPr>
           <a:lstStyle xmlns:a="http://schemas.openxmlformats.org/drawingml/2006/main"/>
           <a:p xmlns:a="http://schemas.openxmlformats.org/drawingml/2006/main">
             <a:pPr algn="l">
-              <a:buNone/>
-              <a:defRPr sz="1200" b="1">
-                <a:solidFill>
-                  <a:srgbClr val="667085"/>
-                </a:solidFill>
-                <a:latin typeface="PingFang SC"/>
-                <a:ea typeface="PingFang SC"/>
-                <a:cs typeface="PingFang SC"/>
-              </a:defRPr>
-            </a:pPr>
-            <a:r>
-              <a:rPr sz="1200" b="1">
-                <a:solidFill>
-                  <a:srgbClr val="667085"/>
-                </a:solidFill>
-                <a:latin typeface="PingFang SC"/>
-                <a:ea typeface="PingFang SC"/>
-                <a:cs typeface="PingFang SC"/>
+              <a:defRPr sz="1050" b="1">
+                <a:solidFill>
+                  <a:srgbClr val="6E7A90"/>
+                </a:solidFill>
+              </a:defRPr>
+            </a:pPr>
+            <a:r>
+              <a:rPr sz="1050" b="1">
+                <a:solidFill>
+                  <a:srgbClr val="6E7A90"/>
+                </a:solidFill>
               </a:rPr>
               <a:t>EVALCALL · 问题定义</a:t>
             </a:r>
@@ -1902,54 +1895,47 @@
           <p:cNvPr id="2" name="title">
             <a:extLst xmlns:a="http://schemas.openxmlformats.org/drawingml/2006/main">
               <a:ext uri="{FF2B5EF4-FFF2-40B4-BE49-F238E27FC236}">
-                <a16:creationId xmlns:a16="http://schemas.microsoft.com/office/drawing/2014/main" id="{165D2154-B96E-43F0-B2E9-7CEAA53D049D}"/>
-              </a:ext>
-            </a:extLst>
-          </p:cNvPr>
-          <p:cNvSpPr>
-            <a:spLocks xmlns:a="http://schemas.openxmlformats.org/drawingml/2006/main" noGrp="1"/>
-          </p:cNvSpPr>
-          <p:nvPr/>
-        </p:nvSpPr>
-        <p:spPr>
-          <a:xfrm xmlns:a="http://schemas.openxmlformats.org/drawingml/2006/main">
-            <a:off x="533400" y="666750"/>
-            <a:ext cx="11125200" cy="742950"/>
-          </a:xfrm>
-          <a:prstGeom xmlns:a="http://schemas.openxmlformats.org/drawingml/2006/main" prst="rect">
-            <a:avLst/>
-          </a:prstGeom>
-          <a:noFill xmlns:a="http://schemas.openxmlformats.org/drawingml/2006/main"/>
-          <a:ln xmlns:a="http://schemas.openxmlformats.org/drawingml/2006/main" w="0">
-            <a:noFill/>
-            <a:prstDash val="solid"/>
-          </a:ln>
-        </p:spPr>
-        <p:txBody>
-          <a:bodyPr xmlns:a="http://schemas.openxmlformats.org/drawingml/2006/main" anchor="t">
+                <a16:creationId xmlns:a16="http://schemas.microsoft.com/office/drawing/2014/main" id="{30D877AD-E85C-4F42-9556-3A4596FDFACA}"/>
+              </a:ext>
+            </a:extLst>
+          </p:cNvPr>
+          <p:cNvSpPr>
+            <a:spLocks xmlns:a="http://schemas.openxmlformats.org/drawingml/2006/main" noGrp="1"/>
+          </p:cNvSpPr>
+          <p:nvPr/>
+        </p:nvSpPr>
+        <p:spPr>
+          <a:xfrm xmlns:a="http://schemas.openxmlformats.org/drawingml/2006/main">
+            <a:off x="533400" y="647700"/>
+            <a:ext cx="11125200" cy="571500"/>
+          </a:xfrm>
+          <a:prstGeom xmlns:a="http://schemas.openxmlformats.org/drawingml/2006/main" prst="rect">
+            <a:avLst/>
+          </a:prstGeom>
+          <a:noFill xmlns:a="http://schemas.openxmlformats.org/drawingml/2006/main"/>
+          <a:ln xmlns:a="http://schemas.openxmlformats.org/drawingml/2006/main" w="0">
+            <a:noFill/>
+            <a:prstDash val="solid"/>
+          </a:ln>
+        </p:spPr>
+        <p:txBody>
+          <a:bodyPr xmlns:a="http://schemas.openxmlformats.org/drawingml/2006/main" wrap="square" lIns="0" tIns="0" rIns="0" bIns="0" anchor="ctr">
             <a:normAutofit fontScale="100000"/>
           </a:bodyPr>
           <a:lstStyle xmlns:a="http://schemas.openxmlformats.org/drawingml/2006/main"/>
           <a:p xmlns:a="http://schemas.openxmlformats.org/drawingml/2006/main">
             <a:pPr algn="l">
-              <a:buNone/>
-              <a:defRPr sz="3150" b="1">
-                <a:solidFill>
-                  <a:srgbClr val="111827"/>
-                </a:solidFill>
-                <a:latin typeface="PingFang SC"/>
-                <a:ea typeface="PingFang SC"/>
-                <a:cs typeface="PingFang SC"/>
-              </a:defRPr>
-            </a:pPr>
-            <a:r>
-              <a:rPr sz="3150" b="1">
-                <a:solidFill>
-                  <a:srgbClr val="111827"/>
-                </a:solidFill>
-                <a:latin typeface="PingFang SC"/>
-                <a:ea typeface="PingFang SC"/>
-                <a:cs typeface="PingFang SC"/>
+              <a:defRPr sz="3000" b="1">
+                <a:solidFill>
+                  <a:srgbClr val="111C31"/>
+                </a:solidFill>
+              </a:defRPr>
+            </a:pPr>
+            <a:r>
+              <a:rPr sz="3000" b="1">
+                <a:solidFill>
+                  <a:srgbClr val="111C31"/>
+                </a:solidFill>
               </a:rPr>
               <a:t>模型外呼的过程中，到底会遇到什么问题呢？</a:t>
             </a:r>
@@ -1961,25 +1947,25 @@
           <p:cNvPr id="3" name="title-rule">
             <a:extLst xmlns:a="http://schemas.openxmlformats.org/drawingml/2006/main">
               <a:ext uri="{FF2B5EF4-FFF2-40B4-BE49-F238E27FC236}">
-                <a16:creationId xmlns:a16="http://schemas.microsoft.com/office/drawing/2014/main" id="{7866D9FB-778F-4E38-BBD2-5560C320B2CA}"/>
-              </a:ext>
-            </a:extLst>
-          </p:cNvPr>
-          <p:cNvSpPr>
-            <a:spLocks xmlns:a="http://schemas.openxmlformats.org/drawingml/2006/main" noGrp="1"/>
-          </p:cNvSpPr>
-          <p:nvPr/>
-        </p:nvSpPr>
-        <p:spPr>
-          <a:xfrm xmlns:a="http://schemas.openxmlformats.org/drawingml/2006/main">
-            <a:off x="533400" y="1457325"/>
+                <a16:creationId xmlns:a16="http://schemas.microsoft.com/office/drawing/2014/main" id="{85223B97-650A-4B60-8FA9-B62F895D2881}"/>
+              </a:ext>
+            </a:extLst>
+          </p:cNvPr>
+          <p:cNvSpPr>
+            <a:spLocks xmlns:a="http://schemas.openxmlformats.org/drawingml/2006/main" noGrp="1"/>
+          </p:cNvSpPr>
+          <p:nvPr/>
+        </p:nvSpPr>
+        <p:spPr>
+          <a:xfrm xmlns:a="http://schemas.openxmlformats.org/drawingml/2006/main">
+            <a:off x="533400" y="1323975"/>
             <a:ext cx="11125200" cy="19050"/>
           </a:xfrm>
           <a:prstGeom xmlns:a="http://schemas.openxmlformats.org/drawingml/2006/main" prst="rect">
             <a:avLst/>
           </a:prstGeom>
           <a:solidFill xmlns:a="http://schemas.openxmlformats.org/drawingml/2006/main">
-            <a:srgbClr val="111827"/>
+            <a:srgbClr val="111C31"/>
           </a:solidFill>
           <a:ln xmlns:a="http://schemas.openxmlformats.org/drawingml/2006/main" w="0">
             <a:noFill/>
@@ -1989,57 +1975,624 @@
       </p:sp>
       <p:sp>
         <p:nvSpPr>
-          <p:cNvPr id="4" name="page">
-            <a:extLst xmlns:a="http://schemas.openxmlformats.org/drawingml/2006/main">
-              <a:ext uri="{FF2B5EF4-FFF2-40B4-BE49-F238E27FC236}">
-                <a16:creationId xmlns:a16="http://schemas.microsoft.com/office/drawing/2014/main" id="{B9DC85EB-6A27-49A6-A6DB-FF60299953B8}"/>
-              </a:ext>
-            </a:extLst>
-          </p:cNvPr>
-          <p:cNvSpPr>
-            <a:spLocks xmlns:a="http://schemas.openxmlformats.org/drawingml/2006/main" noGrp="1"/>
-          </p:cNvSpPr>
-          <p:nvPr/>
-        </p:nvSpPr>
-        <p:spPr>
-          <a:xfrm xmlns:a="http://schemas.openxmlformats.org/drawingml/2006/main">
-            <a:off x="11144250" y="6381750"/>
-            <a:ext cx="514350" cy="209550"/>
-          </a:xfrm>
-          <a:prstGeom xmlns:a="http://schemas.openxmlformats.org/drawingml/2006/main" prst="rect">
-            <a:avLst/>
-          </a:prstGeom>
-          <a:noFill xmlns:a="http://schemas.openxmlformats.org/drawingml/2006/main"/>
-          <a:ln xmlns:a="http://schemas.openxmlformats.org/drawingml/2006/main" w="0">
-            <a:noFill/>
-            <a:prstDash val="solid"/>
-          </a:ln>
-        </p:spPr>
-        <p:txBody>
-          <a:bodyPr xmlns:a="http://schemas.openxmlformats.org/drawingml/2006/main" anchor="t">
-            <a:normAutofit fontScale="73809"/>
+          <p:cNvPr id="4" name="attention-prefix">
+            <a:extLst xmlns:a="http://schemas.openxmlformats.org/drawingml/2006/main">
+              <a:ext uri="{FF2B5EF4-FFF2-40B4-BE49-F238E27FC236}">
+                <a16:creationId xmlns:a16="http://schemas.microsoft.com/office/drawing/2014/main" id="{CD6317AB-3534-431D-BD13-B67C356DB683}"/>
+              </a:ext>
+            </a:extLst>
+          </p:cNvPr>
+          <p:cNvSpPr>
+            <a:spLocks xmlns:a="http://schemas.openxmlformats.org/drawingml/2006/main" noGrp="1"/>
+          </p:cNvSpPr>
+          <p:nvPr/>
+        </p:nvSpPr>
+        <p:spPr>
+          <a:xfrm xmlns:a="http://schemas.openxmlformats.org/drawingml/2006/main">
+            <a:off x="3333750" y="1438275"/>
+            <a:ext cx="2857500" cy="361950"/>
+          </a:xfrm>
+          <a:prstGeom xmlns:a="http://schemas.openxmlformats.org/drawingml/2006/main" prst="rect">
+            <a:avLst/>
+          </a:prstGeom>
+          <a:noFill xmlns:a="http://schemas.openxmlformats.org/drawingml/2006/main"/>
+          <a:ln xmlns:a="http://schemas.openxmlformats.org/drawingml/2006/main" w="0">
+            <a:noFill/>
+            <a:prstDash val="solid"/>
+          </a:ln>
+        </p:spPr>
+        <p:txBody>
+          <a:bodyPr xmlns:a="http://schemas.openxmlformats.org/drawingml/2006/main" wrap="square" lIns="0" tIns="0" rIns="0" bIns="0" anchor="ctr">
+            <a:normAutofit fontScale="100000"/>
           </a:bodyPr>
           <a:lstStyle xmlns:a="http://schemas.openxmlformats.org/drawingml/2006/main"/>
           <a:p xmlns:a="http://schemas.openxmlformats.org/drawingml/2006/main">
             <a:pPr algn="r">
-              <a:buNone/>
-              <a:defRPr sz="1050" b="0">
-                <a:solidFill>
-                  <a:srgbClr val="667085"/>
-                </a:solidFill>
-                <a:latin typeface="PingFang SC"/>
-                <a:ea typeface="PingFang SC"/>
-                <a:cs typeface="PingFang SC"/>
-              </a:defRPr>
-            </a:pPr>
-            <a:r>
-              <a:rPr sz="1050" b="0">
-                <a:solidFill>
-                  <a:srgbClr val="667085"/>
-                </a:solidFill>
-                <a:latin typeface="PingFang SC"/>
-                <a:ea typeface="PingFang SC"/>
-                <a:cs typeface="PingFang SC"/>
+              <a:defRPr sz="1350" b="1">
+                <a:solidFill>
+                  <a:srgbClr val="1D2B46"/>
+                </a:solidFill>
+              </a:defRPr>
+            </a:pPr>
+            <a:r>
+              <a:rPr sz="1350" b="1">
+                <a:solidFill>
+                  <a:srgbClr val="1D2B46"/>
+                </a:solidFill>
+              </a:rPr>
+              <a:t>一通外呼，居然同时面对</a:t>
+            </a:r>
+          </a:p>
+        </p:txBody>
+      </p:sp>
+      <p:sp>
+        <p:nvSpPr>
+          <p:cNvPr id="5" name="attention-five">
+            <a:extLst xmlns:a="http://schemas.openxmlformats.org/drawingml/2006/main">
+              <a:ext uri="{FF2B5EF4-FFF2-40B4-BE49-F238E27FC236}">
+                <a16:creationId xmlns:a16="http://schemas.microsoft.com/office/drawing/2014/main" id="{FD0764E3-298C-485C-93CF-D54FC47CA6E8}"/>
+              </a:ext>
+            </a:extLst>
+          </p:cNvPr>
+          <p:cNvSpPr>
+            <a:spLocks xmlns:a="http://schemas.openxmlformats.org/drawingml/2006/main" noGrp="1"/>
+          </p:cNvSpPr>
+          <p:nvPr/>
+        </p:nvSpPr>
+        <p:spPr>
+          <a:xfrm xmlns:a="http://schemas.openxmlformats.org/drawingml/2006/main">
+            <a:off x="6324600" y="1343025"/>
+            <a:ext cx="457200" cy="495300"/>
+          </a:xfrm>
+          <a:prstGeom xmlns:a="http://schemas.openxmlformats.org/drawingml/2006/main" prst="rect">
+            <a:avLst/>
+          </a:prstGeom>
+          <a:noFill xmlns:a="http://schemas.openxmlformats.org/drawingml/2006/main"/>
+          <a:ln xmlns:a="http://schemas.openxmlformats.org/drawingml/2006/main" w="0">
+            <a:noFill/>
+            <a:prstDash val="solid"/>
+          </a:ln>
+        </p:spPr>
+        <p:txBody>
+          <a:bodyPr xmlns:a="http://schemas.openxmlformats.org/drawingml/2006/main" wrap="square" lIns="0" tIns="0" rIns="0" bIns="0" anchor="ctr">
+            <a:normAutofit fontScale="100000"/>
+          </a:bodyPr>
+          <a:lstStyle xmlns:a="http://schemas.openxmlformats.org/drawingml/2006/main"/>
+          <a:p xmlns:a="http://schemas.openxmlformats.org/drawingml/2006/main">
+            <a:pPr algn="ctr">
+              <a:defRPr sz="2850" b="1">
+                <a:solidFill>
+                  <a:srgbClr val="C48800"/>
+                </a:solidFill>
+              </a:defRPr>
+            </a:pPr>
+            <a:r>
+              <a:rPr sz="2850" b="1">
+                <a:solidFill>
+                  <a:srgbClr val="C48800"/>
+                </a:solidFill>
+              </a:rPr>
+              <a:t>5</a:t>
+            </a:r>
+          </a:p>
+        </p:txBody>
+      </p:sp>
+      <p:sp>
+        <p:nvSpPr>
+          <p:cNvPr id="6" name="attention-suffix">
+            <a:extLst xmlns:a="http://schemas.openxmlformats.org/drawingml/2006/main">
+              <a:ext uri="{FF2B5EF4-FFF2-40B4-BE49-F238E27FC236}">
+                <a16:creationId xmlns:a16="http://schemas.microsoft.com/office/drawing/2014/main" id="{FE2C0260-9715-4B95-9738-AA7BE9628B6C}"/>
+              </a:ext>
+            </a:extLst>
+          </p:cNvPr>
+          <p:cNvSpPr>
+            <a:spLocks xmlns:a="http://schemas.openxmlformats.org/drawingml/2006/main" noGrp="1"/>
+          </p:cNvSpPr>
+          <p:nvPr/>
+        </p:nvSpPr>
+        <p:spPr>
+          <a:xfrm xmlns:a="http://schemas.openxmlformats.org/drawingml/2006/main">
+            <a:off x="6858000" y="1438275"/>
+            <a:ext cx="1143000" cy="361950"/>
+          </a:xfrm>
+          <a:prstGeom xmlns:a="http://schemas.openxmlformats.org/drawingml/2006/main" prst="rect">
+            <a:avLst/>
+          </a:prstGeom>
+          <a:noFill xmlns:a="http://schemas.openxmlformats.org/drawingml/2006/main"/>
+          <a:ln xmlns:a="http://schemas.openxmlformats.org/drawingml/2006/main" w="0">
+            <a:noFill/>
+            <a:prstDash val="solid"/>
+          </a:ln>
+        </p:spPr>
+        <p:txBody>
+          <a:bodyPr xmlns:a="http://schemas.openxmlformats.org/drawingml/2006/main" wrap="square" lIns="0" tIns="0" rIns="0" bIns="0" anchor="ctr">
+            <a:normAutofit fontScale="100000"/>
+          </a:bodyPr>
+          <a:lstStyle xmlns:a="http://schemas.openxmlformats.org/drawingml/2006/main"/>
+          <a:p xmlns:a="http://schemas.openxmlformats.org/drawingml/2006/main">
+            <a:pPr algn="l">
+              <a:defRPr sz="1350" b="1">
+                <a:solidFill>
+                  <a:srgbClr val="1D2B46"/>
+                </a:solidFill>
+              </a:defRPr>
+            </a:pPr>
+            <a:r>
+              <a:rPr sz="1350" b="1">
+                <a:solidFill>
+                  <a:srgbClr val="1D2B46"/>
+                </a:solidFill>
+              </a:rPr>
+              <a:t>类问题</a:t>
+            </a:r>
+          </a:p>
+        </p:txBody>
+      </p:sp>
+      <p:sp>
+        <p:nvSpPr>
+          <p:cNvPr id="7" name="attention-underline">
+            <a:extLst xmlns:a="http://schemas.openxmlformats.org/drawingml/2006/main">
+              <a:ext uri="{FF2B5EF4-FFF2-40B4-BE49-F238E27FC236}">
+                <a16:creationId xmlns:a16="http://schemas.microsoft.com/office/drawing/2014/main" id="{A3C42C4C-9F16-46BA-9FF5-509140DA6CA6}"/>
+              </a:ext>
+            </a:extLst>
+          </p:cNvPr>
+          <p:cNvSpPr>
+            <a:spLocks xmlns:a="http://schemas.openxmlformats.org/drawingml/2006/main" noGrp="1"/>
+          </p:cNvSpPr>
+          <p:nvPr/>
+        </p:nvSpPr>
+        <p:spPr>
+          <a:xfrm xmlns:a="http://schemas.openxmlformats.org/drawingml/2006/main">
+            <a:off x="5981700" y="1790700"/>
+            <a:ext cx="1238250" cy="47625"/>
+          </a:xfrm>
+          <a:prstGeom xmlns:a="http://schemas.openxmlformats.org/drawingml/2006/main" prst="roundRect">
+            <a:avLst>
+              <a:gd name="adj" fmla="val 50000"/>
+            </a:avLst>
+          </a:prstGeom>
+          <a:solidFill xmlns:a="http://schemas.openxmlformats.org/drawingml/2006/main">
+            <a:srgbClr val="FFC300"/>
+          </a:solidFill>
+          <a:ln xmlns:a="http://schemas.openxmlformats.org/drawingml/2006/main" w="0">
+            <a:noFill/>
+            <a:prstDash val="solid"/>
+          </a:ln>
+        </p:spPr>
+      </p:sp>
+      <p:sp>
+        <p:nvSpPr>
+          <p:cNvPr id="8" name="card-shadow-01">
+            <a:extLst xmlns:a="http://schemas.openxmlformats.org/drawingml/2006/main">
+              <a:ext uri="{FF2B5EF4-FFF2-40B4-BE49-F238E27FC236}">
+                <a16:creationId xmlns:a16="http://schemas.microsoft.com/office/drawing/2014/main" id="{D913C4E8-4066-4289-86C6-5E6730DAC03F}"/>
+              </a:ext>
+            </a:extLst>
+          </p:cNvPr>
+          <p:cNvSpPr>
+            <a:spLocks xmlns:a="http://schemas.openxmlformats.org/drawingml/2006/main" noGrp="1"/>
+          </p:cNvSpPr>
+          <p:nvPr/>
+        </p:nvSpPr>
+        <p:spPr>
+          <a:xfrm xmlns:a="http://schemas.openxmlformats.org/drawingml/2006/main">
+            <a:off x="581025" y="2038350"/>
+            <a:ext cx="3429000" cy="1066800"/>
+          </a:xfrm>
+          <a:prstGeom xmlns:a="http://schemas.openxmlformats.org/drawingml/2006/main" prst="roundRect">
+            <a:avLst>
+              <a:gd name="adj" fmla="val 14286"/>
+            </a:avLst>
+          </a:prstGeom>
+          <a:solidFill xmlns:a="http://schemas.openxmlformats.org/drawingml/2006/main">
+            <a:srgbClr val="FFF4BD"/>
+          </a:solidFill>
+          <a:ln xmlns:a="http://schemas.openxmlformats.org/drawingml/2006/main" w="0">
+            <a:noFill/>
+            <a:prstDash val="solid"/>
+          </a:ln>
+        </p:spPr>
+      </p:sp>
+      <p:sp>
+        <p:nvSpPr>
+          <p:cNvPr id="9" name="card-01">
+            <a:extLst xmlns:a="http://schemas.openxmlformats.org/drawingml/2006/main">
+              <a:ext uri="{FF2B5EF4-FFF2-40B4-BE49-F238E27FC236}">
+                <a16:creationId xmlns:a16="http://schemas.microsoft.com/office/drawing/2014/main" id="{8DFB3E88-3A1C-441C-85C3-82E89A479123}"/>
+              </a:ext>
+            </a:extLst>
+          </p:cNvPr>
+          <p:cNvSpPr>
+            <a:spLocks xmlns:a="http://schemas.openxmlformats.org/drawingml/2006/main" noGrp="1"/>
+          </p:cNvSpPr>
+          <p:nvPr/>
+        </p:nvSpPr>
+        <p:spPr>
+          <a:xfrm xmlns:a="http://schemas.openxmlformats.org/drawingml/2006/main">
+            <a:off x="533400" y="1971675"/>
+            <a:ext cx="3429000" cy="1066800"/>
+          </a:xfrm>
+          <a:prstGeom xmlns:a="http://schemas.openxmlformats.org/drawingml/2006/main" prst="roundRect">
+            <a:avLst>
+              <a:gd name="adj" fmla="val 14286"/>
+            </a:avLst>
+          </a:prstGeom>
+          <a:solidFill xmlns:a="http://schemas.openxmlformats.org/drawingml/2006/main">
+            <a:srgbClr val="FFC300"/>
+          </a:solidFill>
+          <a:ln xmlns:a="http://schemas.openxmlformats.org/drawingml/2006/main" w="0">
+            <a:noFill/>
+            <a:prstDash val="solid"/>
+          </a:ln>
+        </p:spPr>
+      </p:sp>
+      <p:sp>
+        <p:nvSpPr>
+          <p:cNvPr id="10" name="card-number-bg-01">
+            <a:extLst xmlns:a="http://schemas.openxmlformats.org/drawingml/2006/main">
+              <a:ext uri="{FF2B5EF4-FFF2-40B4-BE49-F238E27FC236}">
+                <a16:creationId xmlns:a16="http://schemas.microsoft.com/office/drawing/2014/main" id="{D2442FE0-F2EE-4E84-BC54-33BBA0503F21}"/>
+              </a:ext>
+            </a:extLst>
+          </p:cNvPr>
+          <p:cNvSpPr>
+            <a:spLocks xmlns:a="http://schemas.openxmlformats.org/drawingml/2006/main" noGrp="1"/>
+          </p:cNvSpPr>
+          <p:nvPr/>
+        </p:nvSpPr>
+        <p:spPr>
+          <a:xfrm xmlns:a="http://schemas.openxmlformats.org/drawingml/2006/main">
+            <a:off x="704850" y="2133600"/>
+            <a:ext cx="409575" cy="247650"/>
+          </a:xfrm>
+          <a:prstGeom xmlns:a="http://schemas.openxmlformats.org/drawingml/2006/main" prst="roundRect">
+            <a:avLst>
+              <a:gd name="adj" fmla="val 30769"/>
+            </a:avLst>
+          </a:prstGeom>
+          <a:solidFill xmlns:a="http://schemas.openxmlformats.org/drawingml/2006/main">
+            <a:srgbClr val="111C31"/>
+          </a:solidFill>
+          <a:ln xmlns:a="http://schemas.openxmlformats.org/drawingml/2006/main" w="0">
+            <a:noFill/>
+            <a:prstDash val="solid"/>
+          </a:ln>
+        </p:spPr>
+      </p:sp>
+      <p:sp>
+        <p:nvSpPr>
+          <p:cNvPr id="11" name="card-number-01">
+            <a:extLst xmlns:a="http://schemas.openxmlformats.org/drawingml/2006/main">
+              <a:ext uri="{FF2B5EF4-FFF2-40B4-BE49-F238E27FC236}">
+                <a16:creationId xmlns:a16="http://schemas.microsoft.com/office/drawing/2014/main" id="{1B9E8D55-3102-40B4-B3BB-38DD174E7F1D}"/>
+              </a:ext>
+            </a:extLst>
+          </p:cNvPr>
+          <p:cNvSpPr>
+            <a:spLocks xmlns:a="http://schemas.openxmlformats.org/drawingml/2006/main" noGrp="1"/>
+          </p:cNvSpPr>
+          <p:nvPr/>
+        </p:nvSpPr>
+        <p:spPr>
+          <a:xfrm xmlns:a="http://schemas.openxmlformats.org/drawingml/2006/main">
+            <a:off x="704850" y="2133600"/>
+            <a:ext cx="409575" cy="247650"/>
+          </a:xfrm>
+          <a:prstGeom xmlns:a="http://schemas.openxmlformats.org/drawingml/2006/main" prst="rect">
+            <a:avLst/>
+          </a:prstGeom>
+          <a:noFill xmlns:a="http://schemas.openxmlformats.org/drawingml/2006/main"/>
+          <a:ln xmlns:a="http://schemas.openxmlformats.org/drawingml/2006/main" w="0">
+            <a:noFill/>
+            <a:prstDash val="solid"/>
+          </a:ln>
+        </p:spPr>
+        <p:txBody>
+          <a:bodyPr xmlns:a="http://schemas.openxmlformats.org/drawingml/2006/main" wrap="square" lIns="0" tIns="0" rIns="0" bIns="0" anchor="ctr">
+            <a:normAutofit fontScale="100000"/>
+          </a:bodyPr>
+          <a:lstStyle xmlns:a="http://schemas.openxmlformats.org/drawingml/2006/main"/>
+          <a:p xmlns:a="http://schemas.openxmlformats.org/drawingml/2006/main">
+            <a:pPr algn="ctr">
+              <a:defRPr sz="975" b="1">
+                <a:solidFill>
+                  <a:srgbClr val="FFFFFF"/>
+                </a:solidFill>
+              </a:defRPr>
+            </a:pPr>
+            <a:r>
+              <a:rPr sz="975" b="1">
+                <a:solidFill>
+                  <a:srgbClr val="FFFFFF"/>
+                </a:solidFill>
+              </a:rPr>
+              <a:t>01</a:t>
+            </a:r>
+          </a:p>
+        </p:txBody>
+      </p:sp>
+      <p:sp>
+        <p:nvSpPr>
+          <p:cNvPr id="12" name="card-title-01">
+            <a:extLst xmlns:a="http://schemas.openxmlformats.org/drawingml/2006/main">
+              <a:ext uri="{FF2B5EF4-FFF2-40B4-BE49-F238E27FC236}">
+                <a16:creationId xmlns:a16="http://schemas.microsoft.com/office/drawing/2014/main" id="{D10C6C7C-ED9B-49B8-863C-42D1F216F547}"/>
+              </a:ext>
+            </a:extLst>
+          </p:cNvPr>
+          <p:cNvSpPr>
+            <a:spLocks xmlns:a="http://schemas.openxmlformats.org/drawingml/2006/main" noGrp="1"/>
+          </p:cNvSpPr>
+          <p:nvPr/>
+        </p:nvSpPr>
+        <p:spPr>
+          <a:xfrm xmlns:a="http://schemas.openxmlformats.org/drawingml/2006/main">
+            <a:off x="1238250" y="2114550"/>
+            <a:ext cx="2571750" cy="304800"/>
+          </a:xfrm>
+          <a:prstGeom xmlns:a="http://schemas.openxmlformats.org/drawingml/2006/main" prst="rect">
+            <a:avLst/>
+          </a:prstGeom>
+          <a:noFill xmlns:a="http://schemas.openxmlformats.org/drawingml/2006/main"/>
+          <a:ln xmlns:a="http://schemas.openxmlformats.org/drawingml/2006/main" w="0">
+            <a:noFill/>
+            <a:prstDash val="solid"/>
+          </a:ln>
+        </p:spPr>
+        <p:txBody>
+          <a:bodyPr xmlns:a="http://schemas.openxmlformats.org/drawingml/2006/main" wrap="square" lIns="0" tIns="0" rIns="0" bIns="0" anchor="ctr">
+            <a:normAutofit fontScale="100000"/>
+          </a:bodyPr>
+          <a:lstStyle xmlns:a="http://schemas.openxmlformats.org/drawingml/2006/main"/>
+          <a:p xmlns:a="http://schemas.openxmlformats.org/drawingml/2006/main">
+            <a:pPr algn="l">
+              <a:defRPr sz="1275" b="1">
+                <a:solidFill>
+                  <a:srgbClr val="111C31"/>
+                </a:solidFill>
+              </a:defRPr>
+            </a:pPr>
+            <a:r>
+              <a:rPr sz="1275" b="1">
+                <a:solidFill>
+                  <a:srgbClr val="111C31"/>
+                </a:solidFill>
+              </a:rPr>
+              <a:t>指令太复杂，模型容易漏步骤</a:t>
+            </a:r>
+          </a:p>
+        </p:txBody>
+      </p:sp>
+      <p:sp>
+        <p:nvSpPr>
+          <p:cNvPr id="13" name="card-divider-01">
+            <a:extLst xmlns:a="http://schemas.openxmlformats.org/drawingml/2006/main">
+              <a:ext uri="{FF2B5EF4-FFF2-40B4-BE49-F238E27FC236}">
+                <a16:creationId xmlns:a16="http://schemas.microsoft.com/office/drawing/2014/main" id="{67BC3786-D93A-40C0-B09A-65C137F1F889}"/>
+              </a:ext>
+            </a:extLst>
+          </p:cNvPr>
+          <p:cNvSpPr>
+            <a:spLocks xmlns:a="http://schemas.openxmlformats.org/drawingml/2006/main" noGrp="1"/>
+          </p:cNvSpPr>
+          <p:nvPr/>
+        </p:nvSpPr>
+        <p:spPr>
+          <a:xfrm xmlns:a="http://schemas.openxmlformats.org/drawingml/2006/main">
+            <a:off x="704850" y="2495550"/>
+            <a:ext cx="3086100" cy="9525"/>
+          </a:xfrm>
+          <a:prstGeom xmlns:a="http://schemas.openxmlformats.org/drawingml/2006/main" prst="rect">
+            <a:avLst/>
+          </a:prstGeom>
+          <a:solidFill xmlns:a="http://schemas.openxmlformats.org/drawingml/2006/main">
+            <a:srgbClr val="D69F00"/>
+          </a:solidFill>
+          <a:ln xmlns:a="http://schemas.openxmlformats.org/drawingml/2006/main" w="0">
+            <a:noFill/>
+            <a:prstDash val="solid"/>
+          </a:ln>
+        </p:spPr>
+      </p:sp>
+      <p:sp>
+        <p:nvSpPr>
+          <p:cNvPr id="14" name="card-body-01">
+            <a:extLst xmlns:a="http://schemas.openxmlformats.org/drawingml/2006/main">
+              <a:ext uri="{FF2B5EF4-FFF2-40B4-BE49-F238E27FC236}">
+                <a16:creationId xmlns:a16="http://schemas.microsoft.com/office/drawing/2014/main" id="{7C30EEAD-C2C6-42E3-95C6-C420F3105422}"/>
+              </a:ext>
+            </a:extLst>
+          </p:cNvPr>
+          <p:cNvSpPr>
+            <a:spLocks xmlns:a="http://schemas.openxmlformats.org/drawingml/2006/main" noGrp="1"/>
+          </p:cNvSpPr>
+          <p:nvPr/>
+        </p:nvSpPr>
+        <p:spPr>
+          <a:xfrm xmlns:a="http://schemas.openxmlformats.org/drawingml/2006/main">
+            <a:off x="704850" y="2581275"/>
+            <a:ext cx="3086100" cy="276225"/>
+          </a:xfrm>
+          <a:prstGeom xmlns:a="http://schemas.openxmlformats.org/drawingml/2006/main" prst="rect">
+            <a:avLst/>
+          </a:prstGeom>
+          <a:noFill xmlns:a="http://schemas.openxmlformats.org/drawingml/2006/main"/>
+          <a:ln xmlns:a="http://schemas.openxmlformats.org/drawingml/2006/main" w="0">
+            <a:noFill/>
+            <a:prstDash val="solid"/>
+          </a:ln>
+        </p:spPr>
+        <p:txBody>
+          <a:bodyPr xmlns:a="http://schemas.openxmlformats.org/drawingml/2006/main" wrap="square" lIns="0" tIns="0" rIns="0" bIns="0" anchor="ctr">
+            <a:normAutofit fontScale="100000"/>
+          </a:bodyPr>
+          <a:lstStyle xmlns:a="http://schemas.openxmlformats.org/drawingml/2006/main"/>
+          <a:p xmlns:a="http://schemas.openxmlformats.org/drawingml/2006/main">
+            <a:pPr algn="l">
+              <a:defRPr sz="1013" b="0">
+                <a:solidFill>
+                  <a:srgbClr val="1D2B46"/>
+                </a:solidFill>
+              </a:defRPr>
+            </a:pPr>
+            <a:r>
+              <a:rPr sz="1013" b="0">
+                <a:solidFill>
+                  <a:srgbClr val="1D2B46"/>
+                </a:solidFill>
+              </a:rPr>
+              <a:t>多流程、多约束、多分支同时存在</a:t>
+            </a:r>
+          </a:p>
+        </p:txBody>
+      </p:sp>
+      <p:sp>
+        <p:nvSpPr>
+          <p:cNvPr id="15" name="card-shadow-02">
+            <a:extLst xmlns:a="http://schemas.openxmlformats.org/drawingml/2006/main">
+              <a:ext uri="{FF2B5EF4-FFF2-40B4-BE49-F238E27FC236}">
+                <a16:creationId xmlns:a16="http://schemas.microsoft.com/office/drawing/2014/main" id="{BD636BEE-D50E-444B-BD28-63CF71127441}"/>
+              </a:ext>
+            </a:extLst>
+          </p:cNvPr>
+          <p:cNvSpPr>
+            <a:spLocks xmlns:a="http://schemas.openxmlformats.org/drawingml/2006/main" noGrp="1"/>
+          </p:cNvSpPr>
+          <p:nvPr/>
+        </p:nvSpPr>
+        <p:spPr>
+          <a:xfrm xmlns:a="http://schemas.openxmlformats.org/drawingml/2006/main">
+            <a:off x="4429125" y="2038350"/>
+            <a:ext cx="3429000" cy="1066800"/>
+          </a:xfrm>
+          <a:prstGeom xmlns:a="http://schemas.openxmlformats.org/drawingml/2006/main" prst="roundRect">
+            <a:avLst>
+              <a:gd name="adj" fmla="val 14286"/>
+            </a:avLst>
+          </a:prstGeom>
+          <a:solidFill xmlns:a="http://schemas.openxmlformats.org/drawingml/2006/main">
+            <a:srgbClr val="FFF4BD"/>
+          </a:solidFill>
+          <a:ln xmlns:a="http://schemas.openxmlformats.org/drawingml/2006/main" w="0">
+            <a:noFill/>
+            <a:prstDash val="solid"/>
+          </a:ln>
+        </p:spPr>
+      </p:sp>
+      <p:sp>
+        <p:nvSpPr>
+          <p:cNvPr id="16" name="card-02">
+            <a:extLst xmlns:a="http://schemas.openxmlformats.org/drawingml/2006/main">
+              <a:ext uri="{FF2B5EF4-FFF2-40B4-BE49-F238E27FC236}">
+                <a16:creationId xmlns:a16="http://schemas.microsoft.com/office/drawing/2014/main" id="{4AE5D099-E9E3-46F3-889B-08F2318D3E4C}"/>
+              </a:ext>
+            </a:extLst>
+          </p:cNvPr>
+          <p:cNvSpPr>
+            <a:spLocks xmlns:a="http://schemas.openxmlformats.org/drawingml/2006/main" noGrp="1"/>
+          </p:cNvSpPr>
+          <p:nvPr/>
+        </p:nvSpPr>
+        <p:spPr>
+          <a:xfrm xmlns:a="http://schemas.openxmlformats.org/drawingml/2006/main">
+            <a:off x="4381500" y="1971675"/>
+            <a:ext cx="3429000" cy="1066800"/>
+          </a:xfrm>
+          <a:prstGeom xmlns:a="http://schemas.openxmlformats.org/drawingml/2006/main" prst="roundRect">
+            <a:avLst>
+              <a:gd name="adj" fmla="val 14286"/>
+            </a:avLst>
+          </a:prstGeom>
+          <a:solidFill xmlns:a="http://schemas.openxmlformats.org/drawingml/2006/main">
+            <a:srgbClr val="FFC300"/>
+          </a:solidFill>
+          <a:ln xmlns:a="http://schemas.openxmlformats.org/drawingml/2006/main" w="0">
+            <a:noFill/>
+            <a:prstDash val="solid"/>
+          </a:ln>
+        </p:spPr>
+      </p:sp>
+      <p:sp>
+        <p:nvSpPr>
+          <p:cNvPr id="17" name="card-number-bg-02">
+            <a:extLst xmlns:a="http://schemas.openxmlformats.org/drawingml/2006/main">
+              <a:ext uri="{FF2B5EF4-FFF2-40B4-BE49-F238E27FC236}">
+                <a16:creationId xmlns:a16="http://schemas.microsoft.com/office/drawing/2014/main" id="{E9118604-08B1-4544-BD42-76C4C5CF501E}"/>
+              </a:ext>
+            </a:extLst>
+          </p:cNvPr>
+          <p:cNvSpPr>
+            <a:spLocks xmlns:a="http://schemas.openxmlformats.org/drawingml/2006/main" noGrp="1"/>
+          </p:cNvSpPr>
+          <p:nvPr/>
+        </p:nvSpPr>
+        <p:spPr>
+          <a:xfrm xmlns:a="http://schemas.openxmlformats.org/drawingml/2006/main">
+            <a:off x="4552950" y="2133600"/>
+            <a:ext cx="409575" cy="247650"/>
+          </a:xfrm>
+          <a:prstGeom xmlns:a="http://schemas.openxmlformats.org/drawingml/2006/main" prst="roundRect">
+            <a:avLst>
+              <a:gd name="adj" fmla="val 30769"/>
+            </a:avLst>
+          </a:prstGeom>
+          <a:solidFill xmlns:a="http://schemas.openxmlformats.org/drawingml/2006/main">
+            <a:srgbClr val="111C31"/>
+          </a:solidFill>
+          <a:ln xmlns:a="http://schemas.openxmlformats.org/drawingml/2006/main" w="0">
+            <a:noFill/>
+            <a:prstDash val="solid"/>
+          </a:ln>
+        </p:spPr>
+      </p:sp>
+      <p:sp>
+        <p:nvSpPr>
+          <p:cNvPr id="18" name="card-number-02">
+            <a:extLst xmlns:a="http://schemas.openxmlformats.org/drawingml/2006/main">
+              <a:ext uri="{FF2B5EF4-FFF2-40B4-BE49-F238E27FC236}">
+                <a16:creationId xmlns:a16="http://schemas.microsoft.com/office/drawing/2014/main" id="{8DFBC85C-D4A6-4CDD-97A3-5821581A8D59}"/>
+              </a:ext>
+            </a:extLst>
+          </p:cNvPr>
+          <p:cNvSpPr>
+            <a:spLocks xmlns:a="http://schemas.openxmlformats.org/drawingml/2006/main" noGrp="1"/>
+          </p:cNvSpPr>
+          <p:nvPr/>
+        </p:nvSpPr>
+        <p:spPr>
+          <a:xfrm xmlns:a="http://schemas.openxmlformats.org/drawingml/2006/main">
+            <a:off x="4552950" y="2133600"/>
+            <a:ext cx="409575" cy="247650"/>
+          </a:xfrm>
+          <a:prstGeom xmlns:a="http://schemas.openxmlformats.org/drawingml/2006/main" prst="rect">
+            <a:avLst/>
+          </a:prstGeom>
+          <a:noFill xmlns:a="http://schemas.openxmlformats.org/drawingml/2006/main"/>
+          <a:ln xmlns:a="http://schemas.openxmlformats.org/drawingml/2006/main" w="0">
+            <a:noFill/>
+            <a:prstDash val="solid"/>
+          </a:ln>
+        </p:spPr>
+        <p:txBody>
+          <a:bodyPr xmlns:a="http://schemas.openxmlformats.org/drawingml/2006/main" wrap="square" lIns="0" tIns="0" rIns="0" bIns="0" anchor="ctr">
+            <a:normAutofit fontScale="100000"/>
+          </a:bodyPr>
+          <a:lstStyle xmlns:a="http://schemas.openxmlformats.org/drawingml/2006/main"/>
+          <a:p xmlns:a="http://schemas.openxmlformats.org/drawingml/2006/main">
+            <a:pPr algn="ctr">
+              <a:defRPr sz="975" b="1">
+                <a:solidFill>
+                  <a:srgbClr val="FFFFFF"/>
+                </a:solidFill>
+              </a:defRPr>
+            </a:pPr>
+            <a:r>
+              <a:rPr sz="975" b="1">
+                <a:solidFill>
+                  <a:srgbClr val="FFFFFF"/>
+                </a:solidFill>
               </a:rPr>
               <a:t>02</a:t>
             </a:r>
@@ -2048,997 +2601,1246 @@
       </p:sp>
       <p:sp>
         <p:nvSpPr>
-          <p:cNvPr id="7" name="step-n-0">
-            <a:extLst xmlns:a="http://schemas.openxmlformats.org/drawingml/2006/main">
-              <a:ext uri="{FF2B5EF4-FFF2-40B4-BE49-F238E27FC236}">
-                <a16:creationId xmlns:a16="http://schemas.microsoft.com/office/drawing/2014/main" id="{20F518E8-7FC6-4EAD-A44E-6E969E72B027}"/>
-              </a:ext>
-            </a:extLst>
-          </p:cNvPr>
-          <p:cNvSpPr>
-            <a:spLocks xmlns:a="http://schemas.openxmlformats.org/drawingml/2006/main" noGrp="1"/>
-          </p:cNvSpPr>
-          <p:nvPr/>
-        </p:nvSpPr>
-        <p:spPr>
-          <a:xfrm xmlns:a="http://schemas.openxmlformats.org/drawingml/2006/main">
-            <a:off x="533400" y="1685925"/>
-            <a:ext cx="381000" cy="323850"/>
-          </a:xfrm>
-          <a:prstGeom xmlns:a="http://schemas.openxmlformats.org/drawingml/2006/main" prst="rect">
-            <a:avLst/>
-          </a:prstGeom>
-          <a:noFill xmlns:a="http://schemas.openxmlformats.org/drawingml/2006/main"/>
-          <a:ln xmlns:a="http://schemas.openxmlformats.org/drawingml/2006/main" w="0">
-            <a:noFill/>
-            <a:prstDash val="solid"/>
-          </a:ln>
-        </p:spPr>
-        <p:txBody>
-          <a:bodyPr xmlns:a="http://schemas.openxmlformats.org/drawingml/2006/main" anchor="ctr">
+          <p:cNvPr id="19" name="card-title-02">
+            <a:extLst xmlns:a="http://schemas.openxmlformats.org/drawingml/2006/main">
+              <a:ext uri="{FF2B5EF4-FFF2-40B4-BE49-F238E27FC236}">
+                <a16:creationId xmlns:a16="http://schemas.microsoft.com/office/drawing/2014/main" id="{32C3BD0C-7429-4D79-9AC3-8BF4BDB0B808}"/>
+              </a:ext>
+            </a:extLst>
+          </p:cNvPr>
+          <p:cNvSpPr>
+            <a:spLocks xmlns:a="http://schemas.openxmlformats.org/drawingml/2006/main" noGrp="1"/>
+          </p:cNvSpPr>
+          <p:nvPr/>
+        </p:nvSpPr>
+        <p:spPr>
+          <a:xfrm xmlns:a="http://schemas.openxmlformats.org/drawingml/2006/main">
+            <a:off x="5086350" y="2114550"/>
+            <a:ext cx="2571750" cy="304800"/>
+          </a:xfrm>
+          <a:prstGeom xmlns:a="http://schemas.openxmlformats.org/drawingml/2006/main" prst="rect">
+            <a:avLst/>
+          </a:prstGeom>
+          <a:noFill xmlns:a="http://schemas.openxmlformats.org/drawingml/2006/main"/>
+          <a:ln xmlns:a="http://schemas.openxmlformats.org/drawingml/2006/main" w="0">
+            <a:noFill/>
+            <a:prstDash val="solid"/>
+          </a:ln>
+        </p:spPr>
+        <p:txBody>
+          <a:bodyPr xmlns:a="http://schemas.openxmlformats.org/drawingml/2006/main" wrap="square" lIns="0" tIns="0" rIns="0" bIns="0" anchor="ctr">
             <a:normAutofit fontScale="100000"/>
           </a:bodyPr>
           <a:lstStyle xmlns:a="http://schemas.openxmlformats.org/drawingml/2006/main"/>
           <a:p xmlns:a="http://schemas.openxmlformats.org/drawingml/2006/main">
             <a:pPr algn="l">
-              <a:buNone/>
-              <a:defRPr sz="1500" b="1">
-                <a:solidFill>
-                  <a:srgbClr val="B58100"/>
-                </a:solidFill>
-                <a:latin typeface="PingFang SC"/>
-                <a:ea typeface="PingFang SC"/>
-                <a:cs typeface="PingFang SC"/>
-              </a:defRPr>
-            </a:pPr>
-            <a:r>
-              <a:rPr sz="1500" b="1">
-                <a:solidFill>
-                  <a:srgbClr val="B58100"/>
-                </a:solidFill>
-                <a:latin typeface="PingFang SC"/>
-                <a:ea typeface="PingFang SC"/>
-                <a:cs typeface="PingFang SC"/>
-              </a:rPr>
-              <a:t>1.</a:t>
-            </a:r>
-          </a:p>
-        </p:txBody>
-      </p:sp>
-      <p:sp>
-        <p:nvSpPr>
-          <p:cNvPr id="8" name="step-title-0">
-            <a:extLst xmlns:a="http://schemas.openxmlformats.org/drawingml/2006/main">
-              <a:ext uri="{FF2B5EF4-FFF2-40B4-BE49-F238E27FC236}">
-                <a16:creationId xmlns:a16="http://schemas.microsoft.com/office/drawing/2014/main" id="{51765322-5A09-483C-A66A-C4834132A815}"/>
-              </a:ext>
-            </a:extLst>
-          </p:cNvPr>
-          <p:cNvSpPr>
-            <a:spLocks xmlns:a="http://schemas.openxmlformats.org/drawingml/2006/main" noGrp="1"/>
-          </p:cNvSpPr>
-          <p:nvPr/>
-        </p:nvSpPr>
-        <p:spPr>
-          <a:xfrm xmlns:a="http://schemas.openxmlformats.org/drawingml/2006/main">
-            <a:off x="1028700" y="1676400"/>
-            <a:ext cx="10629900" cy="285750"/>
-          </a:xfrm>
-          <a:prstGeom xmlns:a="http://schemas.openxmlformats.org/drawingml/2006/main" prst="rect">
-            <a:avLst/>
-          </a:prstGeom>
-          <a:noFill xmlns:a="http://schemas.openxmlformats.org/drawingml/2006/main"/>
-          <a:ln xmlns:a="http://schemas.openxmlformats.org/drawingml/2006/main" w="0">
-            <a:noFill/>
-            <a:prstDash val="solid"/>
-          </a:ln>
-        </p:spPr>
-        <p:txBody>
-          <a:bodyPr xmlns:a="http://schemas.openxmlformats.org/drawingml/2006/main" anchor="ctr">
-            <a:normAutofit fontScale="73913"/>
+              <a:defRPr sz="1275" b="1">
+                <a:solidFill>
+                  <a:srgbClr val="111C31"/>
+                </a:solidFill>
+              </a:defRPr>
+            </a:pPr>
+            <a:r>
+              <a:rPr sz="1275" b="1">
+                <a:solidFill>
+                  <a:srgbClr val="111C31"/>
+                </a:solidFill>
+              </a:rPr>
+              <a:t>隐私与合规存在一票否决红线</a:t>
+            </a:r>
+          </a:p>
+        </p:txBody>
+      </p:sp>
+      <p:sp>
+        <p:nvSpPr>
+          <p:cNvPr id="20" name="card-divider-02">
+            <a:extLst xmlns:a="http://schemas.openxmlformats.org/drawingml/2006/main">
+              <a:ext uri="{FF2B5EF4-FFF2-40B4-BE49-F238E27FC236}">
+                <a16:creationId xmlns:a16="http://schemas.microsoft.com/office/drawing/2014/main" id="{5623FCB2-FB7A-4AE6-B8AC-E647BAFB80B9}"/>
+              </a:ext>
+            </a:extLst>
+          </p:cNvPr>
+          <p:cNvSpPr>
+            <a:spLocks xmlns:a="http://schemas.openxmlformats.org/drawingml/2006/main" noGrp="1"/>
+          </p:cNvSpPr>
+          <p:nvPr/>
+        </p:nvSpPr>
+        <p:spPr>
+          <a:xfrm xmlns:a="http://schemas.openxmlformats.org/drawingml/2006/main">
+            <a:off x="4552950" y="2495550"/>
+            <a:ext cx="3086100" cy="9525"/>
+          </a:xfrm>
+          <a:prstGeom xmlns:a="http://schemas.openxmlformats.org/drawingml/2006/main" prst="rect">
+            <a:avLst/>
+          </a:prstGeom>
+          <a:solidFill xmlns:a="http://schemas.openxmlformats.org/drawingml/2006/main">
+            <a:srgbClr val="D69F00"/>
+          </a:solidFill>
+          <a:ln xmlns:a="http://schemas.openxmlformats.org/drawingml/2006/main" w="0">
+            <a:noFill/>
+            <a:prstDash val="solid"/>
+          </a:ln>
+        </p:spPr>
+      </p:sp>
+      <p:sp>
+        <p:nvSpPr>
+          <p:cNvPr id="21" name="card-body-02">
+            <a:extLst xmlns:a="http://schemas.openxmlformats.org/drawingml/2006/main">
+              <a:ext uri="{FF2B5EF4-FFF2-40B4-BE49-F238E27FC236}">
+                <a16:creationId xmlns:a16="http://schemas.microsoft.com/office/drawing/2014/main" id="{7C054AA8-43D1-498B-A558-FC77FBDA5E1E}"/>
+              </a:ext>
+            </a:extLst>
+          </p:cNvPr>
+          <p:cNvSpPr>
+            <a:spLocks xmlns:a="http://schemas.openxmlformats.org/drawingml/2006/main" noGrp="1"/>
+          </p:cNvSpPr>
+          <p:nvPr/>
+        </p:nvSpPr>
+        <p:spPr>
+          <a:xfrm xmlns:a="http://schemas.openxmlformats.org/drawingml/2006/main">
+            <a:off x="4552950" y="2581275"/>
+            <a:ext cx="3086100" cy="276225"/>
+          </a:xfrm>
+          <a:prstGeom xmlns:a="http://schemas.openxmlformats.org/drawingml/2006/main" prst="rect">
+            <a:avLst/>
+          </a:prstGeom>
+          <a:noFill xmlns:a="http://schemas.openxmlformats.org/drawingml/2006/main"/>
+          <a:ln xmlns:a="http://schemas.openxmlformats.org/drawingml/2006/main" w="0">
+            <a:noFill/>
+            <a:prstDash val="solid"/>
+          </a:ln>
+        </p:spPr>
+        <p:txBody>
+          <a:bodyPr xmlns:a="http://schemas.openxmlformats.org/drawingml/2006/main" wrap="square" lIns="0" tIns="0" rIns="0" bIns="0" anchor="ctr">
+            <a:normAutofit fontScale="100000"/>
           </a:bodyPr>
           <a:lstStyle xmlns:a="http://schemas.openxmlformats.org/drawingml/2006/main"/>
           <a:p xmlns:a="http://schemas.openxmlformats.org/drawingml/2006/main">
             <a:pPr algn="l">
-              <a:buNone/>
-              <a:defRPr sz="1725" b="1">
-                <a:solidFill>
-                  <a:srgbClr val="111827"/>
-                </a:solidFill>
-                <a:latin typeface="PingFang SC"/>
-                <a:ea typeface="PingFang SC"/>
-                <a:cs typeface="PingFang SC"/>
-              </a:defRPr>
-            </a:pPr>
-            <a:r>
-              <a:rPr sz="1725" b="1">
-                <a:solidFill>
-                  <a:srgbClr val="111827"/>
-                </a:solidFill>
-                <a:latin typeface="PingFang SC"/>
-                <a:ea typeface="PingFang SC"/>
-                <a:cs typeface="PingFang SC"/>
-              </a:rPr>
-              <a:t>指令太复杂，模型容易漏步骤</a:t>
-            </a:r>
-          </a:p>
-        </p:txBody>
-      </p:sp>
-      <p:sp>
-        <p:nvSpPr>
-          <p:cNvPr id="9" name="step-body-0">
-            <a:extLst xmlns:a="http://schemas.openxmlformats.org/drawingml/2006/main">
-              <a:ext uri="{FF2B5EF4-FFF2-40B4-BE49-F238E27FC236}">
-                <a16:creationId xmlns:a16="http://schemas.microsoft.com/office/drawing/2014/main" id="{81D68444-C300-41DA-957D-0CADF615BB22}"/>
-              </a:ext>
-            </a:extLst>
-          </p:cNvPr>
-          <p:cNvSpPr>
-            <a:spLocks xmlns:a="http://schemas.openxmlformats.org/drawingml/2006/main" noGrp="1"/>
-          </p:cNvSpPr>
-          <p:nvPr/>
-        </p:nvSpPr>
-        <p:spPr>
-          <a:xfrm xmlns:a="http://schemas.openxmlformats.org/drawingml/2006/main">
-            <a:off x="1028700" y="1962150"/>
-            <a:ext cx="10629900" cy="247650"/>
-          </a:xfrm>
-          <a:prstGeom xmlns:a="http://schemas.openxmlformats.org/drawingml/2006/main" prst="rect">
-            <a:avLst/>
-          </a:prstGeom>
-          <a:noFill xmlns:a="http://schemas.openxmlformats.org/drawingml/2006/main"/>
-          <a:ln xmlns:a="http://schemas.openxmlformats.org/drawingml/2006/main" w="0">
-            <a:noFill/>
-            <a:prstDash val="solid"/>
-          </a:ln>
-        </p:spPr>
-        <p:txBody>
-          <a:bodyPr xmlns:a="http://schemas.openxmlformats.org/drawingml/2006/main" anchor="ctr">
-            <a:normAutofit fontScale="85417"/>
+              <a:defRPr sz="1013" b="0">
+                <a:solidFill>
+                  <a:srgbClr val="1D2B46"/>
+                </a:solidFill>
+              </a:defRPr>
+            </a:pPr>
+            <a:r>
+              <a:rPr sz="1013" b="0">
+                <a:solidFill>
+                  <a:srgbClr val="1D2B46"/>
+                </a:solidFill>
+              </a:rPr>
+              <a:t>一次敏感信息或承诺错误，版本就不能上线</a:t>
+            </a:r>
+          </a:p>
+        </p:txBody>
+      </p:sp>
+      <p:sp>
+        <p:nvSpPr>
+          <p:cNvPr id="22" name="card-shadow-03">
+            <a:extLst xmlns:a="http://schemas.openxmlformats.org/drawingml/2006/main">
+              <a:ext uri="{FF2B5EF4-FFF2-40B4-BE49-F238E27FC236}">
+                <a16:creationId xmlns:a16="http://schemas.microsoft.com/office/drawing/2014/main" id="{C6B698AC-8EFE-4095-8BC0-84D71CF23571}"/>
+              </a:ext>
+            </a:extLst>
+          </p:cNvPr>
+          <p:cNvSpPr>
+            <a:spLocks xmlns:a="http://schemas.openxmlformats.org/drawingml/2006/main" noGrp="1"/>
+          </p:cNvSpPr>
+          <p:nvPr/>
+        </p:nvSpPr>
+        <p:spPr>
+          <a:xfrm xmlns:a="http://schemas.openxmlformats.org/drawingml/2006/main">
+            <a:off x="8277225" y="2038350"/>
+            <a:ext cx="3429000" cy="1066800"/>
+          </a:xfrm>
+          <a:prstGeom xmlns:a="http://schemas.openxmlformats.org/drawingml/2006/main" prst="roundRect">
+            <a:avLst>
+              <a:gd name="adj" fmla="val 14286"/>
+            </a:avLst>
+          </a:prstGeom>
+          <a:solidFill xmlns:a="http://schemas.openxmlformats.org/drawingml/2006/main">
+            <a:srgbClr val="FFF4BD"/>
+          </a:solidFill>
+          <a:ln xmlns:a="http://schemas.openxmlformats.org/drawingml/2006/main" w="0">
+            <a:noFill/>
+            <a:prstDash val="solid"/>
+          </a:ln>
+        </p:spPr>
+      </p:sp>
+      <p:sp>
+        <p:nvSpPr>
+          <p:cNvPr id="23" name="card-03">
+            <a:extLst xmlns:a="http://schemas.openxmlformats.org/drawingml/2006/main">
+              <a:ext uri="{FF2B5EF4-FFF2-40B4-BE49-F238E27FC236}">
+                <a16:creationId xmlns:a16="http://schemas.microsoft.com/office/drawing/2014/main" id="{A442D49A-E427-40E1-81D3-C9507FDC545B}"/>
+              </a:ext>
+            </a:extLst>
+          </p:cNvPr>
+          <p:cNvSpPr>
+            <a:spLocks xmlns:a="http://schemas.openxmlformats.org/drawingml/2006/main" noGrp="1"/>
+          </p:cNvSpPr>
+          <p:nvPr/>
+        </p:nvSpPr>
+        <p:spPr>
+          <a:xfrm xmlns:a="http://schemas.openxmlformats.org/drawingml/2006/main">
+            <a:off x="8229600" y="1971675"/>
+            <a:ext cx="3429000" cy="1066800"/>
+          </a:xfrm>
+          <a:prstGeom xmlns:a="http://schemas.openxmlformats.org/drawingml/2006/main" prst="roundRect">
+            <a:avLst>
+              <a:gd name="adj" fmla="val 14286"/>
+            </a:avLst>
+          </a:prstGeom>
+          <a:solidFill xmlns:a="http://schemas.openxmlformats.org/drawingml/2006/main">
+            <a:srgbClr val="FFC300"/>
+          </a:solidFill>
+          <a:ln xmlns:a="http://schemas.openxmlformats.org/drawingml/2006/main" w="0">
+            <a:noFill/>
+            <a:prstDash val="solid"/>
+          </a:ln>
+        </p:spPr>
+      </p:sp>
+      <p:sp>
+        <p:nvSpPr>
+          <p:cNvPr id="24" name="card-number-bg-03">
+            <a:extLst xmlns:a="http://schemas.openxmlformats.org/drawingml/2006/main">
+              <a:ext uri="{FF2B5EF4-FFF2-40B4-BE49-F238E27FC236}">
+                <a16:creationId xmlns:a16="http://schemas.microsoft.com/office/drawing/2014/main" id="{C399F0CE-5FA3-4733-A8C8-A5E174ABE59F}"/>
+              </a:ext>
+            </a:extLst>
+          </p:cNvPr>
+          <p:cNvSpPr>
+            <a:spLocks xmlns:a="http://schemas.openxmlformats.org/drawingml/2006/main" noGrp="1"/>
+          </p:cNvSpPr>
+          <p:nvPr/>
+        </p:nvSpPr>
+        <p:spPr>
+          <a:xfrm xmlns:a="http://schemas.openxmlformats.org/drawingml/2006/main">
+            <a:off x="8401050" y="2133600"/>
+            <a:ext cx="409575" cy="247650"/>
+          </a:xfrm>
+          <a:prstGeom xmlns:a="http://schemas.openxmlformats.org/drawingml/2006/main" prst="roundRect">
+            <a:avLst>
+              <a:gd name="adj" fmla="val 30769"/>
+            </a:avLst>
+          </a:prstGeom>
+          <a:solidFill xmlns:a="http://schemas.openxmlformats.org/drawingml/2006/main">
+            <a:srgbClr val="111C31"/>
+          </a:solidFill>
+          <a:ln xmlns:a="http://schemas.openxmlformats.org/drawingml/2006/main" w="0">
+            <a:noFill/>
+            <a:prstDash val="solid"/>
+          </a:ln>
+        </p:spPr>
+      </p:sp>
+      <p:sp>
+        <p:nvSpPr>
+          <p:cNvPr id="25" name="card-number-03">
+            <a:extLst xmlns:a="http://schemas.openxmlformats.org/drawingml/2006/main">
+              <a:ext uri="{FF2B5EF4-FFF2-40B4-BE49-F238E27FC236}">
+                <a16:creationId xmlns:a16="http://schemas.microsoft.com/office/drawing/2014/main" id="{FB9DC75F-5D02-4369-B203-366F86AA602F}"/>
+              </a:ext>
+            </a:extLst>
+          </p:cNvPr>
+          <p:cNvSpPr>
+            <a:spLocks xmlns:a="http://schemas.openxmlformats.org/drawingml/2006/main" noGrp="1"/>
+          </p:cNvSpPr>
+          <p:nvPr/>
+        </p:nvSpPr>
+        <p:spPr>
+          <a:xfrm xmlns:a="http://schemas.openxmlformats.org/drawingml/2006/main">
+            <a:off x="8401050" y="2133600"/>
+            <a:ext cx="409575" cy="247650"/>
+          </a:xfrm>
+          <a:prstGeom xmlns:a="http://schemas.openxmlformats.org/drawingml/2006/main" prst="rect">
+            <a:avLst/>
+          </a:prstGeom>
+          <a:noFill xmlns:a="http://schemas.openxmlformats.org/drawingml/2006/main"/>
+          <a:ln xmlns:a="http://schemas.openxmlformats.org/drawingml/2006/main" w="0">
+            <a:noFill/>
+            <a:prstDash val="solid"/>
+          </a:ln>
+        </p:spPr>
+        <p:txBody>
+          <a:bodyPr xmlns:a="http://schemas.openxmlformats.org/drawingml/2006/main" wrap="square" lIns="0" tIns="0" rIns="0" bIns="0" anchor="ctr">
+            <a:normAutofit fontScale="100000"/>
+          </a:bodyPr>
+          <a:lstStyle xmlns:a="http://schemas.openxmlformats.org/drawingml/2006/main"/>
+          <a:p xmlns:a="http://schemas.openxmlformats.org/drawingml/2006/main">
+            <a:pPr algn="ctr">
+              <a:defRPr sz="975" b="1">
+                <a:solidFill>
+                  <a:srgbClr val="FFFFFF"/>
+                </a:solidFill>
+              </a:defRPr>
+            </a:pPr>
+            <a:r>
+              <a:rPr sz="975" b="1">
+                <a:solidFill>
+                  <a:srgbClr val="FFFFFF"/>
+                </a:solidFill>
+              </a:rPr>
+              <a:t>03</a:t>
+            </a:r>
+          </a:p>
+        </p:txBody>
+      </p:sp>
+      <p:sp>
+        <p:nvSpPr>
+          <p:cNvPr id="26" name="card-title-03">
+            <a:extLst xmlns:a="http://schemas.openxmlformats.org/drawingml/2006/main">
+              <a:ext uri="{FF2B5EF4-FFF2-40B4-BE49-F238E27FC236}">
+                <a16:creationId xmlns:a16="http://schemas.microsoft.com/office/drawing/2014/main" id="{C85E9C0A-C6AB-49C7-9210-A68170D2C061}"/>
+              </a:ext>
+            </a:extLst>
+          </p:cNvPr>
+          <p:cNvSpPr>
+            <a:spLocks xmlns:a="http://schemas.openxmlformats.org/drawingml/2006/main" noGrp="1"/>
+          </p:cNvSpPr>
+          <p:nvPr/>
+        </p:nvSpPr>
+        <p:spPr>
+          <a:xfrm xmlns:a="http://schemas.openxmlformats.org/drawingml/2006/main">
+            <a:off x="8934450" y="2114550"/>
+            <a:ext cx="2571750" cy="304800"/>
+          </a:xfrm>
+          <a:prstGeom xmlns:a="http://schemas.openxmlformats.org/drawingml/2006/main" prst="rect">
+            <a:avLst/>
+          </a:prstGeom>
+          <a:noFill xmlns:a="http://schemas.openxmlformats.org/drawingml/2006/main"/>
+          <a:ln xmlns:a="http://schemas.openxmlformats.org/drawingml/2006/main" w="0">
+            <a:noFill/>
+            <a:prstDash val="solid"/>
+          </a:ln>
+        </p:spPr>
+        <p:txBody>
+          <a:bodyPr xmlns:a="http://schemas.openxmlformats.org/drawingml/2006/main" wrap="square" lIns="0" tIns="0" rIns="0" bIns="0" anchor="ctr">
+            <a:normAutofit fontScale="100000"/>
           </a:bodyPr>
           <a:lstStyle xmlns:a="http://schemas.openxmlformats.org/drawingml/2006/main"/>
           <a:p xmlns:a="http://schemas.openxmlformats.org/drawingml/2006/main">
             <a:pPr algn="l">
-              <a:buNone/>
-              <a:defRPr sz="1200" b="0">
-                <a:solidFill>
-                  <a:srgbClr val="667085"/>
-                </a:solidFill>
-                <a:latin typeface="PingFang SC"/>
-                <a:ea typeface="PingFang SC"/>
-                <a:cs typeface="PingFang SC"/>
-              </a:defRPr>
-            </a:pPr>
-            <a:r>
-              <a:rPr sz="1200" b="0">
-                <a:solidFill>
-                  <a:srgbClr val="667085"/>
-                </a:solidFill>
-                <a:latin typeface="PingFang SC"/>
-                <a:ea typeface="PingFang SC"/>
-                <a:cs typeface="PingFang SC"/>
-              </a:rPr>
-              <a:t>多流程、多约束、多分支同时存在时，模型可能顺序错误、遗漏要求或未完成任务。</a:t>
-            </a:r>
-          </a:p>
-        </p:txBody>
-      </p:sp>
-      <p:sp>
-        <p:nvSpPr>
-          <p:cNvPr id="11" name="step-n-1">
-            <a:extLst xmlns:a="http://schemas.openxmlformats.org/drawingml/2006/main">
-              <a:ext uri="{FF2B5EF4-FFF2-40B4-BE49-F238E27FC236}">
-                <a16:creationId xmlns:a16="http://schemas.microsoft.com/office/drawing/2014/main" id="{9020754C-4655-4B67-93A1-D6945B1572E0}"/>
-              </a:ext>
-            </a:extLst>
-          </p:cNvPr>
-          <p:cNvSpPr>
-            <a:spLocks xmlns:a="http://schemas.openxmlformats.org/drawingml/2006/main" noGrp="1"/>
-          </p:cNvSpPr>
-          <p:nvPr/>
-        </p:nvSpPr>
-        <p:spPr>
-          <a:xfrm xmlns:a="http://schemas.openxmlformats.org/drawingml/2006/main">
-            <a:off x="533400" y="2371725"/>
-            <a:ext cx="381000" cy="323850"/>
-          </a:xfrm>
-          <a:prstGeom xmlns:a="http://schemas.openxmlformats.org/drawingml/2006/main" prst="rect">
-            <a:avLst/>
-          </a:prstGeom>
-          <a:noFill xmlns:a="http://schemas.openxmlformats.org/drawingml/2006/main"/>
-          <a:ln xmlns:a="http://schemas.openxmlformats.org/drawingml/2006/main" w="0">
-            <a:noFill/>
-            <a:prstDash val="solid"/>
-          </a:ln>
-        </p:spPr>
-        <p:txBody>
-          <a:bodyPr xmlns:a="http://schemas.openxmlformats.org/drawingml/2006/main" anchor="ctr">
+              <a:defRPr sz="1275" b="1">
+                <a:solidFill>
+                  <a:srgbClr val="111C31"/>
+                </a:solidFill>
+              </a:defRPr>
+            </a:pPr>
+            <a:r>
+              <a:rPr sz="1275" b="1">
+                <a:solidFill>
+                  <a:srgbClr val="111C31"/>
+                </a:solidFill>
+              </a:rPr>
+              <a:t>特定场景样本太少，风险测不到</a:t>
+            </a:r>
+          </a:p>
+        </p:txBody>
+      </p:sp>
+      <p:sp>
+        <p:nvSpPr>
+          <p:cNvPr id="27" name="card-divider-03">
+            <a:extLst xmlns:a="http://schemas.openxmlformats.org/drawingml/2006/main">
+              <a:ext uri="{FF2B5EF4-FFF2-40B4-BE49-F238E27FC236}">
+                <a16:creationId xmlns:a16="http://schemas.microsoft.com/office/drawing/2014/main" id="{AC323259-4CC9-4452-B236-1A531F541010}"/>
+              </a:ext>
+            </a:extLst>
+          </p:cNvPr>
+          <p:cNvSpPr>
+            <a:spLocks xmlns:a="http://schemas.openxmlformats.org/drawingml/2006/main" noGrp="1"/>
+          </p:cNvSpPr>
+          <p:nvPr/>
+        </p:nvSpPr>
+        <p:spPr>
+          <a:xfrm xmlns:a="http://schemas.openxmlformats.org/drawingml/2006/main">
+            <a:off x="8401050" y="2495550"/>
+            <a:ext cx="3086100" cy="9525"/>
+          </a:xfrm>
+          <a:prstGeom xmlns:a="http://schemas.openxmlformats.org/drawingml/2006/main" prst="rect">
+            <a:avLst/>
+          </a:prstGeom>
+          <a:solidFill xmlns:a="http://schemas.openxmlformats.org/drawingml/2006/main">
+            <a:srgbClr val="D69F00"/>
+          </a:solidFill>
+          <a:ln xmlns:a="http://schemas.openxmlformats.org/drawingml/2006/main" w="0">
+            <a:noFill/>
+            <a:prstDash val="solid"/>
+          </a:ln>
+        </p:spPr>
+      </p:sp>
+      <p:sp>
+        <p:nvSpPr>
+          <p:cNvPr id="28" name="card-body-03">
+            <a:extLst xmlns:a="http://schemas.openxmlformats.org/drawingml/2006/main">
+              <a:ext uri="{FF2B5EF4-FFF2-40B4-BE49-F238E27FC236}">
+                <a16:creationId xmlns:a16="http://schemas.microsoft.com/office/drawing/2014/main" id="{D789FA31-6B06-47F7-A020-3FFD8F3B5773}"/>
+              </a:ext>
+            </a:extLst>
+          </p:cNvPr>
+          <p:cNvSpPr>
+            <a:spLocks xmlns:a="http://schemas.openxmlformats.org/drawingml/2006/main" noGrp="1"/>
+          </p:cNvSpPr>
+          <p:nvPr/>
+        </p:nvSpPr>
+        <p:spPr>
+          <a:xfrm xmlns:a="http://schemas.openxmlformats.org/drawingml/2006/main">
+            <a:off x="8401050" y="2581275"/>
+            <a:ext cx="3086100" cy="276225"/>
+          </a:xfrm>
+          <a:prstGeom xmlns:a="http://schemas.openxmlformats.org/drawingml/2006/main" prst="rect">
+            <a:avLst/>
+          </a:prstGeom>
+          <a:noFill xmlns:a="http://schemas.openxmlformats.org/drawingml/2006/main"/>
+          <a:ln xmlns:a="http://schemas.openxmlformats.org/drawingml/2006/main" w="0">
+            <a:noFill/>
+            <a:prstDash val="solid"/>
+          </a:ln>
+        </p:spPr>
+        <p:txBody>
+          <a:bodyPr xmlns:a="http://schemas.openxmlformats.org/drawingml/2006/main" wrap="square" lIns="0" tIns="0" rIns="0" bIns="0" anchor="ctr">
             <a:normAutofit fontScale="100000"/>
           </a:bodyPr>
           <a:lstStyle xmlns:a="http://schemas.openxmlformats.org/drawingml/2006/main"/>
           <a:p xmlns:a="http://schemas.openxmlformats.org/drawingml/2006/main">
             <a:pPr algn="l">
-              <a:buNone/>
-              <a:defRPr sz="1500" b="1">
-                <a:solidFill>
-                  <a:srgbClr val="111827"/>
-                </a:solidFill>
-                <a:latin typeface="PingFang SC"/>
-                <a:ea typeface="PingFang SC"/>
-                <a:cs typeface="PingFang SC"/>
-              </a:defRPr>
-            </a:pPr>
-            <a:r>
-              <a:rPr sz="1500" b="1">
-                <a:solidFill>
-                  <a:srgbClr val="111827"/>
-                </a:solidFill>
-                <a:latin typeface="PingFang SC"/>
-                <a:ea typeface="PingFang SC"/>
-                <a:cs typeface="PingFang SC"/>
-              </a:rPr>
-              <a:t>2.</a:t>
-            </a:r>
-          </a:p>
-        </p:txBody>
-      </p:sp>
-      <p:sp>
-        <p:nvSpPr>
-          <p:cNvPr id="12" name="step-title-1">
-            <a:extLst xmlns:a="http://schemas.openxmlformats.org/drawingml/2006/main">
-              <a:ext uri="{FF2B5EF4-FFF2-40B4-BE49-F238E27FC236}">
-                <a16:creationId xmlns:a16="http://schemas.microsoft.com/office/drawing/2014/main" id="{42C15ABA-AF5B-4574-A693-1AE5E7C682AD}"/>
-              </a:ext>
-            </a:extLst>
-          </p:cNvPr>
-          <p:cNvSpPr>
-            <a:spLocks xmlns:a="http://schemas.openxmlformats.org/drawingml/2006/main" noGrp="1"/>
-          </p:cNvSpPr>
-          <p:nvPr/>
-        </p:nvSpPr>
-        <p:spPr>
-          <a:xfrm xmlns:a="http://schemas.openxmlformats.org/drawingml/2006/main">
-            <a:off x="1028700" y="2362200"/>
-            <a:ext cx="10629900" cy="285750"/>
-          </a:xfrm>
-          <a:prstGeom xmlns:a="http://schemas.openxmlformats.org/drawingml/2006/main" prst="rect">
-            <a:avLst/>
-          </a:prstGeom>
-          <a:noFill xmlns:a="http://schemas.openxmlformats.org/drawingml/2006/main"/>
-          <a:ln xmlns:a="http://schemas.openxmlformats.org/drawingml/2006/main" w="0">
-            <a:noFill/>
-            <a:prstDash val="solid"/>
-          </a:ln>
-        </p:spPr>
-        <p:txBody>
-          <a:bodyPr xmlns:a="http://schemas.openxmlformats.org/drawingml/2006/main" anchor="ctr">
-            <a:normAutofit fontScale="73913"/>
+              <a:defRPr sz="1013" b="0">
+                <a:solidFill>
+                  <a:srgbClr val="1D2B46"/>
+                </a:solidFill>
+              </a:defRPr>
+            </a:pPr>
+            <a:r>
+              <a:rPr sz="1013" b="0">
+                <a:solidFill>
+                  <a:srgbClr val="1D2B46"/>
+                </a:solidFill>
+              </a:rPr>
+              <a:t>拒绝、打断、质疑等危险分支很难覆盖</a:t>
+            </a:r>
+          </a:p>
+        </p:txBody>
+      </p:sp>
+      <p:sp>
+        <p:nvSpPr>
+          <p:cNvPr id="29" name="card-shadow-04">
+            <a:extLst xmlns:a="http://schemas.openxmlformats.org/drawingml/2006/main">
+              <a:ext uri="{FF2B5EF4-FFF2-40B4-BE49-F238E27FC236}">
+                <a16:creationId xmlns:a16="http://schemas.microsoft.com/office/drawing/2014/main" id="{87DAAB3C-F297-4BDE-9DF1-AFE597EB1902}"/>
+              </a:ext>
+            </a:extLst>
+          </p:cNvPr>
+          <p:cNvSpPr>
+            <a:spLocks xmlns:a="http://schemas.openxmlformats.org/drawingml/2006/main" noGrp="1"/>
+          </p:cNvSpPr>
+          <p:nvPr/>
+        </p:nvSpPr>
+        <p:spPr>
+          <a:xfrm xmlns:a="http://schemas.openxmlformats.org/drawingml/2006/main">
+            <a:off x="2428875" y="3305175"/>
+            <a:ext cx="3524250" cy="1066800"/>
+          </a:xfrm>
+          <a:prstGeom xmlns:a="http://schemas.openxmlformats.org/drawingml/2006/main" prst="roundRect">
+            <a:avLst>
+              <a:gd name="adj" fmla="val 14286"/>
+            </a:avLst>
+          </a:prstGeom>
+          <a:solidFill xmlns:a="http://schemas.openxmlformats.org/drawingml/2006/main">
+            <a:srgbClr val="FFF4BD"/>
+          </a:solidFill>
+          <a:ln xmlns:a="http://schemas.openxmlformats.org/drawingml/2006/main" w="0">
+            <a:noFill/>
+            <a:prstDash val="solid"/>
+          </a:ln>
+        </p:spPr>
+      </p:sp>
+      <p:sp>
+        <p:nvSpPr>
+          <p:cNvPr id="30" name="card-04">
+            <a:extLst xmlns:a="http://schemas.openxmlformats.org/drawingml/2006/main">
+              <a:ext uri="{FF2B5EF4-FFF2-40B4-BE49-F238E27FC236}">
+                <a16:creationId xmlns:a16="http://schemas.microsoft.com/office/drawing/2014/main" id="{8EC24B3F-8614-4B75-8869-19E2A3C9C7DE}"/>
+              </a:ext>
+            </a:extLst>
+          </p:cNvPr>
+          <p:cNvSpPr>
+            <a:spLocks xmlns:a="http://schemas.openxmlformats.org/drawingml/2006/main" noGrp="1"/>
+          </p:cNvSpPr>
+          <p:nvPr/>
+        </p:nvSpPr>
+        <p:spPr>
+          <a:xfrm xmlns:a="http://schemas.openxmlformats.org/drawingml/2006/main">
+            <a:off x="2381250" y="3238500"/>
+            <a:ext cx="3524250" cy="1066800"/>
+          </a:xfrm>
+          <a:prstGeom xmlns:a="http://schemas.openxmlformats.org/drawingml/2006/main" prst="roundRect">
+            <a:avLst>
+              <a:gd name="adj" fmla="val 14286"/>
+            </a:avLst>
+          </a:prstGeom>
+          <a:solidFill xmlns:a="http://schemas.openxmlformats.org/drawingml/2006/main">
+            <a:srgbClr val="FFC300"/>
+          </a:solidFill>
+          <a:ln xmlns:a="http://schemas.openxmlformats.org/drawingml/2006/main" w="0">
+            <a:noFill/>
+            <a:prstDash val="solid"/>
+          </a:ln>
+        </p:spPr>
+      </p:sp>
+      <p:sp>
+        <p:nvSpPr>
+          <p:cNvPr id="31" name="card-number-bg-04">
+            <a:extLst xmlns:a="http://schemas.openxmlformats.org/drawingml/2006/main">
+              <a:ext uri="{FF2B5EF4-FFF2-40B4-BE49-F238E27FC236}">
+                <a16:creationId xmlns:a16="http://schemas.microsoft.com/office/drawing/2014/main" id="{D929FF38-BE97-4E3E-B5CA-CDD0F10DF8A8}"/>
+              </a:ext>
+            </a:extLst>
+          </p:cNvPr>
+          <p:cNvSpPr>
+            <a:spLocks xmlns:a="http://schemas.openxmlformats.org/drawingml/2006/main" noGrp="1"/>
+          </p:cNvSpPr>
+          <p:nvPr/>
+        </p:nvSpPr>
+        <p:spPr>
+          <a:xfrm xmlns:a="http://schemas.openxmlformats.org/drawingml/2006/main">
+            <a:off x="2552700" y="3400425"/>
+            <a:ext cx="409575" cy="247650"/>
+          </a:xfrm>
+          <a:prstGeom xmlns:a="http://schemas.openxmlformats.org/drawingml/2006/main" prst="roundRect">
+            <a:avLst>
+              <a:gd name="adj" fmla="val 30769"/>
+            </a:avLst>
+          </a:prstGeom>
+          <a:solidFill xmlns:a="http://schemas.openxmlformats.org/drawingml/2006/main">
+            <a:srgbClr val="111C31"/>
+          </a:solidFill>
+          <a:ln xmlns:a="http://schemas.openxmlformats.org/drawingml/2006/main" w="0">
+            <a:noFill/>
+            <a:prstDash val="solid"/>
+          </a:ln>
+        </p:spPr>
+      </p:sp>
+      <p:sp>
+        <p:nvSpPr>
+          <p:cNvPr id="32" name="card-number-04">
+            <a:extLst xmlns:a="http://schemas.openxmlformats.org/drawingml/2006/main">
+              <a:ext uri="{FF2B5EF4-FFF2-40B4-BE49-F238E27FC236}">
+                <a16:creationId xmlns:a16="http://schemas.microsoft.com/office/drawing/2014/main" id="{1B03EADF-078C-4B7A-A3FE-09124B253615}"/>
+              </a:ext>
+            </a:extLst>
+          </p:cNvPr>
+          <p:cNvSpPr>
+            <a:spLocks xmlns:a="http://schemas.openxmlformats.org/drawingml/2006/main" noGrp="1"/>
+          </p:cNvSpPr>
+          <p:nvPr/>
+        </p:nvSpPr>
+        <p:spPr>
+          <a:xfrm xmlns:a="http://schemas.openxmlformats.org/drawingml/2006/main">
+            <a:off x="2552700" y="3400425"/>
+            <a:ext cx="409575" cy="247650"/>
+          </a:xfrm>
+          <a:prstGeom xmlns:a="http://schemas.openxmlformats.org/drawingml/2006/main" prst="rect">
+            <a:avLst/>
+          </a:prstGeom>
+          <a:noFill xmlns:a="http://schemas.openxmlformats.org/drawingml/2006/main"/>
+          <a:ln xmlns:a="http://schemas.openxmlformats.org/drawingml/2006/main" w="0">
+            <a:noFill/>
+            <a:prstDash val="solid"/>
+          </a:ln>
+        </p:spPr>
+        <p:txBody>
+          <a:bodyPr xmlns:a="http://schemas.openxmlformats.org/drawingml/2006/main" wrap="square" lIns="0" tIns="0" rIns="0" bIns="0" anchor="ctr">
+            <a:normAutofit fontScale="100000"/>
+          </a:bodyPr>
+          <a:lstStyle xmlns:a="http://schemas.openxmlformats.org/drawingml/2006/main"/>
+          <a:p xmlns:a="http://schemas.openxmlformats.org/drawingml/2006/main">
+            <a:pPr algn="ctr">
+              <a:defRPr sz="975" b="1">
+                <a:solidFill>
+                  <a:srgbClr val="FFFFFF"/>
+                </a:solidFill>
+              </a:defRPr>
+            </a:pPr>
+            <a:r>
+              <a:rPr sz="975" b="1">
+                <a:solidFill>
+                  <a:srgbClr val="FFFFFF"/>
+                </a:solidFill>
+              </a:rPr>
+              <a:t>04</a:t>
+            </a:r>
+          </a:p>
+        </p:txBody>
+      </p:sp>
+      <p:sp>
+        <p:nvSpPr>
+          <p:cNvPr id="33" name="card-title-04">
+            <a:extLst xmlns:a="http://schemas.openxmlformats.org/drawingml/2006/main">
+              <a:ext uri="{FF2B5EF4-FFF2-40B4-BE49-F238E27FC236}">
+                <a16:creationId xmlns:a16="http://schemas.microsoft.com/office/drawing/2014/main" id="{8570E9E5-A3E2-4652-8FBE-8DD566968B64}"/>
+              </a:ext>
+            </a:extLst>
+          </p:cNvPr>
+          <p:cNvSpPr>
+            <a:spLocks xmlns:a="http://schemas.openxmlformats.org/drawingml/2006/main" noGrp="1"/>
+          </p:cNvSpPr>
+          <p:nvPr/>
+        </p:nvSpPr>
+        <p:spPr>
+          <a:xfrm xmlns:a="http://schemas.openxmlformats.org/drawingml/2006/main">
+            <a:off x="3086100" y="3381375"/>
+            <a:ext cx="2667000" cy="304800"/>
+          </a:xfrm>
+          <a:prstGeom xmlns:a="http://schemas.openxmlformats.org/drawingml/2006/main" prst="rect">
+            <a:avLst/>
+          </a:prstGeom>
+          <a:noFill xmlns:a="http://schemas.openxmlformats.org/drawingml/2006/main"/>
+          <a:ln xmlns:a="http://schemas.openxmlformats.org/drawingml/2006/main" w="0">
+            <a:noFill/>
+            <a:prstDash val="solid"/>
+          </a:ln>
+        </p:spPr>
+        <p:txBody>
+          <a:bodyPr xmlns:a="http://schemas.openxmlformats.org/drawingml/2006/main" wrap="square" lIns="0" tIns="0" rIns="0" bIns="0" anchor="ctr">
+            <a:normAutofit fontScale="100000"/>
           </a:bodyPr>
           <a:lstStyle xmlns:a="http://schemas.openxmlformats.org/drawingml/2006/main"/>
           <a:p xmlns:a="http://schemas.openxmlformats.org/drawingml/2006/main">
             <a:pPr algn="l">
-              <a:buNone/>
-              <a:defRPr sz="1725" b="1">
-                <a:solidFill>
-                  <a:srgbClr val="111827"/>
-                </a:solidFill>
-                <a:latin typeface="PingFang SC"/>
-                <a:ea typeface="PingFang SC"/>
-                <a:cs typeface="PingFang SC"/>
-              </a:defRPr>
-            </a:pPr>
-            <a:r>
-              <a:rPr sz="1725" b="1">
-                <a:solidFill>
-                  <a:srgbClr val="111827"/>
-                </a:solidFill>
-                <a:latin typeface="PingFang SC"/>
-                <a:ea typeface="PingFang SC"/>
-                <a:cs typeface="PingFang SC"/>
-              </a:rPr>
-              <a:t>隐私与合规存在一票否决红线</a:t>
-            </a:r>
-          </a:p>
-        </p:txBody>
-      </p:sp>
-      <p:sp>
-        <p:nvSpPr>
-          <p:cNvPr id="13" name="step-body-1">
-            <a:extLst xmlns:a="http://schemas.openxmlformats.org/drawingml/2006/main">
-              <a:ext uri="{FF2B5EF4-FFF2-40B4-BE49-F238E27FC236}">
-                <a16:creationId xmlns:a16="http://schemas.microsoft.com/office/drawing/2014/main" id="{CC81D6D1-3A42-4375-A2DB-05B84F35605D}"/>
-              </a:ext>
-            </a:extLst>
-          </p:cNvPr>
-          <p:cNvSpPr>
-            <a:spLocks xmlns:a="http://schemas.openxmlformats.org/drawingml/2006/main" noGrp="1"/>
-          </p:cNvSpPr>
-          <p:nvPr/>
-        </p:nvSpPr>
-        <p:spPr>
-          <a:xfrm xmlns:a="http://schemas.openxmlformats.org/drawingml/2006/main">
-            <a:off x="1028700" y="2647950"/>
-            <a:ext cx="10629900" cy="247650"/>
-          </a:xfrm>
-          <a:prstGeom xmlns:a="http://schemas.openxmlformats.org/drawingml/2006/main" prst="rect">
-            <a:avLst/>
-          </a:prstGeom>
-          <a:noFill xmlns:a="http://schemas.openxmlformats.org/drawingml/2006/main"/>
-          <a:ln xmlns:a="http://schemas.openxmlformats.org/drawingml/2006/main" w="0">
-            <a:noFill/>
-            <a:prstDash val="solid"/>
-          </a:ln>
-        </p:spPr>
-        <p:txBody>
-          <a:bodyPr xmlns:a="http://schemas.openxmlformats.org/drawingml/2006/main" anchor="ctr">
-            <a:normAutofit fontScale="85417"/>
+              <a:defRPr sz="1275" b="1">
+                <a:solidFill>
+                  <a:srgbClr val="111C31"/>
+                </a:solidFill>
+              </a:defRPr>
+            </a:pPr>
+            <a:r>
+              <a:rPr sz="1275" b="1">
+                <a:solidFill>
+                  <a:srgbClr val="111C31"/>
+                </a:solidFill>
+              </a:rPr>
+              <a:t>人工质检成本高，无法规模化</a:t>
+            </a:r>
+          </a:p>
+        </p:txBody>
+      </p:sp>
+      <p:sp>
+        <p:nvSpPr>
+          <p:cNvPr id="34" name="card-divider-04">
+            <a:extLst xmlns:a="http://schemas.openxmlformats.org/drawingml/2006/main">
+              <a:ext uri="{FF2B5EF4-FFF2-40B4-BE49-F238E27FC236}">
+                <a16:creationId xmlns:a16="http://schemas.microsoft.com/office/drawing/2014/main" id="{63BFE156-96EC-42CA-BAA5-B1AEACBA8634}"/>
+              </a:ext>
+            </a:extLst>
+          </p:cNvPr>
+          <p:cNvSpPr>
+            <a:spLocks xmlns:a="http://schemas.openxmlformats.org/drawingml/2006/main" noGrp="1"/>
+          </p:cNvSpPr>
+          <p:nvPr/>
+        </p:nvSpPr>
+        <p:spPr>
+          <a:xfrm xmlns:a="http://schemas.openxmlformats.org/drawingml/2006/main">
+            <a:off x="2552700" y="3762375"/>
+            <a:ext cx="3181350" cy="9525"/>
+          </a:xfrm>
+          <a:prstGeom xmlns:a="http://schemas.openxmlformats.org/drawingml/2006/main" prst="rect">
+            <a:avLst/>
+          </a:prstGeom>
+          <a:solidFill xmlns:a="http://schemas.openxmlformats.org/drawingml/2006/main">
+            <a:srgbClr val="D69F00"/>
+          </a:solidFill>
+          <a:ln xmlns:a="http://schemas.openxmlformats.org/drawingml/2006/main" w="0">
+            <a:noFill/>
+            <a:prstDash val="solid"/>
+          </a:ln>
+        </p:spPr>
+      </p:sp>
+      <p:sp>
+        <p:nvSpPr>
+          <p:cNvPr id="35" name="card-body-04">
+            <a:extLst xmlns:a="http://schemas.openxmlformats.org/drawingml/2006/main">
+              <a:ext uri="{FF2B5EF4-FFF2-40B4-BE49-F238E27FC236}">
+                <a16:creationId xmlns:a16="http://schemas.microsoft.com/office/drawing/2014/main" id="{8AAF60F1-47ED-4CA1-AC52-88D0689291C3}"/>
+              </a:ext>
+            </a:extLst>
+          </p:cNvPr>
+          <p:cNvSpPr>
+            <a:spLocks xmlns:a="http://schemas.openxmlformats.org/drawingml/2006/main" noGrp="1"/>
+          </p:cNvSpPr>
+          <p:nvPr/>
+        </p:nvSpPr>
+        <p:spPr>
+          <a:xfrm xmlns:a="http://schemas.openxmlformats.org/drawingml/2006/main">
+            <a:off x="2552700" y="3848100"/>
+            <a:ext cx="3181350" cy="276225"/>
+          </a:xfrm>
+          <a:prstGeom xmlns:a="http://schemas.openxmlformats.org/drawingml/2006/main" prst="rect">
+            <a:avLst/>
+          </a:prstGeom>
+          <a:noFill xmlns:a="http://schemas.openxmlformats.org/drawingml/2006/main"/>
+          <a:ln xmlns:a="http://schemas.openxmlformats.org/drawingml/2006/main" w="0">
+            <a:noFill/>
+            <a:prstDash val="solid"/>
+          </a:ln>
+        </p:spPr>
+        <p:txBody>
+          <a:bodyPr xmlns:a="http://schemas.openxmlformats.org/drawingml/2006/main" wrap="square" lIns="0" tIns="0" rIns="0" bIns="0" anchor="ctr">
+            <a:normAutofit fontScale="100000"/>
           </a:bodyPr>
           <a:lstStyle xmlns:a="http://schemas.openxmlformats.org/drawingml/2006/main"/>
           <a:p xmlns:a="http://schemas.openxmlformats.org/drawingml/2006/main">
             <a:pPr algn="l">
-              <a:buNone/>
-              <a:defRPr sz="1200" b="0">
-                <a:solidFill>
-                  <a:srgbClr val="667085"/>
-                </a:solidFill>
-                <a:latin typeface="PingFang SC"/>
-                <a:ea typeface="PingFang SC"/>
-                <a:cs typeface="PingFang SC"/>
-              </a:defRPr>
-            </a:pPr>
-            <a:r>
-              <a:rPr sz="1200" b="0">
-                <a:solidFill>
-                  <a:srgbClr val="667085"/>
-                </a:solidFill>
-                <a:latin typeface="PingFang SC"/>
-                <a:ea typeface="PingFang SC"/>
-                <a:cs typeface="PingFang SC"/>
-              </a:rPr>
-              <a:t>一次敏感信息泄露、违规承诺或身份处理错误，就可能让整个模型版本不能上线。</a:t>
-            </a:r>
-          </a:p>
-        </p:txBody>
-      </p:sp>
-      <p:sp>
-        <p:nvSpPr>
-          <p:cNvPr id="15" name="step-n-2">
-            <a:extLst xmlns:a="http://schemas.openxmlformats.org/drawingml/2006/main">
-              <a:ext uri="{FF2B5EF4-FFF2-40B4-BE49-F238E27FC236}">
-                <a16:creationId xmlns:a16="http://schemas.microsoft.com/office/drawing/2014/main" id="{BE7D4578-4A77-4ECD-A191-6C6D7285889F}"/>
-              </a:ext>
-            </a:extLst>
-          </p:cNvPr>
-          <p:cNvSpPr>
-            <a:spLocks xmlns:a="http://schemas.openxmlformats.org/drawingml/2006/main" noGrp="1"/>
-          </p:cNvSpPr>
-          <p:nvPr/>
-        </p:nvSpPr>
-        <p:spPr>
-          <a:xfrm xmlns:a="http://schemas.openxmlformats.org/drawingml/2006/main">
-            <a:off x="533400" y="3057525"/>
-            <a:ext cx="381000" cy="323850"/>
-          </a:xfrm>
-          <a:prstGeom xmlns:a="http://schemas.openxmlformats.org/drawingml/2006/main" prst="rect">
-            <a:avLst/>
-          </a:prstGeom>
-          <a:noFill xmlns:a="http://schemas.openxmlformats.org/drawingml/2006/main"/>
-          <a:ln xmlns:a="http://schemas.openxmlformats.org/drawingml/2006/main" w="0">
-            <a:noFill/>
-            <a:prstDash val="solid"/>
-          </a:ln>
-        </p:spPr>
-        <p:txBody>
-          <a:bodyPr xmlns:a="http://schemas.openxmlformats.org/drawingml/2006/main" anchor="ctr">
+              <a:defRPr sz="1013" b="0">
+                <a:solidFill>
+                  <a:srgbClr val="1D2B46"/>
+                </a:solidFill>
+              </a:defRPr>
+            </a:pPr>
+            <a:r>
+              <a:rPr sz="1013" b="0">
+                <a:solidFill>
+                  <a:srgbClr val="1D2B46"/>
+                </a:solidFill>
+              </a:rPr>
+              <a:t>抽听慢、标准不一，跟不上模型快速迭代</a:t>
+            </a:r>
+          </a:p>
+        </p:txBody>
+      </p:sp>
+      <p:sp>
+        <p:nvSpPr>
+          <p:cNvPr id="36" name="card-shadow-05">
+            <a:extLst xmlns:a="http://schemas.openxmlformats.org/drawingml/2006/main">
+              <a:ext uri="{FF2B5EF4-FFF2-40B4-BE49-F238E27FC236}">
+                <a16:creationId xmlns:a16="http://schemas.microsoft.com/office/drawing/2014/main" id="{0CCB4E24-7DDC-4BA7-BD67-C751187B3D1D}"/>
+              </a:ext>
+            </a:extLst>
+          </p:cNvPr>
+          <p:cNvSpPr>
+            <a:spLocks xmlns:a="http://schemas.openxmlformats.org/drawingml/2006/main" noGrp="1"/>
+          </p:cNvSpPr>
+          <p:nvPr/>
+        </p:nvSpPr>
+        <p:spPr>
+          <a:xfrm xmlns:a="http://schemas.openxmlformats.org/drawingml/2006/main">
+            <a:off x="6334125" y="3305175"/>
+            <a:ext cx="3524250" cy="1066800"/>
+          </a:xfrm>
+          <a:prstGeom xmlns:a="http://schemas.openxmlformats.org/drawingml/2006/main" prst="roundRect">
+            <a:avLst>
+              <a:gd name="adj" fmla="val 14286"/>
+            </a:avLst>
+          </a:prstGeom>
+          <a:solidFill xmlns:a="http://schemas.openxmlformats.org/drawingml/2006/main">
+            <a:srgbClr val="FFF4BD"/>
+          </a:solidFill>
+          <a:ln xmlns:a="http://schemas.openxmlformats.org/drawingml/2006/main" w="0">
+            <a:noFill/>
+            <a:prstDash val="solid"/>
+          </a:ln>
+        </p:spPr>
+      </p:sp>
+      <p:sp>
+        <p:nvSpPr>
+          <p:cNvPr id="37" name="card-05">
+            <a:extLst xmlns:a="http://schemas.openxmlformats.org/drawingml/2006/main">
+              <a:ext uri="{FF2B5EF4-FFF2-40B4-BE49-F238E27FC236}">
+                <a16:creationId xmlns:a16="http://schemas.microsoft.com/office/drawing/2014/main" id="{6346097A-5949-4987-84DE-40795262076F}"/>
+              </a:ext>
+            </a:extLst>
+          </p:cNvPr>
+          <p:cNvSpPr>
+            <a:spLocks xmlns:a="http://schemas.openxmlformats.org/drawingml/2006/main" noGrp="1"/>
+          </p:cNvSpPr>
+          <p:nvPr/>
+        </p:nvSpPr>
+        <p:spPr>
+          <a:xfrm xmlns:a="http://schemas.openxmlformats.org/drawingml/2006/main">
+            <a:off x="6286500" y="3238500"/>
+            <a:ext cx="3524250" cy="1066800"/>
+          </a:xfrm>
+          <a:prstGeom xmlns:a="http://schemas.openxmlformats.org/drawingml/2006/main" prst="roundRect">
+            <a:avLst>
+              <a:gd name="adj" fmla="val 14286"/>
+            </a:avLst>
+          </a:prstGeom>
+          <a:solidFill xmlns:a="http://schemas.openxmlformats.org/drawingml/2006/main">
+            <a:srgbClr val="FFC300"/>
+          </a:solidFill>
+          <a:ln xmlns:a="http://schemas.openxmlformats.org/drawingml/2006/main" w="0">
+            <a:noFill/>
+            <a:prstDash val="solid"/>
+          </a:ln>
+        </p:spPr>
+      </p:sp>
+      <p:sp>
+        <p:nvSpPr>
+          <p:cNvPr id="38" name="card-number-bg-05">
+            <a:extLst xmlns:a="http://schemas.openxmlformats.org/drawingml/2006/main">
+              <a:ext uri="{FF2B5EF4-FFF2-40B4-BE49-F238E27FC236}">
+                <a16:creationId xmlns:a16="http://schemas.microsoft.com/office/drawing/2014/main" id="{9E654997-C641-4AFC-A08B-7E5B680A42C1}"/>
+              </a:ext>
+            </a:extLst>
+          </p:cNvPr>
+          <p:cNvSpPr>
+            <a:spLocks xmlns:a="http://schemas.openxmlformats.org/drawingml/2006/main" noGrp="1"/>
+          </p:cNvSpPr>
+          <p:nvPr/>
+        </p:nvSpPr>
+        <p:spPr>
+          <a:xfrm xmlns:a="http://schemas.openxmlformats.org/drawingml/2006/main">
+            <a:off x="6457950" y="3400425"/>
+            <a:ext cx="409575" cy="247650"/>
+          </a:xfrm>
+          <a:prstGeom xmlns:a="http://schemas.openxmlformats.org/drawingml/2006/main" prst="roundRect">
+            <a:avLst>
+              <a:gd name="adj" fmla="val 30769"/>
+            </a:avLst>
+          </a:prstGeom>
+          <a:solidFill xmlns:a="http://schemas.openxmlformats.org/drawingml/2006/main">
+            <a:srgbClr val="111C31"/>
+          </a:solidFill>
+          <a:ln xmlns:a="http://schemas.openxmlformats.org/drawingml/2006/main" w="0">
+            <a:noFill/>
+            <a:prstDash val="solid"/>
+          </a:ln>
+        </p:spPr>
+      </p:sp>
+      <p:sp>
+        <p:nvSpPr>
+          <p:cNvPr id="39" name="card-number-05">
+            <a:extLst xmlns:a="http://schemas.openxmlformats.org/drawingml/2006/main">
+              <a:ext uri="{FF2B5EF4-FFF2-40B4-BE49-F238E27FC236}">
+                <a16:creationId xmlns:a16="http://schemas.microsoft.com/office/drawing/2014/main" id="{3C9ED50C-30AD-49FA-9937-78CEAAFADF80}"/>
+              </a:ext>
+            </a:extLst>
+          </p:cNvPr>
+          <p:cNvSpPr>
+            <a:spLocks xmlns:a="http://schemas.openxmlformats.org/drawingml/2006/main" noGrp="1"/>
+          </p:cNvSpPr>
+          <p:nvPr/>
+        </p:nvSpPr>
+        <p:spPr>
+          <a:xfrm xmlns:a="http://schemas.openxmlformats.org/drawingml/2006/main">
+            <a:off x="6457950" y="3400425"/>
+            <a:ext cx="409575" cy="247650"/>
+          </a:xfrm>
+          <a:prstGeom xmlns:a="http://schemas.openxmlformats.org/drawingml/2006/main" prst="rect">
+            <a:avLst/>
+          </a:prstGeom>
+          <a:noFill xmlns:a="http://schemas.openxmlformats.org/drawingml/2006/main"/>
+          <a:ln xmlns:a="http://schemas.openxmlformats.org/drawingml/2006/main" w="0">
+            <a:noFill/>
+            <a:prstDash val="solid"/>
+          </a:ln>
+        </p:spPr>
+        <p:txBody>
+          <a:bodyPr xmlns:a="http://schemas.openxmlformats.org/drawingml/2006/main" wrap="square" lIns="0" tIns="0" rIns="0" bIns="0" anchor="ctr">
             <a:normAutofit fontScale="100000"/>
           </a:bodyPr>
           <a:lstStyle xmlns:a="http://schemas.openxmlformats.org/drawingml/2006/main"/>
           <a:p xmlns:a="http://schemas.openxmlformats.org/drawingml/2006/main">
+            <a:pPr algn="ctr">
+              <a:defRPr sz="975" b="1">
+                <a:solidFill>
+                  <a:srgbClr val="FFFFFF"/>
+                </a:solidFill>
+              </a:defRPr>
+            </a:pPr>
+            <a:r>
+              <a:rPr sz="975" b="1">
+                <a:solidFill>
+                  <a:srgbClr val="FFFFFF"/>
+                </a:solidFill>
+              </a:rPr>
+              <a:t>05</a:t>
+            </a:r>
+          </a:p>
+        </p:txBody>
+      </p:sp>
+      <p:sp>
+        <p:nvSpPr>
+          <p:cNvPr id="40" name="card-title-05">
+            <a:extLst xmlns:a="http://schemas.openxmlformats.org/drawingml/2006/main">
+              <a:ext uri="{FF2B5EF4-FFF2-40B4-BE49-F238E27FC236}">
+                <a16:creationId xmlns:a16="http://schemas.microsoft.com/office/drawing/2014/main" id="{D3640DAA-7FFD-4957-9FE3-09AC9561CCA7}"/>
+              </a:ext>
+            </a:extLst>
+          </p:cNvPr>
+          <p:cNvSpPr>
+            <a:spLocks xmlns:a="http://schemas.openxmlformats.org/drawingml/2006/main" noGrp="1"/>
+          </p:cNvSpPr>
+          <p:nvPr/>
+        </p:nvSpPr>
+        <p:spPr>
+          <a:xfrm xmlns:a="http://schemas.openxmlformats.org/drawingml/2006/main">
+            <a:off x="6991350" y="3381375"/>
+            <a:ext cx="2667000" cy="304800"/>
+          </a:xfrm>
+          <a:prstGeom xmlns:a="http://schemas.openxmlformats.org/drawingml/2006/main" prst="rect">
+            <a:avLst/>
+          </a:prstGeom>
+          <a:noFill xmlns:a="http://schemas.openxmlformats.org/drawingml/2006/main"/>
+          <a:ln xmlns:a="http://schemas.openxmlformats.org/drawingml/2006/main" w="0">
+            <a:noFill/>
+            <a:prstDash val="solid"/>
+          </a:ln>
+        </p:spPr>
+        <p:txBody>
+          <a:bodyPr xmlns:a="http://schemas.openxmlformats.org/drawingml/2006/main" wrap="square" lIns="0" tIns="0" rIns="0" bIns="0" anchor="ctr">
+            <a:normAutofit fontScale="100000"/>
+          </a:bodyPr>
+          <a:lstStyle xmlns:a="http://schemas.openxmlformats.org/drawingml/2006/main"/>
+          <a:p xmlns:a="http://schemas.openxmlformats.org/drawingml/2006/main">
             <a:pPr algn="l">
-              <a:buNone/>
-              <a:defRPr sz="1500" b="1">
-                <a:solidFill>
-                  <a:srgbClr val="111827"/>
-                </a:solidFill>
-                <a:latin typeface="PingFang SC"/>
-                <a:ea typeface="PingFang SC"/>
-                <a:cs typeface="PingFang SC"/>
-              </a:defRPr>
-            </a:pPr>
-            <a:r>
-              <a:rPr sz="1500" b="1">
-                <a:solidFill>
-                  <a:srgbClr val="111827"/>
-                </a:solidFill>
-                <a:latin typeface="PingFang SC"/>
-                <a:ea typeface="PingFang SC"/>
-                <a:cs typeface="PingFang SC"/>
-              </a:rPr>
-              <a:t>3.</a:t>
-            </a:r>
-          </a:p>
-        </p:txBody>
-      </p:sp>
-      <p:sp>
-        <p:nvSpPr>
-          <p:cNvPr id="16" name="step-title-2">
-            <a:extLst xmlns:a="http://schemas.openxmlformats.org/drawingml/2006/main">
-              <a:ext uri="{FF2B5EF4-FFF2-40B4-BE49-F238E27FC236}">
-                <a16:creationId xmlns:a16="http://schemas.microsoft.com/office/drawing/2014/main" id="{B5412980-B5B8-41C5-BBC7-CC881B86EDE9}"/>
-              </a:ext>
-            </a:extLst>
-          </p:cNvPr>
-          <p:cNvSpPr>
-            <a:spLocks xmlns:a="http://schemas.openxmlformats.org/drawingml/2006/main" noGrp="1"/>
-          </p:cNvSpPr>
-          <p:nvPr/>
-        </p:nvSpPr>
-        <p:spPr>
-          <a:xfrm xmlns:a="http://schemas.openxmlformats.org/drawingml/2006/main">
-            <a:off x="1028700" y="3048000"/>
-            <a:ext cx="10629900" cy="285750"/>
-          </a:xfrm>
-          <a:prstGeom xmlns:a="http://schemas.openxmlformats.org/drawingml/2006/main" prst="rect">
-            <a:avLst/>
-          </a:prstGeom>
-          <a:noFill xmlns:a="http://schemas.openxmlformats.org/drawingml/2006/main"/>
-          <a:ln xmlns:a="http://schemas.openxmlformats.org/drawingml/2006/main" w="0">
-            <a:noFill/>
-            <a:prstDash val="solid"/>
-          </a:ln>
-        </p:spPr>
-        <p:txBody>
-          <a:bodyPr xmlns:a="http://schemas.openxmlformats.org/drawingml/2006/main" anchor="ctr">
-            <a:normAutofit fontScale="73913"/>
+              <a:defRPr sz="1275" b="1">
+                <a:solidFill>
+                  <a:srgbClr val="111C31"/>
+                </a:solidFill>
+              </a:defRPr>
+            </a:pPr>
+            <a:r>
+              <a:rPr sz="1275" b="1">
+                <a:solidFill>
+                  <a:srgbClr val="111C31"/>
+                </a:solidFill>
+              </a:rPr>
+              <a:t>出错后无法正确归因</a:t>
+            </a:r>
+          </a:p>
+        </p:txBody>
+      </p:sp>
+      <p:sp>
+        <p:nvSpPr>
+          <p:cNvPr id="41" name="card-divider-05">
+            <a:extLst xmlns:a="http://schemas.openxmlformats.org/drawingml/2006/main">
+              <a:ext uri="{FF2B5EF4-FFF2-40B4-BE49-F238E27FC236}">
+                <a16:creationId xmlns:a16="http://schemas.microsoft.com/office/drawing/2014/main" id="{4A1A3DCD-692A-41B5-A987-C16ACE2826AB}"/>
+              </a:ext>
+            </a:extLst>
+          </p:cNvPr>
+          <p:cNvSpPr>
+            <a:spLocks xmlns:a="http://schemas.openxmlformats.org/drawingml/2006/main" noGrp="1"/>
+          </p:cNvSpPr>
+          <p:nvPr/>
+        </p:nvSpPr>
+        <p:spPr>
+          <a:xfrm xmlns:a="http://schemas.openxmlformats.org/drawingml/2006/main">
+            <a:off x="6457950" y="3762375"/>
+            <a:ext cx="3181350" cy="9525"/>
+          </a:xfrm>
+          <a:prstGeom xmlns:a="http://schemas.openxmlformats.org/drawingml/2006/main" prst="rect">
+            <a:avLst/>
+          </a:prstGeom>
+          <a:solidFill xmlns:a="http://schemas.openxmlformats.org/drawingml/2006/main">
+            <a:srgbClr val="D69F00"/>
+          </a:solidFill>
+          <a:ln xmlns:a="http://schemas.openxmlformats.org/drawingml/2006/main" w="0">
+            <a:noFill/>
+            <a:prstDash val="solid"/>
+          </a:ln>
+        </p:spPr>
+      </p:sp>
+      <p:sp>
+        <p:nvSpPr>
+          <p:cNvPr id="42" name="card-body-05">
+            <a:extLst xmlns:a="http://schemas.openxmlformats.org/drawingml/2006/main">
+              <a:ext uri="{FF2B5EF4-FFF2-40B4-BE49-F238E27FC236}">
+                <a16:creationId xmlns:a16="http://schemas.microsoft.com/office/drawing/2014/main" id="{2DAF6F93-3EB8-4BDA-BFB7-6CE11B6B27D9}"/>
+              </a:ext>
+            </a:extLst>
+          </p:cNvPr>
+          <p:cNvSpPr>
+            <a:spLocks xmlns:a="http://schemas.openxmlformats.org/drawingml/2006/main" noGrp="1"/>
+          </p:cNvSpPr>
+          <p:nvPr/>
+        </p:nvSpPr>
+        <p:spPr>
+          <a:xfrm xmlns:a="http://schemas.openxmlformats.org/drawingml/2006/main">
+            <a:off x="6457950" y="3848100"/>
+            <a:ext cx="3181350" cy="276225"/>
+          </a:xfrm>
+          <a:prstGeom xmlns:a="http://schemas.openxmlformats.org/drawingml/2006/main" prst="rect">
+            <a:avLst/>
+          </a:prstGeom>
+          <a:noFill xmlns:a="http://schemas.openxmlformats.org/drawingml/2006/main"/>
+          <a:ln xmlns:a="http://schemas.openxmlformats.org/drawingml/2006/main" w="0">
+            <a:noFill/>
+            <a:prstDash val="solid"/>
+          </a:ln>
+        </p:spPr>
+        <p:txBody>
+          <a:bodyPr xmlns:a="http://schemas.openxmlformats.org/drawingml/2006/main" wrap="square" lIns="0" tIns="0" rIns="0" bIns="0" anchor="ctr">
+            <a:normAutofit fontScale="100000"/>
           </a:bodyPr>
           <a:lstStyle xmlns:a="http://schemas.openxmlformats.org/drawingml/2006/main"/>
           <a:p xmlns:a="http://schemas.openxmlformats.org/drawingml/2006/main">
             <a:pPr algn="l">
-              <a:buNone/>
-              <a:defRPr sz="1725" b="1">
-                <a:solidFill>
-                  <a:srgbClr val="111827"/>
-                </a:solidFill>
-                <a:latin typeface="PingFang SC"/>
-                <a:ea typeface="PingFang SC"/>
-                <a:cs typeface="PingFang SC"/>
-              </a:defRPr>
-            </a:pPr>
-            <a:r>
-              <a:rPr sz="1725" b="1">
-                <a:solidFill>
-                  <a:srgbClr val="111827"/>
-                </a:solidFill>
-                <a:latin typeface="PingFang SC"/>
-                <a:ea typeface="PingFang SC"/>
-                <a:cs typeface="PingFang SC"/>
-              </a:rPr>
-              <a:t>特定场景样本太少，风险测不到</a:t>
-            </a:r>
-          </a:p>
-        </p:txBody>
-      </p:sp>
-      <p:sp>
-        <p:nvSpPr>
-          <p:cNvPr id="17" name="step-body-2">
-            <a:extLst xmlns:a="http://schemas.openxmlformats.org/drawingml/2006/main">
-              <a:ext uri="{FF2B5EF4-FFF2-40B4-BE49-F238E27FC236}">
-                <a16:creationId xmlns:a16="http://schemas.microsoft.com/office/drawing/2014/main" id="{0472E68F-8D8B-4A37-AF40-5384BD04277E}"/>
-              </a:ext>
-            </a:extLst>
-          </p:cNvPr>
-          <p:cNvSpPr>
-            <a:spLocks xmlns:a="http://schemas.openxmlformats.org/drawingml/2006/main" noGrp="1"/>
-          </p:cNvSpPr>
-          <p:nvPr/>
-        </p:nvSpPr>
-        <p:spPr>
-          <a:xfrm xmlns:a="http://schemas.openxmlformats.org/drawingml/2006/main">
-            <a:off x="1028700" y="3333750"/>
-            <a:ext cx="10629900" cy="247650"/>
-          </a:xfrm>
-          <a:prstGeom xmlns:a="http://schemas.openxmlformats.org/drawingml/2006/main" prst="rect">
-            <a:avLst/>
-          </a:prstGeom>
-          <a:noFill xmlns:a="http://schemas.openxmlformats.org/drawingml/2006/main"/>
-          <a:ln xmlns:a="http://schemas.openxmlformats.org/drawingml/2006/main" w="0">
-            <a:noFill/>
-            <a:prstDash val="solid"/>
-          </a:ln>
-        </p:spPr>
-        <p:txBody>
-          <a:bodyPr xmlns:a="http://schemas.openxmlformats.org/drawingml/2006/main" anchor="ctr">
-            <a:normAutofit fontScale="85417"/>
+              <a:defRPr sz="1013" b="0">
+                <a:solidFill>
+                  <a:srgbClr val="1D2B46"/>
+                </a:solidFill>
+              </a:defRPr>
+            </a:pPr>
+            <a:r>
+              <a:rPr sz="1013" b="0">
+                <a:solidFill>
+                  <a:srgbClr val="1D2B46"/>
+                </a:solidFill>
+              </a:rPr>
+              <a:t>问题可能来自模型、SOP、裁判或测试数据</a:t>
+            </a:r>
+          </a:p>
+        </p:txBody>
+      </p:sp>
+      <p:sp>
+        <p:nvSpPr>
+          <p:cNvPr id="43" name="bottom-rule">
+            <a:extLst xmlns:a="http://schemas.openxmlformats.org/drawingml/2006/main">
+              <a:ext uri="{FF2B5EF4-FFF2-40B4-BE49-F238E27FC236}">
+                <a16:creationId xmlns:a16="http://schemas.microsoft.com/office/drawing/2014/main" id="{ABDECBF0-361C-42B8-B1ED-C8323CF8B585}"/>
+              </a:ext>
+            </a:extLst>
+          </p:cNvPr>
+          <p:cNvSpPr>
+            <a:spLocks xmlns:a="http://schemas.openxmlformats.org/drawingml/2006/main" noGrp="1"/>
+          </p:cNvSpPr>
+          <p:nvPr/>
+        </p:nvSpPr>
+        <p:spPr>
+          <a:xfrm xmlns:a="http://schemas.openxmlformats.org/drawingml/2006/main">
+            <a:off x="533400" y="4514850"/>
+            <a:ext cx="11125200" cy="9525"/>
+          </a:xfrm>
+          <a:prstGeom xmlns:a="http://schemas.openxmlformats.org/drawingml/2006/main" prst="rect">
+            <a:avLst/>
+          </a:prstGeom>
+          <a:solidFill xmlns:a="http://schemas.openxmlformats.org/drawingml/2006/main">
+            <a:srgbClr val="D7DCE4"/>
+          </a:solidFill>
+          <a:ln xmlns:a="http://schemas.openxmlformats.org/drawingml/2006/main" w="0">
+            <a:noFill/>
+            <a:prstDash val="solid"/>
+          </a:ln>
+        </p:spPr>
+      </p:sp>
+      <p:sp>
+        <p:nvSpPr>
+          <p:cNvPr id="44" name="solution-question">
+            <a:extLst xmlns:a="http://schemas.openxmlformats.org/drawingml/2006/main">
+              <a:ext uri="{FF2B5EF4-FFF2-40B4-BE49-F238E27FC236}">
+                <a16:creationId xmlns:a16="http://schemas.microsoft.com/office/drawing/2014/main" id="{D40B7995-D5E7-4BBB-9D7B-ADC727234370}"/>
+              </a:ext>
+            </a:extLst>
+          </p:cNvPr>
+          <p:cNvSpPr>
+            <a:spLocks xmlns:a="http://schemas.openxmlformats.org/drawingml/2006/main" noGrp="1"/>
+          </p:cNvSpPr>
+          <p:nvPr/>
+        </p:nvSpPr>
+        <p:spPr>
+          <a:xfrm xmlns:a="http://schemas.openxmlformats.org/drawingml/2006/main">
+            <a:off x="533400" y="4676775"/>
+            <a:ext cx="5715000" cy="457200"/>
+          </a:xfrm>
+          <a:prstGeom xmlns:a="http://schemas.openxmlformats.org/drawingml/2006/main" prst="rect">
+            <a:avLst/>
+          </a:prstGeom>
+          <a:noFill xmlns:a="http://schemas.openxmlformats.org/drawingml/2006/main"/>
+          <a:ln xmlns:a="http://schemas.openxmlformats.org/drawingml/2006/main" w="0">
+            <a:noFill/>
+            <a:prstDash val="solid"/>
+          </a:ln>
+        </p:spPr>
+        <p:txBody>
+          <a:bodyPr xmlns:a="http://schemas.openxmlformats.org/drawingml/2006/main" wrap="square" lIns="0" tIns="0" rIns="0" bIns="0" anchor="ctr">
+            <a:normAutofit fontScale="100000"/>
           </a:bodyPr>
           <a:lstStyle xmlns:a="http://schemas.openxmlformats.org/drawingml/2006/main"/>
           <a:p xmlns:a="http://schemas.openxmlformats.org/drawingml/2006/main">
             <a:pPr algn="l">
-              <a:buNone/>
-              <a:defRPr sz="1200" b="0">
-                <a:solidFill>
-                  <a:srgbClr val="667085"/>
-                </a:solidFill>
-                <a:latin typeface="PingFang SC"/>
-                <a:ea typeface="PingFang SC"/>
-                <a:cs typeface="PingFang SC"/>
-              </a:defRPr>
-            </a:pPr>
-            <a:r>
-              <a:rPr sz="1200" b="0">
-                <a:solidFill>
-                  <a:srgbClr val="667085"/>
-                </a:solidFill>
-                <a:latin typeface="PingFang SC"/>
-                <a:ea typeface="PingFang SC"/>
-                <a:cs typeface="PingFang SC"/>
-              </a:rPr>
-              <a:t>拒绝、打断、质疑、反复追问等场景数量少但风险高，历史日志很难充分覆盖。</a:t>
-            </a:r>
-          </a:p>
-        </p:txBody>
-      </p:sp>
-      <p:sp>
-        <p:nvSpPr>
-          <p:cNvPr id="19" name="step-n-3">
-            <a:extLst xmlns:a="http://schemas.openxmlformats.org/drawingml/2006/main">
-              <a:ext uri="{FF2B5EF4-FFF2-40B4-BE49-F238E27FC236}">
-                <a16:creationId xmlns:a16="http://schemas.microsoft.com/office/drawing/2014/main" id="{F52B6353-AD90-4D20-ADD2-6BAE145C2618}"/>
-              </a:ext>
-            </a:extLst>
-          </p:cNvPr>
-          <p:cNvSpPr>
-            <a:spLocks xmlns:a="http://schemas.openxmlformats.org/drawingml/2006/main" noGrp="1"/>
-          </p:cNvSpPr>
-          <p:nvPr/>
-        </p:nvSpPr>
-        <p:spPr>
-          <a:xfrm xmlns:a="http://schemas.openxmlformats.org/drawingml/2006/main">
-            <a:off x="533400" y="3743325"/>
-            <a:ext cx="381000" cy="323850"/>
-          </a:xfrm>
-          <a:prstGeom xmlns:a="http://schemas.openxmlformats.org/drawingml/2006/main" prst="rect">
-            <a:avLst/>
-          </a:prstGeom>
-          <a:noFill xmlns:a="http://schemas.openxmlformats.org/drawingml/2006/main"/>
-          <a:ln xmlns:a="http://schemas.openxmlformats.org/drawingml/2006/main" w="0">
-            <a:noFill/>
-            <a:prstDash val="solid"/>
-          </a:ln>
-        </p:spPr>
-        <p:txBody>
-          <a:bodyPr xmlns:a="http://schemas.openxmlformats.org/drawingml/2006/main" anchor="ctr">
+              <a:defRPr sz="2325" b="1">
+                <a:solidFill>
+                  <a:srgbClr val="111C31"/>
+                </a:solidFill>
+              </a:defRPr>
+            </a:pPr>
+            <a:r>
+              <a:rPr sz="2325" b="1">
+                <a:solidFill>
+                  <a:srgbClr val="111C31"/>
+                </a:solidFill>
+              </a:rPr>
+              <a:t>那，该怎么解决呢？</a:t>
+            </a:r>
+          </a:p>
+        </p:txBody>
+      </p:sp>
+      <p:sp>
+        <p:nvSpPr>
+          <p:cNvPr id="45" name="answer-accent">
+            <a:extLst xmlns:a="http://schemas.openxmlformats.org/drawingml/2006/main">
+              <a:ext uri="{FF2B5EF4-FFF2-40B4-BE49-F238E27FC236}">
+                <a16:creationId xmlns:a16="http://schemas.microsoft.com/office/drawing/2014/main" id="{F9C57A2B-380A-4D23-8033-EDD2D3FE4DDF}"/>
+              </a:ext>
+            </a:extLst>
+          </p:cNvPr>
+          <p:cNvSpPr>
+            <a:spLocks xmlns:a="http://schemas.openxmlformats.org/drawingml/2006/main" noGrp="1"/>
+          </p:cNvSpPr>
+          <p:nvPr/>
+        </p:nvSpPr>
+        <p:spPr>
+          <a:xfrm xmlns:a="http://schemas.openxmlformats.org/drawingml/2006/main">
+            <a:off x="533400" y="5305425"/>
+            <a:ext cx="76200" cy="400050"/>
+          </a:xfrm>
+          <a:prstGeom xmlns:a="http://schemas.openxmlformats.org/drawingml/2006/main" prst="roundRect">
+            <a:avLst>
+              <a:gd name="adj" fmla="val 50000"/>
+            </a:avLst>
+          </a:prstGeom>
+          <a:solidFill xmlns:a="http://schemas.openxmlformats.org/drawingml/2006/main">
+            <a:srgbClr val="FFC300"/>
+          </a:solidFill>
+          <a:ln xmlns:a="http://schemas.openxmlformats.org/drawingml/2006/main" w="0">
+            <a:noFill/>
+            <a:prstDash val="solid"/>
+          </a:ln>
+        </p:spPr>
+      </p:sp>
+      <p:sp>
+        <p:nvSpPr>
+          <p:cNvPr id="46" name="solution-answer">
+            <a:extLst xmlns:a="http://schemas.openxmlformats.org/drawingml/2006/main">
+              <a:ext uri="{FF2B5EF4-FFF2-40B4-BE49-F238E27FC236}">
+                <a16:creationId xmlns:a16="http://schemas.microsoft.com/office/drawing/2014/main" id="{EEC27566-8669-41A2-A510-1921F92E9928}"/>
+              </a:ext>
+            </a:extLst>
+          </p:cNvPr>
+          <p:cNvSpPr>
+            <a:spLocks xmlns:a="http://schemas.openxmlformats.org/drawingml/2006/main" noGrp="1"/>
+          </p:cNvSpPr>
+          <p:nvPr/>
+        </p:nvSpPr>
+        <p:spPr>
+          <a:xfrm xmlns:a="http://schemas.openxmlformats.org/drawingml/2006/main">
+            <a:off x="781050" y="5219700"/>
+            <a:ext cx="10877550" cy="590550"/>
+          </a:xfrm>
+          <a:prstGeom xmlns:a="http://schemas.openxmlformats.org/drawingml/2006/main" prst="rect">
+            <a:avLst/>
+          </a:prstGeom>
+          <a:noFill xmlns:a="http://schemas.openxmlformats.org/drawingml/2006/main"/>
+          <a:ln xmlns:a="http://schemas.openxmlformats.org/drawingml/2006/main" w="0">
+            <a:noFill/>
+            <a:prstDash val="solid"/>
+          </a:ln>
+        </p:spPr>
+        <p:txBody>
+          <a:bodyPr xmlns:a="http://schemas.openxmlformats.org/drawingml/2006/main" wrap="square" lIns="0" tIns="0" rIns="0" bIns="0" anchor="ctr">
             <a:normAutofit fontScale="100000"/>
           </a:bodyPr>
           <a:lstStyle xmlns:a="http://schemas.openxmlformats.org/drawingml/2006/main"/>
           <a:p xmlns:a="http://schemas.openxmlformats.org/drawingml/2006/main">
             <a:pPr algn="l">
-              <a:buNone/>
-              <a:defRPr sz="1500" b="1">
-                <a:solidFill>
-                  <a:srgbClr val="111827"/>
-                </a:solidFill>
-                <a:latin typeface="PingFang SC"/>
-                <a:ea typeface="PingFang SC"/>
-                <a:cs typeface="PingFang SC"/>
-              </a:defRPr>
-            </a:pPr>
-            <a:r>
-              <a:rPr sz="1500" b="1">
-                <a:solidFill>
-                  <a:srgbClr val="111827"/>
-                </a:solidFill>
-                <a:latin typeface="PingFang SC"/>
-                <a:ea typeface="PingFang SC"/>
-                <a:cs typeface="PingFang SC"/>
-              </a:rPr>
-              <a:t>4.</a:t>
-            </a:r>
-          </a:p>
-        </p:txBody>
-      </p:sp>
-      <p:sp>
-        <p:nvSpPr>
-          <p:cNvPr id="20" name="step-title-3">
-            <a:extLst xmlns:a="http://schemas.openxmlformats.org/drawingml/2006/main">
-              <a:ext uri="{FF2B5EF4-FFF2-40B4-BE49-F238E27FC236}">
-                <a16:creationId xmlns:a16="http://schemas.microsoft.com/office/drawing/2014/main" id="{D97F5F26-12C6-452C-A2DF-1949CF7AFA1D}"/>
-              </a:ext>
-            </a:extLst>
-          </p:cNvPr>
-          <p:cNvSpPr>
-            <a:spLocks xmlns:a="http://schemas.openxmlformats.org/drawingml/2006/main" noGrp="1"/>
-          </p:cNvSpPr>
-          <p:nvPr/>
-        </p:nvSpPr>
-        <p:spPr>
-          <a:xfrm xmlns:a="http://schemas.openxmlformats.org/drawingml/2006/main">
-            <a:off x="1028700" y="3733800"/>
-            <a:ext cx="10629900" cy="285750"/>
-          </a:xfrm>
-          <a:prstGeom xmlns:a="http://schemas.openxmlformats.org/drawingml/2006/main" prst="rect">
-            <a:avLst/>
-          </a:prstGeom>
-          <a:noFill xmlns:a="http://schemas.openxmlformats.org/drawingml/2006/main"/>
-          <a:ln xmlns:a="http://schemas.openxmlformats.org/drawingml/2006/main" w="0">
-            <a:noFill/>
-            <a:prstDash val="solid"/>
-          </a:ln>
-        </p:spPr>
-        <p:txBody>
-          <a:bodyPr xmlns:a="http://schemas.openxmlformats.org/drawingml/2006/main" anchor="ctr">
-            <a:normAutofit fontScale="73913"/>
-          </a:bodyPr>
-          <a:lstStyle xmlns:a="http://schemas.openxmlformats.org/drawingml/2006/main"/>
-          <a:p xmlns:a="http://schemas.openxmlformats.org/drawingml/2006/main">
-            <a:pPr algn="l">
-              <a:buNone/>
-              <a:defRPr sz="1725" b="1">
-                <a:solidFill>
-                  <a:srgbClr val="111827"/>
-                </a:solidFill>
-                <a:latin typeface="PingFang SC"/>
-                <a:ea typeface="PingFang SC"/>
-                <a:cs typeface="PingFang SC"/>
-              </a:defRPr>
-            </a:pPr>
-            <a:r>
-              <a:rPr sz="1725" b="1">
-                <a:solidFill>
-                  <a:srgbClr val="111827"/>
-                </a:solidFill>
-                <a:latin typeface="PingFang SC"/>
-                <a:ea typeface="PingFang SC"/>
-                <a:cs typeface="PingFang SC"/>
-              </a:rPr>
-              <a:t>人工质检成本高，无法规模化</a:t>
-            </a:r>
-          </a:p>
-        </p:txBody>
-      </p:sp>
-      <p:sp>
-        <p:nvSpPr>
-          <p:cNvPr id="21" name="step-body-3">
-            <a:extLst xmlns:a="http://schemas.openxmlformats.org/drawingml/2006/main">
-              <a:ext uri="{FF2B5EF4-FFF2-40B4-BE49-F238E27FC236}">
-                <a16:creationId xmlns:a16="http://schemas.microsoft.com/office/drawing/2014/main" id="{A8E3E6EE-C136-46CD-9B40-5D5E42AF102B}"/>
-              </a:ext>
-            </a:extLst>
-          </p:cNvPr>
-          <p:cNvSpPr>
-            <a:spLocks xmlns:a="http://schemas.openxmlformats.org/drawingml/2006/main" noGrp="1"/>
-          </p:cNvSpPr>
-          <p:nvPr/>
-        </p:nvSpPr>
-        <p:spPr>
-          <a:xfrm xmlns:a="http://schemas.openxmlformats.org/drawingml/2006/main">
-            <a:off x="1028700" y="4019550"/>
-            <a:ext cx="10629900" cy="247650"/>
-          </a:xfrm>
-          <a:prstGeom xmlns:a="http://schemas.openxmlformats.org/drawingml/2006/main" prst="rect">
-            <a:avLst/>
-          </a:prstGeom>
-          <a:noFill xmlns:a="http://schemas.openxmlformats.org/drawingml/2006/main"/>
-          <a:ln xmlns:a="http://schemas.openxmlformats.org/drawingml/2006/main" w="0">
-            <a:noFill/>
-            <a:prstDash val="solid"/>
-          </a:ln>
-        </p:spPr>
-        <p:txBody>
-          <a:bodyPr xmlns:a="http://schemas.openxmlformats.org/drawingml/2006/main" anchor="ctr">
-            <a:normAutofit fontScale="85417"/>
-          </a:bodyPr>
-          <a:lstStyle xmlns:a="http://schemas.openxmlformats.org/drawingml/2006/main"/>
-          <a:p xmlns:a="http://schemas.openxmlformats.org/drawingml/2006/main">
-            <a:pPr algn="l">
-              <a:buNone/>
-              <a:defRPr sz="1200" b="0">
-                <a:solidFill>
-                  <a:srgbClr val="667085"/>
-                </a:solidFill>
-                <a:latin typeface="PingFang SC"/>
-                <a:ea typeface="PingFang SC"/>
-                <a:cs typeface="PingFang SC"/>
-              </a:defRPr>
-            </a:pPr>
-            <a:r>
-              <a:rPr sz="1200" b="0">
-                <a:solidFill>
-                  <a:srgbClr val="667085"/>
-                </a:solidFill>
-                <a:latin typeface="PingFang SC"/>
-                <a:ea typeface="PingFang SC"/>
-                <a:cs typeface="PingFang SC"/>
-              </a:rPr>
-              <a:t>人工抽听速度慢、标准不统一，无法覆盖大量通话，也跟不上模型快速迭代。</a:t>
-            </a:r>
-          </a:p>
-        </p:txBody>
-      </p:sp>
-      <p:sp>
-        <p:nvSpPr>
-          <p:cNvPr id="22" name="decision-note">
-            <a:extLst xmlns:a="http://schemas.openxmlformats.org/drawingml/2006/main">
-              <a:ext uri="{FF2B5EF4-FFF2-40B4-BE49-F238E27FC236}">
-                <a16:creationId xmlns:a16="http://schemas.microsoft.com/office/drawing/2014/main" id="{85B92780-0A54-4176-AE54-80AED4CD714D}"/>
-              </a:ext>
-            </a:extLst>
-          </p:cNvPr>
-          <p:cNvSpPr>
-            <a:spLocks xmlns:a="http://schemas.openxmlformats.org/drawingml/2006/main" noGrp="1"/>
-          </p:cNvSpPr>
-          <p:nvPr/>
-        </p:nvSpPr>
-        <p:spPr>
-          <a:xfrm xmlns:a="http://schemas.openxmlformats.org/drawingml/2006/main">
-            <a:off x="533400" y="5295900"/>
-            <a:ext cx="11125200" cy="304800"/>
-          </a:xfrm>
-          <a:prstGeom xmlns:a="http://schemas.openxmlformats.org/drawingml/2006/main" prst="rect">
-            <a:avLst/>
-          </a:prstGeom>
-          <a:noFill xmlns:a="http://schemas.openxmlformats.org/drawingml/2006/main"/>
-          <a:ln xmlns:a="http://schemas.openxmlformats.org/drawingml/2006/main" w="0">
-            <a:noFill/>
-            <a:prstDash val="solid"/>
-          </a:ln>
-        </p:spPr>
-        <p:txBody>
-          <a:bodyPr xmlns:a="http://schemas.openxmlformats.org/drawingml/2006/main" anchor="ctr">
-            <a:normAutofit fontScale="77778"/>
-          </a:bodyPr>
-          <a:lstStyle xmlns:a="http://schemas.openxmlformats.org/drawingml/2006/main"/>
-          <a:p xmlns:a="http://schemas.openxmlformats.org/drawingml/2006/main">
-            <a:pPr algn="l">
-              <a:buNone/>
-              <a:defRPr sz="1800" b="1">
-                <a:solidFill>
-                  <a:srgbClr val="111827"/>
-                </a:solidFill>
-                <a:latin typeface="PingFang SC"/>
-                <a:ea typeface="PingFang SC"/>
-                <a:cs typeface="PingFang SC"/>
-              </a:defRPr>
-            </a:pPr>
-            <a:r>
-              <a:rPr sz="1800" b="1">
-                <a:solidFill>
-                  <a:srgbClr val="111827"/>
-                </a:solidFill>
-                <a:latin typeface="PingFang SC"/>
-                <a:ea typeface="PingFang SC"/>
-                <a:cs typeface="PingFang SC"/>
-              </a:rPr>
-              <a:t>那该怎么解决呢？</a:t>
-            </a:r>
-          </a:p>
-        </p:txBody>
-      </p:sp>
-      <p:sp>
-        <p:nvSpPr>
-          <p:cNvPr id="23" name="source">
-            <a:extLst xmlns:a="http://schemas.openxmlformats.org/drawingml/2006/main">
-              <a:ext uri="{FF2B5EF4-FFF2-40B4-BE49-F238E27FC236}">
-                <a16:creationId xmlns:a16="http://schemas.microsoft.com/office/drawing/2014/main" id="{E648FF3C-1484-417E-9F5E-498A0B757CEE}"/>
-              </a:ext>
-            </a:extLst>
-          </p:cNvPr>
-          <p:cNvSpPr>
-            <a:spLocks xmlns:a="http://schemas.openxmlformats.org/drawingml/2006/main" noGrp="1"/>
-          </p:cNvSpPr>
-          <p:nvPr/>
-        </p:nvSpPr>
-        <p:spPr>
-          <a:xfrm xmlns:a="http://schemas.openxmlformats.org/drawingml/2006/main">
-            <a:off x="533400" y="5676900"/>
-            <a:ext cx="10572750" cy="476250"/>
-          </a:xfrm>
-          <a:prstGeom xmlns:a="http://schemas.openxmlformats.org/drawingml/2006/main" prst="rect">
-            <a:avLst/>
-          </a:prstGeom>
-          <a:noFill xmlns:a="http://schemas.openxmlformats.org/drawingml/2006/main"/>
-          <a:ln xmlns:a="http://schemas.openxmlformats.org/drawingml/2006/main" w="0">
-            <a:noFill/>
-            <a:prstDash val="solid"/>
-          </a:ln>
-        </p:spPr>
-        <p:txBody>
-          <a:bodyPr xmlns:a="http://schemas.openxmlformats.org/drawingml/2006/main" anchor="ctr">
+              <a:defRPr sz="2025" b="1">
+                <a:solidFill>
+                  <a:srgbClr val="C48800"/>
+                </a:solidFill>
+              </a:defRPr>
+            </a:pPr>
+            <a:r>
+              <a:rPr sz="2025" b="1">
+                <a:solidFill>
+                  <a:srgbClr val="C48800"/>
+                </a:solidFill>
+              </a:rPr>
+              <a:t>答案是：建立一套能够主动测试、统一判断、准确归因并持续回归的自动评测流程。</a:t>
+            </a:r>
+          </a:p>
+        </p:txBody>
+      </p:sp>
+      <p:sp>
+        <p:nvSpPr>
+          <p:cNvPr id="47" name="answer-underline">
+            <a:extLst xmlns:a="http://schemas.openxmlformats.org/drawingml/2006/main">
+              <a:ext uri="{FF2B5EF4-FFF2-40B4-BE49-F238E27FC236}">
+                <a16:creationId xmlns:a16="http://schemas.microsoft.com/office/drawing/2014/main" id="{14E5AB82-30BB-4AC3-9FB5-4404062AA461}"/>
+              </a:ext>
+            </a:extLst>
+          </p:cNvPr>
+          <p:cNvSpPr>
+            <a:spLocks xmlns:a="http://schemas.openxmlformats.org/drawingml/2006/main" noGrp="1"/>
+          </p:cNvSpPr>
+          <p:nvPr/>
+        </p:nvSpPr>
+        <p:spPr>
+          <a:xfrm xmlns:a="http://schemas.openxmlformats.org/drawingml/2006/main">
+            <a:off x="781050" y="5838825"/>
+            <a:ext cx="6096000" cy="47625"/>
+          </a:xfrm>
+          <a:prstGeom xmlns:a="http://schemas.openxmlformats.org/drawingml/2006/main" prst="roundRect">
+            <a:avLst>
+              <a:gd name="adj" fmla="val 50000"/>
+            </a:avLst>
+          </a:prstGeom>
+          <a:solidFill xmlns:a="http://schemas.openxmlformats.org/drawingml/2006/main">
+            <a:srgbClr val="FFC300"/>
+          </a:solidFill>
+          <a:ln xmlns:a="http://schemas.openxmlformats.org/drawingml/2006/main" w="0">
+            <a:noFill/>
+            <a:prstDash val="solid"/>
+          </a:ln>
+        </p:spPr>
+      </p:sp>
+      <p:sp>
+        <p:nvSpPr>
+          <p:cNvPr id="48" name="page">
+            <a:extLst xmlns:a="http://schemas.openxmlformats.org/drawingml/2006/main">
+              <a:ext uri="{FF2B5EF4-FFF2-40B4-BE49-F238E27FC236}">
+                <a16:creationId xmlns:a16="http://schemas.microsoft.com/office/drawing/2014/main" id="{74E667C8-970F-494D-9C4A-8D9A98312918}"/>
+              </a:ext>
+            </a:extLst>
+          </p:cNvPr>
+          <p:cNvSpPr>
+            <a:spLocks xmlns:a="http://schemas.openxmlformats.org/drawingml/2006/main" noGrp="1"/>
+          </p:cNvSpPr>
+          <p:nvPr/>
+        </p:nvSpPr>
+        <p:spPr>
+          <a:xfrm xmlns:a="http://schemas.openxmlformats.org/drawingml/2006/main">
+            <a:off x="11144250" y="6419850"/>
+            <a:ext cx="514350" cy="190500"/>
+          </a:xfrm>
+          <a:prstGeom xmlns:a="http://schemas.openxmlformats.org/drawingml/2006/main" prst="rect">
+            <a:avLst/>
+          </a:prstGeom>
+          <a:noFill xmlns:a="http://schemas.openxmlformats.org/drawingml/2006/main"/>
+          <a:ln xmlns:a="http://schemas.openxmlformats.org/drawingml/2006/main" w="0">
+            <a:noFill/>
+            <a:prstDash val="solid"/>
+          </a:ln>
+        </p:spPr>
+        <p:txBody>
+          <a:bodyPr xmlns:a="http://schemas.openxmlformats.org/drawingml/2006/main" wrap="square" lIns="0" tIns="0" rIns="0" bIns="0" anchor="ctr">
             <a:normAutofit fontScale="100000"/>
           </a:bodyPr>
           <a:lstStyle xmlns:a="http://schemas.openxmlformats.org/drawingml/2006/main"/>
           <a:p xmlns:a="http://schemas.openxmlformats.org/drawingml/2006/main">
-            <a:pPr algn="l">
-              <a:buNone/>
-              <a:defRPr sz="1500" b="1">
-                <a:solidFill>
-                  <a:srgbClr val="B58100"/>
-                </a:solidFill>
-                <a:latin typeface="PingFang SC"/>
-                <a:ea typeface="PingFang SC"/>
-                <a:cs typeface="PingFang SC"/>
-              </a:defRPr>
-            </a:pPr>
-            <a:r>
-              <a:rPr sz="1500" b="1">
-                <a:solidFill>
-                  <a:srgbClr val="B58100"/>
-                </a:solidFill>
-                <a:latin typeface="PingFang SC"/>
-                <a:ea typeface="PingFang SC"/>
-                <a:cs typeface="PingFang SC"/>
-              </a:rPr>
-              <a:t>答案是：建立一套能够主动测试、统一判断、准确归因并持续回归的自动评测流程。</a:t>
-            </a:r>
-          </a:p>
-        </p:txBody>
-      </p:sp>
-      <p:sp>
-        <p:nvSpPr>
-          <p:cNvPr id="30" name="step-n-6">
-            <a:extLst xmlns:a="http://schemas.openxmlformats.org/drawingml/2006/main">
-              <a:ext uri="{FF2B5EF4-FFF2-40B4-BE49-F238E27FC236}">
-                <a16:creationId xmlns:a16="http://schemas.microsoft.com/office/drawing/2014/main" id="{0AF895B3-0C7D-4F4A-AD53-77115BEBA63A}"/>
-              </a:ext>
-            </a:extLst>
-          </p:cNvPr>
-          <p:cNvSpPr>
-            <a:spLocks xmlns:a="http://schemas.openxmlformats.org/drawingml/2006/main" noGrp="1"/>
-          </p:cNvSpPr>
-          <p:nvPr/>
-        </p:nvSpPr>
-        <p:spPr>
-          <a:xfrm xmlns:a="http://schemas.openxmlformats.org/drawingml/2006/main">
-            <a:off x="533400" y="4429125"/>
-            <a:ext cx="381000" cy="323850"/>
-          </a:xfrm>
-          <a:prstGeom xmlns:a="http://schemas.openxmlformats.org/drawingml/2006/main" prst="rect">
-            <a:avLst/>
-          </a:prstGeom>
-          <a:noFill xmlns:a="http://schemas.openxmlformats.org/drawingml/2006/main"/>
-          <a:ln xmlns:a="http://schemas.openxmlformats.org/drawingml/2006/main" w="0">
-            <a:noFill/>
-            <a:prstDash val="solid"/>
-          </a:ln>
-        </p:spPr>
-        <p:txBody>
-          <a:bodyPr xmlns:a="http://schemas.openxmlformats.org/drawingml/2006/main" anchor="ctr"/>
-          <a:lstStyle xmlns:a="http://schemas.openxmlformats.org/drawingml/2006/main"/>
-          <a:p xmlns:a="http://schemas.openxmlformats.org/drawingml/2006/main">
-            <a:pPr algn="l">
-              <a:buNone/>
-              <a:defRPr sz="1500" b="1">
-                <a:solidFill>
-                  <a:srgbClr val="111827"/>
-                </a:solidFill>
-                <a:latin typeface="PingFang SC"/>
-                <a:ea typeface="PingFang SC"/>
-                <a:cs typeface="PingFang SC"/>
-              </a:defRPr>
-            </a:pPr>
-            <a:r>
-              <a:rPr sz="1500" b="1">
-                <a:solidFill>
-                  <a:srgbClr val="111827"/>
-                </a:solidFill>
-                <a:latin typeface="PingFang SC"/>
-                <a:ea typeface="PingFang SC"/>
-                <a:cs typeface="PingFang SC"/>
-              </a:rPr>
-              <a:t>5.</a:t>
-            </a:r>
-          </a:p>
-        </p:txBody>
-      </p:sp>
-      <p:sp>
-        <p:nvSpPr>
-          <p:cNvPr id="31" name="step-title-6">
-            <a:extLst xmlns:a="http://schemas.openxmlformats.org/drawingml/2006/main">
-              <a:ext uri="{FF2B5EF4-FFF2-40B4-BE49-F238E27FC236}">
-                <a16:creationId xmlns:a16="http://schemas.microsoft.com/office/drawing/2014/main" id="{52A093D1-21A9-4D21-AA78-5E4C7BFEB39C}"/>
-              </a:ext>
-            </a:extLst>
-          </p:cNvPr>
-          <p:cNvSpPr>
-            <a:spLocks xmlns:a="http://schemas.openxmlformats.org/drawingml/2006/main" noGrp="1"/>
-          </p:cNvSpPr>
-          <p:nvPr/>
-        </p:nvSpPr>
-        <p:spPr>
-          <a:xfrm xmlns:a="http://schemas.openxmlformats.org/drawingml/2006/main">
-            <a:off x="1028700" y="4419600"/>
-            <a:ext cx="10629900" cy="285750"/>
-          </a:xfrm>
-          <a:prstGeom xmlns:a="http://schemas.openxmlformats.org/drawingml/2006/main" prst="rect">
-            <a:avLst/>
-          </a:prstGeom>
-          <a:noFill xmlns:a="http://schemas.openxmlformats.org/drawingml/2006/main"/>
-          <a:ln xmlns:a="http://schemas.openxmlformats.org/drawingml/2006/main" w="0">
-            <a:noFill/>
-            <a:prstDash val="solid"/>
-          </a:ln>
-        </p:spPr>
-        <p:txBody>
-          <a:bodyPr xmlns:a="http://schemas.openxmlformats.org/drawingml/2006/main" anchor="ctr"/>
-          <a:lstStyle xmlns:a="http://schemas.openxmlformats.org/drawingml/2006/main"/>
-          <a:p xmlns:a="http://schemas.openxmlformats.org/drawingml/2006/main">
-            <a:pPr algn="l">
-              <a:buNone/>
-              <a:defRPr sz="1725" b="1">
-                <a:solidFill>
-                  <a:srgbClr val="111827"/>
-                </a:solidFill>
-                <a:latin typeface="PingFang SC"/>
-                <a:ea typeface="PingFang SC"/>
-                <a:cs typeface="PingFang SC"/>
-              </a:defRPr>
-            </a:pPr>
-            <a:r>
-              <a:rPr sz="1725" b="1">
-                <a:solidFill>
-                  <a:srgbClr val="111827"/>
-                </a:solidFill>
-                <a:latin typeface="PingFang SC"/>
-                <a:ea typeface="PingFang SC"/>
-                <a:cs typeface="PingFang SC"/>
-              </a:rPr>
-              <a:t>出错后无法正确归因</a:t>
-            </a:r>
-          </a:p>
-        </p:txBody>
-      </p:sp>
-      <p:sp>
-        <p:nvSpPr>
-          <p:cNvPr id="32" name="step-body-6">
-            <a:extLst xmlns:a="http://schemas.openxmlformats.org/drawingml/2006/main">
-              <a:ext uri="{FF2B5EF4-FFF2-40B4-BE49-F238E27FC236}">
-                <a16:creationId xmlns:a16="http://schemas.microsoft.com/office/drawing/2014/main" id="{230A79F8-88BC-4067-BD59-AED39F7BAC2D}"/>
-              </a:ext>
-            </a:extLst>
-          </p:cNvPr>
-          <p:cNvSpPr>
-            <a:spLocks xmlns:a="http://schemas.openxmlformats.org/drawingml/2006/main" noGrp="1"/>
-          </p:cNvSpPr>
-          <p:nvPr/>
-        </p:nvSpPr>
-        <p:spPr>
-          <a:xfrm xmlns:a="http://schemas.openxmlformats.org/drawingml/2006/main">
-            <a:off x="1028700" y="4705350"/>
-            <a:ext cx="10629900" cy="247650"/>
-          </a:xfrm>
-          <a:prstGeom xmlns:a="http://schemas.openxmlformats.org/drawingml/2006/main" prst="rect">
-            <a:avLst/>
-          </a:prstGeom>
-          <a:noFill xmlns:a="http://schemas.openxmlformats.org/drawingml/2006/main"/>
-          <a:ln xmlns:a="http://schemas.openxmlformats.org/drawingml/2006/main" w="0">
-            <a:noFill/>
-            <a:prstDash val="solid"/>
-          </a:ln>
-        </p:spPr>
-        <p:txBody>
-          <a:bodyPr xmlns:a="http://schemas.openxmlformats.org/drawingml/2006/main" anchor="ctr"/>
-          <a:lstStyle xmlns:a="http://schemas.openxmlformats.org/drawingml/2006/main"/>
-          <a:p xmlns:a="http://schemas.openxmlformats.org/drawingml/2006/main">
-            <a:pPr algn="l">
-              <a:buNone/>
-              <a:defRPr sz="1200" b="0">
-                <a:solidFill>
-                  <a:srgbClr val="667085"/>
-                </a:solidFill>
-                <a:latin typeface="PingFang SC"/>
-                <a:ea typeface="PingFang SC"/>
-                <a:cs typeface="PingFang SC"/>
-              </a:defRPr>
-            </a:pPr>
-            <a:r>
-              <a:rPr sz="1200" b="0">
-                <a:solidFill>
-                  <a:srgbClr val="667085"/>
-                </a:solidFill>
-                <a:latin typeface="PingFang SC"/>
-                <a:ea typeface="PingFang SC"/>
-                <a:cs typeface="PingFang SC"/>
-              </a:rPr>
-              <a:t>低分可能来自模型、SOP、裁判或测试数据；归因错误，就会修改错误的对象。</a:t>
+            <a:pPr algn="r">
+              <a:defRPr sz="750" b="0">
+                <a:solidFill>
+                  <a:srgbClr val="6E7A90"/>
+                </a:solidFill>
+              </a:defRPr>
+            </a:pPr>
+            <a:r>
+              <a:rPr sz="750" b="0">
+                <a:solidFill>
+                  <a:srgbClr val="6E7A90"/>
+                </a:solidFill>
+              </a:rPr>
+              <a:t>02</a:t>
             </a:r>
           </a:p>
         </p:txBody>
@@ -4723,7 +5525,7 @@
                 <a:latin typeface="PingFang SC"/>
                 <a:ea typeface="PingFang SC"/>
                 <a:cs typeface="PingFang SC"/>
-                <a:hlinkClick xmlns:r="http://schemas.openxmlformats.org/officeDocument/2006/relationships" r:id="Rbf53a11361bc4743"/>
+                <a:hlinkClick xmlns:r="http://schemas.openxmlformats.org/officeDocument/2006/relationships" r:id="R3352234bac2c4730"/>
               </a:rPr>
               <a:t>▶ 在线 Demo</a:t>
             </a:r>
@@ -4775,7 +5577,7 @@
                 <a:latin typeface="PingFang SC"/>
                 <a:ea typeface="PingFang SC"/>
                 <a:cs typeface="PingFang SC"/>
-                <a:hlinkClick xmlns:r="http://schemas.openxmlformats.org/officeDocument/2006/relationships" r:id="R845140f19b9d4ca1"/>
+                <a:hlinkClick xmlns:r="http://schemas.openxmlformats.org/officeDocument/2006/relationships" r:id="Re1b8640b4fd648ce"/>
               </a:rPr>
               <a:t>结果备份 ↗</a:t>
             </a:r>
@@ -5021,478 +5823,6 @@
       </p:sp>
       <p:sp>
         <p:nvSpPr>
-          <p:cNvPr id="5" name="decision">
-            <a:extLst xmlns:a="http://schemas.openxmlformats.org/drawingml/2006/main">
-              <a:ext uri="{FF2B5EF4-FFF2-40B4-BE49-F238E27FC236}">
-                <a16:creationId xmlns:a16="http://schemas.microsoft.com/office/drawing/2014/main" id="{B0CE3BC9-D8B1-4041-B5E5-CD8D93B3556B}"/>
-              </a:ext>
-            </a:extLst>
-          </p:cNvPr>
-          <p:cNvSpPr>
-            <a:spLocks xmlns:a="http://schemas.openxmlformats.org/drawingml/2006/main" noGrp="1"/>
-          </p:cNvSpPr>
-          <p:nvPr/>
-        </p:nvSpPr>
-        <p:spPr>
-          <a:xfrm xmlns:a="http://schemas.openxmlformats.org/drawingml/2006/main">
-            <a:off x="533400" y="1866900"/>
-            <a:ext cx="4000500" cy="857250"/>
-          </a:xfrm>
-          <a:prstGeom xmlns:a="http://schemas.openxmlformats.org/drawingml/2006/main" prst="rect">
-            <a:avLst/>
-          </a:prstGeom>
-          <a:noFill xmlns:a="http://schemas.openxmlformats.org/drawingml/2006/main"/>
-          <a:ln xmlns:a="http://schemas.openxmlformats.org/drawingml/2006/main" w="0">
-            <a:noFill/>
-            <a:prstDash val="solid"/>
-          </a:ln>
-        </p:spPr>
-        <p:txBody>
-          <a:bodyPr xmlns:a="http://schemas.openxmlformats.org/drawingml/2006/main" anchor="t">
-            <a:normAutofit fontScale="100000"/>
-          </a:bodyPr>
-          <a:lstStyle xmlns:a="http://schemas.openxmlformats.org/drawingml/2006/main"/>
-          <a:p xmlns:a="http://schemas.openxmlformats.org/drawingml/2006/main">
-            <a:pPr algn="l">
-              <a:buNone/>
-              <a:defRPr sz="2400" b="1">
-                <a:solidFill>
-                  <a:srgbClr val="111827"/>
-                </a:solidFill>
-                <a:latin typeface="PingFang SC"/>
-                <a:ea typeface="PingFang SC"/>
-                <a:cs typeface="PingFang SC"/>
-              </a:defRPr>
-            </a:pPr>
-            <a:r>
-              <a:rPr sz="2400" b="1">
-                <a:solidFill>
-                  <a:srgbClr val="111827"/>
-                </a:solidFill>
-                <a:latin typeface="PingFang SC"/>
-                <a:ea typeface="PingFang SC"/>
-                <a:cs typeface="PingFang SC"/>
-              </a:rPr>
-              <a:t>先冻结变量，再评价模型</a:t>
-            </a:r>
-          </a:p>
-        </p:txBody>
-      </p:sp>
-      <p:sp>
-        <p:nvSpPr>
-          <p:cNvPr id="6" name="decision-sub">
-            <a:extLst xmlns:a="http://schemas.openxmlformats.org/drawingml/2006/main">
-              <a:ext uri="{FF2B5EF4-FFF2-40B4-BE49-F238E27FC236}">
-                <a16:creationId xmlns:a16="http://schemas.microsoft.com/office/drawing/2014/main" id="{C81463E1-CB7C-4B7A-8684-388032501444}"/>
-              </a:ext>
-            </a:extLst>
-          </p:cNvPr>
-          <p:cNvSpPr>
-            <a:spLocks xmlns:a="http://schemas.openxmlformats.org/drawingml/2006/main" noGrp="1"/>
-          </p:cNvSpPr>
-          <p:nvPr/>
-        </p:nvSpPr>
-        <p:spPr>
-          <a:xfrm xmlns:a="http://schemas.openxmlformats.org/drawingml/2006/main">
-            <a:off x="552450" y="2781300"/>
-            <a:ext cx="4476750" cy="323850"/>
-          </a:xfrm>
-          <a:prstGeom xmlns:a="http://schemas.openxmlformats.org/drawingml/2006/main" prst="rect">
-            <a:avLst/>
-          </a:prstGeom>
-          <a:noFill xmlns:a="http://schemas.openxmlformats.org/drawingml/2006/main"/>
-          <a:ln xmlns:a="http://schemas.openxmlformats.org/drawingml/2006/main" w="0">
-            <a:noFill/>
-            <a:prstDash val="solid"/>
-          </a:ln>
-        </p:spPr>
-        <p:txBody>
-          <a:bodyPr xmlns:a="http://schemas.openxmlformats.org/drawingml/2006/main" anchor="t">
-            <a:normAutofit fontScale="89797"/>
-          </a:bodyPr>
-          <a:lstStyle xmlns:a="http://schemas.openxmlformats.org/drawingml/2006/main"/>
-          <a:p xmlns:a="http://schemas.openxmlformats.org/drawingml/2006/main">
-            <a:pPr algn="l">
-              <a:buNone/>
-              <a:defRPr sz="1200" b="0">
-                <a:solidFill>
-                  <a:srgbClr val="667085"/>
-                </a:solidFill>
-                <a:latin typeface="PingFang SC"/>
-                <a:ea typeface="PingFang SC"/>
-                <a:cs typeface="PingFang SC"/>
-              </a:defRPr>
-            </a:pPr>
-            <a:r>
-              <a:rPr sz="1200" b="0">
-                <a:solidFill>
-                  <a:srgbClr val="667085"/>
-                </a:solidFill>
-                <a:latin typeface="PingFang SC"/>
-                <a:ea typeface="PingFang SC"/>
-                <a:cs typeface="PingFang SC"/>
-              </a:rPr>
-              <a:t>不做这一步：用户、SOP 或模型版本一变，任何好坏对比都失去意义。</a:t>
-            </a:r>
-          </a:p>
-        </p:txBody>
-      </p:sp>
-      <p:sp>
-        <p:nvSpPr>
-          <p:cNvPr id="7" name="stat-0">
-            <a:extLst xmlns:a="http://schemas.openxmlformats.org/drawingml/2006/main">
-              <a:ext uri="{FF2B5EF4-FFF2-40B4-BE49-F238E27FC236}">
-                <a16:creationId xmlns:a16="http://schemas.microsoft.com/office/drawing/2014/main" id="{A64EB69F-1AD3-45AE-93F6-D916A936F061}"/>
-              </a:ext>
-            </a:extLst>
-          </p:cNvPr>
-          <p:cNvSpPr>
-            <a:spLocks xmlns:a="http://schemas.openxmlformats.org/drawingml/2006/main" noGrp="1"/>
-          </p:cNvSpPr>
-          <p:nvPr/>
-        </p:nvSpPr>
-        <p:spPr>
-          <a:xfrm xmlns:a="http://schemas.openxmlformats.org/drawingml/2006/main">
-            <a:off x="533400" y="3581400"/>
-            <a:ext cx="1352550" cy="666750"/>
-          </a:xfrm>
-          <a:prstGeom xmlns:a="http://schemas.openxmlformats.org/drawingml/2006/main" prst="rect">
-            <a:avLst/>
-          </a:prstGeom>
-          <a:noFill xmlns:a="http://schemas.openxmlformats.org/drawingml/2006/main"/>
-          <a:ln xmlns:a="http://schemas.openxmlformats.org/drawingml/2006/main" w="0">
-            <a:noFill/>
-            <a:prstDash val="solid"/>
-          </a:ln>
-        </p:spPr>
-        <p:txBody>
-          <a:bodyPr xmlns:a="http://schemas.openxmlformats.org/drawingml/2006/main" anchor="t">
-            <a:normAutofit fontScale="69767"/>
-          </a:bodyPr>
-          <a:lstStyle xmlns:a="http://schemas.openxmlformats.org/drawingml/2006/main"/>
-          <a:p xmlns:a="http://schemas.openxmlformats.org/drawingml/2006/main">
-            <a:pPr algn="l">
-              <a:buNone/>
-              <a:defRPr sz="3300" b="1">
-                <a:solidFill>
-                  <a:srgbClr val="111827"/>
-                </a:solidFill>
-                <a:latin typeface="PingFang SC"/>
-                <a:ea typeface="PingFang SC"/>
-                <a:cs typeface="PingFang SC"/>
-              </a:defRPr>
-            </a:pPr>
-            <a:r>
-              <a:rPr sz="3300" b="1">
-                <a:solidFill>
-                  <a:srgbClr val="111827"/>
-                </a:solidFill>
-                <a:latin typeface="PingFang SC"/>
-                <a:ea typeface="PingFang SC"/>
-                <a:cs typeface="PingFang SC"/>
-              </a:rPr>
-              <a:t>双轨输入</a:t>
-            </a:r>
-          </a:p>
-        </p:txBody>
-      </p:sp>
-      <p:sp>
-        <p:nvSpPr>
-          <p:cNvPr id="8" name="stat-label-0">
-            <a:extLst xmlns:a="http://schemas.openxmlformats.org/drawingml/2006/main">
-              <a:ext uri="{FF2B5EF4-FFF2-40B4-BE49-F238E27FC236}">
-                <a16:creationId xmlns:a16="http://schemas.microsoft.com/office/drawing/2014/main" id="{7261F069-84D1-4836-A1CB-0A3A5D5C44E7}"/>
-              </a:ext>
-            </a:extLst>
-          </p:cNvPr>
-          <p:cNvSpPr>
-            <a:spLocks xmlns:a="http://schemas.openxmlformats.org/drawingml/2006/main" noGrp="1"/>
-          </p:cNvSpPr>
-          <p:nvPr/>
-        </p:nvSpPr>
-        <p:spPr>
-          <a:xfrm xmlns:a="http://schemas.openxmlformats.org/drawingml/2006/main">
-            <a:off x="533400" y="4286250"/>
-            <a:ext cx="1352550" cy="266700"/>
-          </a:xfrm>
-          <a:prstGeom xmlns:a="http://schemas.openxmlformats.org/drawingml/2006/main" prst="rect">
-            <a:avLst/>
-          </a:prstGeom>
-          <a:noFill xmlns:a="http://schemas.openxmlformats.org/drawingml/2006/main"/>
-          <a:ln xmlns:a="http://schemas.openxmlformats.org/drawingml/2006/main" w="0">
-            <a:noFill/>
-            <a:prstDash val="solid"/>
-          </a:ln>
-        </p:spPr>
-        <p:txBody>
-          <a:bodyPr xmlns:a="http://schemas.openxmlformats.org/drawingml/2006/main" anchor="t">
-            <a:normAutofit fontScale="100000"/>
-          </a:bodyPr>
-          <a:lstStyle xmlns:a="http://schemas.openxmlformats.org/drawingml/2006/main"/>
-          <a:p xmlns:a="http://schemas.openxmlformats.org/drawingml/2006/main">
-            <a:pPr algn="l">
-              <a:buNone/>
-              <a:defRPr sz="975" b="0">
-                <a:solidFill>
-                  <a:srgbClr val="667085"/>
-                </a:solidFill>
-                <a:latin typeface="PingFang SC"/>
-                <a:ea typeface="PingFang SC"/>
-                <a:cs typeface="PingFang SC"/>
-              </a:defRPr>
-            </a:pPr>
-            <a:r>
-              <a:rPr sz="975" b="0">
-                <a:solidFill>
-                  <a:srgbClr val="667085"/>
-                </a:solidFill>
-                <a:latin typeface="PingFang SC"/>
-                <a:ea typeface="PingFang SC"/>
-                <a:cs typeface="PingFang SC"/>
-              </a:rPr>
-              <a:t>模拟 / 日志</a:t>
-            </a:r>
-          </a:p>
-        </p:txBody>
-      </p:sp>
-      <p:sp>
-        <p:nvSpPr>
-          <p:cNvPr id="9" name="stat-1">
-            <a:extLst xmlns:a="http://schemas.openxmlformats.org/drawingml/2006/main">
-              <a:ext uri="{FF2B5EF4-FFF2-40B4-BE49-F238E27FC236}">
-                <a16:creationId xmlns:a16="http://schemas.microsoft.com/office/drawing/2014/main" id="{C2588DEE-1FC2-4818-B044-00FEF0E24E2D}"/>
-              </a:ext>
-            </a:extLst>
-          </p:cNvPr>
-          <p:cNvSpPr>
-            <a:spLocks xmlns:a="http://schemas.openxmlformats.org/drawingml/2006/main" noGrp="1"/>
-          </p:cNvSpPr>
-          <p:nvPr/>
-        </p:nvSpPr>
-        <p:spPr>
-          <a:xfrm xmlns:a="http://schemas.openxmlformats.org/drawingml/2006/main">
-            <a:off x="2171700" y="3581400"/>
-            <a:ext cx="1352550" cy="666750"/>
-          </a:xfrm>
-          <a:prstGeom xmlns:a="http://schemas.openxmlformats.org/drawingml/2006/main" prst="rect">
-            <a:avLst/>
-          </a:prstGeom>
-          <a:noFill xmlns:a="http://schemas.openxmlformats.org/drawingml/2006/main"/>
-          <a:ln xmlns:a="http://schemas.openxmlformats.org/drawingml/2006/main" w="0">
-            <a:noFill/>
-            <a:prstDash val="solid"/>
-          </a:ln>
-        </p:spPr>
-        <p:txBody>
-          <a:bodyPr xmlns:a="http://schemas.openxmlformats.org/drawingml/2006/main" anchor="t">
-            <a:normAutofit fontScale="69767"/>
-          </a:bodyPr>
-          <a:lstStyle xmlns:a="http://schemas.openxmlformats.org/drawingml/2006/main"/>
-          <a:p xmlns:a="http://schemas.openxmlformats.org/drawingml/2006/main">
-            <a:pPr algn="l">
-              <a:buNone/>
-              <a:defRPr sz="3300" b="1">
-                <a:solidFill>
-                  <a:srgbClr val="111827"/>
-                </a:solidFill>
-                <a:latin typeface="PingFang SC"/>
-                <a:ea typeface="PingFang SC"/>
-                <a:cs typeface="PingFang SC"/>
-              </a:defRPr>
-            </a:pPr>
-            <a:r>
-              <a:rPr sz="3300" b="1">
-                <a:solidFill>
-                  <a:srgbClr val="111827"/>
-                </a:solidFill>
-                <a:latin typeface="PingFang SC"/>
-                <a:ea typeface="PingFang SC"/>
-                <a:cs typeface="PingFang SC"/>
-              </a:rPr>
-              <a:t>版本冻结</a:t>
-            </a:r>
-          </a:p>
-        </p:txBody>
-      </p:sp>
-      <p:sp>
-        <p:nvSpPr>
-          <p:cNvPr id="10" name="stat-label-1">
-            <a:extLst xmlns:a="http://schemas.openxmlformats.org/drawingml/2006/main">
-              <a:ext uri="{FF2B5EF4-FFF2-40B4-BE49-F238E27FC236}">
-                <a16:creationId xmlns:a16="http://schemas.microsoft.com/office/drawing/2014/main" id="{F2DA5F17-C3CD-4B4D-96F7-5057D5458574}"/>
-              </a:ext>
-            </a:extLst>
-          </p:cNvPr>
-          <p:cNvSpPr>
-            <a:spLocks xmlns:a="http://schemas.openxmlformats.org/drawingml/2006/main" noGrp="1"/>
-          </p:cNvSpPr>
-          <p:nvPr/>
-        </p:nvSpPr>
-        <p:spPr>
-          <a:xfrm xmlns:a="http://schemas.openxmlformats.org/drawingml/2006/main">
-            <a:off x="2171700" y="4286250"/>
-            <a:ext cx="1352550" cy="266700"/>
-          </a:xfrm>
-          <a:prstGeom xmlns:a="http://schemas.openxmlformats.org/drawingml/2006/main" prst="rect">
-            <a:avLst/>
-          </a:prstGeom>
-          <a:noFill xmlns:a="http://schemas.openxmlformats.org/drawingml/2006/main"/>
-          <a:ln xmlns:a="http://schemas.openxmlformats.org/drawingml/2006/main" w="0">
-            <a:noFill/>
-            <a:prstDash val="solid"/>
-          </a:ln>
-        </p:spPr>
-        <p:txBody>
-          <a:bodyPr xmlns:a="http://schemas.openxmlformats.org/drawingml/2006/main" anchor="t">
-            <a:normAutofit fontScale="100000"/>
-          </a:bodyPr>
-          <a:lstStyle xmlns:a="http://schemas.openxmlformats.org/drawingml/2006/main"/>
-          <a:p xmlns:a="http://schemas.openxmlformats.org/drawingml/2006/main">
-            <a:pPr algn="l">
-              <a:buNone/>
-              <a:defRPr sz="975" b="0">
-                <a:solidFill>
-                  <a:srgbClr val="667085"/>
-                </a:solidFill>
-                <a:latin typeface="PingFang SC"/>
-                <a:ea typeface="PingFang SC"/>
-                <a:cs typeface="PingFang SC"/>
-              </a:defRPr>
-            </a:pPr>
-            <a:r>
-              <a:rPr sz="975" b="0">
-                <a:solidFill>
-                  <a:srgbClr val="667085"/>
-                </a:solidFill>
-                <a:latin typeface="PingFang SC"/>
-                <a:ea typeface="PingFang SC"/>
-                <a:cs typeface="PingFang SC"/>
-              </a:rPr>
-              <a:t>SOP·模型·用户</a:t>
-            </a:r>
-          </a:p>
-        </p:txBody>
-      </p:sp>
-      <p:sp>
-        <p:nvSpPr>
-          <p:cNvPr id="11" name="stat-2">
-            <a:extLst xmlns:a="http://schemas.openxmlformats.org/drawingml/2006/main">
-              <a:ext uri="{FF2B5EF4-FFF2-40B4-BE49-F238E27FC236}">
-                <a16:creationId xmlns:a16="http://schemas.microsoft.com/office/drawing/2014/main" id="{A2568244-186A-4F43-AECE-BB8E99D7ECA7}"/>
-              </a:ext>
-            </a:extLst>
-          </p:cNvPr>
-          <p:cNvSpPr>
-            <a:spLocks xmlns:a="http://schemas.openxmlformats.org/drawingml/2006/main" noGrp="1"/>
-          </p:cNvSpPr>
-          <p:nvPr/>
-        </p:nvSpPr>
-        <p:spPr>
-          <a:xfrm xmlns:a="http://schemas.openxmlformats.org/drawingml/2006/main">
-            <a:off x="3810000" y="3581400"/>
-            <a:ext cx="1352550" cy="666750"/>
-          </a:xfrm>
-          <a:prstGeom xmlns:a="http://schemas.openxmlformats.org/drawingml/2006/main" prst="rect">
-            <a:avLst/>
-          </a:prstGeom>
-          <a:noFill xmlns:a="http://schemas.openxmlformats.org/drawingml/2006/main"/>
-          <a:ln xmlns:a="http://schemas.openxmlformats.org/drawingml/2006/main" w="0">
-            <a:noFill/>
-            <a:prstDash val="solid"/>
-          </a:ln>
-        </p:spPr>
-        <p:txBody>
-          <a:bodyPr xmlns:a="http://schemas.openxmlformats.org/drawingml/2006/main" anchor="t">
-            <a:normAutofit fontScale="69767"/>
-          </a:bodyPr>
-          <a:lstStyle xmlns:a="http://schemas.openxmlformats.org/drawingml/2006/main"/>
-          <a:p xmlns:a="http://schemas.openxmlformats.org/drawingml/2006/main">
-            <a:pPr algn="l">
-              <a:buNone/>
-              <a:defRPr sz="3300" b="1">
-                <a:solidFill>
-                  <a:srgbClr val="111827"/>
-                </a:solidFill>
-                <a:latin typeface="PingFang SC"/>
-                <a:ea typeface="PingFang SC"/>
-                <a:cs typeface="PingFang SC"/>
-              </a:defRPr>
-            </a:pPr>
-            <a:r>
-              <a:rPr sz="3300" b="1">
-                <a:solidFill>
-                  <a:srgbClr val="111827"/>
-                </a:solidFill>
-                <a:latin typeface="PingFang SC"/>
-                <a:ea typeface="PingFang SC"/>
-                <a:cs typeface="PingFang SC"/>
-              </a:rPr>
-              <a:t>同批贯穿</a:t>
-            </a:r>
-          </a:p>
-        </p:txBody>
-      </p:sp>
-      <p:sp>
-        <p:nvSpPr>
-          <p:cNvPr id="12" name="stat-label-2">
-            <a:extLst xmlns:a="http://schemas.openxmlformats.org/drawingml/2006/main">
-              <a:ext uri="{FF2B5EF4-FFF2-40B4-BE49-F238E27FC236}">
-                <a16:creationId xmlns:a16="http://schemas.microsoft.com/office/drawing/2014/main" id="{46EB030E-F492-46E3-8C5B-6A223CBEDFAD}"/>
-              </a:ext>
-            </a:extLst>
-          </p:cNvPr>
-          <p:cNvSpPr>
-            <a:spLocks xmlns:a="http://schemas.openxmlformats.org/drawingml/2006/main" noGrp="1"/>
-          </p:cNvSpPr>
-          <p:nvPr/>
-        </p:nvSpPr>
-        <p:spPr>
-          <a:xfrm xmlns:a="http://schemas.openxmlformats.org/drawingml/2006/main">
-            <a:off x="3810000" y="4286250"/>
-            <a:ext cx="1352550" cy="266700"/>
-          </a:xfrm>
-          <a:prstGeom xmlns:a="http://schemas.openxmlformats.org/drawingml/2006/main" prst="rect">
-            <a:avLst/>
-          </a:prstGeom>
-          <a:noFill xmlns:a="http://schemas.openxmlformats.org/drawingml/2006/main"/>
-          <a:ln xmlns:a="http://schemas.openxmlformats.org/drawingml/2006/main" w="0">
-            <a:noFill/>
-            <a:prstDash val="solid"/>
-          </a:ln>
-        </p:spPr>
-        <p:txBody>
-          <a:bodyPr xmlns:a="http://schemas.openxmlformats.org/drawingml/2006/main" anchor="t">
-            <a:normAutofit fontScale="100000"/>
-          </a:bodyPr>
-          <a:lstStyle xmlns:a="http://schemas.openxmlformats.org/drawingml/2006/main"/>
-          <a:p xmlns:a="http://schemas.openxmlformats.org/drawingml/2006/main">
-            <a:pPr algn="l">
-              <a:buNone/>
-              <a:defRPr sz="975" b="0">
-                <a:solidFill>
-                  <a:srgbClr val="667085"/>
-                </a:solidFill>
-                <a:latin typeface="PingFang SC"/>
-                <a:ea typeface="PingFang SC"/>
-                <a:cs typeface="PingFang SC"/>
-              </a:defRPr>
-            </a:pPr>
-            <a:r>
-              <a:rPr sz="975" b="0">
-                <a:solidFill>
-                  <a:srgbClr val="667085"/>
-                </a:solidFill>
-                <a:latin typeface="PingFang SC"/>
-                <a:ea typeface="PingFang SC"/>
-                <a:cs typeface="PingFang SC"/>
-              </a:rPr>
-              <a:t>六步共用任务包</a:t>
-            </a:r>
-          </a:p>
-        </p:txBody>
-      </p:sp>
-      <p:sp>
-        <p:nvSpPr>
           <p:cNvPr id="13" name="root-panel">
             <a:extLst xmlns:a="http://schemas.openxmlformats.org/drawingml/2006/main">
               <a:ext uri="{FF2B5EF4-FFF2-40B4-BE49-F238E27FC236}">
@@ -5788,65 +6118,6 @@
                 <a:cs typeface="PingFang SC"/>
               </a:rPr>
               <a:t/>
-            </a:r>
-          </a:p>
-        </p:txBody>
-      </p:sp>
-      <p:sp>
-        <p:nvSpPr>
-          <p:cNvPr id="18" name="source">
-            <a:extLst xmlns:a="http://schemas.openxmlformats.org/drawingml/2006/main">
-              <a:ext uri="{FF2B5EF4-FFF2-40B4-BE49-F238E27FC236}">
-                <a16:creationId xmlns:a16="http://schemas.microsoft.com/office/drawing/2014/main" id="{771875FB-1E0E-4D7E-850B-F8DA480B5683}"/>
-              </a:ext>
-            </a:extLst>
-          </p:cNvPr>
-          <p:cNvSpPr>
-            <a:spLocks xmlns:a="http://schemas.openxmlformats.org/drawingml/2006/main" noGrp="1"/>
-          </p:cNvSpPr>
-          <p:nvPr/>
-        </p:nvSpPr>
-        <p:spPr>
-          <a:xfrm xmlns:a="http://schemas.openxmlformats.org/drawingml/2006/main">
-            <a:off x="533400" y="6372225"/>
-            <a:ext cx="9906000" cy="190500"/>
-          </a:xfrm>
-          <a:prstGeom xmlns:a="http://schemas.openxmlformats.org/drawingml/2006/main" prst="rect">
-            <a:avLst/>
-          </a:prstGeom>
-          <a:noFill xmlns:a="http://schemas.openxmlformats.org/drawingml/2006/main"/>
-          <a:ln xmlns:a="http://schemas.openxmlformats.org/drawingml/2006/main" w="0">
-            <a:noFill/>
-            <a:prstDash val="solid"/>
-          </a:ln>
-        </p:spPr>
-        <p:txBody>
-          <a:bodyPr xmlns:a="http://schemas.openxmlformats.org/drawingml/2006/main" anchor="t">
-            <a:normAutofit fontScale="72222"/>
-          </a:bodyPr>
-          <a:lstStyle xmlns:a="http://schemas.openxmlformats.org/drawingml/2006/main"/>
-          <a:p xmlns:a="http://schemas.openxmlformats.org/drawingml/2006/main">
-            <a:pPr algn="l">
-              <a:buNone/>
-              <a:defRPr sz="900" b="0">
-                <a:solidFill>
-                  <a:srgbClr val="667085"/>
-                </a:solidFill>
-                <a:latin typeface="PingFang SC"/>
-                <a:ea typeface="PingFang SC"/>
-                <a:cs typeface="PingFang SC"/>
-              </a:defRPr>
-            </a:pPr>
-            <a:r>
-              <a:rPr sz="900" b="0">
-                <a:solidFill>
-                  <a:srgbClr val="667085"/>
-                </a:solidFill>
-                <a:latin typeface="PingFang SC"/>
-                <a:ea typeface="PingFang SC"/>
-                <a:cs typeface="PingFang SC"/>
-              </a:rPr>
-              <a:t>设计闭环：双轨输入 → 统一任务包 → 哈希冻结；整个评测只认一个版本事实源。</a:t>
             </a:r>
           </a:p>
         </p:txBody>
@@ -5860,7 +6131,7 @@
           <p:nvPr/>
         </p:nvPicPr>
         <p:blipFill>
-          <a:blip xmlns:r="http://schemas.openxmlformats.org/officeDocument/2006/relationships" xmlns:a="http://schemas.openxmlformats.org/drawingml/2006/main" r:embed="R3b953387b7ae47c5"/>
+          <a:blip xmlns:r="http://schemas.openxmlformats.org/officeDocument/2006/relationships" xmlns:a="http://schemas.openxmlformats.org/drawingml/2006/main" r:embed="R40f1130f7a0f4557"/>
           <a:srcRect xmlns:a="http://schemas.openxmlformats.org/drawingml/2006/main" l="0" t="2174" r="0" b="2174"/>
           <a:stretch xmlns:a="http://schemas.openxmlformats.org/drawingml/2006/main">
             <a:fillRect l="0" t="0" r="0" b="0"/>
@@ -5929,7 +6200,7 @@
                 <a:latin typeface="PingFang SC"/>
                 <a:ea typeface="PingFang SC"/>
                 <a:cs typeface="PingFang SC"/>
-                <a:hlinkClick xmlns:r="http://schemas.openxmlformats.org/officeDocument/2006/relationships" r:id="R5acbfb3d49854018"/>
+                <a:hlinkClick xmlns:r="http://schemas.openxmlformats.org/officeDocument/2006/relationships" r:id="Rd6b8bc8f5cd04c62"/>
               </a:rPr>
               <a:t>▶ 在线 Demo</a:t>
             </a:r>
@@ -5981,9 +6252,420 @@
                 <a:latin typeface="PingFang SC"/>
                 <a:ea typeface="PingFang SC"/>
                 <a:cs typeface="PingFang SC"/>
-                <a:hlinkClick xmlns:r="http://schemas.openxmlformats.org/officeDocument/2006/relationships" r:id="R5c01ebd4a1164975"/>
+                <a:hlinkClick xmlns:r="http://schemas.openxmlformats.org/officeDocument/2006/relationships" r:id="R9d682da392b548a8"/>
               </a:rPr>
               <a:t>结果备份 ↗</a:t>
+            </a:r>
+          </a:p>
+        </p:txBody>
+      </p:sp>
+      <p:sp>
+        <p:nvSpPr>
+          <p:cNvPr id="23" name="problem-accent">
+            <a:extLst xmlns:a="http://schemas.openxmlformats.org/drawingml/2006/main">
+              <a:ext uri="{FF2B5EF4-FFF2-40B4-BE49-F238E27FC236}">
+                <a16:creationId xmlns:a16="http://schemas.microsoft.com/office/drawing/2014/main" id="{1EBF3C19-F77A-45BC-92BA-1E6B0205DFD1}"/>
+              </a:ext>
+            </a:extLst>
+          </p:cNvPr>
+          <p:cNvSpPr>
+            <a:spLocks xmlns:a="http://schemas.openxmlformats.org/drawingml/2006/main" noGrp="1"/>
+          </p:cNvSpPr>
+          <p:nvPr/>
+        </p:nvSpPr>
+        <p:spPr>
+          <a:xfrm xmlns:a="http://schemas.openxmlformats.org/drawingml/2006/main">
+            <a:off x="533400" y="1847850"/>
+            <a:ext cx="66675" cy="342900"/>
+          </a:xfrm>
+          <a:prstGeom xmlns:a="http://schemas.openxmlformats.org/drawingml/2006/main" prst="roundRect">
+            <a:avLst>
+              <a:gd name="adj" fmla="val 50000"/>
+            </a:avLst>
+          </a:prstGeom>
+          <a:solidFill xmlns:a="http://schemas.openxmlformats.org/drawingml/2006/main">
+            <a:srgbClr val="FFC300"/>
+          </a:solidFill>
+          <a:ln xmlns:a="http://schemas.openxmlformats.org/drawingml/2006/main" w="0">
+            <a:noFill/>
+            <a:prstDash val="solid"/>
+          </a:ln>
+        </p:spPr>
+      </p:sp>
+      <p:sp>
+        <p:nvSpPr>
+          <p:cNvPr id="24" name="problem-heading">
+            <a:extLst xmlns:a="http://schemas.openxmlformats.org/drawingml/2006/main">
+              <a:ext uri="{FF2B5EF4-FFF2-40B4-BE49-F238E27FC236}">
+                <a16:creationId xmlns:a16="http://schemas.microsoft.com/office/drawing/2014/main" id="{313B6E8A-2629-4A12-AB80-3971BCC819B9}"/>
+              </a:ext>
+            </a:extLst>
+          </p:cNvPr>
+          <p:cNvSpPr>
+            <a:spLocks xmlns:a="http://schemas.openxmlformats.org/drawingml/2006/main" noGrp="1"/>
+          </p:cNvSpPr>
+          <p:nvPr/>
+        </p:nvSpPr>
+        <p:spPr>
+          <a:xfrm xmlns:a="http://schemas.openxmlformats.org/drawingml/2006/main">
+            <a:off x="723900" y="1828800"/>
+            <a:ext cx="4476750" cy="400050"/>
+          </a:xfrm>
+          <a:prstGeom xmlns:a="http://schemas.openxmlformats.org/drawingml/2006/main" prst="rect">
+            <a:avLst/>
+          </a:prstGeom>
+          <a:noFill xmlns:a="http://schemas.openxmlformats.org/drawingml/2006/main"/>
+          <a:ln xmlns:a="http://schemas.openxmlformats.org/drawingml/2006/main" w="0">
+            <a:noFill/>
+            <a:prstDash val="solid"/>
+          </a:ln>
+        </p:spPr>
+        <p:txBody>
+          <a:bodyPr xmlns:a="http://schemas.openxmlformats.org/drawingml/2006/main" wrap="square" lIns="0" tIns="0" rIns="0" bIns="0" anchor="ctr">
+            <a:normAutofit fontScale="100000"/>
+          </a:bodyPr>
+          <a:lstStyle xmlns:a="http://schemas.openxmlformats.org/drawingml/2006/main"/>
+          <a:p xmlns:a="http://schemas.openxmlformats.org/drawingml/2006/main">
+            <a:pPr algn="l">
+              <a:defRPr sz="1725" b="1">
+                <a:solidFill>
+                  <a:srgbClr val="111C31"/>
+                </a:solidFill>
+              </a:defRPr>
+            </a:pPr>
+            <a:r>
+              <a:rPr sz="1725" b="1">
+                <a:solidFill>
+                  <a:srgbClr val="111C31"/>
+                </a:solidFill>
+              </a:rPr>
+              <a:t>解决了什么问题</a:t>
+            </a:r>
+          </a:p>
+        </p:txBody>
+      </p:sp>
+      <p:sp>
+        <p:nvSpPr>
+          <p:cNvPr id="25" name="problem-body">
+            <a:extLst xmlns:a="http://schemas.openxmlformats.org/drawingml/2006/main">
+              <a:ext uri="{FF2B5EF4-FFF2-40B4-BE49-F238E27FC236}">
+                <a16:creationId xmlns:a16="http://schemas.microsoft.com/office/drawing/2014/main" id="{629D5F89-DE93-49E9-AA15-277D70BFC0C5}"/>
+              </a:ext>
+            </a:extLst>
+          </p:cNvPr>
+          <p:cNvSpPr>
+            <a:spLocks xmlns:a="http://schemas.openxmlformats.org/drawingml/2006/main" noGrp="1"/>
+          </p:cNvSpPr>
+          <p:nvPr/>
+        </p:nvSpPr>
+        <p:spPr>
+          <a:xfrm xmlns:a="http://schemas.openxmlformats.org/drawingml/2006/main">
+            <a:off x="723900" y="2257425"/>
+            <a:ext cx="4476750" cy="628650"/>
+          </a:xfrm>
+          <a:prstGeom xmlns:a="http://schemas.openxmlformats.org/drawingml/2006/main" prst="rect">
+            <a:avLst/>
+          </a:prstGeom>
+          <a:noFill xmlns:a="http://schemas.openxmlformats.org/drawingml/2006/main"/>
+          <a:ln xmlns:a="http://schemas.openxmlformats.org/drawingml/2006/main" w="0">
+            <a:noFill/>
+            <a:prstDash val="solid"/>
+          </a:ln>
+        </p:spPr>
+        <p:txBody>
+          <a:bodyPr xmlns:a="http://schemas.openxmlformats.org/drawingml/2006/main" wrap="square" lIns="0" tIns="0" rIns="0" bIns="0" anchor="t">
+            <a:normAutofit fontScale="100000"/>
+          </a:bodyPr>
+          <a:lstStyle xmlns:a="http://schemas.openxmlformats.org/drawingml/2006/main"/>
+          <a:p xmlns:a="http://schemas.openxmlformats.org/drawingml/2006/main">
+            <a:pPr algn="l">
+              <a:defRPr sz="1238" b="0">
+                <a:solidFill>
+                  <a:srgbClr val="6E7A90"/>
+                </a:solidFill>
+              </a:defRPr>
+            </a:pPr>
+            <a:r>
+              <a:rPr sz="1238" b="0">
+                <a:solidFill>
+                  <a:srgbClr val="6E7A90"/>
+                </a:solidFill>
+              </a:rPr>
+              <a:t>评测输入和版本经常变化，导致不同模型结果无法公平比较。</a:t>
+            </a:r>
+          </a:p>
+        </p:txBody>
+      </p:sp>
+      <p:sp>
+        <p:nvSpPr>
+          <p:cNvPr id="26" name="implementation-accent">
+            <a:extLst xmlns:a="http://schemas.openxmlformats.org/drawingml/2006/main">
+              <a:ext uri="{FF2B5EF4-FFF2-40B4-BE49-F238E27FC236}">
+                <a16:creationId xmlns:a16="http://schemas.microsoft.com/office/drawing/2014/main" id="{C32C0133-DA5B-43AC-8221-4439382CF45E}"/>
+              </a:ext>
+            </a:extLst>
+          </p:cNvPr>
+          <p:cNvSpPr>
+            <a:spLocks xmlns:a="http://schemas.openxmlformats.org/drawingml/2006/main" noGrp="1"/>
+          </p:cNvSpPr>
+          <p:nvPr/>
+        </p:nvSpPr>
+        <p:spPr>
+          <a:xfrm xmlns:a="http://schemas.openxmlformats.org/drawingml/2006/main">
+            <a:off x="533400" y="3086100"/>
+            <a:ext cx="66675" cy="342900"/>
+          </a:xfrm>
+          <a:prstGeom xmlns:a="http://schemas.openxmlformats.org/drawingml/2006/main" prst="roundRect">
+            <a:avLst>
+              <a:gd name="adj" fmla="val 50000"/>
+            </a:avLst>
+          </a:prstGeom>
+          <a:solidFill xmlns:a="http://schemas.openxmlformats.org/drawingml/2006/main">
+            <a:srgbClr val="FFC300"/>
+          </a:solidFill>
+          <a:ln xmlns:a="http://schemas.openxmlformats.org/drawingml/2006/main" w="0">
+            <a:noFill/>
+            <a:prstDash val="solid"/>
+          </a:ln>
+        </p:spPr>
+      </p:sp>
+      <p:sp>
+        <p:nvSpPr>
+          <p:cNvPr id="27" name="implementation-heading">
+            <a:extLst xmlns:a="http://schemas.openxmlformats.org/drawingml/2006/main">
+              <a:ext uri="{FF2B5EF4-FFF2-40B4-BE49-F238E27FC236}">
+                <a16:creationId xmlns:a16="http://schemas.microsoft.com/office/drawing/2014/main" id="{F7014716-44B5-4783-BB5D-02EFFBCD27ED}"/>
+              </a:ext>
+            </a:extLst>
+          </p:cNvPr>
+          <p:cNvSpPr>
+            <a:spLocks xmlns:a="http://schemas.openxmlformats.org/drawingml/2006/main" noGrp="1"/>
+          </p:cNvSpPr>
+          <p:nvPr/>
+        </p:nvSpPr>
+        <p:spPr>
+          <a:xfrm xmlns:a="http://schemas.openxmlformats.org/drawingml/2006/main">
+            <a:off x="723900" y="3067050"/>
+            <a:ext cx="4476750" cy="400050"/>
+          </a:xfrm>
+          <a:prstGeom xmlns:a="http://schemas.openxmlformats.org/drawingml/2006/main" prst="rect">
+            <a:avLst/>
+          </a:prstGeom>
+          <a:noFill xmlns:a="http://schemas.openxmlformats.org/drawingml/2006/main"/>
+          <a:ln xmlns:a="http://schemas.openxmlformats.org/drawingml/2006/main" w="0">
+            <a:noFill/>
+            <a:prstDash val="solid"/>
+          </a:ln>
+        </p:spPr>
+        <p:txBody>
+          <a:bodyPr xmlns:a="http://schemas.openxmlformats.org/drawingml/2006/main" wrap="square" lIns="0" tIns="0" rIns="0" bIns="0" anchor="ctr">
+            <a:normAutofit fontScale="100000"/>
+          </a:bodyPr>
+          <a:lstStyle xmlns:a="http://schemas.openxmlformats.org/drawingml/2006/main"/>
+          <a:p xmlns:a="http://schemas.openxmlformats.org/drawingml/2006/main">
+            <a:pPr algn="l">
+              <a:defRPr sz="1725" b="1">
+                <a:solidFill>
+                  <a:srgbClr val="111C31"/>
+                </a:solidFill>
+              </a:defRPr>
+            </a:pPr>
+            <a:r>
+              <a:rPr sz="1725" b="1">
+                <a:solidFill>
+                  <a:srgbClr val="111C31"/>
+                </a:solidFill>
+              </a:rPr>
+              <a:t>这么设计是怎么实现的</a:t>
+            </a:r>
+          </a:p>
+        </p:txBody>
+      </p:sp>
+      <p:sp>
+        <p:nvSpPr>
+          <p:cNvPr id="28" name="implementation-body">
+            <a:extLst xmlns:a="http://schemas.openxmlformats.org/drawingml/2006/main">
+              <a:ext uri="{FF2B5EF4-FFF2-40B4-BE49-F238E27FC236}">
+                <a16:creationId xmlns:a16="http://schemas.microsoft.com/office/drawing/2014/main" id="{3BDA0EF0-B623-4C8E-93C6-C60A3A388F78}"/>
+              </a:ext>
+            </a:extLst>
+          </p:cNvPr>
+          <p:cNvSpPr>
+            <a:spLocks xmlns:a="http://schemas.openxmlformats.org/drawingml/2006/main" noGrp="1"/>
+          </p:cNvSpPr>
+          <p:nvPr/>
+        </p:nvSpPr>
+        <p:spPr>
+          <a:xfrm xmlns:a="http://schemas.openxmlformats.org/drawingml/2006/main">
+            <a:off x="723900" y="3495675"/>
+            <a:ext cx="4476750" cy="628650"/>
+          </a:xfrm>
+          <a:prstGeom xmlns:a="http://schemas.openxmlformats.org/drawingml/2006/main" prst="rect">
+            <a:avLst/>
+          </a:prstGeom>
+          <a:noFill xmlns:a="http://schemas.openxmlformats.org/drawingml/2006/main"/>
+          <a:ln xmlns:a="http://schemas.openxmlformats.org/drawingml/2006/main" w="0">
+            <a:noFill/>
+            <a:prstDash val="solid"/>
+          </a:ln>
+        </p:spPr>
+        <p:txBody>
+          <a:bodyPr xmlns:a="http://schemas.openxmlformats.org/drawingml/2006/main" wrap="square" lIns="0" tIns="0" rIns="0" bIns="0" anchor="t">
+            <a:normAutofit fontScale="100000"/>
+          </a:bodyPr>
+          <a:lstStyle xmlns:a="http://schemas.openxmlformats.org/drawingml/2006/main"/>
+          <a:p xmlns:a="http://schemas.openxmlformats.org/drawingml/2006/main">
+            <a:pPr algn="l">
+              <a:defRPr sz="1238" b="0">
+                <a:solidFill>
+                  <a:srgbClr val="6E7A90"/>
+                </a:solidFill>
+              </a:defRPr>
+            </a:pPr>
+            <a:r>
+              <a:rPr sz="1238" b="0">
+                <a:solidFill>
+                  <a:srgbClr val="6E7A90"/>
+                </a:solidFill>
+              </a:rPr>
+              <a:t>同时支持模拟测试和已有日志；将模型、SOP、用户批次统一写入任务包并计算哈希。</a:t>
+            </a:r>
+          </a:p>
+        </p:txBody>
+      </p:sp>
+      <p:sp>
+        <p:nvSpPr>
+          <p:cNvPr id="29" name="advantage-accent">
+            <a:extLst xmlns:a="http://schemas.openxmlformats.org/drawingml/2006/main">
+              <a:ext uri="{FF2B5EF4-FFF2-40B4-BE49-F238E27FC236}">
+                <a16:creationId xmlns:a16="http://schemas.microsoft.com/office/drawing/2014/main" id="{3051020D-AF5E-401A-9944-5ED1F465CDFC}"/>
+              </a:ext>
+            </a:extLst>
+          </p:cNvPr>
+          <p:cNvSpPr>
+            <a:spLocks xmlns:a="http://schemas.openxmlformats.org/drawingml/2006/main" noGrp="1"/>
+          </p:cNvSpPr>
+          <p:nvPr/>
+        </p:nvSpPr>
+        <p:spPr>
+          <a:xfrm xmlns:a="http://schemas.openxmlformats.org/drawingml/2006/main">
+            <a:off x="533400" y="4419600"/>
+            <a:ext cx="66675" cy="342900"/>
+          </a:xfrm>
+          <a:prstGeom xmlns:a="http://schemas.openxmlformats.org/drawingml/2006/main" prst="roundRect">
+            <a:avLst>
+              <a:gd name="adj" fmla="val 50000"/>
+            </a:avLst>
+          </a:prstGeom>
+          <a:solidFill xmlns:a="http://schemas.openxmlformats.org/drawingml/2006/main">
+            <a:srgbClr val="FFC300"/>
+          </a:solidFill>
+          <a:ln xmlns:a="http://schemas.openxmlformats.org/drawingml/2006/main" w="0">
+            <a:noFill/>
+            <a:prstDash val="solid"/>
+          </a:ln>
+        </p:spPr>
+      </p:sp>
+      <p:sp>
+        <p:nvSpPr>
+          <p:cNvPr id="30" name="advantage-heading">
+            <a:extLst xmlns:a="http://schemas.openxmlformats.org/drawingml/2006/main">
+              <a:ext uri="{FF2B5EF4-FFF2-40B4-BE49-F238E27FC236}">
+                <a16:creationId xmlns:a16="http://schemas.microsoft.com/office/drawing/2014/main" id="{F1134C0B-E974-455D-A1AD-BF08FDA84889}"/>
+              </a:ext>
+            </a:extLst>
+          </p:cNvPr>
+          <p:cNvSpPr>
+            <a:spLocks xmlns:a="http://schemas.openxmlformats.org/drawingml/2006/main" noGrp="1"/>
+          </p:cNvSpPr>
+          <p:nvPr/>
+        </p:nvSpPr>
+        <p:spPr>
+          <a:xfrm xmlns:a="http://schemas.openxmlformats.org/drawingml/2006/main">
+            <a:off x="723900" y="4400550"/>
+            <a:ext cx="4476750" cy="400050"/>
+          </a:xfrm>
+          <a:prstGeom xmlns:a="http://schemas.openxmlformats.org/drawingml/2006/main" prst="rect">
+            <a:avLst/>
+          </a:prstGeom>
+          <a:noFill xmlns:a="http://schemas.openxmlformats.org/drawingml/2006/main"/>
+          <a:ln xmlns:a="http://schemas.openxmlformats.org/drawingml/2006/main" w="0">
+            <a:noFill/>
+            <a:prstDash val="solid"/>
+          </a:ln>
+        </p:spPr>
+        <p:txBody>
+          <a:bodyPr xmlns:a="http://schemas.openxmlformats.org/drawingml/2006/main" wrap="square" lIns="0" tIns="0" rIns="0" bIns="0" anchor="ctr">
+            <a:normAutofit fontScale="100000"/>
+          </a:bodyPr>
+          <a:lstStyle xmlns:a="http://schemas.openxmlformats.org/drawingml/2006/main"/>
+          <a:p xmlns:a="http://schemas.openxmlformats.org/drawingml/2006/main">
+            <a:pPr algn="l">
+              <a:defRPr sz="1725" b="1">
+                <a:solidFill>
+                  <a:srgbClr val="111C31"/>
+                </a:solidFill>
+              </a:defRPr>
+            </a:pPr>
+            <a:r>
+              <a:rPr sz="1725" b="1">
+                <a:solidFill>
+                  <a:srgbClr val="111C31"/>
+                </a:solidFill>
+              </a:rPr>
+              <a:t>这么设计的优势</a:t>
+            </a:r>
+          </a:p>
+        </p:txBody>
+      </p:sp>
+      <p:sp>
+        <p:nvSpPr>
+          <p:cNvPr id="31" name="advantage-body">
+            <a:extLst xmlns:a="http://schemas.openxmlformats.org/drawingml/2006/main">
+              <a:ext uri="{FF2B5EF4-FFF2-40B4-BE49-F238E27FC236}">
+                <a16:creationId xmlns:a16="http://schemas.microsoft.com/office/drawing/2014/main" id="{F78796D2-59C5-4D3A-B887-5E08EB3E0E37}"/>
+              </a:ext>
+            </a:extLst>
+          </p:cNvPr>
+          <p:cNvSpPr>
+            <a:spLocks xmlns:a="http://schemas.openxmlformats.org/drawingml/2006/main" noGrp="1"/>
+          </p:cNvSpPr>
+          <p:nvPr/>
+        </p:nvSpPr>
+        <p:spPr>
+          <a:xfrm xmlns:a="http://schemas.openxmlformats.org/drawingml/2006/main">
+            <a:off x="723900" y="4829175"/>
+            <a:ext cx="4476750" cy="628650"/>
+          </a:xfrm>
+          <a:prstGeom xmlns:a="http://schemas.openxmlformats.org/drawingml/2006/main" prst="rect">
+            <a:avLst/>
+          </a:prstGeom>
+          <a:noFill xmlns:a="http://schemas.openxmlformats.org/drawingml/2006/main"/>
+          <a:ln xmlns:a="http://schemas.openxmlformats.org/drawingml/2006/main" w="0">
+            <a:noFill/>
+            <a:prstDash val="solid"/>
+          </a:ln>
+        </p:spPr>
+        <p:txBody>
+          <a:bodyPr xmlns:a="http://schemas.openxmlformats.org/drawingml/2006/main" wrap="square" lIns="0" tIns="0" rIns="0" bIns="0" anchor="t">
+            <a:normAutofit fontScale="100000"/>
+          </a:bodyPr>
+          <a:lstStyle xmlns:a="http://schemas.openxmlformats.org/drawingml/2006/main"/>
+          <a:p xmlns:a="http://schemas.openxmlformats.org/drawingml/2006/main">
+            <a:pPr algn="l">
+              <a:defRPr sz="1238" b="0">
+                <a:solidFill>
+                  <a:srgbClr val="6E7A90"/>
+                </a:solidFill>
+              </a:defRPr>
+            </a:pPr>
+            <a:r>
+              <a:rPr sz="1238" b="0">
+                <a:solidFill>
+                  <a:srgbClr val="6E7A90"/>
+                </a:solidFill>
+              </a:rPr>
+              <a:t>六步始终复用同一份输入事实，结果可复现、可追踪，也能进行真实版本对比。</a:t>
             </a:r>
           </a:p>
         </p:txBody>
@@ -6227,478 +6909,6 @@
       </p:sp>
       <p:sp>
         <p:nvSpPr>
-          <p:cNvPr id="5" name="decision">
-            <a:extLst xmlns:a="http://schemas.openxmlformats.org/drawingml/2006/main">
-              <a:ext uri="{FF2B5EF4-FFF2-40B4-BE49-F238E27FC236}">
-                <a16:creationId xmlns:a16="http://schemas.microsoft.com/office/drawing/2014/main" id="{B0CE3BC9-D8B1-4041-B5E5-CD8D93B3556B}"/>
-              </a:ext>
-            </a:extLst>
-          </p:cNvPr>
-          <p:cNvSpPr>
-            <a:spLocks xmlns:a="http://schemas.openxmlformats.org/drawingml/2006/main" noGrp="1"/>
-          </p:cNvSpPr>
-          <p:nvPr/>
-        </p:nvSpPr>
-        <p:spPr>
-          <a:xfrm xmlns:a="http://schemas.openxmlformats.org/drawingml/2006/main">
-            <a:off x="533400" y="1866900"/>
-            <a:ext cx="4000500" cy="857250"/>
-          </a:xfrm>
-          <a:prstGeom xmlns:a="http://schemas.openxmlformats.org/drawingml/2006/main" prst="rect">
-            <a:avLst/>
-          </a:prstGeom>
-          <a:noFill xmlns:a="http://schemas.openxmlformats.org/drawingml/2006/main"/>
-          <a:ln xmlns:a="http://schemas.openxmlformats.org/drawingml/2006/main" w="0">
-            <a:noFill/>
-            <a:prstDash val="solid"/>
-          </a:ln>
-        </p:spPr>
-        <p:txBody>
-          <a:bodyPr xmlns:a="http://schemas.openxmlformats.org/drawingml/2006/main" anchor="t">
-            <a:normAutofit fontScale="100000"/>
-          </a:bodyPr>
-          <a:lstStyle xmlns:a="http://schemas.openxmlformats.org/drawingml/2006/main"/>
-          <a:p xmlns:a="http://schemas.openxmlformats.org/drawingml/2006/main">
-            <a:pPr algn="l">
-              <a:buNone/>
-              <a:defRPr sz="2400" b="1">
-                <a:solidFill>
-                  <a:srgbClr val="111827"/>
-                </a:solidFill>
-                <a:latin typeface="PingFang SC"/>
-                <a:ea typeface="PingFang SC"/>
-                <a:cs typeface="PingFang SC"/>
-              </a:defRPr>
-            </a:pPr>
-            <a:r>
-              <a:rPr sz="2400" b="1">
-                <a:solidFill>
-                  <a:srgbClr val="111827"/>
-                </a:solidFill>
-                <a:latin typeface="PingFang SC"/>
-                <a:ea typeface="PingFang SC"/>
-                <a:cs typeface="PingFang SC"/>
-              </a:rPr>
-              <a:t>LLM 理解规则，代码守住边界</a:t>
-            </a:r>
-          </a:p>
-        </p:txBody>
-      </p:sp>
-      <p:sp>
-        <p:nvSpPr>
-          <p:cNvPr id="6" name="decision-sub">
-            <a:extLst xmlns:a="http://schemas.openxmlformats.org/drawingml/2006/main">
-              <a:ext uri="{FF2B5EF4-FFF2-40B4-BE49-F238E27FC236}">
-                <a16:creationId xmlns:a16="http://schemas.microsoft.com/office/drawing/2014/main" id="{C81463E1-CB7C-4B7A-8684-388032501444}"/>
-              </a:ext>
-            </a:extLst>
-          </p:cNvPr>
-          <p:cNvSpPr>
-            <a:spLocks xmlns:a="http://schemas.openxmlformats.org/drawingml/2006/main" noGrp="1"/>
-          </p:cNvSpPr>
-          <p:nvPr/>
-        </p:nvSpPr>
-        <p:spPr>
-          <a:xfrm xmlns:a="http://schemas.openxmlformats.org/drawingml/2006/main">
-            <a:off x="552450" y="2781300"/>
-            <a:ext cx="4476750" cy="323850"/>
-          </a:xfrm>
-          <a:prstGeom xmlns:a="http://schemas.openxmlformats.org/drawingml/2006/main" prst="rect">
-            <a:avLst/>
-          </a:prstGeom>
-          <a:noFill xmlns:a="http://schemas.openxmlformats.org/drawingml/2006/main"/>
-          <a:ln xmlns:a="http://schemas.openxmlformats.org/drawingml/2006/main" w="0">
-            <a:noFill/>
-            <a:prstDash val="solid"/>
-          </a:ln>
-        </p:spPr>
-        <p:txBody>
-          <a:bodyPr xmlns:a="http://schemas.openxmlformats.org/drawingml/2006/main" anchor="t">
-            <a:normAutofit fontScale="93484"/>
-          </a:bodyPr>
-          <a:lstStyle xmlns:a="http://schemas.openxmlformats.org/drawingml/2006/main"/>
-          <a:p xmlns:a="http://schemas.openxmlformats.org/drawingml/2006/main">
-            <a:pPr algn="l">
-              <a:buNone/>
-              <a:defRPr sz="1200" b="0">
-                <a:solidFill>
-                  <a:srgbClr val="667085"/>
-                </a:solidFill>
-                <a:latin typeface="PingFang SC"/>
-                <a:ea typeface="PingFang SC"/>
-                <a:cs typeface="PingFang SC"/>
-              </a:defRPr>
-            </a:pPr>
-            <a:r>
-              <a:rPr sz="1200" b="0">
-                <a:solidFill>
-                  <a:srgbClr val="667085"/>
-                </a:solidFill>
-                <a:latin typeface="PingFang SC"/>
-                <a:ea typeface="PingFang SC"/>
-                <a:cs typeface="PingFang SC"/>
-              </a:rPr>
-              <a:t>不做这一步：自然语言有歧义，Judge 每次都可能理解成不同标准。</a:t>
-            </a:r>
-          </a:p>
-        </p:txBody>
-      </p:sp>
-      <p:sp>
-        <p:nvSpPr>
-          <p:cNvPr id="7" name="stat-0">
-            <a:extLst xmlns:a="http://schemas.openxmlformats.org/drawingml/2006/main">
-              <a:ext uri="{FF2B5EF4-FFF2-40B4-BE49-F238E27FC236}">
-                <a16:creationId xmlns:a16="http://schemas.microsoft.com/office/drawing/2014/main" id="{A64EB69F-1AD3-45AE-93F6-D916A936F061}"/>
-              </a:ext>
-            </a:extLst>
-          </p:cNvPr>
-          <p:cNvSpPr>
-            <a:spLocks xmlns:a="http://schemas.openxmlformats.org/drawingml/2006/main" noGrp="1"/>
-          </p:cNvSpPr>
-          <p:nvPr/>
-        </p:nvSpPr>
-        <p:spPr>
-          <a:xfrm xmlns:a="http://schemas.openxmlformats.org/drawingml/2006/main">
-            <a:off x="533400" y="3581400"/>
-            <a:ext cx="1352550" cy="666750"/>
-          </a:xfrm>
-          <a:prstGeom xmlns:a="http://schemas.openxmlformats.org/drawingml/2006/main" prst="rect">
-            <a:avLst/>
-          </a:prstGeom>
-          <a:noFill xmlns:a="http://schemas.openxmlformats.org/drawingml/2006/main"/>
-          <a:ln xmlns:a="http://schemas.openxmlformats.org/drawingml/2006/main" w="0">
-            <a:noFill/>
-            <a:prstDash val="solid"/>
-          </a:ln>
-        </p:spPr>
-        <p:txBody>
-          <a:bodyPr xmlns:a="http://schemas.openxmlformats.org/drawingml/2006/main" anchor="t">
-            <a:normAutofit fontScale="100000"/>
-          </a:bodyPr>
-          <a:lstStyle xmlns:a="http://schemas.openxmlformats.org/drawingml/2006/main"/>
-          <a:p xmlns:a="http://schemas.openxmlformats.org/drawingml/2006/main">
-            <a:pPr algn="l">
-              <a:buNone/>
-              <a:defRPr sz="3300" b="1">
-                <a:solidFill>
-                  <a:srgbClr val="111827"/>
-                </a:solidFill>
-                <a:latin typeface="PingFang SC"/>
-                <a:ea typeface="PingFang SC"/>
-                <a:cs typeface="PingFang SC"/>
-              </a:defRPr>
-            </a:pPr>
-            <a:r>
-              <a:rPr sz="3300" b="1">
-                <a:solidFill>
-                  <a:srgbClr val="111827"/>
-                </a:solidFill>
-                <a:latin typeface="PingFang SC"/>
-                <a:ea typeface="PingFang SC"/>
-                <a:cs typeface="PingFang SC"/>
-              </a:rPr>
-              <a:t>L0</a:t>
-            </a:r>
-          </a:p>
-        </p:txBody>
-      </p:sp>
-      <p:sp>
-        <p:nvSpPr>
-          <p:cNvPr id="8" name="stat-label-0">
-            <a:extLst xmlns:a="http://schemas.openxmlformats.org/drawingml/2006/main">
-              <a:ext uri="{FF2B5EF4-FFF2-40B4-BE49-F238E27FC236}">
-                <a16:creationId xmlns:a16="http://schemas.microsoft.com/office/drawing/2014/main" id="{7261F069-84D1-4836-A1CB-0A3A5D5C44E7}"/>
-              </a:ext>
-            </a:extLst>
-          </p:cNvPr>
-          <p:cNvSpPr>
-            <a:spLocks xmlns:a="http://schemas.openxmlformats.org/drawingml/2006/main" noGrp="1"/>
-          </p:cNvSpPr>
-          <p:nvPr/>
-        </p:nvSpPr>
-        <p:spPr>
-          <a:xfrm xmlns:a="http://schemas.openxmlformats.org/drawingml/2006/main">
-            <a:off x="533400" y="4286250"/>
-            <a:ext cx="1352550" cy="266700"/>
-          </a:xfrm>
-          <a:prstGeom xmlns:a="http://schemas.openxmlformats.org/drawingml/2006/main" prst="rect">
-            <a:avLst/>
-          </a:prstGeom>
-          <a:noFill xmlns:a="http://schemas.openxmlformats.org/drawingml/2006/main"/>
-          <a:ln xmlns:a="http://schemas.openxmlformats.org/drawingml/2006/main" w="0">
-            <a:noFill/>
-            <a:prstDash val="solid"/>
-          </a:ln>
-        </p:spPr>
-        <p:txBody>
-          <a:bodyPr xmlns:a="http://schemas.openxmlformats.org/drawingml/2006/main" anchor="t">
-            <a:normAutofit fontScale="100000"/>
-          </a:bodyPr>
-          <a:lstStyle xmlns:a="http://schemas.openxmlformats.org/drawingml/2006/main"/>
-          <a:p xmlns:a="http://schemas.openxmlformats.org/drawingml/2006/main">
-            <a:pPr algn="l">
-              <a:buNone/>
-              <a:defRPr sz="975" b="0">
-                <a:solidFill>
-                  <a:srgbClr val="667085"/>
-                </a:solidFill>
-                <a:latin typeface="PingFang SC"/>
-                <a:ea typeface="PingFang SC"/>
-                <a:cs typeface="PingFang SC"/>
-              </a:defRPr>
-            </a:pPr>
-            <a:r>
-              <a:rPr sz="975" b="0">
-                <a:solidFill>
-                  <a:srgbClr val="667085"/>
-                </a:solidFill>
-                <a:latin typeface="PingFang SC"/>
-                <a:ea typeface="PingFang SC"/>
-                <a:cs typeface="PingFang SC"/>
-              </a:rPr>
-              <a:t>通用安全红线</a:t>
-            </a:r>
-          </a:p>
-        </p:txBody>
-      </p:sp>
-      <p:sp>
-        <p:nvSpPr>
-          <p:cNvPr id="9" name="stat-1">
-            <a:extLst xmlns:a="http://schemas.openxmlformats.org/drawingml/2006/main">
-              <a:ext uri="{FF2B5EF4-FFF2-40B4-BE49-F238E27FC236}">
-                <a16:creationId xmlns:a16="http://schemas.microsoft.com/office/drawing/2014/main" id="{C2588DEE-1FC2-4818-B044-00FEF0E24E2D}"/>
-              </a:ext>
-            </a:extLst>
-          </p:cNvPr>
-          <p:cNvSpPr>
-            <a:spLocks xmlns:a="http://schemas.openxmlformats.org/drawingml/2006/main" noGrp="1"/>
-          </p:cNvSpPr>
-          <p:nvPr/>
-        </p:nvSpPr>
-        <p:spPr>
-          <a:xfrm xmlns:a="http://schemas.openxmlformats.org/drawingml/2006/main">
-            <a:off x="2171700" y="3581400"/>
-            <a:ext cx="1352550" cy="666750"/>
-          </a:xfrm>
-          <a:prstGeom xmlns:a="http://schemas.openxmlformats.org/drawingml/2006/main" prst="rect">
-            <a:avLst/>
-          </a:prstGeom>
-          <a:noFill xmlns:a="http://schemas.openxmlformats.org/drawingml/2006/main"/>
-          <a:ln xmlns:a="http://schemas.openxmlformats.org/drawingml/2006/main" w="0">
-            <a:noFill/>
-            <a:prstDash val="solid"/>
-          </a:ln>
-        </p:spPr>
-        <p:txBody>
-          <a:bodyPr xmlns:a="http://schemas.openxmlformats.org/drawingml/2006/main" anchor="t">
-            <a:normAutofit fontScale="100000"/>
-          </a:bodyPr>
-          <a:lstStyle xmlns:a="http://schemas.openxmlformats.org/drawingml/2006/main"/>
-          <a:p xmlns:a="http://schemas.openxmlformats.org/drawingml/2006/main">
-            <a:pPr algn="l">
-              <a:buNone/>
-              <a:defRPr sz="3300" b="1">
-                <a:solidFill>
-                  <a:srgbClr val="111827"/>
-                </a:solidFill>
-                <a:latin typeface="PingFang SC"/>
-                <a:ea typeface="PingFang SC"/>
-                <a:cs typeface="PingFang SC"/>
-              </a:defRPr>
-            </a:pPr>
-            <a:r>
-              <a:rPr sz="3300" b="1">
-                <a:solidFill>
-                  <a:srgbClr val="111827"/>
-                </a:solidFill>
-                <a:latin typeface="PingFang SC"/>
-                <a:ea typeface="PingFang SC"/>
-                <a:cs typeface="PingFang SC"/>
-              </a:rPr>
-              <a:t>L1</a:t>
-            </a:r>
-          </a:p>
-        </p:txBody>
-      </p:sp>
-      <p:sp>
-        <p:nvSpPr>
-          <p:cNvPr id="10" name="stat-label-1">
-            <a:extLst xmlns:a="http://schemas.openxmlformats.org/drawingml/2006/main">
-              <a:ext uri="{FF2B5EF4-FFF2-40B4-BE49-F238E27FC236}">
-                <a16:creationId xmlns:a16="http://schemas.microsoft.com/office/drawing/2014/main" id="{F2DA5F17-C3CD-4B4D-96F7-5057D5458574}"/>
-              </a:ext>
-            </a:extLst>
-          </p:cNvPr>
-          <p:cNvSpPr>
-            <a:spLocks xmlns:a="http://schemas.openxmlformats.org/drawingml/2006/main" noGrp="1"/>
-          </p:cNvSpPr>
-          <p:nvPr/>
-        </p:nvSpPr>
-        <p:spPr>
-          <a:xfrm xmlns:a="http://schemas.openxmlformats.org/drawingml/2006/main">
-            <a:off x="2171700" y="4286250"/>
-            <a:ext cx="1352550" cy="266700"/>
-          </a:xfrm>
-          <a:prstGeom xmlns:a="http://schemas.openxmlformats.org/drawingml/2006/main" prst="rect">
-            <a:avLst/>
-          </a:prstGeom>
-          <a:noFill xmlns:a="http://schemas.openxmlformats.org/drawingml/2006/main"/>
-          <a:ln xmlns:a="http://schemas.openxmlformats.org/drawingml/2006/main" w="0">
-            <a:noFill/>
-            <a:prstDash val="solid"/>
-          </a:ln>
-        </p:spPr>
-        <p:txBody>
-          <a:bodyPr xmlns:a="http://schemas.openxmlformats.org/drawingml/2006/main" anchor="t">
-            <a:normAutofit fontScale="100000"/>
-          </a:bodyPr>
-          <a:lstStyle xmlns:a="http://schemas.openxmlformats.org/drawingml/2006/main"/>
-          <a:p xmlns:a="http://schemas.openxmlformats.org/drawingml/2006/main">
-            <a:pPr algn="l">
-              <a:buNone/>
-              <a:defRPr sz="975" b="0">
-                <a:solidFill>
-                  <a:srgbClr val="667085"/>
-                </a:solidFill>
-                <a:latin typeface="PingFang SC"/>
-                <a:ea typeface="PingFang SC"/>
-                <a:cs typeface="PingFang SC"/>
-              </a:defRPr>
-            </a:pPr>
-            <a:r>
-              <a:rPr sz="975" b="0">
-                <a:solidFill>
-                  <a:srgbClr val="667085"/>
-                </a:solidFill>
-                <a:latin typeface="PingFang SC"/>
-                <a:ea typeface="PingFang SC"/>
-                <a:cs typeface="PingFang SC"/>
-              </a:rPr>
-              <a:t>任务业务规则</a:t>
-            </a:r>
-          </a:p>
-        </p:txBody>
-      </p:sp>
-      <p:sp>
-        <p:nvSpPr>
-          <p:cNvPr id="11" name="stat-2">
-            <a:extLst xmlns:a="http://schemas.openxmlformats.org/drawingml/2006/main">
-              <a:ext uri="{FF2B5EF4-FFF2-40B4-BE49-F238E27FC236}">
-                <a16:creationId xmlns:a16="http://schemas.microsoft.com/office/drawing/2014/main" id="{A2568244-186A-4F43-AECE-BB8E99D7ECA7}"/>
-              </a:ext>
-            </a:extLst>
-          </p:cNvPr>
-          <p:cNvSpPr>
-            <a:spLocks xmlns:a="http://schemas.openxmlformats.org/drawingml/2006/main" noGrp="1"/>
-          </p:cNvSpPr>
-          <p:nvPr/>
-        </p:nvSpPr>
-        <p:spPr>
-          <a:xfrm xmlns:a="http://schemas.openxmlformats.org/drawingml/2006/main">
-            <a:off x="3810000" y="3581400"/>
-            <a:ext cx="1352550" cy="666750"/>
-          </a:xfrm>
-          <a:prstGeom xmlns:a="http://schemas.openxmlformats.org/drawingml/2006/main" prst="rect">
-            <a:avLst/>
-          </a:prstGeom>
-          <a:noFill xmlns:a="http://schemas.openxmlformats.org/drawingml/2006/main"/>
-          <a:ln xmlns:a="http://schemas.openxmlformats.org/drawingml/2006/main" w="0">
-            <a:noFill/>
-            <a:prstDash val="solid"/>
-          </a:ln>
-        </p:spPr>
-        <p:txBody>
-          <a:bodyPr xmlns:a="http://schemas.openxmlformats.org/drawingml/2006/main" anchor="t">
-            <a:normAutofit fontScale="100000"/>
-          </a:bodyPr>
-          <a:lstStyle xmlns:a="http://schemas.openxmlformats.org/drawingml/2006/main"/>
-          <a:p xmlns:a="http://schemas.openxmlformats.org/drawingml/2006/main">
-            <a:pPr algn="l">
-              <a:buNone/>
-              <a:defRPr sz="3300" b="1">
-                <a:solidFill>
-                  <a:srgbClr val="111827"/>
-                </a:solidFill>
-                <a:latin typeface="PingFang SC"/>
-                <a:ea typeface="PingFang SC"/>
-                <a:cs typeface="PingFang SC"/>
-              </a:defRPr>
-            </a:pPr>
-            <a:r>
-              <a:rPr sz="3300" b="1">
-                <a:solidFill>
-                  <a:srgbClr val="111827"/>
-                </a:solidFill>
-                <a:latin typeface="PingFang SC"/>
-                <a:ea typeface="PingFang SC"/>
-                <a:cs typeface="PingFang SC"/>
-              </a:rPr>
-              <a:t>溯源</a:t>
-            </a:r>
-          </a:p>
-        </p:txBody>
-      </p:sp>
-      <p:sp>
-        <p:nvSpPr>
-          <p:cNvPr id="12" name="stat-label-2">
-            <a:extLst xmlns:a="http://schemas.openxmlformats.org/drawingml/2006/main">
-              <a:ext uri="{FF2B5EF4-FFF2-40B4-BE49-F238E27FC236}">
-                <a16:creationId xmlns:a16="http://schemas.microsoft.com/office/drawing/2014/main" id="{46EB030E-F492-46E3-8C5B-6A223CBEDFAD}"/>
-              </a:ext>
-            </a:extLst>
-          </p:cNvPr>
-          <p:cNvSpPr>
-            <a:spLocks xmlns:a="http://schemas.openxmlformats.org/drawingml/2006/main" noGrp="1"/>
-          </p:cNvSpPr>
-          <p:nvPr/>
-        </p:nvSpPr>
-        <p:spPr>
-          <a:xfrm xmlns:a="http://schemas.openxmlformats.org/drawingml/2006/main">
-            <a:off x="3810000" y="4286250"/>
-            <a:ext cx="1352550" cy="266700"/>
-          </a:xfrm>
-          <a:prstGeom xmlns:a="http://schemas.openxmlformats.org/drawingml/2006/main" prst="rect">
-            <a:avLst/>
-          </a:prstGeom>
-          <a:noFill xmlns:a="http://schemas.openxmlformats.org/drawingml/2006/main"/>
-          <a:ln xmlns:a="http://schemas.openxmlformats.org/drawingml/2006/main" w="0">
-            <a:noFill/>
-            <a:prstDash val="solid"/>
-          </a:ln>
-        </p:spPr>
-        <p:txBody>
-          <a:bodyPr xmlns:a="http://schemas.openxmlformats.org/drawingml/2006/main" anchor="t">
-            <a:normAutofit fontScale="100000"/>
-          </a:bodyPr>
-          <a:lstStyle xmlns:a="http://schemas.openxmlformats.org/drawingml/2006/main"/>
-          <a:p xmlns:a="http://schemas.openxmlformats.org/drawingml/2006/main">
-            <a:pPr algn="l">
-              <a:buNone/>
-              <a:defRPr sz="975" b="0">
-                <a:solidFill>
-                  <a:srgbClr val="667085"/>
-                </a:solidFill>
-                <a:latin typeface="PingFang SC"/>
-                <a:ea typeface="PingFang SC"/>
-                <a:cs typeface="PingFang SC"/>
-              </a:defRPr>
-            </a:pPr>
-            <a:r>
-              <a:rPr sz="975" b="0">
-                <a:solidFill>
-                  <a:srgbClr val="667085"/>
-                </a:solidFill>
-                <a:latin typeface="PingFang SC"/>
-                <a:ea typeface="PingFang SC"/>
-                <a:cs typeface="PingFang SC"/>
-              </a:rPr>
-              <a:t>原文·严重度·条件</a:t>
-            </a:r>
-          </a:p>
-        </p:txBody>
-      </p:sp>
-      <p:sp>
-        <p:nvSpPr>
           <p:cNvPr id="13" name="root-panel">
             <a:extLst xmlns:a="http://schemas.openxmlformats.org/drawingml/2006/main">
               <a:ext uri="{FF2B5EF4-FFF2-40B4-BE49-F238E27FC236}">
@@ -6994,65 +7204,6 @@
                 <a:cs typeface="PingFang SC"/>
               </a:rPr>
               <a:t/>
-            </a:r>
-          </a:p>
-        </p:txBody>
-      </p:sp>
-      <p:sp>
-        <p:nvSpPr>
-          <p:cNvPr id="18" name="source">
-            <a:extLst xmlns:a="http://schemas.openxmlformats.org/drawingml/2006/main">
-              <a:ext uri="{FF2B5EF4-FFF2-40B4-BE49-F238E27FC236}">
-                <a16:creationId xmlns:a16="http://schemas.microsoft.com/office/drawing/2014/main" id="{771875FB-1E0E-4D7E-850B-F8DA480B5683}"/>
-              </a:ext>
-            </a:extLst>
-          </p:cNvPr>
-          <p:cNvSpPr>
-            <a:spLocks xmlns:a="http://schemas.openxmlformats.org/drawingml/2006/main" noGrp="1"/>
-          </p:cNvSpPr>
-          <p:nvPr/>
-        </p:nvSpPr>
-        <p:spPr>
-          <a:xfrm xmlns:a="http://schemas.openxmlformats.org/drawingml/2006/main">
-            <a:off x="533400" y="6372225"/>
-            <a:ext cx="9906000" cy="190500"/>
-          </a:xfrm>
-          <a:prstGeom xmlns:a="http://schemas.openxmlformats.org/drawingml/2006/main" prst="rect">
-            <a:avLst/>
-          </a:prstGeom>
-          <a:noFill xmlns:a="http://schemas.openxmlformats.org/drawingml/2006/main"/>
-          <a:ln xmlns:a="http://schemas.openxmlformats.org/drawingml/2006/main" w="0">
-            <a:noFill/>
-            <a:prstDash val="solid"/>
-          </a:ln>
-        </p:spPr>
-        <p:txBody>
-          <a:bodyPr xmlns:a="http://schemas.openxmlformats.org/drawingml/2006/main" anchor="t">
-            <a:normAutofit fontScale="72222"/>
-          </a:bodyPr>
-          <a:lstStyle xmlns:a="http://schemas.openxmlformats.org/drawingml/2006/main"/>
-          <a:p xmlns:a="http://schemas.openxmlformats.org/drawingml/2006/main">
-            <a:pPr algn="l">
-              <a:buNone/>
-              <a:defRPr sz="900" b="0">
-                <a:solidFill>
-                  <a:srgbClr val="667085"/>
-                </a:solidFill>
-                <a:latin typeface="PingFang SC"/>
-                <a:ea typeface="PingFang SC"/>
-                <a:cs typeface="PingFang SC"/>
-              </a:defRPr>
-            </a:pPr>
-            <a:r>
-              <a:rPr sz="900" b="0">
-                <a:solidFill>
-                  <a:srgbClr val="667085"/>
-                </a:solidFill>
-                <a:latin typeface="PingFang SC"/>
-                <a:ea typeface="PingFang SC"/>
-                <a:cs typeface="PingFang SC"/>
-              </a:rPr>
-              <a:t>设计闭环：SOP → 原子检查点 → 来源校验 → Checklist hash；评分标准由提示词变成合同。</a:t>
             </a:r>
           </a:p>
         </p:txBody>
@@ -7066,7 +7217,7 @@
           <p:nvPr/>
         </p:nvPicPr>
         <p:blipFill>
-          <a:blip xmlns:r="http://schemas.openxmlformats.org/officeDocument/2006/relationships" xmlns:a="http://schemas.openxmlformats.org/drawingml/2006/main" r:embed="R844c39ffe16f470c"/>
+          <a:blip xmlns:r="http://schemas.openxmlformats.org/officeDocument/2006/relationships" xmlns:a="http://schemas.openxmlformats.org/drawingml/2006/main" r:embed="R76bf847efd034428"/>
           <a:srcRect xmlns:a="http://schemas.openxmlformats.org/drawingml/2006/main" l="0" t="2174" r="0" b="2174"/>
           <a:stretch xmlns:a="http://schemas.openxmlformats.org/drawingml/2006/main">
             <a:fillRect l="0" t="0" r="0" b="0"/>
@@ -7135,7 +7286,7 @@
                 <a:latin typeface="PingFang SC"/>
                 <a:ea typeface="PingFang SC"/>
                 <a:cs typeface="PingFang SC"/>
-                <a:hlinkClick xmlns:r="http://schemas.openxmlformats.org/officeDocument/2006/relationships" r:id="R201131aa623f4586"/>
+                <a:hlinkClick xmlns:r="http://schemas.openxmlformats.org/officeDocument/2006/relationships" r:id="R146525409b7646cd"/>
               </a:rPr>
               <a:t>▶ 在线 Demo</a:t>
             </a:r>
@@ -7187,9 +7338,420 @@
                 <a:latin typeface="PingFang SC"/>
                 <a:ea typeface="PingFang SC"/>
                 <a:cs typeface="PingFang SC"/>
-                <a:hlinkClick xmlns:r="http://schemas.openxmlformats.org/officeDocument/2006/relationships" r:id="R57ae383847554ddd"/>
+                <a:hlinkClick xmlns:r="http://schemas.openxmlformats.org/officeDocument/2006/relationships" r:id="R7760256aa0c64fa5"/>
               </a:rPr>
               <a:t>结果备份 ↗</a:t>
+            </a:r>
+          </a:p>
+        </p:txBody>
+      </p:sp>
+      <p:sp>
+        <p:nvSpPr>
+          <p:cNvPr id="23" name="problem-accent">
+            <a:extLst xmlns:a="http://schemas.openxmlformats.org/drawingml/2006/main">
+              <a:ext uri="{FF2B5EF4-FFF2-40B4-BE49-F238E27FC236}">
+                <a16:creationId xmlns:a16="http://schemas.microsoft.com/office/drawing/2014/main" id="{3B9485B1-617A-482B-AD8F-6B1BBAA0DA7E}"/>
+              </a:ext>
+            </a:extLst>
+          </p:cNvPr>
+          <p:cNvSpPr>
+            <a:spLocks xmlns:a="http://schemas.openxmlformats.org/drawingml/2006/main" noGrp="1"/>
+          </p:cNvSpPr>
+          <p:nvPr/>
+        </p:nvSpPr>
+        <p:spPr>
+          <a:xfrm xmlns:a="http://schemas.openxmlformats.org/drawingml/2006/main">
+            <a:off x="533400" y="1847850"/>
+            <a:ext cx="66675" cy="342900"/>
+          </a:xfrm>
+          <a:prstGeom xmlns:a="http://schemas.openxmlformats.org/drawingml/2006/main" prst="roundRect">
+            <a:avLst>
+              <a:gd name="adj" fmla="val 50000"/>
+            </a:avLst>
+          </a:prstGeom>
+          <a:solidFill xmlns:a="http://schemas.openxmlformats.org/drawingml/2006/main">
+            <a:srgbClr val="FFC300"/>
+          </a:solidFill>
+          <a:ln xmlns:a="http://schemas.openxmlformats.org/drawingml/2006/main" w="0">
+            <a:noFill/>
+            <a:prstDash val="solid"/>
+          </a:ln>
+        </p:spPr>
+      </p:sp>
+      <p:sp>
+        <p:nvSpPr>
+          <p:cNvPr id="24" name="problem-heading">
+            <a:extLst xmlns:a="http://schemas.openxmlformats.org/drawingml/2006/main">
+              <a:ext uri="{FF2B5EF4-FFF2-40B4-BE49-F238E27FC236}">
+                <a16:creationId xmlns:a16="http://schemas.microsoft.com/office/drawing/2014/main" id="{CD95CBE7-CBE0-4F8A-A748-33AEC0A81893}"/>
+              </a:ext>
+            </a:extLst>
+          </p:cNvPr>
+          <p:cNvSpPr>
+            <a:spLocks xmlns:a="http://schemas.openxmlformats.org/drawingml/2006/main" noGrp="1"/>
+          </p:cNvSpPr>
+          <p:nvPr/>
+        </p:nvSpPr>
+        <p:spPr>
+          <a:xfrm xmlns:a="http://schemas.openxmlformats.org/drawingml/2006/main">
+            <a:off x="723900" y="1828800"/>
+            <a:ext cx="4476750" cy="400050"/>
+          </a:xfrm>
+          <a:prstGeom xmlns:a="http://schemas.openxmlformats.org/drawingml/2006/main" prst="rect">
+            <a:avLst/>
+          </a:prstGeom>
+          <a:noFill xmlns:a="http://schemas.openxmlformats.org/drawingml/2006/main"/>
+          <a:ln xmlns:a="http://schemas.openxmlformats.org/drawingml/2006/main" w="0">
+            <a:noFill/>
+            <a:prstDash val="solid"/>
+          </a:ln>
+        </p:spPr>
+        <p:txBody>
+          <a:bodyPr xmlns:a="http://schemas.openxmlformats.org/drawingml/2006/main" wrap="square" lIns="0" tIns="0" rIns="0" bIns="0" anchor="ctr">
+            <a:normAutofit fontScale="100000"/>
+          </a:bodyPr>
+          <a:lstStyle xmlns:a="http://schemas.openxmlformats.org/drawingml/2006/main"/>
+          <a:p xmlns:a="http://schemas.openxmlformats.org/drawingml/2006/main">
+            <a:pPr algn="l">
+              <a:defRPr sz="1725" b="1">
+                <a:solidFill>
+                  <a:srgbClr val="111C31"/>
+                </a:solidFill>
+              </a:defRPr>
+            </a:pPr>
+            <a:r>
+              <a:rPr sz="1725" b="1">
+                <a:solidFill>
+                  <a:srgbClr val="111C31"/>
+                </a:solidFill>
+              </a:rPr>
+              <a:t>解决了什么问题</a:t>
+            </a:r>
+          </a:p>
+        </p:txBody>
+      </p:sp>
+      <p:sp>
+        <p:nvSpPr>
+          <p:cNvPr id="25" name="problem-body">
+            <a:extLst xmlns:a="http://schemas.openxmlformats.org/drawingml/2006/main">
+              <a:ext uri="{FF2B5EF4-FFF2-40B4-BE49-F238E27FC236}">
+                <a16:creationId xmlns:a16="http://schemas.microsoft.com/office/drawing/2014/main" id="{079EF836-5F99-4886-9D40-D2633B7FD27B}"/>
+              </a:ext>
+            </a:extLst>
+          </p:cNvPr>
+          <p:cNvSpPr>
+            <a:spLocks xmlns:a="http://schemas.openxmlformats.org/drawingml/2006/main" noGrp="1"/>
+          </p:cNvSpPr>
+          <p:nvPr/>
+        </p:nvSpPr>
+        <p:spPr>
+          <a:xfrm xmlns:a="http://schemas.openxmlformats.org/drawingml/2006/main">
+            <a:off x="723900" y="2257425"/>
+            <a:ext cx="4476750" cy="628650"/>
+          </a:xfrm>
+          <a:prstGeom xmlns:a="http://schemas.openxmlformats.org/drawingml/2006/main" prst="rect">
+            <a:avLst/>
+          </a:prstGeom>
+          <a:noFill xmlns:a="http://schemas.openxmlformats.org/drawingml/2006/main"/>
+          <a:ln xmlns:a="http://schemas.openxmlformats.org/drawingml/2006/main" w="0">
+            <a:noFill/>
+            <a:prstDash val="solid"/>
+          </a:ln>
+        </p:spPr>
+        <p:txBody>
+          <a:bodyPr xmlns:a="http://schemas.openxmlformats.org/drawingml/2006/main" wrap="square" lIns="0" tIns="0" rIns="0" bIns="0" anchor="t">
+            <a:normAutofit fontScale="100000"/>
+          </a:bodyPr>
+          <a:lstStyle xmlns:a="http://schemas.openxmlformats.org/drawingml/2006/main"/>
+          <a:p xmlns:a="http://schemas.openxmlformats.org/drawingml/2006/main">
+            <a:pPr algn="l">
+              <a:defRPr sz="1238" b="0">
+                <a:solidFill>
+                  <a:srgbClr val="6E7A90"/>
+                </a:solidFill>
+              </a:defRPr>
+            </a:pPr>
+            <a:r>
+              <a:rPr sz="1238" b="0">
+                <a:solidFill>
+                  <a:srgbClr val="6E7A90"/>
+                </a:solidFill>
+              </a:rPr>
+              <a:t>自然语言SOP存在歧义，Judge可能每次按照不同标准打分。</a:t>
+            </a:r>
+          </a:p>
+        </p:txBody>
+      </p:sp>
+      <p:sp>
+        <p:nvSpPr>
+          <p:cNvPr id="26" name="implementation-accent">
+            <a:extLst xmlns:a="http://schemas.openxmlformats.org/drawingml/2006/main">
+              <a:ext uri="{FF2B5EF4-FFF2-40B4-BE49-F238E27FC236}">
+                <a16:creationId xmlns:a16="http://schemas.microsoft.com/office/drawing/2014/main" id="{0C6C29B1-DD49-4628-8F76-F83422B81387}"/>
+              </a:ext>
+            </a:extLst>
+          </p:cNvPr>
+          <p:cNvSpPr>
+            <a:spLocks xmlns:a="http://schemas.openxmlformats.org/drawingml/2006/main" noGrp="1"/>
+          </p:cNvSpPr>
+          <p:nvPr/>
+        </p:nvSpPr>
+        <p:spPr>
+          <a:xfrm xmlns:a="http://schemas.openxmlformats.org/drawingml/2006/main">
+            <a:off x="533400" y="3086100"/>
+            <a:ext cx="66675" cy="342900"/>
+          </a:xfrm>
+          <a:prstGeom xmlns:a="http://schemas.openxmlformats.org/drawingml/2006/main" prst="roundRect">
+            <a:avLst>
+              <a:gd name="adj" fmla="val 50000"/>
+            </a:avLst>
+          </a:prstGeom>
+          <a:solidFill xmlns:a="http://schemas.openxmlformats.org/drawingml/2006/main">
+            <a:srgbClr val="FFC300"/>
+          </a:solidFill>
+          <a:ln xmlns:a="http://schemas.openxmlformats.org/drawingml/2006/main" w="0">
+            <a:noFill/>
+            <a:prstDash val="solid"/>
+          </a:ln>
+        </p:spPr>
+      </p:sp>
+      <p:sp>
+        <p:nvSpPr>
+          <p:cNvPr id="27" name="implementation-heading">
+            <a:extLst xmlns:a="http://schemas.openxmlformats.org/drawingml/2006/main">
+              <a:ext uri="{FF2B5EF4-FFF2-40B4-BE49-F238E27FC236}">
+                <a16:creationId xmlns:a16="http://schemas.microsoft.com/office/drawing/2014/main" id="{EC37DCB2-9C1B-42A9-B571-3945FBAED8A5}"/>
+              </a:ext>
+            </a:extLst>
+          </p:cNvPr>
+          <p:cNvSpPr>
+            <a:spLocks xmlns:a="http://schemas.openxmlformats.org/drawingml/2006/main" noGrp="1"/>
+          </p:cNvSpPr>
+          <p:nvPr/>
+        </p:nvSpPr>
+        <p:spPr>
+          <a:xfrm xmlns:a="http://schemas.openxmlformats.org/drawingml/2006/main">
+            <a:off x="723900" y="3067050"/>
+            <a:ext cx="4476750" cy="400050"/>
+          </a:xfrm>
+          <a:prstGeom xmlns:a="http://schemas.openxmlformats.org/drawingml/2006/main" prst="rect">
+            <a:avLst/>
+          </a:prstGeom>
+          <a:noFill xmlns:a="http://schemas.openxmlformats.org/drawingml/2006/main"/>
+          <a:ln xmlns:a="http://schemas.openxmlformats.org/drawingml/2006/main" w="0">
+            <a:noFill/>
+            <a:prstDash val="solid"/>
+          </a:ln>
+        </p:spPr>
+        <p:txBody>
+          <a:bodyPr xmlns:a="http://schemas.openxmlformats.org/drawingml/2006/main" wrap="square" lIns="0" tIns="0" rIns="0" bIns="0" anchor="ctr">
+            <a:normAutofit fontScale="100000"/>
+          </a:bodyPr>
+          <a:lstStyle xmlns:a="http://schemas.openxmlformats.org/drawingml/2006/main"/>
+          <a:p xmlns:a="http://schemas.openxmlformats.org/drawingml/2006/main">
+            <a:pPr algn="l">
+              <a:defRPr sz="1725" b="1">
+                <a:solidFill>
+                  <a:srgbClr val="111C31"/>
+                </a:solidFill>
+              </a:defRPr>
+            </a:pPr>
+            <a:r>
+              <a:rPr sz="1725" b="1">
+                <a:solidFill>
+                  <a:srgbClr val="111C31"/>
+                </a:solidFill>
+              </a:rPr>
+              <a:t>这么设计是怎么实现的</a:t>
+            </a:r>
+          </a:p>
+        </p:txBody>
+      </p:sp>
+      <p:sp>
+        <p:nvSpPr>
+          <p:cNvPr id="28" name="implementation-body">
+            <a:extLst xmlns:a="http://schemas.openxmlformats.org/drawingml/2006/main">
+              <a:ext uri="{FF2B5EF4-FFF2-40B4-BE49-F238E27FC236}">
+                <a16:creationId xmlns:a16="http://schemas.microsoft.com/office/drawing/2014/main" id="{306037A7-E046-4BAD-86F5-B4AF9ED86F4B}"/>
+              </a:ext>
+            </a:extLst>
+          </p:cNvPr>
+          <p:cNvSpPr>
+            <a:spLocks xmlns:a="http://schemas.openxmlformats.org/drawingml/2006/main" noGrp="1"/>
+          </p:cNvSpPr>
+          <p:nvPr/>
+        </p:nvSpPr>
+        <p:spPr>
+          <a:xfrm xmlns:a="http://schemas.openxmlformats.org/drawingml/2006/main">
+            <a:off x="723900" y="3495675"/>
+            <a:ext cx="4476750" cy="628650"/>
+          </a:xfrm>
+          <a:prstGeom xmlns:a="http://schemas.openxmlformats.org/drawingml/2006/main" prst="rect">
+            <a:avLst/>
+          </a:prstGeom>
+          <a:noFill xmlns:a="http://schemas.openxmlformats.org/drawingml/2006/main"/>
+          <a:ln xmlns:a="http://schemas.openxmlformats.org/drawingml/2006/main" w="0">
+            <a:noFill/>
+            <a:prstDash val="solid"/>
+          </a:ln>
+        </p:spPr>
+        <p:txBody>
+          <a:bodyPr xmlns:a="http://schemas.openxmlformats.org/drawingml/2006/main" wrap="square" lIns="0" tIns="0" rIns="0" bIns="0" anchor="t">
+            <a:normAutofit fontScale="100000"/>
+          </a:bodyPr>
+          <a:lstStyle xmlns:a="http://schemas.openxmlformats.org/drawingml/2006/main"/>
+          <a:p xmlns:a="http://schemas.openxmlformats.org/drawingml/2006/main">
+            <a:pPr algn="l">
+              <a:defRPr sz="1238" b="0">
+                <a:solidFill>
+                  <a:srgbClr val="6E7A90"/>
+                </a:solidFill>
+              </a:defRPr>
+            </a:pPr>
+            <a:r>
+              <a:rPr sz="1238" b="0">
+                <a:solidFill>
+                  <a:srgbClr val="6E7A90"/>
+                </a:solidFill>
+              </a:rPr>
+              <a:t>把SOP编译成L0通用红线与L1业务规则；每个检查点保留来源、条件和严重度。</a:t>
+            </a:r>
+          </a:p>
+        </p:txBody>
+      </p:sp>
+      <p:sp>
+        <p:nvSpPr>
+          <p:cNvPr id="29" name="advantage-accent">
+            <a:extLst xmlns:a="http://schemas.openxmlformats.org/drawingml/2006/main">
+              <a:ext uri="{FF2B5EF4-FFF2-40B4-BE49-F238E27FC236}">
+                <a16:creationId xmlns:a16="http://schemas.microsoft.com/office/drawing/2014/main" id="{4487EA6B-2914-4057-A998-3CEB5C829ABD}"/>
+              </a:ext>
+            </a:extLst>
+          </p:cNvPr>
+          <p:cNvSpPr>
+            <a:spLocks xmlns:a="http://schemas.openxmlformats.org/drawingml/2006/main" noGrp="1"/>
+          </p:cNvSpPr>
+          <p:nvPr/>
+        </p:nvSpPr>
+        <p:spPr>
+          <a:xfrm xmlns:a="http://schemas.openxmlformats.org/drawingml/2006/main">
+            <a:off x="533400" y="4419600"/>
+            <a:ext cx="66675" cy="342900"/>
+          </a:xfrm>
+          <a:prstGeom xmlns:a="http://schemas.openxmlformats.org/drawingml/2006/main" prst="roundRect">
+            <a:avLst>
+              <a:gd name="adj" fmla="val 50000"/>
+            </a:avLst>
+          </a:prstGeom>
+          <a:solidFill xmlns:a="http://schemas.openxmlformats.org/drawingml/2006/main">
+            <a:srgbClr val="FFC300"/>
+          </a:solidFill>
+          <a:ln xmlns:a="http://schemas.openxmlformats.org/drawingml/2006/main" w="0">
+            <a:noFill/>
+            <a:prstDash val="solid"/>
+          </a:ln>
+        </p:spPr>
+      </p:sp>
+      <p:sp>
+        <p:nvSpPr>
+          <p:cNvPr id="30" name="advantage-heading">
+            <a:extLst xmlns:a="http://schemas.openxmlformats.org/drawingml/2006/main">
+              <a:ext uri="{FF2B5EF4-FFF2-40B4-BE49-F238E27FC236}">
+                <a16:creationId xmlns:a16="http://schemas.microsoft.com/office/drawing/2014/main" id="{37CE9FFD-DD4A-4BAB-B4AC-652894AFBDEA}"/>
+              </a:ext>
+            </a:extLst>
+          </p:cNvPr>
+          <p:cNvSpPr>
+            <a:spLocks xmlns:a="http://schemas.openxmlformats.org/drawingml/2006/main" noGrp="1"/>
+          </p:cNvSpPr>
+          <p:nvPr/>
+        </p:nvSpPr>
+        <p:spPr>
+          <a:xfrm xmlns:a="http://schemas.openxmlformats.org/drawingml/2006/main">
+            <a:off x="723900" y="4400550"/>
+            <a:ext cx="4476750" cy="400050"/>
+          </a:xfrm>
+          <a:prstGeom xmlns:a="http://schemas.openxmlformats.org/drawingml/2006/main" prst="rect">
+            <a:avLst/>
+          </a:prstGeom>
+          <a:noFill xmlns:a="http://schemas.openxmlformats.org/drawingml/2006/main"/>
+          <a:ln xmlns:a="http://schemas.openxmlformats.org/drawingml/2006/main" w="0">
+            <a:noFill/>
+            <a:prstDash val="solid"/>
+          </a:ln>
+        </p:spPr>
+        <p:txBody>
+          <a:bodyPr xmlns:a="http://schemas.openxmlformats.org/drawingml/2006/main" wrap="square" lIns="0" tIns="0" rIns="0" bIns="0" anchor="ctr">
+            <a:normAutofit fontScale="100000"/>
+          </a:bodyPr>
+          <a:lstStyle xmlns:a="http://schemas.openxmlformats.org/drawingml/2006/main"/>
+          <a:p xmlns:a="http://schemas.openxmlformats.org/drawingml/2006/main">
+            <a:pPr algn="l">
+              <a:defRPr sz="1725" b="1">
+                <a:solidFill>
+                  <a:srgbClr val="111C31"/>
+                </a:solidFill>
+              </a:defRPr>
+            </a:pPr>
+            <a:r>
+              <a:rPr sz="1725" b="1">
+                <a:solidFill>
+                  <a:srgbClr val="111C31"/>
+                </a:solidFill>
+              </a:rPr>
+              <a:t>这么设计的优势</a:t>
+            </a:r>
+          </a:p>
+        </p:txBody>
+      </p:sp>
+      <p:sp>
+        <p:nvSpPr>
+          <p:cNvPr id="31" name="advantage-body">
+            <a:extLst xmlns:a="http://schemas.openxmlformats.org/drawingml/2006/main">
+              <a:ext uri="{FF2B5EF4-FFF2-40B4-BE49-F238E27FC236}">
+                <a16:creationId xmlns:a16="http://schemas.microsoft.com/office/drawing/2014/main" id="{9FE45EED-D1AA-4926-851B-28968ABF3B33}"/>
+              </a:ext>
+            </a:extLst>
+          </p:cNvPr>
+          <p:cNvSpPr>
+            <a:spLocks xmlns:a="http://schemas.openxmlformats.org/drawingml/2006/main" noGrp="1"/>
+          </p:cNvSpPr>
+          <p:nvPr/>
+        </p:nvSpPr>
+        <p:spPr>
+          <a:xfrm xmlns:a="http://schemas.openxmlformats.org/drawingml/2006/main">
+            <a:off x="723900" y="4829175"/>
+            <a:ext cx="4476750" cy="628650"/>
+          </a:xfrm>
+          <a:prstGeom xmlns:a="http://schemas.openxmlformats.org/drawingml/2006/main" prst="rect">
+            <a:avLst/>
+          </a:prstGeom>
+          <a:noFill xmlns:a="http://schemas.openxmlformats.org/drawingml/2006/main"/>
+          <a:ln xmlns:a="http://schemas.openxmlformats.org/drawingml/2006/main" w="0">
+            <a:noFill/>
+            <a:prstDash val="solid"/>
+          </a:ln>
+        </p:spPr>
+        <p:txBody>
+          <a:bodyPr xmlns:a="http://schemas.openxmlformats.org/drawingml/2006/main" wrap="square" lIns="0" tIns="0" rIns="0" bIns="0" anchor="t">
+            <a:normAutofit fontScale="100000"/>
+          </a:bodyPr>
+          <a:lstStyle xmlns:a="http://schemas.openxmlformats.org/drawingml/2006/main"/>
+          <a:p xmlns:a="http://schemas.openxmlformats.org/drawingml/2006/main">
+            <a:pPr algn="l">
+              <a:defRPr sz="1238" b="0">
+                <a:solidFill>
+                  <a:srgbClr val="6E7A90"/>
+                </a:solidFill>
+              </a:defRPr>
+            </a:pPr>
+            <a:r>
+              <a:rPr sz="1238" b="0">
+                <a:solidFill>
+                  <a:srgbClr val="6E7A90"/>
+                </a:solidFill>
+              </a:rPr>
+              <a:t>评分标准从提示词变成可执行合同，既能自动评分，也能逐项审计和复核。</a:t>
             </a:r>
           </a:p>
         </p:txBody>
@@ -7433,478 +7995,6 @@
       </p:sp>
       <p:sp>
         <p:nvSpPr>
-          <p:cNvPr id="5" name="decision">
-            <a:extLst xmlns:a="http://schemas.openxmlformats.org/drawingml/2006/main">
-              <a:ext uri="{FF2B5EF4-FFF2-40B4-BE49-F238E27FC236}">
-                <a16:creationId xmlns:a16="http://schemas.microsoft.com/office/drawing/2014/main" id="{B0CE3BC9-D8B1-4041-B5E5-CD8D93B3556B}"/>
-              </a:ext>
-            </a:extLst>
-          </p:cNvPr>
-          <p:cNvSpPr>
-            <a:spLocks xmlns:a="http://schemas.openxmlformats.org/drawingml/2006/main" noGrp="1"/>
-          </p:cNvSpPr>
-          <p:nvPr/>
-        </p:nvSpPr>
-        <p:spPr>
-          <a:xfrm xmlns:a="http://schemas.openxmlformats.org/drawingml/2006/main">
-            <a:off x="533400" y="1866900"/>
-            <a:ext cx="4000500" cy="857250"/>
-          </a:xfrm>
-          <a:prstGeom xmlns:a="http://schemas.openxmlformats.org/drawingml/2006/main" prst="rect">
-            <a:avLst/>
-          </a:prstGeom>
-          <a:noFill xmlns:a="http://schemas.openxmlformats.org/drawingml/2006/main"/>
-          <a:ln xmlns:a="http://schemas.openxmlformats.org/drawingml/2006/main" w="0">
-            <a:noFill/>
-            <a:prstDash val="solid"/>
-          </a:ln>
-        </p:spPr>
-        <p:txBody>
-          <a:bodyPr xmlns:a="http://schemas.openxmlformats.org/drawingml/2006/main" anchor="t">
-            <a:normAutofit fontScale="100000"/>
-          </a:bodyPr>
-          <a:lstStyle xmlns:a="http://schemas.openxmlformats.org/drawingml/2006/main"/>
-          <a:p xmlns:a="http://schemas.openxmlformats.org/drawingml/2006/main">
-            <a:pPr algn="l">
-              <a:buNone/>
-              <a:defRPr sz="2400" b="1">
-                <a:solidFill>
-                  <a:srgbClr val="111827"/>
-                </a:solidFill>
-                <a:latin typeface="PingFang SC"/>
-                <a:ea typeface="PingFang SC"/>
-                <a:cs typeface="PingFang SC"/>
-              </a:defRPr>
-            </a:pPr>
-            <a:r>
-              <a:rPr sz="2400" b="1">
-                <a:solidFill>
-                  <a:srgbClr val="111827"/>
-                </a:solidFill>
-                <a:latin typeface="PingFang SC"/>
-                <a:ea typeface="PingFang SC"/>
-                <a:cs typeface="PingFang SC"/>
-              </a:rPr>
-              <a:t>不是等线上出事，而是上线前主动撞边界</a:t>
-            </a:r>
-          </a:p>
-        </p:txBody>
-      </p:sp>
-      <p:sp>
-        <p:nvSpPr>
-          <p:cNvPr id="6" name="decision-sub">
-            <a:extLst xmlns:a="http://schemas.openxmlformats.org/drawingml/2006/main">
-              <a:ext uri="{FF2B5EF4-FFF2-40B4-BE49-F238E27FC236}">
-                <a16:creationId xmlns:a16="http://schemas.microsoft.com/office/drawing/2014/main" id="{C81463E1-CB7C-4B7A-8684-388032501444}"/>
-              </a:ext>
-            </a:extLst>
-          </p:cNvPr>
-          <p:cNvSpPr>
-            <a:spLocks xmlns:a="http://schemas.openxmlformats.org/drawingml/2006/main" noGrp="1"/>
-          </p:cNvSpPr>
-          <p:nvPr/>
-        </p:nvSpPr>
-        <p:spPr>
-          <a:xfrm xmlns:a="http://schemas.openxmlformats.org/drawingml/2006/main">
-            <a:off x="552450" y="2781300"/>
-            <a:ext cx="4476750" cy="323850"/>
-          </a:xfrm>
-          <a:prstGeom xmlns:a="http://schemas.openxmlformats.org/drawingml/2006/main" prst="rect">
-            <a:avLst/>
-          </a:prstGeom>
-          <a:noFill xmlns:a="http://schemas.openxmlformats.org/drawingml/2006/main"/>
-          <a:ln xmlns:a="http://schemas.openxmlformats.org/drawingml/2006/main" w="0">
-            <a:noFill/>
-            <a:prstDash val="solid"/>
-          </a:ln>
-        </p:spPr>
-        <p:txBody>
-          <a:bodyPr xmlns:a="http://schemas.openxmlformats.org/drawingml/2006/main" anchor="t">
-            <a:normAutofit fontScale="100000"/>
-          </a:bodyPr>
-          <a:lstStyle xmlns:a="http://schemas.openxmlformats.org/drawingml/2006/main"/>
-          <a:p xmlns:a="http://schemas.openxmlformats.org/drawingml/2006/main">
-            <a:pPr algn="l">
-              <a:buNone/>
-              <a:defRPr sz="1200" b="0">
-                <a:solidFill>
-                  <a:srgbClr val="667085"/>
-                </a:solidFill>
-                <a:latin typeface="PingFang SC"/>
-                <a:ea typeface="PingFang SC"/>
-                <a:cs typeface="PingFang SC"/>
-              </a:defRPr>
-            </a:pPr>
-            <a:r>
-              <a:rPr sz="1200" b="0">
-                <a:solidFill>
-                  <a:srgbClr val="667085"/>
-                </a:solidFill>
-                <a:latin typeface="PingFang SC"/>
-                <a:ea typeface="PingFang SC"/>
-                <a:cs typeface="PingFang SC"/>
-              </a:rPr>
-              <a:t>不做这一步：历史日志只覆盖已发生情况，危险分支可能漏掉。</a:t>
-            </a:r>
-          </a:p>
-        </p:txBody>
-      </p:sp>
-      <p:sp>
-        <p:nvSpPr>
-          <p:cNvPr id="7" name="stat-0">
-            <a:extLst xmlns:a="http://schemas.openxmlformats.org/drawingml/2006/main">
-              <a:ext uri="{FF2B5EF4-FFF2-40B4-BE49-F238E27FC236}">
-                <a16:creationId xmlns:a16="http://schemas.microsoft.com/office/drawing/2014/main" id="{A64EB69F-1AD3-45AE-93F6-D916A936F061}"/>
-              </a:ext>
-            </a:extLst>
-          </p:cNvPr>
-          <p:cNvSpPr>
-            <a:spLocks xmlns:a="http://schemas.openxmlformats.org/drawingml/2006/main" noGrp="1"/>
-          </p:cNvSpPr>
-          <p:nvPr/>
-        </p:nvSpPr>
-        <p:spPr>
-          <a:xfrm xmlns:a="http://schemas.openxmlformats.org/drawingml/2006/main">
-            <a:off x="533400" y="3581400"/>
-            <a:ext cx="1352550" cy="666750"/>
-          </a:xfrm>
-          <a:prstGeom xmlns:a="http://schemas.openxmlformats.org/drawingml/2006/main" prst="rect">
-            <a:avLst/>
-          </a:prstGeom>
-          <a:noFill xmlns:a="http://schemas.openxmlformats.org/drawingml/2006/main"/>
-          <a:ln xmlns:a="http://schemas.openxmlformats.org/drawingml/2006/main" w="0">
-            <a:noFill/>
-            <a:prstDash val="solid"/>
-          </a:ln>
-        </p:spPr>
-        <p:txBody>
-          <a:bodyPr xmlns:a="http://schemas.openxmlformats.org/drawingml/2006/main" anchor="t">
-            <a:normAutofit fontScale="72037"/>
-          </a:bodyPr>
-          <a:lstStyle xmlns:a="http://schemas.openxmlformats.org/drawingml/2006/main"/>
-          <a:p xmlns:a="http://schemas.openxmlformats.org/drawingml/2006/main">
-            <a:pPr algn="l">
-              <a:buNone/>
-              <a:defRPr sz="3300" b="1">
-                <a:solidFill>
-                  <a:srgbClr val="111827"/>
-                </a:solidFill>
-                <a:latin typeface="PingFang SC"/>
-                <a:ea typeface="PingFang SC"/>
-                <a:cs typeface="PingFang SC"/>
-              </a:defRPr>
-            </a:pPr>
-            <a:r>
-              <a:rPr sz="3300" b="1">
-                <a:solidFill>
-                  <a:srgbClr val="111827"/>
-                </a:solidFill>
-                <a:latin typeface="PingFang SC"/>
-                <a:ea typeface="PingFang SC"/>
-                <a:cs typeface="PingFang SC"/>
-              </a:rPr>
-              <a:t>Persona</a:t>
-            </a:r>
-          </a:p>
-        </p:txBody>
-      </p:sp>
-      <p:sp>
-        <p:nvSpPr>
-          <p:cNvPr id="8" name="stat-label-0">
-            <a:extLst xmlns:a="http://schemas.openxmlformats.org/drawingml/2006/main">
-              <a:ext uri="{FF2B5EF4-FFF2-40B4-BE49-F238E27FC236}">
-                <a16:creationId xmlns:a16="http://schemas.microsoft.com/office/drawing/2014/main" id="{7261F069-84D1-4836-A1CB-0A3A5D5C44E7}"/>
-              </a:ext>
-            </a:extLst>
-          </p:cNvPr>
-          <p:cNvSpPr>
-            <a:spLocks xmlns:a="http://schemas.openxmlformats.org/drawingml/2006/main" noGrp="1"/>
-          </p:cNvSpPr>
-          <p:nvPr/>
-        </p:nvSpPr>
-        <p:spPr>
-          <a:xfrm xmlns:a="http://schemas.openxmlformats.org/drawingml/2006/main">
-            <a:off x="533400" y="4286250"/>
-            <a:ext cx="1352550" cy="266700"/>
-          </a:xfrm>
-          <a:prstGeom xmlns:a="http://schemas.openxmlformats.org/drawingml/2006/main" prst="rect">
-            <a:avLst/>
-          </a:prstGeom>
-          <a:noFill xmlns:a="http://schemas.openxmlformats.org/drawingml/2006/main"/>
-          <a:ln xmlns:a="http://schemas.openxmlformats.org/drawingml/2006/main" w="0">
-            <a:noFill/>
-            <a:prstDash val="solid"/>
-          </a:ln>
-        </p:spPr>
-        <p:txBody>
-          <a:bodyPr xmlns:a="http://schemas.openxmlformats.org/drawingml/2006/main" anchor="t">
-            <a:normAutofit fontScale="100000"/>
-          </a:bodyPr>
-          <a:lstStyle xmlns:a="http://schemas.openxmlformats.org/drawingml/2006/main"/>
-          <a:p xmlns:a="http://schemas.openxmlformats.org/drawingml/2006/main">
-            <a:pPr algn="l">
-              <a:buNone/>
-              <a:defRPr sz="975" b="0">
-                <a:solidFill>
-                  <a:srgbClr val="667085"/>
-                </a:solidFill>
-                <a:latin typeface="PingFang SC"/>
-                <a:ea typeface="PingFang SC"/>
-                <a:cs typeface="PingFang SC"/>
-              </a:defRPr>
-            </a:pPr>
-            <a:r>
-              <a:rPr sz="975" b="0">
-                <a:solidFill>
-                  <a:srgbClr val="667085"/>
-                </a:solidFill>
-                <a:latin typeface="PingFang SC"/>
-                <a:ea typeface="PingFang SC"/>
-                <a:cs typeface="PingFang SC"/>
-              </a:rPr>
-              <a:t>用户行为边界</a:t>
-            </a:r>
-          </a:p>
-        </p:txBody>
-      </p:sp>
-      <p:sp>
-        <p:nvSpPr>
-          <p:cNvPr id="9" name="stat-1">
-            <a:extLst xmlns:a="http://schemas.openxmlformats.org/drawingml/2006/main">
-              <a:ext uri="{FF2B5EF4-FFF2-40B4-BE49-F238E27FC236}">
-                <a16:creationId xmlns:a16="http://schemas.microsoft.com/office/drawing/2014/main" id="{C2588DEE-1FC2-4818-B044-00FEF0E24E2D}"/>
-              </a:ext>
-            </a:extLst>
-          </p:cNvPr>
-          <p:cNvSpPr>
-            <a:spLocks xmlns:a="http://schemas.openxmlformats.org/drawingml/2006/main" noGrp="1"/>
-          </p:cNvSpPr>
-          <p:nvPr/>
-        </p:nvSpPr>
-        <p:spPr>
-          <a:xfrm xmlns:a="http://schemas.openxmlformats.org/drawingml/2006/main">
-            <a:off x="2171700" y="3581400"/>
-            <a:ext cx="1352550" cy="666750"/>
-          </a:xfrm>
-          <a:prstGeom xmlns:a="http://schemas.openxmlformats.org/drawingml/2006/main" prst="rect">
-            <a:avLst/>
-          </a:prstGeom>
-          <a:noFill xmlns:a="http://schemas.openxmlformats.org/drawingml/2006/main"/>
-          <a:ln xmlns:a="http://schemas.openxmlformats.org/drawingml/2006/main" w="0">
-            <a:noFill/>
-            <a:prstDash val="solid"/>
-          </a:ln>
-        </p:spPr>
-        <p:txBody>
-          <a:bodyPr xmlns:a="http://schemas.openxmlformats.org/drawingml/2006/main" anchor="t">
-            <a:normAutofit fontScale="69767"/>
-          </a:bodyPr>
-          <a:lstStyle xmlns:a="http://schemas.openxmlformats.org/drawingml/2006/main"/>
-          <a:p xmlns:a="http://schemas.openxmlformats.org/drawingml/2006/main">
-            <a:pPr algn="l">
-              <a:buNone/>
-              <a:defRPr sz="3300" b="1">
-                <a:solidFill>
-                  <a:srgbClr val="111827"/>
-                </a:solidFill>
-                <a:latin typeface="PingFang SC"/>
-                <a:ea typeface="PingFang SC"/>
-                <a:cs typeface="PingFang SC"/>
-              </a:defRPr>
-            </a:pPr>
-            <a:r>
-              <a:rPr sz="3300" b="1">
-                <a:solidFill>
-                  <a:srgbClr val="111827"/>
-                </a:solidFill>
-                <a:latin typeface="PingFang SC"/>
-                <a:ea typeface="PingFang SC"/>
-                <a:cs typeface="PingFang SC"/>
-              </a:rPr>
-              <a:t>对抗目标</a:t>
-            </a:r>
-          </a:p>
-        </p:txBody>
-      </p:sp>
-      <p:sp>
-        <p:nvSpPr>
-          <p:cNvPr id="10" name="stat-label-1">
-            <a:extLst xmlns:a="http://schemas.openxmlformats.org/drawingml/2006/main">
-              <a:ext uri="{FF2B5EF4-FFF2-40B4-BE49-F238E27FC236}">
-                <a16:creationId xmlns:a16="http://schemas.microsoft.com/office/drawing/2014/main" id="{F2DA5F17-C3CD-4B4D-96F7-5057D5458574}"/>
-              </a:ext>
-            </a:extLst>
-          </p:cNvPr>
-          <p:cNvSpPr>
-            <a:spLocks xmlns:a="http://schemas.openxmlformats.org/drawingml/2006/main" noGrp="1"/>
-          </p:cNvSpPr>
-          <p:nvPr/>
-        </p:nvSpPr>
-        <p:spPr>
-          <a:xfrm xmlns:a="http://schemas.openxmlformats.org/drawingml/2006/main">
-            <a:off x="2171700" y="4286250"/>
-            <a:ext cx="1352550" cy="266700"/>
-          </a:xfrm>
-          <a:prstGeom xmlns:a="http://schemas.openxmlformats.org/drawingml/2006/main" prst="rect">
-            <a:avLst/>
-          </a:prstGeom>
-          <a:noFill xmlns:a="http://schemas.openxmlformats.org/drawingml/2006/main"/>
-          <a:ln xmlns:a="http://schemas.openxmlformats.org/drawingml/2006/main" w="0">
-            <a:noFill/>
-            <a:prstDash val="solid"/>
-          </a:ln>
-        </p:spPr>
-        <p:txBody>
-          <a:bodyPr xmlns:a="http://schemas.openxmlformats.org/drawingml/2006/main" anchor="t">
-            <a:normAutofit fontScale="100000"/>
-          </a:bodyPr>
-          <a:lstStyle xmlns:a="http://schemas.openxmlformats.org/drawingml/2006/main"/>
-          <a:p xmlns:a="http://schemas.openxmlformats.org/drawingml/2006/main">
-            <a:pPr algn="l">
-              <a:buNone/>
-              <a:defRPr sz="975" b="0">
-                <a:solidFill>
-                  <a:srgbClr val="667085"/>
-                </a:solidFill>
-                <a:latin typeface="PingFang SC"/>
-                <a:ea typeface="PingFang SC"/>
-                <a:cs typeface="PingFang SC"/>
-              </a:defRPr>
-            </a:pPr>
-            <a:r>
-              <a:rPr sz="975" b="0">
-                <a:solidFill>
-                  <a:srgbClr val="667085"/>
-                </a:solidFill>
-                <a:latin typeface="PingFang SC"/>
-                <a:ea typeface="PingFang SC"/>
-                <a:cs typeface="PingFang SC"/>
-              </a:rPr>
-              <a:t>主动撞脆弱点</a:t>
-            </a:r>
-          </a:p>
-        </p:txBody>
-      </p:sp>
-      <p:sp>
-        <p:nvSpPr>
-          <p:cNvPr id="11" name="stat-2">
-            <a:extLst xmlns:a="http://schemas.openxmlformats.org/drawingml/2006/main">
-              <a:ext uri="{FF2B5EF4-FFF2-40B4-BE49-F238E27FC236}">
-                <a16:creationId xmlns:a16="http://schemas.microsoft.com/office/drawing/2014/main" id="{A2568244-186A-4F43-AECE-BB8E99D7ECA7}"/>
-              </a:ext>
-            </a:extLst>
-          </p:cNvPr>
-          <p:cNvSpPr>
-            <a:spLocks xmlns:a="http://schemas.openxmlformats.org/drawingml/2006/main" noGrp="1"/>
-          </p:cNvSpPr>
-          <p:nvPr/>
-        </p:nvSpPr>
-        <p:spPr>
-          <a:xfrm xmlns:a="http://schemas.openxmlformats.org/drawingml/2006/main">
-            <a:off x="3810000" y="3581400"/>
-            <a:ext cx="1352550" cy="666750"/>
-          </a:xfrm>
-          <a:prstGeom xmlns:a="http://schemas.openxmlformats.org/drawingml/2006/main" prst="rect">
-            <a:avLst/>
-          </a:prstGeom>
-          <a:noFill xmlns:a="http://schemas.openxmlformats.org/drawingml/2006/main"/>
-          <a:ln xmlns:a="http://schemas.openxmlformats.org/drawingml/2006/main" w="0">
-            <a:noFill/>
-            <a:prstDash val="solid"/>
-          </a:ln>
-        </p:spPr>
-        <p:txBody>
-          <a:bodyPr xmlns:a="http://schemas.openxmlformats.org/drawingml/2006/main" anchor="t">
-            <a:normAutofit fontScale="59133"/>
-          </a:bodyPr>
-          <a:lstStyle xmlns:a="http://schemas.openxmlformats.org/drawingml/2006/main"/>
-          <a:p xmlns:a="http://schemas.openxmlformats.org/drawingml/2006/main">
-            <a:pPr algn="l">
-              <a:buNone/>
-              <a:defRPr sz="3300" b="1">
-                <a:solidFill>
-                  <a:srgbClr val="111827"/>
-                </a:solidFill>
-                <a:latin typeface="PingFang SC"/>
-                <a:ea typeface="PingFang SC"/>
-                <a:cs typeface="PingFang SC"/>
-              </a:defRPr>
-            </a:pPr>
-            <a:r>
-              <a:rPr sz="3300" b="1">
-                <a:solidFill>
-                  <a:srgbClr val="111827"/>
-                </a:solidFill>
-                <a:latin typeface="PingFang SC"/>
-                <a:ea typeface="PingFang SC"/>
-                <a:cs typeface="PingFang SC"/>
-              </a:rPr>
-              <a:t>固定 Seed</a:t>
-            </a:r>
-          </a:p>
-        </p:txBody>
-      </p:sp>
-      <p:sp>
-        <p:nvSpPr>
-          <p:cNvPr id="12" name="stat-label-2">
-            <a:extLst xmlns:a="http://schemas.openxmlformats.org/drawingml/2006/main">
-              <a:ext uri="{FF2B5EF4-FFF2-40B4-BE49-F238E27FC236}">
-                <a16:creationId xmlns:a16="http://schemas.microsoft.com/office/drawing/2014/main" id="{46EB030E-F492-46E3-8C5B-6A223CBEDFAD}"/>
-              </a:ext>
-            </a:extLst>
-          </p:cNvPr>
-          <p:cNvSpPr>
-            <a:spLocks xmlns:a="http://schemas.openxmlformats.org/drawingml/2006/main" noGrp="1"/>
-          </p:cNvSpPr>
-          <p:nvPr/>
-        </p:nvSpPr>
-        <p:spPr>
-          <a:xfrm xmlns:a="http://schemas.openxmlformats.org/drawingml/2006/main">
-            <a:off x="3810000" y="4286250"/>
-            <a:ext cx="1352550" cy="266700"/>
-          </a:xfrm>
-          <a:prstGeom xmlns:a="http://schemas.openxmlformats.org/drawingml/2006/main" prst="rect">
-            <a:avLst/>
-          </a:prstGeom>
-          <a:noFill xmlns:a="http://schemas.openxmlformats.org/drawingml/2006/main"/>
-          <a:ln xmlns:a="http://schemas.openxmlformats.org/drawingml/2006/main" w="0">
-            <a:noFill/>
-            <a:prstDash val="solid"/>
-          </a:ln>
-        </p:spPr>
-        <p:txBody>
-          <a:bodyPr xmlns:a="http://schemas.openxmlformats.org/drawingml/2006/main" anchor="t">
-            <a:normAutofit fontScale="100000"/>
-          </a:bodyPr>
-          <a:lstStyle xmlns:a="http://schemas.openxmlformats.org/drawingml/2006/main"/>
-          <a:p xmlns:a="http://schemas.openxmlformats.org/drawingml/2006/main">
-            <a:pPr algn="l">
-              <a:buNone/>
-              <a:defRPr sz="975" b="0">
-                <a:solidFill>
-                  <a:srgbClr val="667085"/>
-                </a:solidFill>
-                <a:latin typeface="PingFang SC"/>
-                <a:ea typeface="PingFang SC"/>
-                <a:cs typeface="PingFang SC"/>
-              </a:defRPr>
-            </a:pPr>
-            <a:r>
-              <a:rPr sz="975" b="0">
-                <a:solidFill>
-                  <a:srgbClr val="667085"/>
-                </a:solidFill>
-                <a:latin typeface="PingFang SC"/>
-                <a:ea typeface="PingFang SC"/>
-                <a:cs typeface="PingFang SC"/>
-              </a:rPr>
-              <a:t>同场景可复现</a:t>
-            </a:r>
-          </a:p>
-        </p:txBody>
-      </p:sp>
-      <p:sp>
-        <p:nvSpPr>
           <p:cNvPr id="13" name="root-panel">
             <a:extLst xmlns:a="http://schemas.openxmlformats.org/drawingml/2006/main">
               <a:ext uri="{FF2B5EF4-FFF2-40B4-BE49-F238E27FC236}">
@@ -8200,65 +8290,6 @@
                 <a:cs typeface="PingFang SC"/>
               </a:rPr>
               <a:t/>
-            </a:r>
-          </a:p>
-        </p:txBody>
-      </p:sp>
-      <p:sp>
-        <p:nvSpPr>
-          <p:cNvPr id="18" name="source">
-            <a:extLst xmlns:a="http://schemas.openxmlformats.org/drawingml/2006/main">
-              <a:ext uri="{FF2B5EF4-FFF2-40B4-BE49-F238E27FC236}">
-                <a16:creationId xmlns:a16="http://schemas.microsoft.com/office/drawing/2014/main" id="{771875FB-1E0E-4D7E-850B-F8DA480B5683}"/>
-              </a:ext>
-            </a:extLst>
-          </p:cNvPr>
-          <p:cNvSpPr>
-            <a:spLocks xmlns:a="http://schemas.openxmlformats.org/drawingml/2006/main" noGrp="1"/>
-          </p:cNvSpPr>
-          <p:nvPr/>
-        </p:nvSpPr>
-        <p:spPr>
-          <a:xfrm xmlns:a="http://schemas.openxmlformats.org/drawingml/2006/main">
-            <a:off x="533400" y="6372225"/>
-            <a:ext cx="9906000" cy="190500"/>
-          </a:xfrm>
-          <a:prstGeom xmlns:a="http://schemas.openxmlformats.org/drawingml/2006/main" prst="rect">
-            <a:avLst/>
-          </a:prstGeom>
-          <a:noFill xmlns:a="http://schemas.openxmlformats.org/drawingml/2006/main"/>
-          <a:ln xmlns:a="http://schemas.openxmlformats.org/drawingml/2006/main" w="0">
-            <a:noFill/>
-            <a:prstDash val="solid"/>
-          </a:ln>
-        </p:spPr>
-        <p:txBody>
-          <a:bodyPr xmlns:a="http://schemas.openxmlformats.org/drawingml/2006/main" anchor="t">
-            <a:normAutofit fontScale="72222"/>
-          </a:bodyPr>
-          <a:lstStyle xmlns:a="http://schemas.openxmlformats.org/drawingml/2006/main"/>
-          <a:p xmlns:a="http://schemas.openxmlformats.org/drawingml/2006/main">
-            <a:pPr algn="l">
-              <a:buNone/>
-              <a:defRPr sz="900" b="0">
-                <a:solidFill>
-                  <a:srgbClr val="667085"/>
-                </a:solidFill>
-                <a:latin typeface="PingFang SC"/>
-                <a:ea typeface="PingFang SC"/>
-                <a:cs typeface="PingFang SC"/>
-              </a:defRPr>
-            </a:pPr>
-            <a:r>
-              <a:rPr sz="900" b="0">
-                <a:solidFill>
-                  <a:srgbClr val="667085"/>
-                </a:solidFill>
-                <a:latin typeface="PingFang SC"/>
-                <a:ea typeface="PingFang SC"/>
-                <a:cs typeface="PingFang SC"/>
-              </a:rPr>
-              <a:t>设计闭环：Persona × 对抗目标 × 固定 seed → 测试对话；两种入口共用后半条评测链。</a:t>
             </a:r>
           </a:p>
         </p:txBody>
@@ -8272,7 +8303,7 @@
           <p:nvPr/>
         </p:nvPicPr>
         <p:blipFill>
-          <a:blip xmlns:r="http://schemas.openxmlformats.org/officeDocument/2006/relationships" xmlns:a="http://schemas.openxmlformats.org/drawingml/2006/main" r:embed="R88d04edd735d4892"/>
+          <a:blip xmlns:r="http://schemas.openxmlformats.org/officeDocument/2006/relationships" xmlns:a="http://schemas.openxmlformats.org/drawingml/2006/main" r:embed="Re8c5d0cf7a694fb9"/>
           <a:srcRect xmlns:a="http://schemas.openxmlformats.org/drawingml/2006/main" l="0" t="2174" r="0" b="2174"/>
           <a:stretch xmlns:a="http://schemas.openxmlformats.org/drawingml/2006/main">
             <a:fillRect l="0" t="0" r="0" b="0"/>
@@ -8341,7 +8372,7 @@
                 <a:latin typeface="PingFang SC"/>
                 <a:ea typeface="PingFang SC"/>
                 <a:cs typeface="PingFang SC"/>
-                <a:hlinkClick xmlns:r="http://schemas.openxmlformats.org/officeDocument/2006/relationships" r:id="R78df1bbb13bc4d62"/>
+                <a:hlinkClick xmlns:r="http://schemas.openxmlformats.org/officeDocument/2006/relationships" r:id="Rfaa5e54138d74062"/>
               </a:rPr>
               <a:t>▶ 在线跑六步</a:t>
             </a:r>
@@ -8393,9 +8424,420 @@
                 <a:latin typeface="PingFang SC"/>
                 <a:ea typeface="PingFang SC"/>
                 <a:cs typeface="PingFang SC"/>
-                <a:hlinkClick xmlns:r="http://schemas.openxmlformats.org/officeDocument/2006/relationships" r:id="R6827eebe06d343b3"/>
+                <a:hlinkClick xmlns:r="http://schemas.openxmlformats.org/officeDocument/2006/relationships" r:id="Re0fe6c5662284923"/>
               </a:rPr>
               <a:t>结果备份 ↗</a:t>
+            </a:r>
+          </a:p>
+        </p:txBody>
+      </p:sp>
+      <p:sp>
+        <p:nvSpPr>
+          <p:cNvPr id="23" name="problem-accent">
+            <a:extLst xmlns:a="http://schemas.openxmlformats.org/drawingml/2006/main">
+              <a:ext uri="{FF2B5EF4-FFF2-40B4-BE49-F238E27FC236}">
+                <a16:creationId xmlns:a16="http://schemas.microsoft.com/office/drawing/2014/main" id="{B222B827-C6BE-4046-AD95-978466C4B900}"/>
+              </a:ext>
+            </a:extLst>
+          </p:cNvPr>
+          <p:cNvSpPr>
+            <a:spLocks xmlns:a="http://schemas.openxmlformats.org/drawingml/2006/main" noGrp="1"/>
+          </p:cNvSpPr>
+          <p:nvPr/>
+        </p:nvSpPr>
+        <p:spPr>
+          <a:xfrm xmlns:a="http://schemas.openxmlformats.org/drawingml/2006/main">
+            <a:off x="533400" y="1847850"/>
+            <a:ext cx="66675" cy="342900"/>
+          </a:xfrm>
+          <a:prstGeom xmlns:a="http://schemas.openxmlformats.org/drawingml/2006/main" prst="roundRect">
+            <a:avLst>
+              <a:gd name="adj" fmla="val 50000"/>
+            </a:avLst>
+          </a:prstGeom>
+          <a:solidFill xmlns:a="http://schemas.openxmlformats.org/drawingml/2006/main">
+            <a:srgbClr val="FFC300"/>
+          </a:solidFill>
+          <a:ln xmlns:a="http://schemas.openxmlformats.org/drawingml/2006/main" w="0">
+            <a:noFill/>
+            <a:prstDash val="solid"/>
+          </a:ln>
+        </p:spPr>
+      </p:sp>
+      <p:sp>
+        <p:nvSpPr>
+          <p:cNvPr id="24" name="problem-heading">
+            <a:extLst xmlns:a="http://schemas.openxmlformats.org/drawingml/2006/main">
+              <a:ext uri="{FF2B5EF4-FFF2-40B4-BE49-F238E27FC236}">
+                <a16:creationId xmlns:a16="http://schemas.microsoft.com/office/drawing/2014/main" id="{BA914AF9-9C70-4A1E-BC61-6B2FC08A540B}"/>
+              </a:ext>
+            </a:extLst>
+          </p:cNvPr>
+          <p:cNvSpPr>
+            <a:spLocks xmlns:a="http://schemas.openxmlformats.org/drawingml/2006/main" noGrp="1"/>
+          </p:cNvSpPr>
+          <p:nvPr/>
+        </p:nvSpPr>
+        <p:spPr>
+          <a:xfrm xmlns:a="http://schemas.openxmlformats.org/drawingml/2006/main">
+            <a:off x="723900" y="1828800"/>
+            <a:ext cx="4476750" cy="400050"/>
+          </a:xfrm>
+          <a:prstGeom xmlns:a="http://schemas.openxmlformats.org/drawingml/2006/main" prst="rect">
+            <a:avLst/>
+          </a:prstGeom>
+          <a:noFill xmlns:a="http://schemas.openxmlformats.org/drawingml/2006/main"/>
+          <a:ln xmlns:a="http://schemas.openxmlformats.org/drawingml/2006/main" w="0">
+            <a:noFill/>
+            <a:prstDash val="solid"/>
+          </a:ln>
+        </p:spPr>
+        <p:txBody>
+          <a:bodyPr xmlns:a="http://schemas.openxmlformats.org/drawingml/2006/main" wrap="square" lIns="0" tIns="0" rIns="0" bIns="0" anchor="ctr">
+            <a:normAutofit fontScale="100000"/>
+          </a:bodyPr>
+          <a:lstStyle xmlns:a="http://schemas.openxmlformats.org/drawingml/2006/main"/>
+          <a:p xmlns:a="http://schemas.openxmlformats.org/drawingml/2006/main">
+            <a:pPr algn="l">
+              <a:defRPr sz="1725" b="1">
+                <a:solidFill>
+                  <a:srgbClr val="111C31"/>
+                </a:solidFill>
+              </a:defRPr>
+            </a:pPr>
+            <a:r>
+              <a:rPr sz="1725" b="1">
+                <a:solidFill>
+                  <a:srgbClr val="111C31"/>
+                </a:solidFill>
+              </a:rPr>
+              <a:t>解决了什么问题</a:t>
+            </a:r>
+          </a:p>
+        </p:txBody>
+      </p:sp>
+      <p:sp>
+        <p:nvSpPr>
+          <p:cNvPr id="25" name="problem-body">
+            <a:extLst xmlns:a="http://schemas.openxmlformats.org/drawingml/2006/main">
+              <a:ext uri="{FF2B5EF4-FFF2-40B4-BE49-F238E27FC236}">
+                <a16:creationId xmlns:a16="http://schemas.microsoft.com/office/drawing/2014/main" id="{B0A20B1F-3A6C-4F7F-B84A-CD504F99BB95}"/>
+              </a:ext>
+            </a:extLst>
+          </p:cNvPr>
+          <p:cNvSpPr>
+            <a:spLocks xmlns:a="http://schemas.openxmlformats.org/drawingml/2006/main" noGrp="1"/>
+          </p:cNvSpPr>
+          <p:nvPr/>
+        </p:nvSpPr>
+        <p:spPr>
+          <a:xfrm xmlns:a="http://schemas.openxmlformats.org/drawingml/2006/main">
+            <a:off x="723900" y="2257425"/>
+            <a:ext cx="4476750" cy="628650"/>
+          </a:xfrm>
+          <a:prstGeom xmlns:a="http://schemas.openxmlformats.org/drawingml/2006/main" prst="rect">
+            <a:avLst/>
+          </a:prstGeom>
+          <a:noFill xmlns:a="http://schemas.openxmlformats.org/drawingml/2006/main"/>
+          <a:ln xmlns:a="http://schemas.openxmlformats.org/drawingml/2006/main" w="0">
+            <a:noFill/>
+            <a:prstDash val="solid"/>
+          </a:ln>
+        </p:spPr>
+        <p:txBody>
+          <a:bodyPr xmlns:a="http://schemas.openxmlformats.org/drawingml/2006/main" wrap="square" lIns="0" tIns="0" rIns="0" bIns="0" anchor="t">
+            <a:normAutofit fontScale="100000"/>
+          </a:bodyPr>
+          <a:lstStyle xmlns:a="http://schemas.openxmlformats.org/drawingml/2006/main"/>
+          <a:p xmlns:a="http://schemas.openxmlformats.org/drawingml/2006/main">
+            <a:pPr algn="l">
+              <a:defRPr sz="1238" b="0">
+                <a:solidFill>
+                  <a:srgbClr val="6E7A90"/>
+                </a:solidFill>
+              </a:defRPr>
+            </a:pPr>
+            <a:r>
+              <a:rPr sz="1238" b="0">
+                <a:solidFill>
+                  <a:srgbClr val="6E7A90"/>
+                </a:solidFill>
+              </a:rPr>
+              <a:t>历史日志覆盖不到拒绝、打断、质疑等高风险对话边界。</a:t>
+            </a:r>
+          </a:p>
+        </p:txBody>
+      </p:sp>
+      <p:sp>
+        <p:nvSpPr>
+          <p:cNvPr id="26" name="implementation-accent">
+            <a:extLst xmlns:a="http://schemas.openxmlformats.org/drawingml/2006/main">
+              <a:ext uri="{FF2B5EF4-FFF2-40B4-BE49-F238E27FC236}">
+                <a16:creationId xmlns:a16="http://schemas.microsoft.com/office/drawing/2014/main" id="{C184AFA4-EA83-4A6F-83EA-68DDA24380DC}"/>
+              </a:ext>
+            </a:extLst>
+          </p:cNvPr>
+          <p:cNvSpPr>
+            <a:spLocks xmlns:a="http://schemas.openxmlformats.org/drawingml/2006/main" noGrp="1"/>
+          </p:cNvSpPr>
+          <p:nvPr/>
+        </p:nvSpPr>
+        <p:spPr>
+          <a:xfrm xmlns:a="http://schemas.openxmlformats.org/drawingml/2006/main">
+            <a:off x="533400" y="3086100"/>
+            <a:ext cx="66675" cy="342900"/>
+          </a:xfrm>
+          <a:prstGeom xmlns:a="http://schemas.openxmlformats.org/drawingml/2006/main" prst="roundRect">
+            <a:avLst>
+              <a:gd name="adj" fmla="val 50000"/>
+            </a:avLst>
+          </a:prstGeom>
+          <a:solidFill xmlns:a="http://schemas.openxmlformats.org/drawingml/2006/main">
+            <a:srgbClr val="FFC300"/>
+          </a:solidFill>
+          <a:ln xmlns:a="http://schemas.openxmlformats.org/drawingml/2006/main" w="0">
+            <a:noFill/>
+            <a:prstDash val="solid"/>
+          </a:ln>
+        </p:spPr>
+      </p:sp>
+      <p:sp>
+        <p:nvSpPr>
+          <p:cNvPr id="27" name="implementation-heading">
+            <a:extLst xmlns:a="http://schemas.openxmlformats.org/drawingml/2006/main">
+              <a:ext uri="{FF2B5EF4-FFF2-40B4-BE49-F238E27FC236}">
+                <a16:creationId xmlns:a16="http://schemas.microsoft.com/office/drawing/2014/main" id="{FCC8BE34-7A5F-46E7-A312-EA04A5DAB568}"/>
+              </a:ext>
+            </a:extLst>
+          </p:cNvPr>
+          <p:cNvSpPr>
+            <a:spLocks xmlns:a="http://schemas.openxmlformats.org/drawingml/2006/main" noGrp="1"/>
+          </p:cNvSpPr>
+          <p:nvPr/>
+        </p:nvSpPr>
+        <p:spPr>
+          <a:xfrm xmlns:a="http://schemas.openxmlformats.org/drawingml/2006/main">
+            <a:off x="723900" y="3067050"/>
+            <a:ext cx="4476750" cy="400050"/>
+          </a:xfrm>
+          <a:prstGeom xmlns:a="http://schemas.openxmlformats.org/drawingml/2006/main" prst="rect">
+            <a:avLst/>
+          </a:prstGeom>
+          <a:noFill xmlns:a="http://schemas.openxmlformats.org/drawingml/2006/main"/>
+          <a:ln xmlns:a="http://schemas.openxmlformats.org/drawingml/2006/main" w="0">
+            <a:noFill/>
+            <a:prstDash val="solid"/>
+          </a:ln>
+        </p:spPr>
+        <p:txBody>
+          <a:bodyPr xmlns:a="http://schemas.openxmlformats.org/drawingml/2006/main" wrap="square" lIns="0" tIns="0" rIns="0" bIns="0" anchor="ctr">
+            <a:normAutofit fontScale="100000"/>
+          </a:bodyPr>
+          <a:lstStyle xmlns:a="http://schemas.openxmlformats.org/drawingml/2006/main"/>
+          <a:p xmlns:a="http://schemas.openxmlformats.org/drawingml/2006/main">
+            <a:pPr algn="l">
+              <a:defRPr sz="1725" b="1">
+                <a:solidFill>
+                  <a:srgbClr val="111C31"/>
+                </a:solidFill>
+              </a:defRPr>
+            </a:pPr>
+            <a:r>
+              <a:rPr sz="1725" b="1">
+                <a:solidFill>
+                  <a:srgbClr val="111C31"/>
+                </a:solidFill>
+              </a:rPr>
+              <a:t>这么设计是怎么实现的</a:t>
+            </a:r>
+          </a:p>
+        </p:txBody>
+      </p:sp>
+      <p:sp>
+        <p:nvSpPr>
+          <p:cNvPr id="28" name="implementation-body">
+            <a:extLst xmlns:a="http://schemas.openxmlformats.org/drawingml/2006/main">
+              <a:ext uri="{FF2B5EF4-FFF2-40B4-BE49-F238E27FC236}">
+                <a16:creationId xmlns:a16="http://schemas.microsoft.com/office/drawing/2014/main" id="{D114048F-A66C-4A16-9847-894AA99E9296}"/>
+              </a:ext>
+            </a:extLst>
+          </p:cNvPr>
+          <p:cNvSpPr>
+            <a:spLocks xmlns:a="http://schemas.openxmlformats.org/drawingml/2006/main" noGrp="1"/>
+          </p:cNvSpPr>
+          <p:nvPr/>
+        </p:nvSpPr>
+        <p:spPr>
+          <a:xfrm xmlns:a="http://schemas.openxmlformats.org/drawingml/2006/main">
+            <a:off x="723900" y="3495675"/>
+            <a:ext cx="4476750" cy="628650"/>
+          </a:xfrm>
+          <a:prstGeom xmlns:a="http://schemas.openxmlformats.org/drawingml/2006/main" prst="rect">
+            <a:avLst/>
+          </a:prstGeom>
+          <a:noFill xmlns:a="http://schemas.openxmlformats.org/drawingml/2006/main"/>
+          <a:ln xmlns:a="http://schemas.openxmlformats.org/drawingml/2006/main" w="0">
+            <a:noFill/>
+            <a:prstDash val="solid"/>
+          </a:ln>
+        </p:spPr>
+        <p:txBody>
+          <a:bodyPr xmlns:a="http://schemas.openxmlformats.org/drawingml/2006/main" wrap="square" lIns="0" tIns="0" rIns="0" bIns="0" anchor="t">
+            <a:normAutofit fontScale="100000"/>
+          </a:bodyPr>
+          <a:lstStyle xmlns:a="http://schemas.openxmlformats.org/drawingml/2006/main"/>
+          <a:p xmlns:a="http://schemas.openxmlformats.org/drawingml/2006/main">
+            <a:pPr algn="l">
+              <a:defRPr sz="1238" b="0">
+                <a:solidFill>
+                  <a:srgbClr val="6E7A90"/>
+                </a:solidFill>
+              </a:defRPr>
+            </a:pPr>
+            <a:r>
+              <a:rPr sz="1238" b="0">
+                <a:solidFill>
+                  <a:srgbClr val="6E7A90"/>
+                </a:solidFill>
+              </a:rPr>
+              <a:t>用户模拟器组合Persona、对抗目标和固定Seed，主动生成可复现的多轮测试对话。</a:t>
+            </a:r>
+          </a:p>
+        </p:txBody>
+      </p:sp>
+      <p:sp>
+        <p:nvSpPr>
+          <p:cNvPr id="29" name="advantage-accent">
+            <a:extLst xmlns:a="http://schemas.openxmlformats.org/drawingml/2006/main">
+              <a:ext uri="{FF2B5EF4-FFF2-40B4-BE49-F238E27FC236}">
+                <a16:creationId xmlns:a16="http://schemas.microsoft.com/office/drawing/2014/main" id="{3F2BEE25-1A17-4FB3-9115-65766800328E}"/>
+              </a:ext>
+            </a:extLst>
+          </p:cNvPr>
+          <p:cNvSpPr>
+            <a:spLocks xmlns:a="http://schemas.openxmlformats.org/drawingml/2006/main" noGrp="1"/>
+          </p:cNvSpPr>
+          <p:nvPr/>
+        </p:nvSpPr>
+        <p:spPr>
+          <a:xfrm xmlns:a="http://schemas.openxmlformats.org/drawingml/2006/main">
+            <a:off x="533400" y="4419600"/>
+            <a:ext cx="66675" cy="342900"/>
+          </a:xfrm>
+          <a:prstGeom xmlns:a="http://schemas.openxmlformats.org/drawingml/2006/main" prst="roundRect">
+            <a:avLst>
+              <a:gd name="adj" fmla="val 50000"/>
+            </a:avLst>
+          </a:prstGeom>
+          <a:solidFill xmlns:a="http://schemas.openxmlformats.org/drawingml/2006/main">
+            <a:srgbClr val="FFC300"/>
+          </a:solidFill>
+          <a:ln xmlns:a="http://schemas.openxmlformats.org/drawingml/2006/main" w="0">
+            <a:noFill/>
+            <a:prstDash val="solid"/>
+          </a:ln>
+        </p:spPr>
+      </p:sp>
+      <p:sp>
+        <p:nvSpPr>
+          <p:cNvPr id="30" name="advantage-heading">
+            <a:extLst xmlns:a="http://schemas.openxmlformats.org/drawingml/2006/main">
+              <a:ext uri="{FF2B5EF4-FFF2-40B4-BE49-F238E27FC236}">
+                <a16:creationId xmlns:a16="http://schemas.microsoft.com/office/drawing/2014/main" id="{6F87DED5-101A-4ECC-A6D3-FFA4552D8ACA}"/>
+              </a:ext>
+            </a:extLst>
+          </p:cNvPr>
+          <p:cNvSpPr>
+            <a:spLocks xmlns:a="http://schemas.openxmlformats.org/drawingml/2006/main" noGrp="1"/>
+          </p:cNvSpPr>
+          <p:nvPr/>
+        </p:nvSpPr>
+        <p:spPr>
+          <a:xfrm xmlns:a="http://schemas.openxmlformats.org/drawingml/2006/main">
+            <a:off x="723900" y="4400550"/>
+            <a:ext cx="4476750" cy="400050"/>
+          </a:xfrm>
+          <a:prstGeom xmlns:a="http://schemas.openxmlformats.org/drawingml/2006/main" prst="rect">
+            <a:avLst/>
+          </a:prstGeom>
+          <a:noFill xmlns:a="http://schemas.openxmlformats.org/drawingml/2006/main"/>
+          <a:ln xmlns:a="http://schemas.openxmlformats.org/drawingml/2006/main" w="0">
+            <a:noFill/>
+            <a:prstDash val="solid"/>
+          </a:ln>
+        </p:spPr>
+        <p:txBody>
+          <a:bodyPr xmlns:a="http://schemas.openxmlformats.org/drawingml/2006/main" wrap="square" lIns="0" tIns="0" rIns="0" bIns="0" anchor="ctr">
+            <a:normAutofit fontScale="100000"/>
+          </a:bodyPr>
+          <a:lstStyle xmlns:a="http://schemas.openxmlformats.org/drawingml/2006/main"/>
+          <a:p xmlns:a="http://schemas.openxmlformats.org/drawingml/2006/main">
+            <a:pPr algn="l">
+              <a:defRPr sz="1725" b="1">
+                <a:solidFill>
+                  <a:srgbClr val="111C31"/>
+                </a:solidFill>
+              </a:defRPr>
+            </a:pPr>
+            <a:r>
+              <a:rPr sz="1725" b="1">
+                <a:solidFill>
+                  <a:srgbClr val="111C31"/>
+                </a:solidFill>
+              </a:rPr>
+              <a:t>这么设计的优势</a:t>
+            </a:r>
+          </a:p>
+        </p:txBody>
+      </p:sp>
+      <p:sp>
+        <p:nvSpPr>
+          <p:cNvPr id="31" name="advantage-body">
+            <a:extLst xmlns:a="http://schemas.openxmlformats.org/drawingml/2006/main">
+              <a:ext uri="{FF2B5EF4-FFF2-40B4-BE49-F238E27FC236}">
+                <a16:creationId xmlns:a16="http://schemas.microsoft.com/office/drawing/2014/main" id="{B62385B5-429A-40AF-A477-A6CB863C3A12}"/>
+              </a:ext>
+            </a:extLst>
+          </p:cNvPr>
+          <p:cNvSpPr>
+            <a:spLocks xmlns:a="http://schemas.openxmlformats.org/drawingml/2006/main" noGrp="1"/>
+          </p:cNvSpPr>
+          <p:nvPr/>
+        </p:nvSpPr>
+        <p:spPr>
+          <a:xfrm xmlns:a="http://schemas.openxmlformats.org/drawingml/2006/main">
+            <a:off x="723900" y="4829175"/>
+            <a:ext cx="4476750" cy="628650"/>
+          </a:xfrm>
+          <a:prstGeom xmlns:a="http://schemas.openxmlformats.org/drawingml/2006/main" prst="rect">
+            <a:avLst/>
+          </a:prstGeom>
+          <a:noFill xmlns:a="http://schemas.openxmlformats.org/drawingml/2006/main"/>
+          <a:ln xmlns:a="http://schemas.openxmlformats.org/drawingml/2006/main" w="0">
+            <a:noFill/>
+            <a:prstDash val="solid"/>
+          </a:ln>
+        </p:spPr>
+        <p:txBody>
+          <a:bodyPr xmlns:a="http://schemas.openxmlformats.org/drawingml/2006/main" wrap="square" lIns="0" tIns="0" rIns="0" bIns="0" anchor="t">
+            <a:normAutofit fontScale="100000"/>
+          </a:bodyPr>
+          <a:lstStyle xmlns:a="http://schemas.openxmlformats.org/drawingml/2006/main"/>
+          <a:p xmlns:a="http://schemas.openxmlformats.org/drawingml/2006/main">
+            <a:pPr algn="l">
+              <a:defRPr sz="1238" b="0">
+                <a:solidFill>
+                  <a:srgbClr val="6E7A90"/>
+                </a:solidFill>
+              </a:defRPr>
+            </a:pPr>
+            <a:r>
+              <a:rPr sz="1238" b="0">
+                <a:solidFill>
+                  <a:srgbClr val="6E7A90"/>
+                </a:solidFill>
+              </a:rPr>
+              <a:t>上线前主动暴露脆弱点，同时保证两个模型版本面对完全相同的测试场景。</a:t>
             </a:r>
           </a:p>
         </p:txBody>
@@ -8639,478 +9081,6 @@
       </p:sp>
       <p:sp>
         <p:nvSpPr>
-          <p:cNvPr id="5" name="decision">
-            <a:extLst xmlns:a="http://schemas.openxmlformats.org/drawingml/2006/main">
-              <a:ext uri="{FF2B5EF4-FFF2-40B4-BE49-F238E27FC236}">
-                <a16:creationId xmlns:a16="http://schemas.microsoft.com/office/drawing/2014/main" id="{B0CE3BC9-D8B1-4041-B5E5-CD8D93B3556B}"/>
-              </a:ext>
-            </a:extLst>
-          </p:cNvPr>
-          <p:cNvSpPr>
-            <a:spLocks xmlns:a="http://schemas.openxmlformats.org/drawingml/2006/main" noGrp="1"/>
-          </p:cNvSpPr>
-          <p:nvPr/>
-        </p:nvSpPr>
-        <p:spPr>
-          <a:xfrm xmlns:a="http://schemas.openxmlformats.org/drawingml/2006/main">
-            <a:off x="533400" y="1866900"/>
-            <a:ext cx="4000500" cy="857250"/>
-          </a:xfrm>
-          <a:prstGeom xmlns:a="http://schemas.openxmlformats.org/drawingml/2006/main" prst="rect">
-            <a:avLst/>
-          </a:prstGeom>
-          <a:noFill xmlns:a="http://schemas.openxmlformats.org/drawingml/2006/main"/>
-          <a:ln xmlns:a="http://schemas.openxmlformats.org/drawingml/2006/main" w="0">
-            <a:noFill/>
-            <a:prstDash val="solid"/>
-          </a:ln>
-        </p:spPr>
-        <p:txBody>
-          <a:bodyPr xmlns:a="http://schemas.openxmlformats.org/drawingml/2006/main" anchor="t">
-            <a:normAutofit fontScale="100000"/>
-          </a:bodyPr>
-          <a:lstStyle xmlns:a="http://schemas.openxmlformats.org/drawingml/2006/main"/>
-          <a:p xmlns:a="http://schemas.openxmlformats.org/drawingml/2006/main">
-            <a:pPr algn="l">
-              <a:buNone/>
-              <a:defRPr sz="2400" b="1">
-                <a:solidFill>
-                  <a:srgbClr val="111827"/>
-                </a:solidFill>
-                <a:latin typeface="PingFang SC"/>
-                <a:ea typeface="PingFang SC"/>
-                <a:cs typeface="PingFang SC"/>
-              </a:defRPr>
-            </a:pPr>
-            <a:r>
-              <a:rPr sz="2400" b="1">
-                <a:solidFill>
-                  <a:srgbClr val="111827"/>
-                </a:solidFill>
-                <a:latin typeface="PingFang SC"/>
-                <a:ea typeface="PingFang SC"/>
-                <a:cs typeface="PingFang SC"/>
-              </a:rPr>
-              <a:t>平均分回答表现，门禁回答能不能上线</a:t>
-            </a:r>
-          </a:p>
-        </p:txBody>
-      </p:sp>
-      <p:sp>
-        <p:nvSpPr>
-          <p:cNvPr id="6" name="decision-sub">
-            <a:extLst xmlns:a="http://schemas.openxmlformats.org/drawingml/2006/main">
-              <a:ext uri="{FF2B5EF4-FFF2-40B4-BE49-F238E27FC236}">
-                <a16:creationId xmlns:a16="http://schemas.microsoft.com/office/drawing/2014/main" id="{C81463E1-CB7C-4B7A-8684-388032501444}"/>
-              </a:ext>
-            </a:extLst>
-          </p:cNvPr>
-          <p:cNvSpPr>
-            <a:spLocks xmlns:a="http://schemas.openxmlformats.org/drawingml/2006/main" noGrp="1"/>
-          </p:cNvSpPr>
-          <p:nvPr/>
-        </p:nvSpPr>
-        <p:spPr>
-          <a:xfrm xmlns:a="http://schemas.openxmlformats.org/drawingml/2006/main">
-            <a:off x="552450" y="2781300"/>
-            <a:ext cx="4476750" cy="323850"/>
-          </a:xfrm>
-          <a:prstGeom xmlns:a="http://schemas.openxmlformats.org/drawingml/2006/main" prst="rect">
-            <a:avLst/>
-          </a:prstGeom>
-          <a:noFill xmlns:a="http://schemas.openxmlformats.org/drawingml/2006/main"/>
-          <a:ln xmlns:a="http://schemas.openxmlformats.org/drawingml/2006/main" w="0">
-            <a:noFill/>
-            <a:prstDash val="solid"/>
-          </a:ln>
-        </p:spPr>
-        <p:txBody>
-          <a:bodyPr xmlns:a="http://schemas.openxmlformats.org/drawingml/2006/main" anchor="t">
-            <a:normAutofit fontScale="98609"/>
-          </a:bodyPr>
-          <a:lstStyle xmlns:a="http://schemas.openxmlformats.org/drawingml/2006/main"/>
-          <a:p xmlns:a="http://schemas.openxmlformats.org/drawingml/2006/main">
-            <a:pPr algn="l">
-              <a:buNone/>
-              <a:defRPr sz="1200" b="0">
-                <a:solidFill>
-                  <a:srgbClr val="667085"/>
-                </a:solidFill>
-                <a:latin typeface="PingFang SC"/>
-                <a:ea typeface="PingFang SC"/>
-                <a:cs typeface="PingFang SC"/>
-              </a:defRPr>
-            </a:pPr>
-            <a:r>
-              <a:rPr sz="1200" b="0">
-                <a:solidFill>
-                  <a:srgbClr val="667085"/>
-                </a:solidFill>
-                <a:latin typeface="PingFang SC"/>
-                <a:ea typeface="PingFang SC"/>
-                <a:cs typeface="PingFang SC"/>
-              </a:rPr>
-              <a:t>不做这一步：高平均分可能掩盖隐私泄露、P0 和关键流程中断。</a:t>
-            </a:r>
-          </a:p>
-        </p:txBody>
-      </p:sp>
-      <p:sp>
-        <p:nvSpPr>
-          <p:cNvPr id="7" name="stat-0">
-            <a:extLst xmlns:a="http://schemas.openxmlformats.org/drawingml/2006/main">
-              <a:ext uri="{FF2B5EF4-FFF2-40B4-BE49-F238E27FC236}">
-                <a16:creationId xmlns:a16="http://schemas.microsoft.com/office/drawing/2014/main" id="{A64EB69F-1AD3-45AE-93F6-D916A936F061}"/>
-              </a:ext>
-            </a:extLst>
-          </p:cNvPr>
-          <p:cNvSpPr>
-            <a:spLocks xmlns:a="http://schemas.openxmlformats.org/drawingml/2006/main" noGrp="1"/>
-          </p:cNvSpPr>
-          <p:nvPr/>
-        </p:nvSpPr>
-        <p:spPr>
-          <a:xfrm xmlns:a="http://schemas.openxmlformats.org/drawingml/2006/main">
-            <a:off x="533400" y="3581400"/>
-            <a:ext cx="1352550" cy="666750"/>
-          </a:xfrm>
-          <a:prstGeom xmlns:a="http://schemas.openxmlformats.org/drawingml/2006/main" prst="rect">
-            <a:avLst/>
-          </a:prstGeom>
-          <a:noFill xmlns:a="http://schemas.openxmlformats.org/drawingml/2006/main"/>
-          <a:ln xmlns:a="http://schemas.openxmlformats.org/drawingml/2006/main" w="0">
-            <a:noFill/>
-            <a:prstDash val="solid"/>
-          </a:ln>
-        </p:spPr>
-        <p:txBody>
-          <a:bodyPr xmlns:a="http://schemas.openxmlformats.org/drawingml/2006/main" anchor="t">
-            <a:normAutofit fontScale="100000"/>
-          </a:bodyPr>
-          <a:lstStyle xmlns:a="http://schemas.openxmlformats.org/drawingml/2006/main"/>
-          <a:p xmlns:a="http://schemas.openxmlformats.org/drawingml/2006/main">
-            <a:pPr algn="l">
-              <a:buNone/>
-              <a:defRPr sz="3300" b="1">
-                <a:solidFill>
-                  <a:srgbClr val="111827"/>
-                </a:solidFill>
-                <a:latin typeface="PingFang SC"/>
-                <a:ea typeface="PingFang SC"/>
-                <a:cs typeface="PingFang SC"/>
-              </a:defRPr>
-            </a:pPr>
-            <a:r>
-              <a:rPr sz="3300" b="1">
-                <a:solidFill>
-                  <a:srgbClr val="111827"/>
-                </a:solidFill>
-                <a:latin typeface="PingFang SC"/>
-                <a:ea typeface="PingFang SC"/>
-                <a:cs typeface="PingFang SC"/>
-              </a:rPr>
-              <a:t>门禁</a:t>
-            </a:r>
-          </a:p>
-        </p:txBody>
-      </p:sp>
-      <p:sp>
-        <p:nvSpPr>
-          <p:cNvPr id="8" name="stat-label-0">
-            <a:extLst xmlns:a="http://schemas.openxmlformats.org/drawingml/2006/main">
-              <a:ext uri="{FF2B5EF4-FFF2-40B4-BE49-F238E27FC236}">
-                <a16:creationId xmlns:a16="http://schemas.microsoft.com/office/drawing/2014/main" id="{7261F069-84D1-4836-A1CB-0A3A5D5C44E7}"/>
-              </a:ext>
-            </a:extLst>
-          </p:cNvPr>
-          <p:cNvSpPr>
-            <a:spLocks xmlns:a="http://schemas.openxmlformats.org/drawingml/2006/main" noGrp="1"/>
-          </p:cNvSpPr>
-          <p:nvPr/>
-        </p:nvSpPr>
-        <p:spPr>
-          <a:xfrm xmlns:a="http://schemas.openxmlformats.org/drawingml/2006/main">
-            <a:off x="533400" y="4286250"/>
-            <a:ext cx="1352550" cy="266700"/>
-          </a:xfrm>
-          <a:prstGeom xmlns:a="http://schemas.openxmlformats.org/drawingml/2006/main" prst="rect">
-            <a:avLst/>
-          </a:prstGeom>
-          <a:noFill xmlns:a="http://schemas.openxmlformats.org/drawingml/2006/main"/>
-          <a:ln xmlns:a="http://schemas.openxmlformats.org/drawingml/2006/main" w="0">
-            <a:noFill/>
-            <a:prstDash val="solid"/>
-          </a:ln>
-        </p:spPr>
-        <p:txBody>
-          <a:bodyPr xmlns:a="http://schemas.openxmlformats.org/drawingml/2006/main" anchor="t">
-            <a:normAutofit fontScale="100000"/>
-          </a:bodyPr>
-          <a:lstStyle xmlns:a="http://schemas.openxmlformats.org/drawingml/2006/main"/>
-          <a:p xmlns:a="http://schemas.openxmlformats.org/drawingml/2006/main">
-            <a:pPr algn="l">
-              <a:buNone/>
-              <a:defRPr sz="975" b="0">
-                <a:solidFill>
-                  <a:srgbClr val="667085"/>
-                </a:solidFill>
-                <a:latin typeface="PingFang SC"/>
-                <a:ea typeface="PingFang SC"/>
-                <a:cs typeface="PingFang SC"/>
-              </a:defRPr>
-            </a:pPr>
-            <a:r>
-              <a:rPr sz="975" b="0">
-                <a:solidFill>
-                  <a:srgbClr val="667085"/>
-                </a:solidFill>
-                <a:latin typeface="PingFang SC"/>
-                <a:ea typeface="PingFang SC"/>
-                <a:cs typeface="PingFang SC"/>
-              </a:rPr>
-              <a:t>P0 一票否决</a:t>
-            </a:r>
-          </a:p>
-        </p:txBody>
-      </p:sp>
-      <p:sp>
-        <p:nvSpPr>
-          <p:cNvPr id="9" name="stat-1">
-            <a:extLst xmlns:a="http://schemas.openxmlformats.org/drawingml/2006/main">
-              <a:ext uri="{FF2B5EF4-FFF2-40B4-BE49-F238E27FC236}">
-                <a16:creationId xmlns:a16="http://schemas.microsoft.com/office/drawing/2014/main" id="{C2588DEE-1FC2-4818-B044-00FEF0E24E2D}"/>
-              </a:ext>
-            </a:extLst>
-          </p:cNvPr>
-          <p:cNvSpPr>
-            <a:spLocks xmlns:a="http://schemas.openxmlformats.org/drawingml/2006/main" noGrp="1"/>
-          </p:cNvSpPr>
-          <p:nvPr/>
-        </p:nvSpPr>
-        <p:spPr>
-          <a:xfrm xmlns:a="http://schemas.openxmlformats.org/drawingml/2006/main">
-            <a:off x="2171700" y="3581400"/>
-            <a:ext cx="1352550" cy="666750"/>
-          </a:xfrm>
-          <a:prstGeom xmlns:a="http://schemas.openxmlformats.org/drawingml/2006/main" prst="rect">
-            <a:avLst/>
-          </a:prstGeom>
-          <a:noFill xmlns:a="http://schemas.openxmlformats.org/drawingml/2006/main"/>
-          <a:ln xmlns:a="http://schemas.openxmlformats.org/drawingml/2006/main" w="0">
-            <a:noFill/>
-            <a:prstDash val="solid"/>
-          </a:ln>
-        </p:spPr>
-        <p:txBody>
-          <a:bodyPr xmlns:a="http://schemas.openxmlformats.org/drawingml/2006/main" anchor="t">
-            <a:normAutofit fontScale="100000"/>
-          </a:bodyPr>
-          <a:lstStyle xmlns:a="http://schemas.openxmlformats.org/drawingml/2006/main"/>
-          <a:p xmlns:a="http://schemas.openxmlformats.org/drawingml/2006/main">
-            <a:pPr algn="l">
-              <a:buNone/>
-              <a:defRPr sz="3300" b="1">
-                <a:solidFill>
-                  <a:srgbClr val="111827"/>
-                </a:solidFill>
-                <a:latin typeface="PingFang SC"/>
-                <a:ea typeface="PingFang SC"/>
-                <a:cs typeface="PingFang SC"/>
-              </a:defRPr>
-            </a:pPr>
-            <a:r>
-              <a:rPr sz="3300" b="1">
-                <a:solidFill>
-                  <a:srgbClr val="111827"/>
-                </a:solidFill>
-                <a:latin typeface="PingFang SC"/>
-                <a:ea typeface="PingFang SC"/>
-                <a:cs typeface="PingFang SC"/>
-              </a:rPr>
-              <a:t>履约</a:t>
-            </a:r>
-          </a:p>
-        </p:txBody>
-      </p:sp>
-      <p:sp>
-        <p:nvSpPr>
-          <p:cNvPr id="10" name="stat-label-1">
-            <a:extLst xmlns:a="http://schemas.openxmlformats.org/drawingml/2006/main">
-              <a:ext uri="{FF2B5EF4-FFF2-40B4-BE49-F238E27FC236}">
-                <a16:creationId xmlns:a16="http://schemas.microsoft.com/office/drawing/2014/main" id="{F2DA5F17-C3CD-4B4D-96F7-5057D5458574}"/>
-              </a:ext>
-            </a:extLst>
-          </p:cNvPr>
-          <p:cNvSpPr>
-            <a:spLocks xmlns:a="http://schemas.openxmlformats.org/drawingml/2006/main" noGrp="1"/>
-          </p:cNvSpPr>
-          <p:nvPr/>
-        </p:nvSpPr>
-        <p:spPr>
-          <a:xfrm xmlns:a="http://schemas.openxmlformats.org/drawingml/2006/main">
-            <a:off x="2171700" y="4286250"/>
-            <a:ext cx="1352550" cy="266700"/>
-          </a:xfrm>
-          <a:prstGeom xmlns:a="http://schemas.openxmlformats.org/drawingml/2006/main" prst="rect">
-            <a:avLst/>
-          </a:prstGeom>
-          <a:noFill xmlns:a="http://schemas.openxmlformats.org/drawingml/2006/main"/>
-          <a:ln xmlns:a="http://schemas.openxmlformats.org/drawingml/2006/main" w="0">
-            <a:noFill/>
-            <a:prstDash val="solid"/>
-          </a:ln>
-        </p:spPr>
-        <p:txBody>
-          <a:bodyPr xmlns:a="http://schemas.openxmlformats.org/drawingml/2006/main" anchor="t">
-            <a:normAutofit fontScale="100000"/>
-          </a:bodyPr>
-          <a:lstStyle xmlns:a="http://schemas.openxmlformats.org/drawingml/2006/main"/>
-          <a:p xmlns:a="http://schemas.openxmlformats.org/drawingml/2006/main">
-            <a:pPr algn="l">
-              <a:buNone/>
-              <a:defRPr sz="975" b="0">
-                <a:solidFill>
-                  <a:srgbClr val="667085"/>
-                </a:solidFill>
-                <a:latin typeface="PingFang SC"/>
-                <a:ea typeface="PingFang SC"/>
-                <a:cs typeface="PingFang SC"/>
-              </a:defRPr>
-            </a:pPr>
-            <a:r>
-              <a:rPr sz="975" b="0">
-                <a:solidFill>
-                  <a:srgbClr val="667085"/>
-                </a:solidFill>
-                <a:latin typeface="PingFang SC"/>
-                <a:ea typeface="PingFang SC"/>
-                <a:cs typeface="PingFang SC"/>
-              </a:rPr>
-              <a:t>任务是否完成</a:t>
-            </a:r>
-          </a:p>
-        </p:txBody>
-      </p:sp>
-      <p:sp>
-        <p:nvSpPr>
-          <p:cNvPr id="11" name="stat-2">
-            <a:extLst xmlns:a="http://schemas.openxmlformats.org/drawingml/2006/main">
-              <a:ext uri="{FF2B5EF4-FFF2-40B4-BE49-F238E27FC236}">
-                <a16:creationId xmlns:a16="http://schemas.microsoft.com/office/drawing/2014/main" id="{A2568244-186A-4F43-AECE-BB8E99D7ECA7}"/>
-              </a:ext>
-            </a:extLst>
-          </p:cNvPr>
-          <p:cNvSpPr>
-            <a:spLocks xmlns:a="http://schemas.openxmlformats.org/drawingml/2006/main" noGrp="1"/>
-          </p:cNvSpPr>
-          <p:nvPr/>
-        </p:nvSpPr>
-        <p:spPr>
-          <a:xfrm xmlns:a="http://schemas.openxmlformats.org/drawingml/2006/main">
-            <a:off x="3810000" y="3581400"/>
-            <a:ext cx="1352550" cy="666750"/>
-          </a:xfrm>
-          <a:prstGeom xmlns:a="http://schemas.openxmlformats.org/drawingml/2006/main" prst="rect">
-            <a:avLst/>
-          </a:prstGeom>
-          <a:noFill xmlns:a="http://schemas.openxmlformats.org/drawingml/2006/main"/>
-          <a:ln xmlns:a="http://schemas.openxmlformats.org/drawingml/2006/main" w="0">
-            <a:noFill/>
-            <a:prstDash val="solid"/>
-          </a:ln>
-        </p:spPr>
-        <p:txBody>
-          <a:bodyPr xmlns:a="http://schemas.openxmlformats.org/drawingml/2006/main" anchor="t">
-            <a:normAutofit fontScale="100000"/>
-          </a:bodyPr>
-          <a:lstStyle xmlns:a="http://schemas.openxmlformats.org/drawingml/2006/main"/>
-          <a:p xmlns:a="http://schemas.openxmlformats.org/drawingml/2006/main">
-            <a:pPr algn="l">
-              <a:buNone/>
-              <a:defRPr sz="3300" b="1">
-                <a:solidFill>
-                  <a:srgbClr val="111827"/>
-                </a:solidFill>
-                <a:latin typeface="PingFang SC"/>
-                <a:ea typeface="PingFang SC"/>
-                <a:cs typeface="PingFang SC"/>
-              </a:defRPr>
-            </a:pPr>
-            <a:r>
-              <a:rPr sz="3300" b="1">
-                <a:solidFill>
-                  <a:srgbClr val="111827"/>
-                </a:solidFill>
-                <a:latin typeface="PingFang SC"/>
-                <a:ea typeface="PingFang SC"/>
-                <a:cs typeface="PingFang SC"/>
-              </a:rPr>
-              <a:t>证据</a:t>
-            </a:r>
-          </a:p>
-        </p:txBody>
-      </p:sp>
-      <p:sp>
-        <p:nvSpPr>
-          <p:cNvPr id="12" name="stat-label-2">
-            <a:extLst xmlns:a="http://schemas.openxmlformats.org/drawingml/2006/main">
-              <a:ext uri="{FF2B5EF4-FFF2-40B4-BE49-F238E27FC236}">
-                <a16:creationId xmlns:a16="http://schemas.microsoft.com/office/drawing/2014/main" id="{46EB030E-F492-46E3-8C5B-6A223CBEDFAD}"/>
-              </a:ext>
-            </a:extLst>
-          </p:cNvPr>
-          <p:cNvSpPr>
-            <a:spLocks xmlns:a="http://schemas.openxmlformats.org/drawingml/2006/main" noGrp="1"/>
-          </p:cNvSpPr>
-          <p:nvPr/>
-        </p:nvSpPr>
-        <p:spPr>
-          <a:xfrm xmlns:a="http://schemas.openxmlformats.org/drawingml/2006/main">
-            <a:off x="3810000" y="4286250"/>
-            <a:ext cx="1352550" cy="266700"/>
-          </a:xfrm>
-          <a:prstGeom xmlns:a="http://schemas.openxmlformats.org/drawingml/2006/main" prst="rect">
-            <a:avLst/>
-          </a:prstGeom>
-          <a:noFill xmlns:a="http://schemas.openxmlformats.org/drawingml/2006/main"/>
-          <a:ln xmlns:a="http://schemas.openxmlformats.org/drawingml/2006/main" w="0">
-            <a:noFill/>
-            <a:prstDash val="solid"/>
-          </a:ln>
-        </p:spPr>
-        <p:txBody>
-          <a:bodyPr xmlns:a="http://schemas.openxmlformats.org/drawingml/2006/main" anchor="t">
-            <a:normAutofit fontScale="100000"/>
-          </a:bodyPr>
-          <a:lstStyle xmlns:a="http://schemas.openxmlformats.org/drawingml/2006/main"/>
-          <a:p xmlns:a="http://schemas.openxmlformats.org/drawingml/2006/main">
-            <a:pPr algn="l">
-              <a:buNone/>
-              <a:defRPr sz="975" b="0">
-                <a:solidFill>
-                  <a:srgbClr val="667085"/>
-                </a:solidFill>
-                <a:latin typeface="PingFang SC"/>
-                <a:ea typeface="PingFang SC"/>
-                <a:cs typeface="PingFang SC"/>
-              </a:defRPr>
-            </a:pPr>
-            <a:r>
-              <a:rPr sz="975" b="0">
-                <a:solidFill>
-                  <a:srgbClr val="667085"/>
-                </a:solidFill>
-                <a:latin typeface="PingFang SC"/>
-                <a:ea typeface="PingFang SC"/>
-                <a:cs typeface="PingFang SC"/>
-              </a:rPr>
-              <a:t>逐项引用原话</a:t>
-            </a:r>
-          </a:p>
-        </p:txBody>
-      </p:sp>
-      <p:sp>
-        <p:nvSpPr>
           <p:cNvPr id="13" name="root-panel">
             <a:extLst xmlns:a="http://schemas.openxmlformats.org/drawingml/2006/main">
               <a:ext uri="{FF2B5EF4-FFF2-40B4-BE49-F238E27FC236}">
@@ -9406,65 +9376,6 @@
                 <a:cs typeface="PingFang SC"/>
               </a:rPr>
               <a:t/>
-            </a:r>
-          </a:p>
-        </p:txBody>
-      </p:sp>
-      <p:sp>
-        <p:nvSpPr>
-          <p:cNvPr id="18" name="source">
-            <a:extLst xmlns:a="http://schemas.openxmlformats.org/drawingml/2006/main">
-              <a:ext uri="{FF2B5EF4-FFF2-40B4-BE49-F238E27FC236}">
-                <a16:creationId xmlns:a16="http://schemas.microsoft.com/office/drawing/2014/main" id="{771875FB-1E0E-4D7E-850B-F8DA480B5683}"/>
-              </a:ext>
-            </a:extLst>
-          </p:cNvPr>
-          <p:cNvSpPr>
-            <a:spLocks xmlns:a="http://schemas.openxmlformats.org/drawingml/2006/main" noGrp="1"/>
-          </p:cNvSpPr>
-          <p:nvPr/>
-        </p:nvSpPr>
-        <p:spPr>
-          <a:xfrm xmlns:a="http://schemas.openxmlformats.org/drawingml/2006/main">
-            <a:off x="533400" y="6372225"/>
-            <a:ext cx="9906000" cy="190500"/>
-          </a:xfrm>
-          <a:prstGeom xmlns:a="http://schemas.openxmlformats.org/drawingml/2006/main" prst="rect">
-            <a:avLst/>
-          </a:prstGeom>
-          <a:noFill xmlns:a="http://schemas.openxmlformats.org/drawingml/2006/main"/>
-          <a:ln xmlns:a="http://schemas.openxmlformats.org/drawingml/2006/main" w="0">
-            <a:noFill/>
-            <a:prstDash val="solid"/>
-          </a:ln>
-        </p:spPr>
-        <p:txBody>
-          <a:bodyPr xmlns:a="http://schemas.openxmlformats.org/drawingml/2006/main" anchor="t">
-            <a:normAutofit fontScale="72222"/>
-          </a:bodyPr>
-          <a:lstStyle xmlns:a="http://schemas.openxmlformats.org/drawingml/2006/main"/>
-          <a:p xmlns:a="http://schemas.openxmlformats.org/drawingml/2006/main">
-            <a:pPr algn="l">
-              <a:buNone/>
-              <a:defRPr sz="900" b="0">
-                <a:solidFill>
-                  <a:srgbClr val="667085"/>
-                </a:solidFill>
-                <a:latin typeface="PingFang SC"/>
-                <a:ea typeface="PingFang SC"/>
-                <a:cs typeface="PingFang SC"/>
-              </a:defRPr>
-            </a:pPr>
-            <a:r>
-              <a:rPr sz="900" b="0">
-                <a:solidFill>
-                  <a:srgbClr val="667085"/>
-                </a:solidFill>
-                <a:latin typeface="PingFang SC"/>
-                <a:ea typeface="PingFang SC"/>
-                <a:cs typeface="PingFang SC"/>
-              </a:rPr>
-              <a:t>设计闭环：P0 / 关键流程 / 履约 → 上线门禁；证据、盲区和复核队列回答“为什么”。</a:t>
             </a:r>
           </a:p>
         </p:txBody>
@@ -9478,7 +9389,7 @@
           <p:nvPr/>
         </p:nvPicPr>
         <p:blipFill>
-          <a:blip xmlns:r="http://schemas.openxmlformats.org/officeDocument/2006/relationships" xmlns:a="http://schemas.openxmlformats.org/drawingml/2006/main" r:embed="R57ba6046844c48bd"/>
+          <a:blip xmlns:r="http://schemas.openxmlformats.org/officeDocument/2006/relationships" xmlns:a="http://schemas.openxmlformats.org/drawingml/2006/main" r:embed="R17ef752269df43fd"/>
           <a:srcRect xmlns:a="http://schemas.openxmlformats.org/drawingml/2006/main" l="0" t="8152" r="0" b="8152"/>
           <a:stretch xmlns:a="http://schemas.openxmlformats.org/drawingml/2006/main">
             <a:fillRect l="0" t="0" r="0" b="0"/>
@@ -9547,7 +9458,7 @@
                 <a:latin typeface="PingFang SC"/>
                 <a:ea typeface="PingFang SC"/>
                 <a:cs typeface="PingFang SC"/>
-                <a:hlinkClick xmlns:r="http://schemas.openxmlformats.org/officeDocument/2006/relationships" r:id="R36521880b814440a"/>
+                <a:hlinkClick xmlns:r="http://schemas.openxmlformats.org/officeDocument/2006/relationships" r:id="R2a9b2d98098e4c29"/>
               </a:rPr>
               <a:t>▶ 在线 Demo</a:t>
             </a:r>
@@ -9599,9 +9510,420 @@
                 <a:latin typeface="PingFang SC"/>
                 <a:ea typeface="PingFang SC"/>
                 <a:cs typeface="PingFang SC"/>
-                <a:hlinkClick xmlns:r="http://schemas.openxmlformats.org/officeDocument/2006/relationships" r:id="Re612e82877be42fc"/>
+                <a:hlinkClick xmlns:r="http://schemas.openxmlformats.org/officeDocument/2006/relationships" r:id="R4514b347417642a8"/>
               </a:rPr>
               <a:t>结果备份 ↗</a:t>
+            </a:r>
+          </a:p>
+        </p:txBody>
+      </p:sp>
+      <p:sp>
+        <p:nvSpPr>
+          <p:cNvPr id="23" name="problem-accent">
+            <a:extLst xmlns:a="http://schemas.openxmlformats.org/drawingml/2006/main">
+              <a:ext uri="{FF2B5EF4-FFF2-40B4-BE49-F238E27FC236}">
+                <a16:creationId xmlns:a16="http://schemas.microsoft.com/office/drawing/2014/main" id="{60008BEC-F7DC-4519-A618-4EDB4D574234}"/>
+              </a:ext>
+            </a:extLst>
+          </p:cNvPr>
+          <p:cNvSpPr>
+            <a:spLocks xmlns:a="http://schemas.openxmlformats.org/drawingml/2006/main" noGrp="1"/>
+          </p:cNvSpPr>
+          <p:nvPr/>
+        </p:nvSpPr>
+        <p:spPr>
+          <a:xfrm xmlns:a="http://schemas.openxmlformats.org/drawingml/2006/main">
+            <a:off x="533400" y="1847850"/>
+            <a:ext cx="66675" cy="342900"/>
+          </a:xfrm>
+          <a:prstGeom xmlns:a="http://schemas.openxmlformats.org/drawingml/2006/main" prst="roundRect">
+            <a:avLst>
+              <a:gd name="adj" fmla="val 50000"/>
+            </a:avLst>
+          </a:prstGeom>
+          <a:solidFill xmlns:a="http://schemas.openxmlformats.org/drawingml/2006/main">
+            <a:srgbClr val="FFC300"/>
+          </a:solidFill>
+          <a:ln xmlns:a="http://schemas.openxmlformats.org/drawingml/2006/main" w="0">
+            <a:noFill/>
+            <a:prstDash val="solid"/>
+          </a:ln>
+        </p:spPr>
+      </p:sp>
+      <p:sp>
+        <p:nvSpPr>
+          <p:cNvPr id="24" name="problem-heading">
+            <a:extLst xmlns:a="http://schemas.openxmlformats.org/drawingml/2006/main">
+              <a:ext uri="{FF2B5EF4-FFF2-40B4-BE49-F238E27FC236}">
+                <a16:creationId xmlns:a16="http://schemas.microsoft.com/office/drawing/2014/main" id="{DE4AA2E2-8E8F-43A6-98BB-8D49DA211ED1}"/>
+              </a:ext>
+            </a:extLst>
+          </p:cNvPr>
+          <p:cNvSpPr>
+            <a:spLocks xmlns:a="http://schemas.openxmlformats.org/drawingml/2006/main" noGrp="1"/>
+          </p:cNvSpPr>
+          <p:nvPr/>
+        </p:nvSpPr>
+        <p:spPr>
+          <a:xfrm xmlns:a="http://schemas.openxmlformats.org/drawingml/2006/main">
+            <a:off x="723900" y="1828800"/>
+            <a:ext cx="4476750" cy="400050"/>
+          </a:xfrm>
+          <a:prstGeom xmlns:a="http://schemas.openxmlformats.org/drawingml/2006/main" prst="rect">
+            <a:avLst/>
+          </a:prstGeom>
+          <a:noFill xmlns:a="http://schemas.openxmlformats.org/drawingml/2006/main"/>
+          <a:ln xmlns:a="http://schemas.openxmlformats.org/drawingml/2006/main" w="0">
+            <a:noFill/>
+            <a:prstDash val="solid"/>
+          </a:ln>
+        </p:spPr>
+        <p:txBody>
+          <a:bodyPr xmlns:a="http://schemas.openxmlformats.org/drawingml/2006/main" wrap="square" lIns="0" tIns="0" rIns="0" bIns="0" anchor="ctr">
+            <a:normAutofit fontScale="100000"/>
+          </a:bodyPr>
+          <a:lstStyle xmlns:a="http://schemas.openxmlformats.org/drawingml/2006/main"/>
+          <a:p xmlns:a="http://schemas.openxmlformats.org/drawingml/2006/main">
+            <a:pPr algn="l">
+              <a:defRPr sz="1725" b="1">
+                <a:solidFill>
+                  <a:srgbClr val="111C31"/>
+                </a:solidFill>
+              </a:defRPr>
+            </a:pPr>
+            <a:r>
+              <a:rPr sz="1725" b="1">
+                <a:solidFill>
+                  <a:srgbClr val="111C31"/>
+                </a:solidFill>
+              </a:rPr>
+              <a:t>解决了什么问题</a:t>
+            </a:r>
+          </a:p>
+        </p:txBody>
+      </p:sp>
+      <p:sp>
+        <p:nvSpPr>
+          <p:cNvPr id="25" name="problem-body">
+            <a:extLst xmlns:a="http://schemas.openxmlformats.org/drawingml/2006/main">
+              <a:ext uri="{FF2B5EF4-FFF2-40B4-BE49-F238E27FC236}">
+                <a16:creationId xmlns:a16="http://schemas.microsoft.com/office/drawing/2014/main" id="{B716AD63-7EF0-423A-AABC-476FD667FBFB}"/>
+              </a:ext>
+            </a:extLst>
+          </p:cNvPr>
+          <p:cNvSpPr>
+            <a:spLocks xmlns:a="http://schemas.openxmlformats.org/drawingml/2006/main" noGrp="1"/>
+          </p:cNvSpPr>
+          <p:nvPr/>
+        </p:nvSpPr>
+        <p:spPr>
+          <a:xfrm xmlns:a="http://schemas.openxmlformats.org/drawingml/2006/main">
+            <a:off x="723900" y="2257425"/>
+            <a:ext cx="4476750" cy="628650"/>
+          </a:xfrm>
+          <a:prstGeom xmlns:a="http://schemas.openxmlformats.org/drawingml/2006/main" prst="rect">
+            <a:avLst/>
+          </a:prstGeom>
+          <a:noFill xmlns:a="http://schemas.openxmlformats.org/drawingml/2006/main"/>
+          <a:ln xmlns:a="http://schemas.openxmlformats.org/drawingml/2006/main" w="0">
+            <a:noFill/>
+            <a:prstDash val="solid"/>
+          </a:ln>
+        </p:spPr>
+        <p:txBody>
+          <a:bodyPr xmlns:a="http://schemas.openxmlformats.org/drawingml/2006/main" wrap="square" lIns="0" tIns="0" rIns="0" bIns="0" anchor="t">
+            <a:normAutofit fontScale="100000"/>
+          </a:bodyPr>
+          <a:lstStyle xmlns:a="http://schemas.openxmlformats.org/drawingml/2006/main"/>
+          <a:p xmlns:a="http://schemas.openxmlformats.org/drawingml/2006/main">
+            <a:pPr algn="l">
+              <a:defRPr sz="1238" b="0">
+                <a:solidFill>
+                  <a:srgbClr val="6E7A90"/>
+                </a:solidFill>
+              </a:defRPr>
+            </a:pPr>
+            <a:r>
+              <a:rPr sz="1238" b="0">
+                <a:solidFill>
+                  <a:srgbClr val="6E7A90"/>
+                </a:solidFill>
+              </a:rPr>
+              <a:t>平均分会掩盖P0、隐私泄露和关键流程中断，无法直接回答能否上线。</a:t>
+            </a:r>
+          </a:p>
+        </p:txBody>
+      </p:sp>
+      <p:sp>
+        <p:nvSpPr>
+          <p:cNvPr id="26" name="implementation-accent">
+            <a:extLst xmlns:a="http://schemas.openxmlformats.org/drawingml/2006/main">
+              <a:ext uri="{FF2B5EF4-FFF2-40B4-BE49-F238E27FC236}">
+                <a16:creationId xmlns:a16="http://schemas.microsoft.com/office/drawing/2014/main" id="{DB3CEC12-E2FC-4BB5-AB6F-C138DE5CDE98}"/>
+              </a:ext>
+            </a:extLst>
+          </p:cNvPr>
+          <p:cNvSpPr>
+            <a:spLocks xmlns:a="http://schemas.openxmlformats.org/drawingml/2006/main" noGrp="1"/>
+          </p:cNvSpPr>
+          <p:nvPr/>
+        </p:nvSpPr>
+        <p:spPr>
+          <a:xfrm xmlns:a="http://schemas.openxmlformats.org/drawingml/2006/main">
+            <a:off x="533400" y="3086100"/>
+            <a:ext cx="66675" cy="342900"/>
+          </a:xfrm>
+          <a:prstGeom xmlns:a="http://schemas.openxmlformats.org/drawingml/2006/main" prst="roundRect">
+            <a:avLst>
+              <a:gd name="adj" fmla="val 50000"/>
+            </a:avLst>
+          </a:prstGeom>
+          <a:solidFill xmlns:a="http://schemas.openxmlformats.org/drawingml/2006/main">
+            <a:srgbClr val="FFC300"/>
+          </a:solidFill>
+          <a:ln xmlns:a="http://schemas.openxmlformats.org/drawingml/2006/main" w="0">
+            <a:noFill/>
+            <a:prstDash val="solid"/>
+          </a:ln>
+        </p:spPr>
+      </p:sp>
+      <p:sp>
+        <p:nvSpPr>
+          <p:cNvPr id="27" name="implementation-heading">
+            <a:extLst xmlns:a="http://schemas.openxmlformats.org/drawingml/2006/main">
+              <a:ext uri="{FF2B5EF4-FFF2-40B4-BE49-F238E27FC236}">
+                <a16:creationId xmlns:a16="http://schemas.microsoft.com/office/drawing/2014/main" id="{ED7508C4-6A7B-4330-A3E6-32CAE4030C00}"/>
+              </a:ext>
+            </a:extLst>
+          </p:cNvPr>
+          <p:cNvSpPr>
+            <a:spLocks xmlns:a="http://schemas.openxmlformats.org/drawingml/2006/main" noGrp="1"/>
+          </p:cNvSpPr>
+          <p:nvPr/>
+        </p:nvSpPr>
+        <p:spPr>
+          <a:xfrm xmlns:a="http://schemas.openxmlformats.org/drawingml/2006/main">
+            <a:off x="723900" y="3067050"/>
+            <a:ext cx="4476750" cy="400050"/>
+          </a:xfrm>
+          <a:prstGeom xmlns:a="http://schemas.openxmlformats.org/drawingml/2006/main" prst="rect">
+            <a:avLst/>
+          </a:prstGeom>
+          <a:noFill xmlns:a="http://schemas.openxmlformats.org/drawingml/2006/main"/>
+          <a:ln xmlns:a="http://schemas.openxmlformats.org/drawingml/2006/main" w="0">
+            <a:noFill/>
+            <a:prstDash val="solid"/>
+          </a:ln>
+        </p:spPr>
+        <p:txBody>
+          <a:bodyPr xmlns:a="http://schemas.openxmlformats.org/drawingml/2006/main" wrap="square" lIns="0" tIns="0" rIns="0" bIns="0" anchor="ctr">
+            <a:normAutofit fontScale="100000"/>
+          </a:bodyPr>
+          <a:lstStyle xmlns:a="http://schemas.openxmlformats.org/drawingml/2006/main"/>
+          <a:p xmlns:a="http://schemas.openxmlformats.org/drawingml/2006/main">
+            <a:pPr algn="l">
+              <a:defRPr sz="1725" b="1">
+                <a:solidFill>
+                  <a:srgbClr val="111C31"/>
+                </a:solidFill>
+              </a:defRPr>
+            </a:pPr>
+            <a:r>
+              <a:rPr sz="1725" b="1">
+                <a:solidFill>
+                  <a:srgbClr val="111C31"/>
+                </a:solidFill>
+              </a:rPr>
+              <a:t>这么设计是怎么实现的</a:t>
+            </a:r>
+          </a:p>
+        </p:txBody>
+      </p:sp>
+      <p:sp>
+        <p:nvSpPr>
+          <p:cNvPr id="28" name="implementation-body">
+            <a:extLst xmlns:a="http://schemas.openxmlformats.org/drawingml/2006/main">
+              <a:ext uri="{FF2B5EF4-FFF2-40B4-BE49-F238E27FC236}">
+                <a16:creationId xmlns:a16="http://schemas.microsoft.com/office/drawing/2014/main" id="{43652FED-648B-4C1B-A264-E8643668D6DC}"/>
+              </a:ext>
+            </a:extLst>
+          </p:cNvPr>
+          <p:cNvSpPr>
+            <a:spLocks xmlns:a="http://schemas.openxmlformats.org/drawingml/2006/main" noGrp="1"/>
+          </p:cNvSpPr>
+          <p:nvPr/>
+        </p:nvSpPr>
+        <p:spPr>
+          <a:xfrm xmlns:a="http://schemas.openxmlformats.org/drawingml/2006/main">
+            <a:off x="723900" y="3495675"/>
+            <a:ext cx="4476750" cy="628650"/>
+          </a:xfrm>
+          <a:prstGeom xmlns:a="http://schemas.openxmlformats.org/drawingml/2006/main" prst="rect">
+            <a:avLst/>
+          </a:prstGeom>
+          <a:noFill xmlns:a="http://schemas.openxmlformats.org/drawingml/2006/main"/>
+          <a:ln xmlns:a="http://schemas.openxmlformats.org/drawingml/2006/main" w="0">
+            <a:noFill/>
+            <a:prstDash val="solid"/>
+          </a:ln>
+        </p:spPr>
+        <p:txBody>
+          <a:bodyPr xmlns:a="http://schemas.openxmlformats.org/drawingml/2006/main" wrap="square" lIns="0" tIns="0" rIns="0" bIns="0" anchor="t">
+            <a:normAutofit fontScale="100000"/>
+          </a:bodyPr>
+          <a:lstStyle xmlns:a="http://schemas.openxmlformats.org/drawingml/2006/main"/>
+          <a:p xmlns:a="http://schemas.openxmlformats.org/drawingml/2006/main">
+            <a:pPr algn="l">
+              <a:defRPr sz="1238" b="0">
+                <a:solidFill>
+                  <a:srgbClr val="6E7A90"/>
+                </a:solidFill>
+              </a:defRPr>
+            </a:pPr>
+            <a:r>
+              <a:rPr sz="1238" b="0">
+                <a:solidFill>
+                  <a:srgbClr val="6E7A90"/>
+                </a:solidFill>
+              </a:rPr>
+              <a:t>同时计算门禁、履约率、P0和关键失败，并把每个结论绑定到原始对话证据。</a:t>
+            </a:r>
+          </a:p>
+        </p:txBody>
+      </p:sp>
+      <p:sp>
+        <p:nvSpPr>
+          <p:cNvPr id="29" name="advantage-accent">
+            <a:extLst xmlns:a="http://schemas.openxmlformats.org/drawingml/2006/main">
+              <a:ext uri="{FF2B5EF4-FFF2-40B4-BE49-F238E27FC236}">
+                <a16:creationId xmlns:a16="http://schemas.microsoft.com/office/drawing/2014/main" id="{DD56CC73-95A7-4D84-92F8-5CBCF6FBAFD2}"/>
+              </a:ext>
+            </a:extLst>
+          </p:cNvPr>
+          <p:cNvSpPr>
+            <a:spLocks xmlns:a="http://schemas.openxmlformats.org/drawingml/2006/main" noGrp="1"/>
+          </p:cNvSpPr>
+          <p:nvPr/>
+        </p:nvSpPr>
+        <p:spPr>
+          <a:xfrm xmlns:a="http://schemas.openxmlformats.org/drawingml/2006/main">
+            <a:off x="533400" y="4419600"/>
+            <a:ext cx="66675" cy="342900"/>
+          </a:xfrm>
+          <a:prstGeom xmlns:a="http://schemas.openxmlformats.org/drawingml/2006/main" prst="roundRect">
+            <a:avLst>
+              <a:gd name="adj" fmla="val 50000"/>
+            </a:avLst>
+          </a:prstGeom>
+          <a:solidFill xmlns:a="http://schemas.openxmlformats.org/drawingml/2006/main">
+            <a:srgbClr val="FFC300"/>
+          </a:solidFill>
+          <a:ln xmlns:a="http://schemas.openxmlformats.org/drawingml/2006/main" w="0">
+            <a:noFill/>
+            <a:prstDash val="solid"/>
+          </a:ln>
+        </p:spPr>
+      </p:sp>
+      <p:sp>
+        <p:nvSpPr>
+          <p:cNvPr id="30" name="advantage-heading">
+            <a:extLst xmlns:a="http://schemas.openxmlformats.org/drawingml/2006/main">
+              <a:ext uri="{FF2B5EF4-FFF2-40B4-BE49-F238E27FC236}">
+                <a16:creationId xmlns:a16="http://schemas.microsoft.com/office/drawing/2014/main" id="{E7F89674-DA4D-4E05-8260-6DBFDCC3105A}"/>
+              </a:ext>
+            </a:extLst>
+          </p:cNvPr>
+          <p:cNvSpPr>
+            <a:spLocks xmlns:a="http://schemas.openxmlformats.org/drawingml/2006/main" noGrp="1"/>
+          </p:cNvSpPr>
+          <p:nvPr/>
+        </p:nvSpPr>
+        <p:spPr>
+          <a:xfrm xmlns:a="http://schemas.openxmlformats.org/drawingml/2006/main">
+            <a:off x="723900" y="4400550"/>
+            <a:ext cx="4476750" cy="400050"/>
+          </a:xfrm>
+          <a:prstGeom xmlns:a="http://schemas.openxmlformats.org/drawingml/2006/main" prst="rect">
+            <a:avLst/>
+          </a:prstGeom>
+          <a:noFill xmlns:a="http://schemas.openxmlformats.org/drawingml/2006/main"/>
+          <a:ln xmlns:a="http://schemas.openxmlformats.org/drawingml/2006/main" w="0">
+            <a:noFill/>
+            <a:prstDash val="solid"/>
+          </a:ln>
+        </p:spPr>
+        <p:txBody>
+          <a:bodyPr xmlns:a="http://schemas.openxmlformats.org/drawingml/2006/main" wrap="square" lIns="0" tIns="0" rIns="0" bIns="0" anchor="ctr">
+            <a:normAutofit fontScale="100000"/>
+          </a:bodyPr>
+          <a:lstStyle xmlns:a="http://schemas.openxmlformats.org/drawingml/2006/main"/>
+          <a:p xmlns:a="http://schemas.openxmlformats.org/drawingml/2006/main">
+            <a:pPr algn="l">
+              <a:defRPr sz="1725" b="1">
+                <a:solidFill>
+                  <a:srgbClr val="111C31"/>
+                </a:solidFill>
+              </a:defRPr>
+            </a:pPr>
+            <a:r>
+              <a:rPr sz="1725" b="1">
+                <a:solidFill>
+                  <a:srgbClr val="111C31"/>
+                </a:solidFill>
+              </a:rPr>
+              <a:t>这么设计的优势</a:t>
+            </a:r>
+          </a:p>
+        </p:txBody>
+      </p:sp>
+      <p:sp>
+        <p:nvSpPr>
+          <p:cNvPr id="31" name="advantage-body">
+            <a:extLst xmlns:a="http://schemas.openxmlformats.org/drawingml/2006/main">
+              <a:ext uri="{FF2B5EF4-FFF2-40B4-BE49-F238E27FC236}">
+                <a16:creationId xmlns:a16="http://schemas.microsoft.com/office/drawing/2014/main" id="{217E7D7C-F967-401C-B7E7-D9009D49FEC0}"/>
+              </a:ext>
+            </a:extLst>
+          </p:cNvPr>
+          <p:cNvSpPr>
+            <a:spLocks xmlns:a="http://schemas.openxmlformats.org/drawingml/2006/main" noGrp="1"/>
+          </p:cNvSpPr>
+          <p:nvPr/>
+        </p:nvSpPr>
+        <p:spPr>
+          <a:xfrm xmlns:a="http://schemas.openxmlformats.org/drawingml/2006/main">
+            <a:off x="723900" y="4829175"/>
+            <a:ext cx="4476750" cy="628650"/>
+          </a:xfrm>
+          <a:prstGeom xmlns:a="http://schemas.openxmlformats.org/drawingml/2006/main" prst="rect">
+            <a:avLst/>
+          </a:prstGeom>
+          <a:noFill xmlns:a="http://schemas.openxmlformats.org/drawingml/2006/main"/>
+          <a:ln xmlns:a="http://schemas.openxmlformats.org/drawingml/2006/main" w="0">
+            <a:noFill/>
+            <a:prstDash val="solid"/>
+          </a:ln>
+        </p:spPr>
+        <p:txBody>
+          <a:bodyPr xmlns:a="http://schemas.openxmlformats.org/drawingml/2006/main" wrap="square" lIns="0" tIns="0" rIns="0" bIns="0" anchor="t">
+            <a:normAutofit fontScale="100000"/>
+          </a:bodyPr>
+          <a:lstStyle xmlns:a="http://schemas.openxmlformats.org/drawingml/2006/main"/>
+          <a:p xmlns:a="http://schemas.openxmlformats.org/drawingml/2006/main">
+            <a:pPr algn="l">
+              <a:defRPr sz="1238" b="0">
+                <a:solidFill>
+                  <a:srgbClr val="6E7A90"/>
+                </a:solidFill>
+              </a:defRPr>
+            </a:pPr>
+            <a:r>
+              <a:rPr sz="1238" b="0">
+                <a:solidFill>
+                  <a:srgbClr val="6E7A90"/>
+                </a:solidFill>
+              </a:rPr>
+              <a:t>报告直接支持发布决策；评委既能看到结论，也能追溯每一次打回的原因。</a:t>
             </a:r>
           </a:p>
         </p:txBody>
@@ -9845,478 +10167,6 @@
       </p:sp>
       <p:sp>
         <p:nvSpPr>
-          <p:cNvPr id="5" name="decision">
-            <a:extLst xmlns:a="http://schemas.openxmlformats.org/drawingml/2006/main">
-              <a:ext uri="{FF2B5EF4-FFF2-40B4-BE49-F238E27FC236}">
-                <a16:creationId xmlns:a16="http://schemas.microsoft.com/office/drawing/2014/main" id="{B0CE3BC9-D8B1-4041-B5E5-CD8D93B3556B}"/>
-              </a:ext>
-            </a:extLst>
-          </p:cNvPr>
-          <p:cNvSpPr>
-            <a:spLocks xmlns:a="http://schemas.openxmlformats.org/drawingml/2006/main" noGrp="1"/>
-          </p:cNvSpPr>
-          <p:nvPr/>
-        </p:nvSpPr>
-        <p:spPr>
-          <a:xfrm xmlns:a="http://schemas.openxmlformats.org/drawingml/2006/main">
-            <a:off x="533400" y="1866900"/>
-            <a:ext cx="4000500" cy="857250"/>
-          </a:xfrm>
-          <a:prstGeom xmlns:a="http://schemas.openxmlformats.org/drawingml/2006/main" prst="rect">
-            <a:avLst/>
-          </a:prstGeom>
-          <a:noFill xmlns:a="http://schemas.openxmlformats.org/drawingml/2006/main"/>
-          <a:ln xmlns:a="http://schemas.openxmlformats.org/drawingml/2006/main" w="0">
-            <a:noFill/>
-            <a:prstDash val="solid"/>
-          </a:ln>
-        </p:spPr>
-        <p:txBody>
-          <a:bodyPr xmlns:a="http://schemas.openxmlformats.org/drawingml/2006/main" anchor="t">
-            <a:normAutofit fontScale="100000"/>
-          </a:bodyPr>
-          <a:lstStyle xmlns:a="http://schemas.openxmlformats.org/drawingml/2006/main"/>
-          <a:p xmlns:a="http://schemas.openxmlformats.org/drawingml/2006/main">
-            <a:pPr algn="l">
-              <a:buNone/>
-              <a:defRPr sz="2400" b="1">
-                <a:solidFill>
-                  <a:srgbClr val="111827"/>
-                </a:solidFill>
-                <a:latin typeface="PingFang SC"/>
-                <a:ea typeface="PingFang SC"/>
-                <a:cs typeface="PingFang SC"/>
-              </a:defRPr>
-            </a:pPr>
-            <a:r>
-              <a:rPr sz="2400" b="1">
-                <a:solidFill>
-                  <a:srgbClr val="111827"/>
-                </a:solidFill>
-                <a:latin typeface="PingFang SC"/>
-                <a:ea typeface="PingFang SC"/>
-                <a:cs typeface="PingFang SC"/>
-              </a:rPr>
-              <a:t>先分清责任，再决定改谁</a:t>
-            </a:r>
-          </a:p>
-        </p:txBody>
-      </p:sp>
-      <p:sp>
-        <p:nvSpPr>
-          <p:cNvPr id="6" name="decision-sub">
-            <a:extLst xmlns:a="http://schemas.openxmlformats.org/drawingml/2006/main">
-              <a:ext uri="{FF2B5EF4-FFF2-40B4-BE49-F238E27FC236}">
-                <a16:creationId xmlns:a16="http://schemas.microsoft.com/office/drawing/2014/main" id="{C81463E1-CB7C-4B7A-8684-388032501444}"/>
-              </a:ext>
-            </a:extLst>
-          </p:cNvPr>
-          <p:cNvSpPr>
-            <a:spLocks xmlns:a="http://schemas.openxmlformats.org/drawingml/2006/main" noGrp="1"/>
-          </p:cNvSpPr>
-          <p:nvPr/>
-        </p:nvSpPr>
-        <p:spPr>
-          <a:xfrm xmlns:a="http://schemas.openxmlformats.org/drawingml/2006/main">
-            <a:off x="552450" y="2781300"/>
-            <a:ext cx="4476750" cy="323850"/>
-          </a:xfrm>
-          <a:prstGeom xmlns:a="http://schemas.openxmlformats.org/drawingml/2006/main" prst="rect">
-            <a:avLst/>
-          </a:prstGeom>
-          <a:noFill xmlns:a="http://schemas.openxmlformats.org/drawingml/2006/main"/>
-          <a:ln xmlns:a="http://schemas.openxmlformats.org/drawingml/2006/main" w="0">
-            <a:noFill/>
-            <a:prstDash val="solid"/>
-          </a:ln>
-        </p:spPr>
-        <p:txBody>
-          <a:bodyPr xmlns:a="http://schemas.openxmlformats.org/drawingml/2006/main" anchor="t">
-            <a:normAutofit fontScale="93328"/>
-          </a:bodyPr>
-          <a:lstStyle xmlns:a="http://schemas.openxmlformats.org/drawingml/2006/main"/>
-          <a:p xmlns:a="http://schemas.openxmlformats.org/drawingml/2006/main">
-            <a:pPr algn="l">
-              <a:buNone/>
-              <a:defRPr sz="1200" b="0">
-                <a:solidFill>
-                  <a:srgbClr val="667085"/>
-                </a:solidFill>
-                <a:latin typeface="PingFang SC"/>
-                <a:ea typeface="PingFang SC"/>
-                <a:cs typeface="PingFang SC"/>
-              </a:defRPr>
-            </a:pPr>
-            <a:r>
-              <a:rPr sz="1200" b="0">
-                <a:solidFill>
-                  <a:srgbClr val="667085"/>
-                </a:solidFill>
-                <a:latin typeface="PingFang SC"/>
-                <a:ea typeface="PingFang SC"/>
-                <a:cs typeface="PingFang SC"/>
-              </a:rPr>
-              <a:t>不做这一步：SOP、Judge 或覆盖问题，都会被误判成模型能力差。</a:t>
-            </a:r>
-          </a:p>
-        </p:txBody>
-      </p:sp>
-      <p:sp>
-        <p:nvSpPr>
-          <p:cNvPr id="7" name="stat-0">
-            <a:extLst xmlns:a="http://schemas.openxmlformats.org/drawingml/2006/main">
-              <a:ext uri="{FF2B5EF4-FFF2-40B4-BE49-F238E27FC236}">
-                <a16:creationId xmlns:a16="http://schemas.microsoft.com/office/drawing/2014/main" id="{A64EB69F-1AD3-45AE-93F6-D916A936F061}"/>
-              </a:ext>
-            </a:extLst>
-          </p:cNvPr>
-          <p:cNvSpPr>
-            <a:spLocks xmlns:a="http://schemas.openxmlformats.org/drawingml/2006/main" noGrp="1"/>
-          </p:cNvSpPr>
-          <p:nvPr/>
-        </p:nvSpPr>
-        <p:spPr>
-          <a:xfrm xmlns:a="http://schemas.openxmlformats.org/drawingml/2006/main">
-            <a:off x="533400" y="3581400"/>
-            <a:ext cx="1352550" cy="666750"/>
-          </a:xfrm>
-          <a:prstGeom xmlns:a="http://schemas.openxmlformats.org/drawingml/2006/main" prst="rect">
-            <a:avLst/>
-          </a:prstGeom>
-          <a:noFill xmlns:a="http://schemas.openxmlformats.org/drawingml/2006/main"/>
-          <a:ln xmlns:a="http://schemas.openxmlformats.org/drawingml/2006/main" w="0">
-            <a:noFill/>
-            <a:prstDash val="solid"/>
-          </a:ln>
-        </p:spPr>
-        <p:txBody>
-          <a:bodyPr xmlns:a="http://schemas.openxmlformats.org/drawingml/2006/main" anchor="t">
-            <a:normAutofit fontScale="100000"/>
-          </a:bodyPr>
-          <a:lstStyle xmlns:a="http://schemas.openxmlformats.org/drawingml/2006/main"/>
-          <a:p xmlns:a="http://schemas.openxmlformats.org/drawingml/2006/main">
-            <a:pPr algn="l">
-              <a:buNone/>
-              <a:defRPr sz="3300" b="1">
-                <a:solidFill>
-                  <a:srgbClr val="111827"/>
-                </a:solidFill>
-                <a:latin typeface="PingFang SC"/>
-                <a:ea typeface="PingFang SC"/>
-                <a:cs typeface="PingFang SC"/>
-              </a:defRPr>
-            </a:pPr>
-            <a:r>
-              <a:rPr sz="3300" b="1">
-                <a:solidFill>
-                  <a:srgbClr val="111827"/>
-                </a:solidFill>
-                <a:latin typeface="PingFang SC"/>
-                <a:ea typeface="PingFang SC"/>
-                <a:cs typeface="PingFang SC"/>
-              </a:rPr>
-              <a:t>模型</a:t>
-            </a:r>
-          </a:p>
-        </p:txBody>
-      </p:sp>
-      <p:sp>
-        <p:nvSpPr>
-          <p:cNvPr id="8" name="stat-label-0">
-            <a:extLst xmlns:a="http://schemas.openxmlformats.org/drawingml/2006/main">
-              <a:ext uri="{FF2B5EF4-FFF2-40B4-BE49-F238E27FC236}">
-                <a16:creationId xmlns:a16="http://schemas.microsoft.com/office/drawing/2014/main" id="{7261F069-84D1-4836-A1CB-0A3A5D5C44E7}"/>
-              </a:ext>
-            </a:extLst>
-          </p:cNvPr>
-          <p:cNvSpPr>
-            <a:spLocks xmlns:a="http://schemas.openxmlformats.org/drawingml/2006/main" noGrp="1"/>
-          </p:cNvSpPr>
-          <p:nvPr/>
-        </p:nvSpPr>
-        <p:spPr>
-          <a:xfrm xmlns:a="http://schemas.openxmlformats.org/drawingml/2006/main">
-            <a:off x="533400" y="4286250"/>
-            <a:ext cx="1352550" cy="266700"/>
-          </a:xfrm>
-          <a:prstGeom xmlns:a="http://schemas.openxmlformats.org/drawingml/2006/main" prst="rect">
-            <a:avLst/>
-          </a:prstGeom>
-          <a:noFill xmlns:a="http://schemas.openxmlformats.org/drawingml/2006/main"/>
-          <a:ln xmlns:a="http://schemas.openxmlformats.org/drawingml/2006/main" w="0">
-            <a:noFill/>
-            <a:prstDash val="solid"/>
-          </a:ln>
-        </p:spPr>
-        <p:txBody>
-          <a:bodyPr xmlns:a="http://schemas.openxmlformats.org/drawingml/2006/main" anchor="t">
-            <a:normAutofit fontScale="100000"/>
-          </a:bodyPr>
-          <a:lstStyle xmlns:a="http://schemas.openxmlformats.org/drawingml/2006/main"/>
-          <a:p xmlns:a="http://schemas.openxmlformats.org/drawingml/2006/main">
-            <a:pPr algn="l">
-              <a:buNone/>
-              <a:defRPr sz="975" b="0">
-                <a:solidFill>
-                  <a:srgbClr val="667085"/>
-                </a:solidFill>
-                <a:latin typeface="PingFang SC"/>
-                <a:ea typeface="PingFang SC"/>
-                <a:cs typeface="PingFang SC"/>
-              </a:defRPr>
-            </a:pPr>
-            <a:r>
-              <a:rPr sz="975" b="0">
-                <a:solidFill>
-                  <a:srgbClr val="667085"/>
-                </a:solidFill>
-                <a:latin typeface="PingFang SC"/>
-                <a:ea typeface="PingFang SC"/>
-                <a:cs typeface="PingFang SC"/>
-              </a:rPr>
-              <a:t>能力与策略问题</a:t>
-            </a:r>
-          </a:p>
-        </p:txBody>
-      </p:sp>
-      <p:sp>
-        <p:nvSpPr>
-          <p:cNvPr id="9" name="stat-1">
-            <a:extLst xmlns:a="http://schemas.openxmlformats.org/drawingml/2006/main">
-              <a:ext uri="{FF2B5EF4-FFF2-40B4-BE49-F238E27FC236}">
-                <a16:creationId xmlns:a16="http://schemas.microsoft.com/office/drawing/2014/main" id="{C2588DEE-1FC2-4818-B044-00FEF0E24E2D}"/>
-              </a:ext>
-            </a:extLst>
-          </p:cNvPr>
-          <p:cNvSpPr>
-            <a:spLocks xmlns:a="http://schemas.openxmlformats.org/drawingml/2006/main" noGrp="1"/>
-          </p:cNvSpPr>
-          <p:nvPr/>
-        </p:nvSpPr>
-        <p:spPr>
-          <a:xfrm xmlns:a="http://schemas.openxmlformats.org/drawingml/2006/main">
-            <a:off x="2171700" y="3581400"/>
-            <a:ext cx="1352550" cy="666750"/>
-          </a:xfrm>
-          <a:prstGeom xmlns:a="http://schemas.openxmlformats.org/drawingml/2006/main" prst="rect">
-            <a:avLst/>
-          </a:prstGeom>
-          <a:noFill xmlns:a="http://schemas.openxmlformats.org/drawingml/2006/main"/>
-          <a:ln xmlns:a="http://schemas.openxmlformats.org/drawingml/2006/main" w="0">
-            <a:noFill/>
-            <a:prstDash val="solid"/>
-          </a:ln>
-        </p:spPr>
-        <p:txBody>
-          <a:bodyPr xmlns:a="http://schemas.openxmlformats.org/drawingml/2006/main" anchor="t">
-            <a:normAutofit fontScale="100000"/>
-          </a:bodyPr>
-          <a:lstStyle xmlns:a="http://schemas.openxmlformats.org/drawingml/2006/main"/>
-          <a:p xmlns:a="http://schemas.openxmlformats.org/drawingml/2006/main">
-            <a:pPr algn="l">
-              <a:buNone/>
-              <a:defRPr sz="3300" b="1">
-                <a:solidFill>
-                  <a:srgbClr val="111827"/>
-                </a:solidFill>
-                <a:latin typeface="PingFang SC"/>
-                <a:ea typeface="PingFang SC"/>
-                <a:cs typeface="PingFang SC"/>
-              </a:defRPr>
-            </a:pPr>
-            <a:r>
-              <a:rPr sz="3300" b="1">
-                <a:solidFill>
-                  <a:srgbClr val="111827"/>
-                </a:solidFill>
-                <a:latin typeface="PingFang SC"/>
-                <a:ea typeface="PingFang SC"/>
-                <a:cs typeface="PingFang SC"/>
-              </a:rPr>
-              <a:t>SOP</a:t>
-            </a:r>
-          </a:p>
-        </p:txBody>
-      </p:sp>
-      <p:sp>
-        <p:nvSpPr>
-          <p:cNvPr id="10" name="stat-label-1">
-            <a:extLst xmlns:a="http://schemas.openxmlformats.org/drawingml/2006/main">
-              <a:ext uri="{FF2B5EF4-FFF2-40B4-BE49-F238E27FC236}">
-                <a16:creationId xmlns:a16="http://schemas.microsoft.com/office/drawing/2014/main" id="{F2DA5F17-C3CD-4B4D-96F7-5057D5458574}"/>
-              </a:ext>
-            </a:extLst>
-          </p:cNvPr>
-          <p:cNvSpPr>
-            <a:spLocks xmlns:a="http://schemas.openxmlformats.org/drawingml/2006/main" noGrp="1"/>
-          </p:cNvSpPr>
-          <p:nvPr/>
-        </p:nvSpPr>
-        <p:spPr>
-          <a:xfrm xmlns:a="http://schemas.openxmlformats.org/drawingml/2006/main">
-            <a:off x="2171700" y="4286250"/>
-            <a:ext cx="1352550" cy="266700"/>
-          </a:xfrm>
-          <a:prstGeom xmlns:a="http://schemas.openxmlformats.org/drawingml/2006/main" prst="rect">
-            <a:avLst/>
-          </a:prstGeom>
-          <a:noFill xmlns:a="http://schemas.openxmlformats.org/drawingml/2006/main"/>
-          <a:ln xmlns:a="http://schemas.openxmlformats.org/drawingml/2006/main" w="0">
-            <a:noFill/>
-            <a:prstDash val="solid"/>
-          </a:ln>
-        </p:spPr>
-        <p:txBody>
-          <a:bodyPr xmlns:a="http://schemas.openxmlformats.org/drawingml/2006/main" anchor="t">
-            <a:normAutofit fontScale="100000"/>
-          </a:bodyPr>
-          <a:lstStyle xmlns:a="http://schemas.openxmlformats.org/drawingml/2006/main"/>
-          <a:p xmlns:a="http://schemas.openxmlformats.org/drawingml/2006/main">
-            <a:pPr algn="l">
-              <a:buNone/>
-              <a:defRPr sz="975" b="0">
-                <a:solidFill>
-                  <a:srgbClr val="667085"/>
-                </a:solidFill>
-                <a:latin typeface="PingFang SC"/>
-                <a:ea typeface="PingFang SC"/>
-                <a:cs typeface="PingFang SC"/>
-              </a:defRPr>
-            </a:pPr>
-            <a:r>
-              <a:rPr sz="975" b="0">
-                <a:solidFill>
-                  <a:srgbClr val="667085"/>
-                </a:solidFill>
-                <a:latin typeface="PingFang SC"/>
-                <a:ea typeface="PingFang SC"/>
-                <a:cs typeface="PingFang SC"/>
-              </a:rPr>
-              <a:t>指令可执行性</a:t>
-            </a:r>
-          </a:p>
-        </p:txBody>
-      </p:sp>
-      <p:sp>
-        <p:nvSpPr>
-          <p:cNvPr id="11" name="stat-2">
-            <a:extLst xmlns:a="http://schemas.openxmlformats.org/drawingml/2006/main">
-              <a:ext uri="{FF2B5EF4-FFF2-40B4-BE49-F238E27FC236}">
-                <a16:creationId xmlns:a16="http://schemas.microsoft.com/office/drawing/2014/main" id="{A2568244-186A-4F43-AECE-BB8E99D7ECA7}"/>
-              </a:ext>
-            </a:extLst>
-          </p:cNvPr>
-          <p:cNvSpPr>
-            <a:spLocks xmlns:a="http://schemas.openxmlformats.org/drawingml/2006/main" noGrp="1"/>
-          </p:cNvSpPr>
-          <p:nvPr/>
-        </p:nvSpPr>
-        <p:spPr>
-          <a:xfrm xmlns:a="http://schemas.openxmlformats.org/drawingml/2006/main">
-            <a:off x="3810000" y="3581400"/>
-            <a:ext cx="1352550" cy="666750"/>
-          </a:xfrm>
-          <a:prstGeom xmlns:a="http://schemas.openxmlformats.org/drawingml/2006/main" prst="rect">
-            <a:avLst/>
-          </a:prstGeom>
-          <a:noFill xmlns:a="http://schemas.openxmlformats.org/drawingml/2006/main"/>
-          <a:ln xmlns:a="http://schemas.openxmlformats.org/drawingml/2006/main" w="0">
-            <a:noFill/>
-            <a:prstDash val="solid"/>
-          </a:ln>
-        </p:spPr>
-        <p:txBody>
-          <a:bodyPr xmlns:a="http://schemas.openxmlformats.org/drawingml/2006/main" anchor="t">
-            <a:normAutofit fontScale="100000"/>
-          </a:bodyPr>
-          <a:lstStyle xmlns:a="http://schemas.openxmlformats.org/drawingml/2006/main"/>
-          <a:p xmlns:a="http://schemas.openxmlformats.org/drawingml/2006/main">
-            <a:pPr algn="l">
-              <a:buNone/>
-              <a:defRPr sz="3300" b="1">
-                <a:solidFill>
-                  <a:srgbClr val="111827"/>
-                </a:solidFill>
-                <a:latin typeface="PingFang SC"/>
-                <a:ea typeface="PingFang SC"/>
-                <a:cs typeface="PingFang SC"/>
-              </a:defRPr>
-            </a:pPr>
-            <a:r>
-              <a:rPr sz="3300" b="1">
-                <a:solidFill>
-                  <a:srgbClr val="111827"/>
-                </a:solidFill>
-                <a:latin typeface="PingFang SC"/>
-                <a:ea typeface="PingFang SC"/>
-                <a:cs typeface="PingFang SC"/>
-              </a:rPr>
-              <a:t>裁判</a:t>
-            </a:r>
-          </a:p>
-        </p:txBody>
-      </p:sp>
-      <p:sp>
-        <p:nvSpPr>
-          <p:cNvPr id="12" name="stat-label-2">
-            <a:extLst xmlns:a="http://schemas.openxmlformats.org/drawingml/2006/main">
-              <a:ext uri="{FF2B5EF4-FFF2-40B4-BE49-F238E27FC236}">
-                <a16:creationId xmlns:a16="http://schemas.microsoft.com/office/drawing/2014/main" id="{46EB030E-F492-46E3-8C5B-6A223CBEDFAD}"/>
-              </a:ext>
-            </a:extLst>
-          </p:cNvPr>
-          <p:cNvSpPr>
-            <a:spLocks xmlns:a="http://schemas.openxmlformats.org/drawingml/2006/main" noGrp="1"/>
-          </p:cNvSpPr>
-          <p:nvPr/>
-        </p:nvSpPr>
-        <p:spPr>
-          <a:xfrm xmlns:a="http://schemas.openxmlformats.org/drawingml/2006/main">
-            <a:off x="3810000" y="4286250"/>
-            <a:ext cx="1352550" cy="266700"/>
-          </a:xfrm>
-          <a:prstGeom xmlns:a="http://schemas.openxmlformats.org/drawingml/2006/main" prst="rect">
-            <a:avLst/>
-          </a:prstGeom>
-          <a:noFill xmlns:a="http://schemas.openxmlformats.org/drawingml/2006/main"/>
-          <a:ln xmlns:a="http://schemas.openxmlformats.org/drawingml/2006/main" w="0">
-            <a:noFill/>
-            <a:prstDash val="solid"/>
-          </a:ln>
-        </p:spPr>
-        <p:txBody>
-          <a:bodyPr xmlns:a="http://schemas.openxmlformats.org/drawingml/2006/main" anchor="t">
-            <a:normAutofit fontScale="100000"/>
-          </a:bodyPr>
-          <a:lstStyle xmlns:a="http://schemas.openxmlformats.org/drawingml/2006/main"/>
-          <a:p xmlns:a="http://schemas.openxmlformats.org/drawingml/2006/main">
-            <a:pPr algn="l">
-              <a:buNone/>
-              <a:defRPr sz="975" b="0">
-                <a:solidFill>
-                  <a:srgbClr val="667085"/>
-                </a:solidFill>
-                <a:latin typeface="PingFang SC"/>
-                <a:ea typeface="PingFang SC"/>
-                <a:cs typeface="PingFang SC"/>
-              </a:defRPr>
-            </a:pPr>
-            <a:r>
-              <a:rPr sz="975" b="0">
-                <a:solidFill>
-                  <a:srgbClr val="667085"/>
-                </a:solidFill>
-                <a:latin typeface="PingFang SC"/>
-                <a:ea typeface="PingFang SC"/>
-                <a:cs typeface="PingFang SC"/>
-              </a:rPr>
-              <a:t>Judge / 测试数据</a:t>
-            </a:r>
-          </a:p>
-        </p:txBody>
-      </p:sp>
-      <p:sp>
-        <p:nvSpPr>
           <p:cNvPr id="13" name="root-panel">
             <a:extLst xmlns:a="http://schemas.openxmlformats.org/drawingml/2006/main">
               <a:ext uri="{FF2B5EF4-FFF2-40B4-BE49-F238E27FC236}">
@@ -10612,65 +10462,6 @@
                 <a:cs typeface="PingFang SC"/>
               </a:rPr>
               <a:t/>
-            </a:r>
-          </a:p>
-        </p:txBody>
-      </p:sp>
-      <p:sp>
-        <p:nvSpPr>
-          <p:cNvPr id="18" name="source">
-            <a:extLst xmlns:a="http://schemas.openxmlformats.org/drawingml/2006/main">
-              <a:ext uri="{FF2B5EF4-FFF2-40B4-BE49-F238E27FC236}">
-                <a16:creationId xmlns:a16="http://schemas.microsoft.com/office/drawing/2014/main" id="{771875FB-1E0E-4D7E-850B-F8DA480B5683}"/>
-              </a:ext>
-            </a:extLst>
-          </p:cNvPr>
-          <p:cNvSpPr>
-            <a:spLocks xmlns:a="http://schemas.openxmlformats.org/drawingml/2006/main" noGrp="1"/>
-          </p:cNvSpPr>
-          <p:nvPr/>
-        </p:nvSpPr>
-        <p:spPr>
-          <a:xfrm xmlns:a="http://schemas.openxmlformats.org/drawingml/2006/main">
-            <a:off x="533400" y="6372225"/>
-            <a:ext cx="9906000" cy="190500"/>
-          </a:xfrm>
-          <a:prstGeom xmlns:a="http://schemas.openxmlformats.org/drawingml/2006/main" prst="rect">
-            <a:avLst/>
-          </a:prstGeom>
-          <a:noFill xmlns:a="http://schemas.openxmlformats.org/drawingml/2006/main"/>
-          <a:ln xmlns:a="http://schemas.openxmlformats.org/drawingml/2006/main" w="0">
-            <a:noFill/>
-            <a:prstDash val="solid"/>
-          </a:ln>
-        </p:spPr>
-        <p:txBody>
-          <a:bodyPr xmlns:a="http://schemas.openxmlformats.org/drawingml/2006/main" anchor="t">
-            <a:normAutofit fontScale="72222"/>
-          </a:bodyPr>
-          <a:lstStyle xmlns:a="http://schemas.openxmlformats.org/drawingml/2006/main"/>
-          <a:p xmlns:a="http://schemas.openxmlformats.org/drawingml/2006/main">
-            <a:pPr algn="l">
-              <a:buNone/>
-              <a:defRPr sz="900" b="0">
-                <a:solidFill>
-                  <a:srgbClr val="667085"/>
-                </a:solidFill>
-                <a:latin typeface="PingFang SC"/>
-                <a:ea typeface="PingFang SC"/>
-                <a:cs typeface="PingFang SC"/>
-              </a:defRPr>
-            </a:pPr>
-            <a:r>
-              <a:rPr sz="900" b="0">
-                <a:solidFill>
-                  <a:srgbClr val="667085"/>
-                </a:solidFill>
-                <a:latin typeface="PingFang SC"/>
-                <a:ea typeface="PingFang SC"/>
-                <a:cs typeface="PingFang SC"/>
-              </a:rPr>
-              <a:t>设计闭环：模型表现 × SOP 健康 × Judge 状态 × 数据覆盖 → 可解释根因，而不是默认怪模型。</a:t>
             </a:r>
           </a:p>
         </p:txBody>
@@ -10684,7 +10475,7 @@
           <p:nvPr/>
         </p:nvPicPr>
         <p:blipFill>
-          <a:blip xmlns:r="http://schemas.openxmlformats.org/officeDocument/2006/relationships" xmlns:a="http://schemas.openxmlformats.org/drawingml/2006/main" r:embed="R119be18d84b84c4f"/>
+          <a:blip xmlns:r="http://schemas.openxmlformats.org/officeDocument/2006/relationships" xmlns:a="http://schemas.openxmlformats.org/drawingml/2006/main" r:embed="R4576bd49b12848c7"/>
           <a:srcRect xmlns:a="http://schemas.openxmlformats.org/drawingml/2006/main" l="0" t="2174" r="0" b="2174"/>
           <a:stretch xmlns:a="http://schemas.openxmlformats.org/drawingml/2006/main">
             <a:fillRect l="0" t="0" r="0" b="0"/>
@@ -10753,7 +10544,7 @@
                 <a:latin typeface="PingFang SC"/>
                 <a:ea typeface="PingFang SC"/>
                 <a:cs typeface="PingFang SC"/>
-                <a:hlinkClick xmlns:r="http://schemas.openxmlformats.org/officeDocument/2006/relationships" r:id="Rc8eb0e44c68749f0"/>
+                <a:hlinkClick xmlns:r="http://schemas.openxmlformats.org/officeDocument/2006/relationships" r:id="Rc70b3bfbb9cf4f0b"/>
               </a:rPr>
               <a:t>▶ 在线 Demo</a:t>
             </a:r>
@@ -10805,9 +10596,420 @@
                 <a:latin typeface="PingFang SC"/>
                 <a:ea typeface="PingFang SC"/>
                 <a:cs typeface="PingFang SC"/>
-                <a:hlinkClick xmlns:r="http://schemas.openxmlformats.org/officeDocument/2006/relationships" r:id="R69f15c4e87a3442d"/>
+                <a:hlinkClick xmlns:r="http://schemas.openxmlformats.org/officeDocument/2006/relationships" r:id="Rf723d50c0ef74891"/>
               </a:rPr>
               <a:t>结果备份 ↗</a:t>
+            </a:r>
+          </a:p>
+        </p:txBody>
+      </p:sp>
+      <p:sp>
+        <p:nvSpPr>
+          <p:cNvPr id="23" name="problem-accent">
+            <a:extLst xmlns:a="http://schemas.openxmlformats.org/drawingml/2006/main">
+              <a:ext uri="{FF2B5EF4-FFF2-40B4-BE49-F238E27FC236}">
+                <a16:creationId xmlns:a16="http://schemas.microsoft.com/office/drawing/2014/main" id="{FF003637-F443-4258-9A8E-6444EEC92D6A}"/>
+              </a:ext>
+            </a:extLst>
+          </p:cNvPr>
+          <p:cNvSpPr>
+            <a:spLocks xmlns:a="http://schemas.openxmlformats.org/drawingml/2006/main" noGrp="1"/>
+          </p:cNvSpPr>
+          <p:nvPr/>
+        </p:nvSpPr>
+        <p:spPr>
+          <a:xfrm xmlns:a="http://schemas.openxmlformats.org/drawingml/2006/main">
+            <a:off x="533400" y="1847850"/>
+            <a:ext cx="66675" cy="342900"/>
+          </a:xfrm>
+          <a:prstGeom xmlns:a="http://schemas.openxmlformats.org/drawingml/2006/main" prst="roundRect">
+            <a:avLst>
+              <a:gd name="adj" fmla="val 50000"/>
+            </a:avLst>
+          </a:prstGeom>
+          <a:solidFill xmlns:a="http://schemas.openxmlformats.org/drawingml/2006/main">
+            <a:srgbClr val="FFC300"/>
+          </a:solidFill>
+          <a:ln xmlns:a="http://schemas.openxmlformats.org/drawingml/2006/main" w="0">
+            <a:noFill/>
+            <a:prstDash val="solid"/>
+          </a:ln>
+        </p:spPr>
+      </p:sp>
+      <p:sp>
+        <p:nvSpPr>
+          <p:cNvPr id="24" name="problem-heading">
+            <a:extLst xmlns:a="http://schemas.openxmlformats.org/drawingml/2006/main">
+              <a:ext uri="{FF2B5EF4-FFF2-40B4-BE49-F238E27FC236}">
+                <a16:creationId xmlns:a16="http://schemas.microsoft.com/office/drawing/2014/main" id="{63A1AE28-D302-4DB3-9398-055D1D63402C}"/>
+              </a:ext>
+            </a:extLst>
+          </p:cNvPr>
+          <p:cNvSpPr>
+            <a:spLocks xmlns:a="http://schemas.openxmlformats.org/drawingml/2006/main" noGrp="1"/>
+          </p:cNvSpPr>
+          <p:nvPr/>
+        </p:nvSpPr>
+        <p:spPr>
+          <a:xfrm xmlns:a="http://schemas.openxmlformats.org/drawingml/2006/main">
+            <a:off x="723900" y="1828800"/>
+            <a:ext cx="4476750" cy="400050"/>
+          </a:xfrm>
+          <a:prstGeom xmlns:a="http://schemas.openxmlformats.org/drawingml/2006/main" prst="rect">
+            <a:avLst/>
+          </a:prstGeom>
+          <a:noFill xmlns:a="http://schemas.openxmlformats.org/drawingml/2006/main"/>
+          <a:ln xmlns:a="http://schemas.openxmlformats.org/drawingml/2006/main" w="0">
+            <a:noFill/>
+            <a:prstDash val="solid"/>
+          </a:ln>
+        </p:spPr>
+        <p:txBody>
+          <a:bodyPr xmlns:a="http://schemas.openxmlformats.org/drawingml/2006/main" wrap="square" lIns="0" tIns="0" rIns="0" bIns="0" anchor="ctr">
+            <a:normAutofit fontScale="100000"/>
+          </a:bodyPr>
+          <a:lstStyle xmlns:a="http://schemas.openxmlformats.org/drawingml/2006/main"/>
+          <a:p xmlns:a="http://schemas.openxmlformats.org/drawingml/2006/main">
+            <a:pPr algn="l">
+              <a:defRPr sz="1725" b="1">
+                <a:solidFill>
+                  <a:srgbClr val="111C31"/>
+                </a:solidFill>
+              </a:defRPr>
+            </a:pPr>
+            <a:r>
+              <a:rPr sz="1725" b="1">
+                <a:solidFill>
+                  <a:srgbClr val="111C31"/>
+                </a:solidFill>
+              </a:rPr>
+              <a:t>解决了什么问题</a:t>
+            </a:r>
+          </a:p>
+        </p:txBody>
+      </p:sp>
+      <p:sp>
+        <p:nvSpPr>
+          <p:cNvPr id="25" name="problem-body">
+            <a:extLst xmlns:a="http://schemas.openxmlformats.org/drawingml/2006/main">
+              <a:ext uri="{FF2B5EF4-FFF2-40B4-BE49-F238E27FC236}">
+                <a16:creationId xmlns:a16="http://schemas.microsoft.com/office/drawing/2014/main" id="{ACA44B70-9636-492C-911F-26C12CCF633A}"/>
+              </a:ext>
+            </a:extLst>
+          </p:cNvPr>
+          <p:cNvSpPr>
+            <a:spLocks xmlns:a="http://schemas.openxmlformats.org/drawingml/2006/main" noGrp="1"/>
+          </p:cNvSpPr>
+          <p:nvPr/>
+        </p:nvSpPr>
+        <p:spPr>
+          <a:xfrm xmlns:a="http://schemas.openxmlformats.org/drawingml/2006/main">
+            <a:off x="723900" y="2257425"/>
+            <a:ext cx="4476750" cy="628650"/>
+          </a:xfrm>
+          <a:prstGeom xmlns:a="http://schemas.openxmlformats.org/drawingml/2006/main" prst="rect">
+            <a:avLst/>
+          </a:prstGeom>
+          <a:noFill xmlns:a="http://schemas.openxmlformats.org/drawingml/2006/main"/>
+          <a:ln xmlns:a="http://schemas.openxmlformats.org/drawingml/2006/main" w="0">
+            <a:noFill/>
+            <a:prstDash val="solid"/>
+          </a:ln>
+        </p:spPr>
+        <p:txBody>
+          <a:bodyPr xmlns:a="http://schemas.openxmlformats.org/drawingml/2006/main" wrap="square" lIns="0" tIns="0" rIns="0" bIns="0" anchor="t">
+            <a:normAutofit fontScale="100000"/>
+          </a:bodyPr>
+          <a:lstStyle xmlns:a="http://schemas.openxmlformats.org/drawingml/2006/main"/>
+          <a:p xmlns:a="http://schemas.openxmlformats.org/drawingml/2006/main">
+            <a:pPr algn="l">
+              <a:defRPr sz="1238" b="0">
+                <a:solidFill>
+                  <a:srgbClr val="6E7A90"/>
+                </a:solidFill>
+              </a:defRPr>
+            </a:pPr>
+            <a:r>
+              <a:rPr sz="1238" b="0">
+                <a:solidFill>
+                  <a:srgbClr val="6E7A90"/>
+                </a:solidFill>
+              </a:rPr>
+              <a:t>低分不一定来自模型，也可能是SOP、裁判或测试覆盖的问题。</a:t>
+            </a:r>
+          </a:p>
+        </p:txBody>
+      </p:sp>
+      <p:sp>
+        <p:nvSpPr>
+          <p:cNvPr id="26" name="implementation-accent">
+            <a:extLst xmlns:a="http://schemas.openxmlformats.org/drawingml/2006/main">
+              <a:ext uri="{FF2B5EF4-FFF2-40B4-BE49-F238E27FC236}">
+                <a16:creationId xmlns:a16="http://schemas.microsoft.com/office/drawing/2014/main" id="{4DC232C1-2542-4325-8696-B8A6C828B220}"/>
+              </a:ext>
+            </a:extLst>
+          </p:cNvPr>
+          <p:cNvSpPr>
+            <a:spLocks xmlns:a="http://schemas.openxmlformats.org/drawingml/2006/main" noGrp="1"/>
+          </p:cNvSpPr>
+          <p:nvPr/>
+        </p:nvSpPr>
+        <p:spPr>
+          <a:xfrm xmlns:a="http://schemas.openxmlformats.org/drawingml/2006/main">
+            <a:off x="533400" y="3086100"/>
+            <a:ext cx="66675" cy="342900"/>
+          </a:xfrm>
+          <a:prstGeom xmlns:a="http://schemas.openxmlformats.org/drawingml/2006/main" prst="roundRect">
+            <a:avLst>
+              <a:gd name="adj" fmla="val 50000"/>
+            </a:avLst>
+          </a:prstGeom>
+          <a:solidFill xmlns:a="http://schemas.openxmlformats.org/drawingml/2006/main">
+            <a:srgbClr val="FFC300"/>
+          </a:solidFill>
+          <a:ln xmlns:a="http://schemas.openxmlformats.org/drawingml/2006/main" w="0">
+            <a:noFill/>
+            <a:prstDash val="solid"/>
+          </a:ln>
+        </p:spPr>
+      </p:sp>
+      <p:sp>
+        <p:nvSpPr>
+          <p:cNvPr id="27" name="implementation-heading">
+            <a:extLst xmlns:a="http://schemas.openxmlformats.org/drawingml/2006/main">
+              <a:ext uri="{FF2B5EF4-FFF2-40B4-BE49-F238E27FC236}">
+                <a16:creationId xmlns:a16="http://schemas.microsoft.com/office/drawing/2014/main" id="{8653607E-AF75-49A1-AAA8-09B32C72D27E}"/>
+              </a:ext>
+            </a:extLst>
+          </p:cNvPr>
+          <p:cNvSpPr>
+            <a:spLocks xmlns:a="http://schemas.openxmlformats.org/drawingml/2006/main" noGrp="1"/>
+          </p:cNvSpPr>
+          <p:nvPr/>
+        </p:nvSpPr>
+        <p:spPr>
+          <a:xfrm xmlns:a="http://schemas.openxmlformats.org/drawingml/2006/main">
+            <a:off x="723900" y="3067050"/>
+            <a:ext cx="4476750" cy="400050"/>
+          </a:xfrm>
+          <a:prstGeom xmlns:a="http://schemas.openxmlformats.org/drawingml/2006/main" prst="rect">
+            <a:avLst/>
+          </a:prstGeom>
+          <a:noFill xmlns:a="http://schemas.openxmlformats.org/drawingml/2006/main"/>
+          <a:ln xmlns:a="http://schemas.openxmlformats.org/drawingml/2006/main" w="0">
+            <a:noFill/>
+            <a:prstDash val="solid"/>
+          </a:ln>
+        </p:spPr>
+        <p:txBody>
+          <a:bodyPr xmlns:a="http://schemas.openxmlformats.org/drawingml/2006/main" wrap="square" lIns="0" tIns="0" rIns="0" bIns="0" anchor="ctr">
+            <a:normAutofit fontScale="100000"/>
+          </a:bodyPr>
+          <a:lstStyle xmlns:a="http://schemas.openxmlformats.org/drawingml/2006/main"/>
+          <a:p xmlns:a="http://schemas.openxmlformats.org/drawingml/2006/main">
+            <a:pPr algn="l">
+              <a:defRPr sz="1725" b="1">
+                <a:solidFill>
+                  <a:srgbClr val="111C31"/>
+                </a:solidFill>
+              </a:defRPr>
+            </a:pPr>
+            <a:r>
+              <a:rPr sz="1725" b="1">
+                <a:solidFill>
+                  <a:srgbClr val="111C31"/>
+                </a:solidFill>
+              </a:rPr>
+              <a:t>这么设计是怎么实现的</a:t>
+            </a:r>
+          </a:p>
+        </p:txBody>
+      </p:sp>
+      <p:sp>
+        <p:nvSpPr>
+          <p:cNvPr id="28" name="implementation-body">
+            <a:extLst xmlns:a="http://schemas.openxmlformats.org/drawingml/2006/main">
+              <a:ext uri="{FF2B5EF4-FFF2-40B4-BE49-F238E27FC236}">
+                <a16:creationId xmlns:a16="http://schemas.microsoft.com/office/drawing/2014/main" id="{66779728-8EE9-4B86-8699-FA96AAEDEE2D}"/>
+              </a:ext>
+            </a:extLst>
+          </p:cNvPr>
+          <p:cNvSpPr>
+            <a:spLocks xmlns:a="http://schemas.openxmlformats.org/drawingml/2006/main" noGrp="1"/>
+          </p:cNvSpPr>
+          <p:nvPr/>
+        </p:nvSpPr>
+        <p:spPr>
+          <a:xfrm xmlns:a="http://schemas.openxmlformats.org/drawingml/2006/main">
+            <a:off x="723900" y="3495675"/>
+            <a:ext cx="4476750" cy="628650"/>
+          </a:xfrm>
+          <a:prstGeom xmlns:a="http://schemas.openxmlformats.org/drawingml/2006/main" prst="rect">
+            <a:avLst/>
+          </a:prstGeom>
+          <a:noFill xmlns:a="http://schemas.openxmlformats.org/drawingml/2006/main"/>
+          <a:ln xmlns:a="http://schemas.openxmlformats.org/drawingml/2006/main" w="0">
+            <a:noFill/>
+            <a:prstDash val="solid"/>
+          </a:ln>
+        </p:spPr>
+        <p:txBody>
+          <a:bodyPr xmlns:a="http://schemas.openxmlformats.org/drawingml/2006/main" wrap="square" lIns="0" tIns="0" rIns="0" bIns="0" anchor="t">
+            <a:normAutofit fontScale="100000"/>
+          </a:bodyPr>
+          <a:lstStyle xmlns:a="http://schemas.openxmlformats.org/drawingml/2006/main"/>
+          <a:p xmlns:a="http://schemas.openxmlformats.org/drawingml/2006/main">
+            <a:pPr algn="l">
+              <a:defRPr sz="1238" b="0">
+                <a:solidFill>
+                  <a:srgbClr val="6E7A90"/>
+                </a:solidFill>
+              </a:defRPr>
+            </a:pPr>
+            <a:r>
+              <a:rPr sz="1238" b="0">
+                <a:solidFill>
+                  <a:srgbClr val="6E7A90"/>
+                </a:solidFill>
+              </a:rPr>
+              <a:t>综合打回率、履约率、P0、SOP健康度、NA率与裁判分歧率进行多信号归因。</a:t>
+            </a:r>
+          </a:p>
+        </p:txBody>
+      </p:sp>
+      <p:sp>
+        <p:nvSpPr>
+          <p:cNvPr id="29" name="advantage-accent">
+            <a:extLst xmlns:a="http://schemas.openxmlformats.org/drawingml/2006/main">
+              <a:ext uri="{FF2B5EF4-FFF2-40B4-BE49-F238E27FC236}">
+                <a16:creationId xmlns:a16="http://schemas.microsoft.com/office/drawing/2014/main" id="{1ACF809B-3EA1-4432-9935-E162FC5BD3A9}"/>
+              </a:ext>
+            </a:extLst>
+          </p:cNvPr>
+          <p:cNvSpPr>
+            <a:spLocks xmlns:a="http://schemas.openxmlformats.org/drawingml/2006/main" noGrp="1"/>
+          </p:cNvSpPr>
+          <p:nvPr/>
+        </p:nvSpPr>
+        <p:spPr>
+          <a:xfrm xmlns:a="http://schemas.openxmlformats.org/drawingml/2006/main">
+            <a:off x="533400" y="4419600"/>
+            <a:ext cx="66675" cy="342900"/>
+          </a:xfrm>
+          <a:prstGeom xmlns:a="http://schemas.openxmlformats.org/drawingml/2006/main" prst="roundRect">
+            <a:avLst>
+              <a:gd name="adj" fmla="val 50000"/>
+            </a:avLst>
+          </a:prstGeom>
+          <a:solidFill xmlns:a="http://schemas.openxmlformats.org/drawingml/2006/main">
+            <a:srgbClr val="FFC300"/>
+          </a:solidFill>
+          <a:ln xmlns:a="http://schemas.openxmlformats.org/drawingml/2006/main" w="0">
+            <a:noFill/>
+            <a:prstDash val="solid"/>
+          </a:ln>
+        </p:spPr>
+      </p:sp>
+      <p:sp>
+        <p:nvSpPr>
+          <p:cNvPr id="30" name="advantage-heading">
+            <a:extLst xmlns:a="http://schemas.openxmlformats.org/drawingml/2006/main">
+              <a:ext uri="{FF2B5EF4-FFF2-40B4-BE49-F238E27FC236}">
+                <a16:creationId xmlns:a16="http://schemas.microsoft.com/office/drawing/2014/main" id="{38DE4F6E-71F1-407C-AF57-9BF61E0B98E5}"/>
+              </a:ext>
+            </a:extLst>
+          </p:cNvPr>
+          <p:cNvSpPr>
+            <a:spLocks xmlns:a="http://schemas.openxmlformats.org/drawingml/2006/main" noGrp="1"/>
+          </p:cNvSpPr>
+          <p:nvPr/>
+        </p:nvSpPr>
+        <p:spPr>
+          <a:xfrm xmlns:a="http://schemas.openxmlformats.org/drawingml/2006/main">
+            <a:off x="723900" y="4400550"/>
+            <a:ext cx="4476750" cy="400050"/>
+          </a:xfrm>
+          <a:prstGeom xmlns:a="http://schemas.openxmlformats.org/drawingml/2006/main" prst="rect">
+            <a:avLst/>
+          </a:prstGeom>
+          <a:noFill xmlns:a="http://schemas.openxmlformats.org/drawingml/2006/main"/>
+          <a:ln xmlns:a="http://schemas.openxmlformats.org/drawingml/2006/main" w="0">
+            <a:noFill/>
+            <a:prstDash val="solid"/>
+          </a:ln>
+        </p:spPr>
+        <p:txBody>
+          <a:bodyPr xmlns:a="http://schemas.openxmlformats.org/drawingml/2006/main" wrap="square" lIns="0" tIns="0" rIns="0" bIns="0" anchor="ctr">
+            <a:normAutofit fontScale="100000"/>
+          </a:bodyPr>
+          <a:lstStyle xmlns:a="http://schemas.openxmlformats.org/drawingml/2006/main"/>
+          <a:p xmlns:a="http://schemas.openxmlformats.org/drawingml/2006/main">
+            <a:pPr algn="l">
+              <a:defRPr sz="1725" b="1">
+                <a:solidFill>
+                  <a:srgbClr val="111C31"/>
+                </a:solidFill>
+              </a:defRPr>
+            </a:pPr>
+            <a:r>
+              <a:rPr sz="1725" b="1">
+                <a:solidFill>
+                  <a:srgbClr val="111C31"/>
+                </a:solidFill>
+              </a:rPr>
+              <a:t>这么设计的优势</a:t>
+            </a:r>
+          </a:p>
+        </p:txBody>
+      </p:sp>
+      <p:sp>
+        <p:nvSpPr>
+          <p:cNvPr id="31" name="advantage-body">
+            <a:extLst xmlns:a="http://schemas.openxmlformats.org/drawingml/2006/main">
+              <a:ext uri="{FF2B5EF4-FFF2-40B4-BE49-F238E27FC236}">
+                <a16:creationId xmlns:a16="http://schemas.microsoft.com/office/drawing/2014/main" id="{B90A30B9-507E-449B-9AD7-D8387885E484}"/>
+              </a:ext>
+            </a:extLst>
+          </p:cNvPr>
+          <p:cNvSpPr>
+            <a:spLocks xmlns:a="http://schemas.openxmlformats.org/drawingml/2006/main" noGrp="1"/>
+          </p:cNvSpPr>
+          <p:nvPr/>
+        </p:nvSpPr>
+        <p:spPr>
+          <a:xfrm xmlns:a="http://schemas.openxmlformats.org/drawingml/2006/main">
+            <a:off x="723900" y="4829175"/>
+            <a:ext cx="4476750" cy="628650"/>
+          </a:xfrm>
+          <a:prstGeom xmlns:a="http://schemas.openxmlformats.org/drawingml/2006/main" prst="rect">
+            <a:avLst/>
+          </a:prstGeom>
+          <a:noFill xmlns:a="http://schemas.openxmlformats.org/drawingml/2006/main"/>
+          <a:ln xmlns:a="http://schemas.openxmlformats.org/drawingml/2006/main" w="0">
+            <a:noFill/>
+            <a:prstDash val="solid"/>
+          </a:ln>
+        </p:spPr>
+        <p:txBody>
+          <a:bodyPr xmlns:a="http://schemas.openxmlformats.org/drawingml/2006/main" wrap="square" lIns="0" tIns="0" rIns="0" bIns="0" anchor="t">
+            <a:normAutofit fontScale="100000"/>
+          </a:bodyPr>
+          <a:lstStyle xmlns:a="http://schemas.openxmlformats.org/drawingml/2006/main"/>
+          <a:p xmlns:a="http://schemas.openxmlformats.org/drawingml/2006/main">
+            <a:pPr algn="l">
+              <a:defRPr sz="1238" b="0">
+                <a:solidFill>
+                  <a:srgbClr val="6E7A90"/>
+                </a:solidFill>
+              </a:defRPr>
+            </a:pPr>
+            <a:r>
+              <a:rPr sz="1238" b="0">
+                <a:solidFill>
+                  <a:srgbClr val="6E7A90"/>
+                </a:solidFill>
+              </a:rPr>
+              <a:t>避免把系统问题错怪给模型，让优化资源真正投入责任对象。</a:t>
             </a:r>
           </a:p>
         </p:txBody>
@@ -11051,478 +11253,6 @@
       </p:sp>
       <p:sp>
         <p:nvSpPr>
-          <p:cNvPr id="5" name="decision">
-            <a:extLst xmlns:a="http://schemas.openxmlformats.org/drawingml/2006/main">
-              <a:ext uri="{FF2B5EF4-FFF2-40B4-BE49-F238E27FC236}">
-                <a16:creationId xmlns:a16="http://schemas.microsoft.com/office/drawing/2014/main" id="{B0CE3BC9-D8B1-4041-B5E5-CD8D93B3556B}"/>
-              </a:ext>
-            </a:extLst>
-          </p:cNvPr>
-          <p:cNvSpPr>
-            <a:spLocks xmlns:a="http://schemas.openxmlformats.org/drawingml/2006/main" noGrp="1"/>
-          </p:cNvSpPr>
-          <p:nvPr/>
-        </p:nvSpPr>
-        <p:spPr>
-          <a:xfrm xmlns:a="http://schemas.openxmlformats.org/drawingml/2006/main">
-            <a:off x="533400" y="1866900"/>
-            <a:ext cx="4000500" cy="857250"/>
-          </a:xfrm>
-          <a:prstGeom xmlns:a="http://schemas.openxmlformats.org/drawingml/2006/main" prst="rect">
-            <a:avLst/>
-          </a:prstGeom>
-          <a:noFill xmlns:a="http://schemas.openxmlformats.org/drawingml/2006/main"/>
-          <a:ln xmlns:a="http://schemas.openxmlformats.org/drawingml/2006/main" w="0">
-            <a:noFill/>
-            <a:prstDash val="solid"/>
-          </a:ln>
-        </p:spPr>
-        <p:txBody>
-          <a:bodyPr xmlns:a="http://schemas.openxmlformats.org/drawingml/2006/main" anchor="t">
-            <a:normAutofit fontScale="100000"/>
-          </a:bodyPr>
-          <a:lstStyle xmlns:a="http://schemas.openxmlformats.org/drawingml/2006/main"/>
-          <a:p xmlns:a="http://schemas.openxmlformats.org/drawingml/2006/main">
-            <a:pPr algn="l">
-              <a:buNone/>
-              <a:defRPr sz="2400" b="1">
-                <a:solidFill>
-                  <a:srgbClr val="111827"/>
-                </a:solidFill>
-                <a:latin typeface="PingFang SC"/>
-                <a:ea typeface="PingFang SC"/>
-                <a:cs typeface="PingFang SC"/>
-              </a:defRPr>
-            </a:pPr>
-            <a:r>
-              <a:rPr sz="2400" b="1">
-                <a:solidFill>
-                  <a:srgbClr val="111827"/>
-                </a:solidFill>
-                <a:latin typeface="PingFang SC"/>
-                <a:ea typeface="PingFang SC"/>
-                <a:cs typeface="PingFang SC"/>
-              </a:rPr>
-              <a:t>只改责任对象，评分尺不变</a:t>
-            </a:r>
-          </a:p>
-        </p:txBody>
-      </p:sp>
-      <p:sp>
-        <p:nvSpPr>
-          <p:cNvPr id="6" name="decision-sub">
-            <a:extLst xmlns:a="http://schemas.openxmlformats.org/drawingml/2006/main">
-              <a:ext uri="{FF2B5EF4-FFF2-40B4-BE49-F238E27FC236}">
-                <a16:creationId xmlns:a16="http://schemas.microsoft.com/office/drawing/2014/main" id="{C81463E1-CB7C-4B7A-8684-388032501444}"/>
-              </a:ext>
-            </a:extLst>
-          </p:cNvPr>
-          <p:cNvSpPr>
-            <a:spLocks xmlns:a="http://schemas.openxmlformats.org/drawingml/2006/main" noGrp="1"/>
-          </p:cNvSpPr>
-          <p:nvPr/>
-        </p:nvSpPr>
-        <p:spPr>
-          <a:xfrm xmlns:a="http://schemas.openxmlformats.org/drawingml/2006/main">
-            <a:off x="552450" y="2781300"/>
-            <a:ext cx="4476750" cy="323850"/>
-          </a:xfrm>
-          <a:prstGeom xmlns:a="http://schemas.openxmlformats.org/drawingml/2006/main" prst="rect">
-            <a:avLst/>
-          </a:prstGeom>
-          <a:noFill xmlns:a="http://schemas.openxmlformats.org/drawingml/2006/main"/>
-          <a:ln xmlns:a="http://schemas.openxmlformats.org/drawingml/2006/main" w="0">
-            <a:noFill/>
-            <a:prstDash val="solid"/>
-          </a:ln>
-        </p:spPr>
-        <p:txBody>
-          <a:bodyPr xmlns:a="http://schemas.openxmlformats.org/drawingml/2006/main" anchor="t">
-            <a:normAutofit fontScale="100000"/>
-          </a:bodyPr>
-          <a:lstStyle xmlns:a="http://schemas.openxmlformats.org/drawingml/2006/main"/>
-          <a:p xmlns:a="http://schemas.openxmlformats.org/drawingml/2006/main">
-            <a:pPr algn="l">
-              <a:buNone/>
-              <a:defRPr sz="1200" b="0">
-                <a:solidFill>
-                  <a:srgbClr val="667085"/>
-                </a:solidFill>
-                <a:latin typeface="PingFang SC"/>
-                <a:ea typeface="PingFang SC"/>
-                <a:cs typeface="PingFang SC"/>
-              </a:defRPr>
-            </a:pPr>
-            <a:r>
-              <a:rPr sz="1200" b="0">
-                <a:solidFill>
-                  <a:srgbClr val="667085"/>
-                </a:solidFill>
-                <a:latin typeface="PingFang SC"/>
-                <a:ea typeface="PingFang SC"/>
-                <a:cs typeface="PingFang SC"/>
-              </a:rPr>
-              <a:t>不做这一步：模型和评分尺同时变化，无法证明谁起作用。</a:t>
-            </a:r>
-          </a:p>
-        </p:txBody>
-      </p:sp>
-      <p:sp>
-        <p:nvSpPr>
-          <p:cNvPr id="7" name="stat-0">
-            <a:extLst xmlns:a="http://schemas.openxmlformats.org/drawingml/2006/main">
-              <a:ext uri="{FF2B5EF4-FFF2-40B4-BE49-F238E27FC236}">
-                <a16:creationId xmlns:a16="http://schemas.microsoft.com/office/drawing/2014/main" id="{A64EB69F-1AD3-45AE-93F6-D916A936F061}"/>
-              </a:ext>
-            </a:extLst>
-          </p:cNvPr>
-          <p:cNvSpPr>
-            <a:spLocks xmlns:a="http://schemas.openxmlformats.org/drawingml/2006/main" noGrp="1"/>
-          </p:cNvSpPr>
-          <p:nvPr/>
-        </p:nvSpPr>
-        <p:spPr>
-          <a:xfrm xmlns:a="http://schemas.openxmlformats.org/drawingml/2006/main">
-            <a:off x="533400" y="3581400"/>
-            <a:ext cx="1352550" cy="666750"/>
-          </a:xfrm>
-          <a:prstGeom xmlns:a="http://schemas.openxmlformats.org/drawingml/2006/main" prst="rect">
-            <a:avLst/>
-          </a:prstGeom>
-          <a:noFill xmlns:a="http://schemas.openxmlformats.org/drawingml/2006/main"/>
-          <a:ln xmlns:a="http://schemas.openxmlformats.org/drawingml/2006/main" w="0">
-            <a:noFill/>
-            <a:prstDash val="solid"/>
-          </a:ln>
-        </p:spPr>
-        <p:txBody>
-          <a:bodyPr xmlns:a="http://schemas.openxmlformats.org/drawingml/2006/main" anchor="t">
-            <a:normAutofit fontScale="69767"/>
-          </a:bodyPr>
-          <a:lstStyle xmlns:a="http://schemas.openxmlformats.org/drawingml/2006/main"/>
-          <a:p xmlns:a="http://schemas.openxmlformats.org/drawingml/2006/main">
-            <a:pPr algn="l">
-              <a:buNone/>
-              <a:defRPr sz="3300" b="1">
-                <a:solidFill>
-                  <a:srgbClr val="111827"/>
-                </a:solidFill>
-                <a:latin typeface="PingFang SC"/>
-                <a:ea typeface="PingFang SC"/>
-                <a:cs typeface="PingFang SC"/>
-              </a:defRPr>
-            </a:pPr>
-            <a:r>
-              <a:rPr sz="3300" b="1">
-                <a:solidFill>
-                  <a:srgbClr val="111827"/>
-                </a:solidFill>
-                <a:latin typeface="PingFang SC"/>
-                <a:ea typeface="PingFang SC"/>
-                <a:cs typeface="PingFang SC"/>
-              </a:rPr>
-              <a:t>只改对象</a:t>
-            </a:r>
-          </a:p>
-        </p:txBody>
-      </p:sp>
-      <p:sp>
-        <p:nvSpPr>
-          <p:cNvPr id="8" name="stat-label-0">
-            <a:extLst xmlns:a="http://schemas.openxmlformats.org/drawingml/2006/main">
-              <a:ext uri="{FF2B5EF4-FFF2-40B4-BE49-F238E27FC236}">
-                <a16:creationId xmlns:a16="http://schemas.microsoft.com/office/drawing/2014/main" id="{7261F069-84D1-4836-A1CB-0A3A5D5C44E7}"/>
-              </a:ext>
-            </a:extLst>
-          </p:cNvPr>
-          <p:cNvSpPr>
-            <a:spLocks xmlns:a="http://schemas.openxmlformats.org/drawingml/2006/main" noGrp="1"/>
-          </p:cNvSpPr>
-          <p:nvPr/>
-        </p:nvSpPr>
-        <p:spPr>
-          <a:xfrm xmlns:a="http://schemas.openxmlformats.org/drawingml/2006/main">
-            <a:off x="533400" y="4286250"/>
-            <a:ext cx="1352550" cy="266700"/>
-          </a:xfrm>
-          <a:prstGeom xmlns:a="http://schemas.openxmlformats.org/drawingml/2006/main" prst="rect">
-            <a:avLst/>
-          </a:prstGeom>
-          <a:noFill xmlns:a="http://schemas.openxmlformats.org/drawingml/2006/main"/>
-          <a:ln xmlns:a="http://schemas.openxmlformats.org/drawingml/2006/main" w="0">
-            <a:noFill/>
-            <a:prstDash val="solid"/>
-          </a:ln>
-        </p:spPr>
-        <p:txBody>
-          <a:bodyPr xmlns:a="http://schemas.openxmlformats.org/drawingml/2006/main" anchor="t">
-            <a:normAutofit fontScale="100000"/>
-          </a:bodyPr>
-          <a:lstStyle xmlns:a="http://schemas.openxmlformats.org/drawingml/2006/main"/>
-          <a:p xmlns:a="http://schemas.openxmlformats.org/drawingml/2006/main">
-            <a:pPr algn="l">
-              <a:buNone/>
-              <a:defRPr sz="975" b="0">
-                <a:solidFill>
-                  <a:srgbClr val="667085"/>
-                </a:solidFill>
-                <a:latin typeface="PingFang SC"/>
-                <a:ea typeface="PingFang SC"/>
-                <a:cs typeface="PingFang SC"/>
-              </a:defRPr>
-            </a:pPr>
-            <a:r>
-              <a:rPr sz="975" b="0">
-                <a:solidFill>
-                  <a:srgbClr val="667085"/>
-                </a:solidFill>
-                <a:latin typeface="PingFang SC"/>
-                <a:ea typeface="PingFang SC"/>
-                <a:cs typeface="PingFang SC"/>
-              </a:rPr>
-              <a:t>按根因路由</a:t>
-            </a:r>
-          </a:p>
-        </p:txBody>
-      </p:sp>
-      <p:sp>
-        <p:nvSpPr>
-          <p:cNvPr id="9" name="stat-1">
-            <a:extLst xmlns:a="http://schemas.openxmlformats.org/drawingml/2006/main">
-              <a:ext uri="{FF2B5EF4-FFF2-40B4-BE49-F238E27FC236}">
-                <a16:creationId xmlns:a16="http://schemas.microsoft.com/office/drawing/2014/main" id="{C2588DEE-1FC2-4818-B044-00FEF0E24E2D}"/>
-              </a:ext>
-            </a:extLst>
-          </p:cNvPr>
-          <p:cNvSpPr>
-            <a:spLocks xmlns:a="http://schemas.openxmlformats.org/drawingml/2006/main" noGrp="1"/>
-          </p:cNvSpPr>
-          <p:nvPr/>
-        </p:nvSpPr>
-        <p:spPr>
-          <a:xfrm xmlns:a="http://schemas.openxmlformats.org/drawingml/2006/main">
-            <a:off x="2171700" y="3581400"/>
-            <a:ext cx="1352550" cy="666750"/>
-          </a:xfrm>
-          <a:prstGeom xmlns:a="http://schemas.openxmlformats.org/drawingml/2006/main" prst="rect">
-            <a:avLst/>
-          </a:prstGeom>
-          <a:noFill xmlns:a="http://schemas.openxmlformats.org/drawingml/2006/main"/>
-          <a:ln xmlns:a="http://schemas.openxmlformats.org/drawingml/2006/main" w="0">
-            <a:noFill/>
-            <a:prstDash val="solid"/>
-          </a:ln>
-        </p:spPr>
-        <p:txBody>
-          <a:bodyPr xmlns:a="http://schemas.openxmlformats.org/drawingml/2006/main" anchor="t">
-            <a:normAutofit fontScale="69767"/>
-          </a:bodyPr>
-          <a:lstStyle xmlns:a="http://schemas.openxmlformats.org/drawingml/2006/main"/>
-          <a:p xmlns:a="http://schemas.openxmlformats.org/drawingml/2006/main">
-            <a:pPr algn="l">
-              <a:buNone/>
-              <a:defRPr sz="3300" b="1">
-                <a:solidFill>
-                  <a:srgbClr val="111827"/>
-                </a:solidFill>
-                <a:latin typeface="PingFang SC"/>
-                <a:ea typeface="PingFang SC"/>
-                <a:cs typeface="PingFang SC"/>
-              </a:defRPr>
-            </a:pPr>
-            <a:r>
-              <a:rPr sz="3300" b="1">
-                <a:solidFill>
-                  <a:srgbClr val="111827"/>
-                </a:solidFill>
-                <a:latin typeface="PingFang SC"/>
-                <a:ea typeface="PingFang SC"/>
-                <a:cs typeface="PingFang SC"/>
-              </a:rPr>
-              <a:t>锁定尺子</a:t>
-            </a:r>
-          </a:p>
-        </p:txBody>
-      </p:sp>
-      <p:sp>
-        <p:nvSpPr>
-          <p:cNvPr id="10" name="stat-label-1">
-            <a:extLst xmlns:a="http://schemas.openxmlformats.org/drawingml/2006/main">
-              <a:ext uri="{FF2B5EF4-FFF2-40B4-BE49-F238E27FC236}">
-                <a16:creationId xmlns:a16="http://schemas.microsoft.com/office/drawing/2014/main" id="{F2DA5F17-C3CD-4B4D-96F7-5057D5458574}"/>
-              </a:ext>
-            </a:extLst>
-          </p:cNvPr>
-          <p:cNvSpPr>
-            <a:spLocks xmlns:a="http://schemas.openxmlformats.org/drawingml/2006/main" noGrp="1"/>
-          </p:cNvSpPr>
-          <p:nvPr/>
-        </p:nvSpPr>
-        <p:spPr>
-          <a:xfrm xmlns:a="http://schemas.openxmlformats.org/drawingml/2006/main">
-            <a:off x="2171700" y="4286250"/>
-            <a:ext cx="1352550" cy="266700"/>
-          </a:xfrm>
-          <a:prstGeom xmlns:a="http://schemas.openxmlformats.org/drawingml/2006/main" prst="rect">
-            <a:avLst/>
-          </a:prstGeom>
-          <a:noFill xmlns:a="http://schemas.openxmlformats.org/drawingml/2006/main"/>
-          <a:ln xmlns:a="http://schemas.openxmlformats.org/drawingml/2006/main" w="0">
-            <a:noFill/>
-            <a:prstDash val="solid"/>
-          </a:ln>
-        </p:spPr>
-        <p:txBody>
-          <a:bodyPr xmlns:a="http://schemas.openxmlformats.org/drawingml/2006/main" anchor="t">
-            <a:normAutofit fontScale="100000"/>
-          </a:bodyPr>
-          <a:lstStyle xmlns:a="http://schemas.openxmlformats.org/drawingml/2006/main"/>
-          <a:p xmlns:a="http://schemas.openxmlformats.org/drawingml/2006/main">
-            <a:pPr algn="l">
-              <a:buNone/>
-              <a:defRPr sz="975" b="0">
-                <a:solidFill>
-                  <a:srgbClr val="667085"/>
-                </a:solidFill>
-                <a:latin typeface="PingFang SC"/>
-                <a:ea typeface="PingFang SC"/>
-                <a:cs typeface="PingFang SC"/>
-              </a:defRPr>
-            </a:pPr>
-            <a:r>
-              <a:rPr sz="975" b="0">
-                <a:solidFill>
-                  <a:srgbClr val="667085"/>
-                </a:solidFill>
-                <a:latin typeface="PingFang SC"/>
-                <a:ea typeface="PingFang SC"/>
-                <a:cs typeface="PingFang SC"/>
-              </a:rPr>
-              <a:t>SOP·Checklist</a:t>
-            </a:r>
-          </a:p>
-        </p:txBody>
-      </p:sp>
-      <p:sp>
-        <p:nvSpPr>
-          <p:cNvPr id="11" name="stat-2">
-            <a:extLst xmlns:a="http://schemas.openxmlformats.org/drawingml/2006/main">
-              <a:ext uri="{FF2B5EF4-FFF2-40B4-BE49-F238E27FC236}">
-                <a16:creationId xmlns:a16="http://schemas.microsoft.com/office/drawing/2014/main" id="{A2568244-186A-4F43-AECE-BB8E99D7ECA7}"/>
-              </a:ext>
-            </a:extLst>
-          </p:cNvPr>
-          <p:cNvSpPr>
-            <a:spLocks xmlns:a="http://schemas.openxmlformats.org/drawingml/2006/main" noGrp="1"/>
-          </p:cNvSpPr>
-          <p:nvPr/>
-        </p:nvSpPr>
-        <p:spPr>
-          <a:xfrm xmlns:a="http://schemas.openxmlformats.org/drawingml/2006/main">
-            <a:off x="3810000" y="3581400"/>
-            <a:ext cx="1352550" cy="666750"/>
-          </a:xfrm>
-          <a:prstGeom xmlns:a="http://schemas.openxmlformats.org/drawingml/2006/main" prst="rect">
-            <a:avLst/>
-          </a:prstGeom>
-          <a:noFill xmlns:a="http://schemas.openxmlformats.org/drawingml/2006/main"/>
-          <a:ln xmlns:a="http://schemas.openxmlformats.org/drawingml/2006/main" w="0">
-            <a:noFill/>
-            <a:prstDash val="solid"/>
-          </a:ln>
-        </p:spPr>
-        <p:txBody>
-          <a:bodyPr xmlns:a="http://schemas.openxmlformats.org/drawingml/2006/main" anchor="t">
-            <a:normAutofit fontScale="100000"/>
-          </a:bodyPr>
-          <a:lstStyle xmlns:a="http://schemas.openxmlformats.org/drawingml/2006/main"/>
-          <a:p xmlns:a="http://schemas.openxmlformats.org/drawingml/2006/main">
-            <a:pPr algn="l">
-              <a:buNone/>
-              <a:defRPr sz="1800" b="1">
-                <a:solidFill>
-                  <a:srgbClr val="111827"/>
-                </a:solidFill>
-                <a:latin typeface="PingFang SC"/>
-                <a:ea typeface="PingFang SC"/>
-                <a:cs typeface="PingFang SC"/>
-              </a:defRPr>
-            </a:pPr>
-            <a:r>
-              <a:rPr sz="1800" b="1">
-                <a:solidFill>
-                  <a:srgbClr val="111827"/>
-                </a:solidFill>
-                <a:latin typeface="PingFang SC"/>
-                <a:ea typeface="PingFang SC"/>
-                <a:cs typeface="PingFang SC"/>
-              </a:rPr>
-              <a:t>Step 3</a:t>
-            </a:r>
-          </a:p>
-        </p:txBody>
-      </p:sp>
-      <p:sp>
-        <p:nvSpPr>
-          <p:cNvPr id="12" name="stat-label-2">
-            <a:extLst xmlns:a="http://schemas.openxmlformats.org/drawingml/2006/main">
-              <a:ext uri="{FF2B5EF4-FFF2-40B4-BE49-F238E27FC236}">
-                <a16:creationId xmlns:a16="http://schemas.microsoft.com/office/drawing/2014/main" id="{46EB030E-F492-46E3-8C5B-6A223CBEDFAD}"/>
-              </a:ext>
-            </a:extLst>
-          </p:cNvPr>
-          <p:cNvSpPr>
-            <a:spLocks xmlns:a="http://schemas.openxmlformats.org/drawingml/2006/main" noGrp="1"/>
-          </p:cNvSpPr>
-          <p:nvPr/>
-        </p:nvSpPr>
-        <p:spPr>
-          <a:xfrm xmlns:a="http://schemas.openxmlformats.org/drawingml/2006/main">
-            <a:off x="3810000" y="4286250"/>
-            <a:ext cx="1352550" cy="266700"/>
-          </a:xfrm>
-          <a:prstGeom xmlns:a="http://schemas.openxmlformats.org/drawingml/2006/main" prst="rect">
-            <a:avLst/>
-          </a:prstGeom>
-          <a:noFill xmlns:a="http://schemas.openxmlformats.org/drawingml/2006/main"/>
-          <a:ln xmlns:a="http://schemas.openxmlformats.org/drawingml/2006/main" w="0">
-            <a:noFill/>
-            <a:prstDash val="solid"/>
-          </a:ln>
-        </p:spPr>
-        <p:txBody>
-          <a:bodyPr xmlns:a="http://schemas.openxmlformats.org/drawingml/2006/main" anchor="t">
-            <a:normAutofit fontScale="100000"/>
-          </a:bodyPr>
-          <a:lstStyle xmlns:a="http://schemas.openxmlformats.org/drawingml/2006/main"/>
-          <a:p xmlns:a="http://schemas.openxmlformats.org/drawingml/2006/main">
-            <a:pPr algn="l">
-              <a:buNone/>
-              <a:defRPr sz="975" b="0">
-                <a:solidFill>
-                  <a:srgbClr val="667085"/>
-                </a:solidFill>
-                <a:latin typeface="PingFang SC"/>
-                <a:ea typeface="PingFang SC"/>
-                <a:cs typeface="PingFang SC"/>
-              </a:defRPr>
-            </a:pPr>
-            <a:r>
-              <a:rPr sz="975" b="0">
-                <a:solidFill>
-                  <a:srgbClr val="667085"/>
-                </a:solidFill>
-                <a:latin typeface="PingFang SC"/>
-                <a:ea typeface="PingFang SC"/>
-                <a:cs typeface="PingFang SC"/>
-              </a:rPr>
-              <a:t>同批用户重放</a:t>
-            </a:r>
-          </a:p>
-        </p:txBody>
-      </p:sp>
-      <p:sp>
-        <p:nvSpPr>
           <p:cNvPr id="13" name="root-panel">
             <a:extLst xmlns:a="http://schemas.openxmlformats.org/drawingml/2006/main">
               <a:ext uri="{FF2B5EF4-FFF2-40B4-BE49-F238E27FC236}">
@@ -11818,65 +11548,6 @@
                 <a:cs typeface="PingFang SC"/>
               </a:rPr>
               <a:t/>
-            </a:r>
-          </a:p>
-        </p:txBody>
-      </p:sp>
-      <p:sp>
-        <p:nvSpPr>
-          <p:cNvPr id="18" name="source">
-            <a:extLst xmlns:a="http://schemas.openxmlformats.org/drawingml/2006/main">
-              <a:ext uri="{FF2B5EF4-FFF2-40B4-BE49-F238E27FC236}">
-                <a16:creationId xmlns:a16="http://schemas.microsoft.com/office/drawing/2014/main" id="{771875FB-1E0E-4D7E-850B-F8DA480B5683}"/>
-              </a:ext>
-            </a:extLst>
-          </p:cNvPr>
-          <p:cNvSpPr>
-            <a:spLocks xmlns:a="http://schemas.openxmlformats.org/drawingml/2006/main" noGrp="1"/>
-          </p:cNvSpPr>
-          <p:nvPr/>
-        </p:nvSpPr>
-        <p:spPr>
-          <a:xfrm xmlns:a="http://schemas.openxmlformats.org/drawingml/2006/main">
-            <a:off x="533400" y="6372225"/>
-            <a:ext cx="9906000" cy="190500"/>
-          </a:xfrm>
-          <a:prstGeom xmlns:a="http://schemas.openxmlformats.org/drawingml/2006/main" prst="rect">
-            <a:avLst/>
-          </a:prstGeom>
-          <a:noFill xmlns:a="http://schemas.openxmlformats.org/drawingml/2006/main"/>
-          <a:ln xmlns:a="http://schemas.openxmlformats.org/drawingml/2006/main" w="0">
-            <a:noFill/>
-            <a:prstDash val="solid"/>
-          </a:ln>
-        </p:spPr>
-        <p:txBody>
-          <a:bodyPr xmlns:a="http://schemas.openxmlformats.org/drawingml/2006/main" anchor="t">
-            <a:normAutofit fontScale="72222"/>
-          </a:bodyPr>
-          <a:lstStyle xmlns:a="http://schemas.openxmlformats.org/drawingml/2006/main"/>
-          <a:p xmlns:a="http://schemas.openxmlformats.org/drawingml/2006/main">
-            <a:pPr algn="l">
-              <a:buNone/>
-              <a:defRPr sz="900" b="0">
-                <a:solidFill>
-                  <a:srgbClr val="667085"/>
-                </a:solidFill>
-                <a:latin typeface="PingFang SC"/>
-                <a:ea typeface="PingFang SC"/>
-                <a:cs typeface="PingFang SC"/>
-              </a:defRPr>
-            </a:pPr>
-            <a:r>
-              <a:rPr sz="900" b="0">
-                <a:solidFill>
-                  <a:srgbClr val="667085"/>
-                </a:solidFill>
-                <a:latin typeface="PingFang SC"/>
-                <a:ea typeface="PingFang SC"/>
-                <a:cs typeface="PingFang SC"/>
-              </a:rPr>
-              <a:t>设计闭环：根因路由 → 单变量修复 → 同尺回归 → 原生 diff；形成可证伪的优化闭环。</a:t>
             </a:r>
           </a:p>
         </p:txBody>
@@ -11890,7 +11561,7 @@
           <p:nvPr/>
         </p:nvPicPr>
         <p:blipFill>
-          <a:blip xmlns:r="http://schemas.openxmlformats.org/officeDocument/2006/relationships" xmlns:a="http://schemas.openxmlformats.org/drawingml/2006/main" r:embed="Rb9ea120134194a5e"/>
+          <a:blip xmlns:r="http://schemas.openxmlformats.org/officeDocument/2006/relationships" xmlns:a="http://schemas.openxmlformats.org/drawingml/2006/main" r:embed="Rc95162b325864c92"/>
           <a:srcRect xmlns:a="http://schemas.openxmlformats.org/drawingml/2006/main" l="0" t="8152" r="0" b="8152"/>
           <a:stretch xmlns:a="http://schemas.openxmlformats.org/drawingml/2006/main">
             <a:fillRect l="0" t="0" r="0" b="0"/>
@@ -11959,7 +11630,7 @@
                 <a:latin typeface="PingFang SC"/>
                 <a:ea typeface="PingFang SC"/>
                 <a:cs typeface="PingFang SC"/>
-                <a:hlinkClick xmlns:r="http://schemas.openxmlformats.org/officeDocument/2006/relationships" r:id="Re39bb87545534533"/>
+                <a:hlinkClick xmlns:r="http://schemas.openxmlformats.org/officeDocument/2006/relationships" r:id="R74b7230a8d954be4"/>
               </a:rPr>
               <a:t>▶ 在线 Demo</a:t>
             </a:r>
@@ -12011,9 +11682,420 @@
                 <a:latin typeface="PingFang SC"/>
                 <a:ea typeface="PingFang SC"/>
                 <a:cs typeface="PingFang SC"/>
-                <a:hlinkClick xmlns:r="http://schemas.openxmlformats.org/officeDocument/2006/relationships" r:id="R82de5b419605499f"/>
+                <a:hlinkClick xmlns:r="http://schemas.openxmlformats.org/officeDocument/2006/relationships" r:id="Rfe1196de1277461b"/>
               </a:rPr>
               <a:t>结果备份 ↗</a:t>
+            </a:r>
+          </a:p>
+        </p:txBody>
+      </p:sp>
+      <p:sp>
+        <p:nvSpPr>
+          <p:cNvPr id="23" name="problem-accent">
+            <a:extLst xmlns:a="http://schemas.openxmlformats.org/drawingml/2006/main">
+              <a:ext uri="{FF2B5EF4-FFF2-40B4-BE49-F238E27FC236}">
+                <a16:creationId xmlns:a16="http://schemas.microsoft.com/office/drawing/2014/main" id="{AA3DCD02-EAFA-4E89-8A1F-0DD4534DC491}"/>
+              </a:ext>
+            </a:extLst>
+          </p:cNvPr>
+          <p:cNvSpPr>
+            <a:spLocks xmlns:a="http://schemas.openxmlformats.org/drawingml/2006/main" noGrp="1"/>
+          </p:cNvSpPr>
+          <p:nvPr/>
+        </p:nvSpPr>
+        <p:spPr>
+          <a:xfrm xmlns:a="http://schemas.openxmlformats.org/drawingml/2006/main">
+            <a:off x="533400" y="1847850"/>
+            <a:ext cx="66675" cy="342900"/>
+          </a:xfrm>
+          <a:prstGeom xmlns:a="http://schemas.openxmlformats.org/drawingml/2006/main" prst="roundRect">
+            <a:avLst>
+              <a:gd name="adj" fmla="val 50000"/>
+            </a:avLst>
+          </a:prstGeom>
+          <a:solidFill xmlns:a="http://schemas.openxmlformats.org/drawingml/2006/main">
+            <a:srgbClr val="FFC300"/>
+          </a:solidFill>
+          <a:ln xmlns:a="http://schemas.openxmlformats.org/drawingml/2006/main" w="0">
+            <a:noFill/>
+            <a:prstDash val="solid"/>
+          </a:ln>
+        </p:spPr>
+      </p:sp>
+      <p:sp>
+        <p:nvSpPr>
+          <p:cNvPr id="24" name="problem-heading">
+            <a:extLst xmlns:a="http://schemas.openxmlformats.org/drawingml/2006/main">
+              <a:ext uri="{FF2B5EF4-FFF2-40B4-BE49-F238E27FC236}">
+                <a16:creationId xmlns:a16="http://schemas.microsoft.com/office/drawing/2014/main" id="{69669314-CA30-4C29-B578-D48BA4B2C205}"/>
+              </a:ext>
+            </a:extLst>
+          </p:cNvPr>
+          <p:cNvSpPr>
+            <a:spLocks xmlns:a="http://schemas.openxmlformats.org/drawingml/2006/main" noGrp="1"/>
+          </p:cNvSpPr>
+          <p:nvPr/>
+        </p:nvSpPr>
+        <p:spPr>
+          <a:xfrm xmlns:a="http://schemas.openxmlformats.org/drawingml/2006/main">
+            <a:off x="723900" y="1828800"/>
+            <a:ext cx="4476750" cy="400050"/>
+          </a:xfrm>
+          <a:prstGeom xmlns:a="http://schemas.openxmlformats.org/drawingml/2006/main" prst="rect">
+            <a:avLst/>
+          </a:prstGeom>
+          <a:noFill xmlns:a="http://schemas.openxmlformats.org/drawingml/2006/main"/>
+          <a:ln xmlns:a="http://schemas.openxmlformats.org/drawingml/2006/main" w="0">
+            <a:noFill/>
+            <a:prstDash val="solid"/>
+          </a:ln>
+        </p:spPr>
+        <p:txBody>
+          <a:bodyPr xmlns:a="http://schemas.openxmlformats.org/drawingml/2006/main" wrap="square" lIns="0" tIns="0" rIns="0" bIns="0" anchor="ctr">
+            <a:normAutofit fontScale="100000"/>
+          </a:bodyPr>
+          <a:lstStyle xmlns:a="http://schemas.openxmlformats.org/drawingml/2006/main"/>
+          <a:p xmlns:a="http://schemas.openxmlformats.org/drawingml/2006/main">
+            <a:pPr algn="l">
+              <a:defRPr sz="1725" b="1">
+                <a:solidFill>
+                  <a:srgbClr val="111C31"/>
+                </a:solidFill>
+              </a:defRPr>
+            </a:pPr>
+            <a:r>
+              <a:rPr sz="1725" b="1">
+                <a:solidFill>
+                  <a:srgbClr val="111C31"/>
+                </a:solidFill>
+              </a:rPr>
+              <a:t>解决了什么问题</a:t>
+            </a:r>
+          </a:p>
+        </p:txBody>
+      </p:sp>
+      <p:sp>
+        <p:nvSpPr>
+          <p:cNvPr id="25" name="problem-body">
+            <a:extLst xmlns:a="http://schemas.openxmlformats.org/drawingml/2006/main">
+              <a:ext uri="{FF2B5EF4-FFF2-40B4-BE49-F238E27FC236}">
+                <a16:creationId xmlns:a16="http://schemas.microsoft.com/office/drawing/2014/main" id="{E003D782-C5C5-4E9E-96C5-D9A752DEA73C}"/>
+              </a:ext>
+            </a:extLst>
+          </p:cNvPr>
+          <p:cNvSpPr>
+            <a:spLocks xmlns:a="http://schemas.openxmlformats.org/drawingml/2006/main" noGrp="1"/>
+          </p:cNvSpPr>
+          <p:nvPr/>
+        </p:nvSpPr>
+        <p:spPr>
+          <a:xfrm xmlns:a="http://schemas.openxmlformats.org/drawingml/2006/main">
+            <a:off x="723900" y="2257425"/>
+            <a:ext cx="4476750" cy="628650"/>
+          </a:xfrm>
+          <a:prstGeom xmlns:a="http://schemas.openxmlformats.org/drawingml/2006/main" prst="rect">
+            <a:avLst/>
+          </a:prstGeom>
+          <a:noFill xmlns:a="http://schemas.openxmlformats.org/drawingml/2006/main"/>
+          <a:ln xmlns:a="http://schemas.openxmlformats.org/drawingml/2006/main" w="0">
+            <a:noFill/>
+            <a:prstDash val="solid"/>
+          </a:ln>
+        </p:spPr>
+        <p:txBody>
+          <a:bodyPr xmlns:a="http://schemas.openxmlformats.org/drawingml/2006/main" wrap="square" lIns="0" tIns="0" rIns="0" bIns="0" anchor="t">
+            <a:normAutofit fontScale="100000"/>
+          </a:bodyPr>
+          <a:lstStyle xmlns:a="http://schemas.openxmlformats.org/drawingml/2006/main"/>
+          <a:p xmlns:a="http://schemas.openxmlformats.org/drawingml/2006/main">
+            <a:pPr algn="l">
+              <a:defRPr sz="1238" b="0">
+                <a:solidFill>
+                  <a:srgbClr val="6E7A90"/>
+                </a:solidFill>
+              </a:defRPr>
+            </a:pPr>
+            <a:r>
+              <a:rPr sz="1238" b="0">
+                <a:solidFill>
+                  <a:srgbClr val="6E7A90"/>
+                </a:solidFill>
+              </a:rPr>
+              <a:t>模型和评分尺同时变化时，无法证明性能提升究竟由谁造成。</a:t>
+            </a:r>
+          </a:p>
+        </p:txBody>
+      </p:sp>
+      <p:sp>
+        <p:nvSpPr>
+          <p:cNvPr id="26" name="implementation-accent">
+            <a:extLst xmlns:a="http://schemas.openxmlformats.org/drawingml/2006/main">
+              <a:ext uri="{FF2B5EF4-FFF2-40B4-BE49-F238E27FC236}">
+                <a16:creationId xmlns:a16="http://schemas.microsoft.com/office/drawing/2014/main" id="{A830DC0E-467C-44D8-B68F-C5A19D00912B}"/>
+              </a:ext>
+            </a:extLst>
+          </p:cNvPr>
+          <p:cNvSpPr>
+            <a:spLocks xmlns:a="http://schemas.openxmlformats.org/drawingml/2006/main" noGrp="1"/>
+          </p:cNvSpPr>
+          <p:nvPr/>
+        </p:nvSpPr>
+        <p:spPr>
+          <a:xfrm xmlns:a="http://schemas.openxmlformats.org/drawingml/2006/main">
+            <a:off x="533400" y="3086100"/>
+            <a:ext cx="66675" cy="342900"/>
+          </a:xfrm>
+          <a:prstGeom xmlns:a="http://schemas.openxmlformats.org/drawingml/2006/main" prst="roundRect">
+            <a:avLst>
+              <a:gd name="adj" fmla="val 50000"/>
+            </a:avLst>
+          </a:prstGeom>
+          <a:solidFill xmlns:a="http://schemas.openxmlformats.org/drawingml/2006/main">
+            <a:srgbClr val="FFC300"/>
+          </a:solidFill>
+          <a:ln xmlns:a="http://schemas.openxmlformats.org/drawingml/2006/main" w="0">
+            <a:noFill/>
+            <a:prstDash val="solid"/>
+          </a:ln>
+        </p:spPr>
+      </p:sp>
+      <p:sp>
+        <p:nvSpPr>
+          <p:cNvPr id="27" name="implementation-heading">
+            <a:extLst xmlns:a="http://schemas.openxmlformats.org/drawingml/2006/main">
+              <a:ext uri="{FF2B5EF4-FFF2-40B4-BE49-F238E27FC236}">
+                <a16:creationId xmlns:a16="http://schemas.microsoft.com/office/drawing/2014/main" id="{7EBFACBC-6322-4679-BF7C-85B66C2E8212}"/>
+              </a:ext>
+            </a:extLst>
+          </p:cNvPr>
+          <p:cNvSpPr>
+            <a:spLocks xmlns:a="http://schemas.openxmlformats.org/drawingml/2006/main" noGrp="1"/>
+          </p:cNvSpPr>
+          <p:nvPr/>
+        </p:nvSpPr>
+        <p:spPr>
+          <a:xfrm xmlns:a="http://schemas.openxmlformats.org/drawingml/2006/main">
+            <a:off x="723900" y="3067050"/>
+            <a:ext cx="4476750" cy="400050"/>
+          </a:xfrm>
+          <a:prstGeom xmlns:a="http://schemas.openxmlformats.org/drawingml/2006/main" prst="rect">
+            <a:avLst/>
+          </a:prstGeom>
+          <a:noFill xmlns:a="http://schemas.openxmlformats.org/drawingml/2006/main"/>
+          <a:ln xmlns:a="http://schemas.openxmlformats.org/drawingml/2006/main" w="0">
+            <a:noFill/>
+            <a:prstDash val="solid"/>
+          </a:ln>
+        </p:spPr>
+        <p:txBody>
+          <a:bodyPr xmlns:a="http://schemas.openxmlformats.org/drawingml/2006/main" wrap="square" lIns="0" tIns="0" rIns="0" bIns="0" anchor="ctr">
+            <a:normAutofit fontScale="100000"/>
+          </a:bodyPr>
+          <a:lstStyle xmlns:a="http://schemas.openxmlformats.org/drawingml/2006/main"/>
+          <a:p xmlns:a="http://schemas.openxmlformats.org/drawingml/2006/main">
+            <a:pPr algn="l">
+              <a:defRPr sz="1725" b="1">
+                <a:solidFill>
+                  <a:srgbClr val="111C31"/>
+                </a:solidFill>
+              </a:defRPr>
+            </a:pPr>
+            <a:r>
+              <a:rPr sz="1725" b="1">
+                <a:solidFill>
+                  <a:srgbClr val="111C31"/>
+                </a:solidFill>
+              </a:rPr>
+              <a:t>这么设计是怎么实现的</a:t>
+            </a:r>
+          </a:p>
+        </p:txBody>
+      </p:sp>
+      <p:sp>
+        <p:nvSpPr>
+          <p:cNvPr id="28" name="implementation-body">
+            <a:extLst xmlns:a="http://schemas.openxmlformats.org/drawingml/2006/main">
+              <a:ext uri="{FF2B5EF4-FFF2-40B4-BE49-F238E27FC236}">
+                <a16:creationId xmlns:a16="http://schemas.microsoft.com/office/drawing/2014/main" id="{14B128BE-2C54-453E-A116-3A3EE8C99032}"/>
+              </a:ext>
+            </a:extLst>
+          </p:cNvPr>
+          <p:cNvSpPr>
+            <a:spLocks xmlns:a="http://schemas.openxmlformats.org/drawingml/2006/main" noGrp="1"/>
+          </p:cNvSpPr>
+          <p:nvPr/>
+        </p:nvSpPr>
+        <p:spPr>
+          <a:xfrm xmlns:a="http://schemas.openxmlformats.org/drawingml/2006/main">
+            <a:off x="723900" y="3495675"/>
+            <a:ext cx="4476750" cy="628650"/>
+          </a:xfrm>
+          <a:prstGeom xmlns:a="http://schemas.openxmlformats.org/drawingml/2006/main" prst="rect">
+            <a:avLst/>
+          </a:prstGeom>
+          <a:noFill xmlns:a="http://schemas.openxmlformats.org/drawingml/2006/main"/>
+          <a:ln xmlns:a="http://schemas.openxmlformats.org/drawingml/2006/main" w="0">
+            <a:noFill/>
+            <a:prstDash val="solid"/>
+          </a:ln>
+        </p:spPr>
+        <p:txBody>
+          <a:bodyPr xmlns:a="http://schemas.openxmlformats.org/drawingml/2006/main" wrap="square" lIns="0" tIns="0" rIns="0" bIns="0" anchor="t">
+            <a:normAutofit fontScale="100000"/>
+          </a:bodyPr>
+          <a:lstStyle xmlns:a="http://schemas.openxmlformats.org/drawingml/2006/main"/>
+          <a:p xmlns:a="http://schemas.openxmlformats.org/drawingml/2006/main">
+            <a:pPr algn="l">
+              <a:defRPr sz="1238" b="0">
+                <a:solidFill>
+                  <a:srgbClr val="6E7A90"/>
+                </a:solidFill>
+              </a:defRPr>
+            </a:pPr>
+            <a:r>
+              <a:rPr sz="1238" b="0">
+                <a:solidFill>
+                  <a:srgbClr val="6E7A90"/>
+                </a:solidFill>
+              </a:rPr>
+              <a:t>只改根因对应对象，锁定SOP、Checklist、Judge与用户批次，再回到第3步回归。</a:t>
+            </a:r>
+          </a:p>
+        </p:txBody>
+      </p:sp>
+      <p:sp>
+        <p:nvSpPr>
+          <p:cNvPr id="29" name="advantage-accent">
+            <a:extLst xmlns:a="http://schemas.openxmlformats.org/drawingml/2006/main">
+              <a:ext uri="{FF2B5EF4-FFF2-40B4-BE49-F238E27FC236}">
+                <a16:creationId xmlns:a16="http://schemas.microsoft.com/office/drawing/2014/main" id="{177AB0A1-957C-4ED9-9664-6FAA9CDE3AA3}"/>
+              </a:ext>
+            </a:extLst>
+          </p:cNvPr>
+          <p:cNvSpPr>
+            <a:spLocks xmlns:a="http://schemas.openxmlformats.org/drawingml/2006/main" noGrp="1"/>
+          </p:cNvSpPr>
+          <p:nvPr/>
+        </p:nvSpPr>
+        <p:spPr>
+          <a:xfrm xmlns:a="http://schemas.openxmlformats.org/drawingml/2006/main">
+            <a:off x="533400" y="4419600"/>
+            <a:ext cx="66675" cy="342900"/>
+          </a:xfrm>
+          <a:prstGeom xmlns:a="http://schemas.openxmlformats.org/drawingml/2006/main" prst="roundRect">
+            <a:avLst>
+              <a:gd name="adj" fmla="val 50000"/>
+            </a:avLst>
+          </a:prstGeom>
+          <a:solidFill xmlns:a="http://schemas.openxmlformats.org/drawingml/2006/main">
+            <a:srgbClr val="FFC300"/>
+          </a:solidFill>
+          <a:ln xmlns:a="http://schemas.openxmlformats.org/drawingml/2006/main" w="0">
+            <a:noFill/>
+            <a:prstDash val="solid"/>
+          </a:ln>
+        </p:spPr>
+      </p:sp>
+      <p:sp>
+        <p:nvSpPr>
+          <p:cNvPr id="30" name="advantage-heading">
+            <a:extLst xmlns:a="http://schemas.openxmlformats.org/drawingml/2006/main">
+              <a:ext uri="{FF2B5EF4-FFF2-40B4-BE49-F238E27FC236}">
+                <a16:creationId xmlns:a16="http://schemas.microsoft.com/office/drawing/2014/main" id="{1F884E4C-31D9-44DE-9EB6-8BF20EC4D205}"/>
+              </a:ext>
+            </a:extLst>
+          </p:cNvPr>
+          <p:cNvSpPr>
+            <a:spLocks xmlns:a="http://schemas.openxmlformats.org/drawingml/2006/main" noGrp="1"/>
+          </p:cNvSpPr>
+          <p:nvPr/>
+        </p:nvSpPr>
+        <p:spPr>
+          <a:xfrm xmlns:a="http://schemas.openxmlformats.org/drawingml/2006/main">
+            <a:off x="723900" y="4400550"/>
+            <a:ext cx="4476750" cy="400050"/>
+          </a:xfrm>
+          <a:prstGeom xmlns:a="http://schemas.openxmlformats.org/drawingml/2006/main" prst="rect">
+            <a:avLst/>
+          </a:prstGeom>
+          <a:noFill xmlns:a="http://schemas.openxmlformats.org/drawingml/2006/main"/>
+          <a:ln xmlns:a="http://schemas.openxmlformats.org/drawingml/2006/main" w="0">
+            <a:noFill/>
+            <a:prstDash val="solid"/>
+          </a:ln>
+        </p:spPr>
+        <p:txBody>
+          <a:bodyPr xmlns:a="http://schemas.openxmlformats.org/drawingml/2006/main" wrap="square" lIns="0" tIns="0" rIns="0" bIns="0" anchor="ctr">
+            <a:normAutofit fontScale="100000"/>
+          </a:bodyPr>
+          <a:lstStyle xmlns:a="http://schemas.openxmlformats.org/drawingml/2006/main"/>
+          <a:p xmlns:a="http://schemas.openxmlformats.org/drawingml/2006/main">
+            <a:pPr algn="l">
+              <a:defRPr sz="1725" b="1">
+                <a:solidFill>
+                  <a:srgbClr val="111C31"/>
+                </a:solidFill>
+              </a:defRPr>
+            </a:pPr>
+            <a:r>
+              <a:rPr sz="1725" b="1">
+                <a:solidFill>
+                  <a:srgbClr val="111C31"/>
+                </a:solidFill>
+              </a:rPr>
+              <a:t>这么设计的优势</a:t>
+            </a:r>
+          </a:p>
+        </p:txBody>
+      </p:sp>
+      <p:sp>
+        <p:nvSpPr>
+          <p:cNvPr id="31" name="advantage-body">
+            <a:extLst xmlns:a="http://schemas.openxmlformats.org/drawingml/2006/main">
+              <a:ext uri="{FF2B5EF4-FFF2-40B4-BE49-F238E27FC236}">
+                <a16:creationId xmlns:a16="http://schemas.microsoft.com/office/drawing/2014/main" id="{ECF459A0-177A-4772-A453-24B61FEE5C46}"/>
+              </a:ext>
+            </a:extLst>
+          </p:cNvPr>
+          <p:cNvSpPr>
+            <a:spLocks xmlns:a="http://schemas.openxmlformats.org/drawingml/2006/main" noGrp="1"/>
+          </p:cNvSpPr>
+          <p:nvPr/>
+        </p:nvSpPr>
+        <p:spPr>
+          <a:xfrm xmlns:a="http://schemas.openxmlformats.org/drawingml/2006/main">
+            <a:off x="723900" y="4829175"/>
+            <a:ext cx="4476750" cy="628650"/>
+          </a:xfrm>
+          <a:prstGeom xmlns:a="http://schemas.openxmlformats.org/drawingml/2006/main" prst="rect">
+            <a:avLst/>
+          </a:prstGeom>
+          <a:noFill xmlns:a="http://schemas.openxmlformats.org/drawingml/2006/main"/>
+          <a:ln xmlns:a="http://schemas.openxmlformats.org/drawingml/2006/main" w="0">
+            <a:noFill/>
+            <a:prstDash val="solid"/>
+          </a:ln>
+        </p:spPr>
+        <p:txBody>
+          <a:bodyPr xmlns:a="http://schemas.openxmlformats.org/drawingml/2006/main" wrap="square" lIns="0" tIns="0" rIns="0" bIns="0" anchor="t">
+            <a:normAutofit fontScale="100000"/>
+          </a:bodyPr>
+          <a:lstStyle xmlns:a="http://schemas.openxmlformats.org/drawingml/2006/main"/>
+          <a:p xmlns:a="http://schemas.openxmlformats.org/drawingml/2006/main">
+            <a:pPr algn="l">
+              <a:defRPr sz="1238" b="0">
+                <a:solidFill>
+                  <a:srgbClr val="6E7A90"/>
+                </a:solidFill>
+              </a:defRPr>
+            </a:pPr>
+            <a:r>
+              <a:rPr sz="1238" b="0">
+                <a:solidFill>
+                  <a:srgbClr val="6E7A90"/>
+                </a:solidFill>
+              </a:rPr>
+              <a:t>形成单变量、同尺、可审计的改进证据，证明优化有效且没有偷换标准。</a:t>
             </a:r>
           </a:p>
         </p:txBody>

--- a/submission/EvalCall决赛提交包-20260715/01_EvalCall决赛PPT-最终提交版.pptx
+++ b/submission/EvalCall决赛提交包-20260715/01_EvalCall决赛PPT-最终提交版.pptx
@@ -2,21 +2,21 @@
 <file path=ppt/presentation.xml><?xml version="1.0" encoding="utf-8"?>
 <p:presentation xmlns:p="http://schemas.openxmlformats.org/presentationml/2006/main">
   <p:sldMasterIdLst>
-    <p:sldMasterId xmlns:r="http://schemas.openxmlformats.org/officeDocument/2006/relationships" id="2147483648" r:id="Rfe9f91867e2b4350"/>
+    <p:sldMasterId xmlns:r="http://schemas.openxmlformats.org/officeDocument/2006/relationships" id="2147483648" r:id="Raccf9b20c2d845a7"/>
   </p:sldMasterIdLst>
   <p:notesMasterIdLst>
-    <p:notesMasterId xmlns:r="http://schemas.openxmlformats.org/officeDocument/2006/relationships" r:id="Ra05e5ddf8fc148e1"/>
+    <p:notesMasterId xmlns:r="http://schemas.openxmlformats.org/officeDocument/2006/relationships" r:id="Ra877ad6c90384a43"/>
   </p:notesMasterIdLst>
   <p:sldIdLst>
-    <p:sldId xmlns:r="http://schemas.openxmlformats.org/officeDocument/2006/relationships" id="256" r:id="R3ec07cfae2b84cfe"/>
-    <p:sldId xmlns:r="http://schemas.openxmlformats.org/officeDocument/2006/relationships" id="257" r:id="Rfdd8f2a0fe4f4a10"/>
-    <p:sldId xmlns:r="http://schemas.openxmlformats.org/officeDocument/2006/relationships" id="258" r:id="Rf4bd7e9e826e4513"/>
-    <p:sldId xmlns:r="http://schemas.openxmlformats.org/officeDocument/2006/relationships" id="259" r:id="R4b1c180705564481"/>
-    <p:sldId xmlns:r="http://schemas.openxmlformats.org/officeDocument/2006/relationships" id="260" r:id="R56d139750c214727"/>
-    <p:sldId xmlns:r="http://schemas.openxmlformats.org/officeDocument/2006/relationships" id="261" r:id="Rc67adf09bcd34757"/>
-    <p:sldId xmlns:r="http://schemas.openxmlformats.org/officeDocument/2006/relationships" id="262" r:id="R7d5c7607607a448c"/>
-    <p:sldId xmlns:r="http://schemas.openxmlformats.org/officeDocument/2006/relationships" id="263" r:id="Rccdd674f480040c6"/>
-    <p:sldId xmlns:r="http://schemas.openxmlformats.org/officeDocument/2006/relationships" id="264" r:id="R39ce073740c04d56"/>
+    <p:sldId xmlns:r="http://schemas.openxmlformats.org/officeDocument/2006/relationships" id="256" r:id="R20738b59c50d436f"/>
+    <p:sldId xmlns:r="http://schemas.openxmlformats.org/officeDocument/2006/relationships" id="257" r:id="R0f1a63dca1c14cdf"/>
+    <p:sldId xmlns:r="http://schemas.openxmlformats.org/officeDocument/2006/relationships" id="258" r:id="R1ecb4381e19140e8"/>
+    <p:sldId xmlns:r="http://schemas.openxmlformats.org/officeDocument/2006/relationships" id="259" r:id="R7f3ef8aec69d4ecd"/>
+    <p:sldId xmlns:r="http://schemas.openxmlformats.org/officeDocument/2006/relationships" id="260" r:id="R5fec3e7b371b4619"/>
+    <p:sldId xmlns:r="http://schemas.openxmlformats.org/officeDocument/2006/relationships" id="261" r:id="Rd48c294b4c0a432f"/>
+    <p:sldId xmlns:r="http://schemas.openxmlformats.org/officeDocument/2006/relationships" id="262" r:id="Re33e345d80de4b55"/>
+    <p:sldId xmlns:r="http://schemas.openxmlformats.org/officeDocument/2006/relationships" id="263" r:id="Red15dd8fc50d48b3"/>
+    <p:sldId xmlns:r="http://schemas.openxmlformats.org/officeDocument/2006/relationships" id="264" r:id="R2c813f8b44574722"/>
   </p:sldIdLst>
   <p:sldSz cx="12192000" cy="6858000"/>
   <p:notesSz cx="6858000" cy="9144000"/>
@@ -1238,7 +1238,7 @@
   </p:cSld>
   <p:clrMap bg1="lt1" tx1="dk1" bg2="lt2" tx2="dk2" accent1="accent1" accent2="accent2" accent3="accent3" accent4="accent4" accent5="accent5" accent6="accent6" hlink="hlink" folHlink="folHlink"/>
   <p:sldLayoutIdLst>
-    <p:sldLayoutId xmlns:r="http://schemas.openxmlformats.org/officeDocument/2006/relationships" id="2147483649" r:id="R7bbd6a40754d496a"/>
+    <p:sldLayoutId xmlns:r="http://schemas.openxmlformats.org/officeDocument/2006/relationships" id="2147483649" r:id="R2078dab3c8f54e11"/>
   </p:sldLayoutIdLst>
   <p:txStyles>
     <p:titleStyle>
@@ -1793,7 +1793,7 @@
           <p:nvPr/>
         </p:nvPicPr>
         <p:blipFill>
-          <a:blip xmlns:r="http://schemas.openxmlformats.org/officeDocument/2006/relationships" xmlns:a="http://schemas.openxmlformats.org/drawingml/2006/main" r:embed="R26c7083d0dc14c01"/>
+          <a:blip xmlns:r="http://schemas.openxmlformats.org/officeDocument/2006/relationships" xmlns:a="http://schemas.openxmlformats.org/drawingml/2006/main" r:embed="R842447d322514666"/>
           <a:srcRect xmlns:a="http://schemas.openxmlformats.org/drawingml/2006/main" l="0" t="27" r="0" b="27"/>
           <a:stretch xmlns:a="http://schemas.openxmlformats.org/drawingml/2006/main">
             <a:fillRect l="0" t="0" r="0" b="0"/>
@@ -1873,6 +1873,7 @@
           <a:lstStyle xmlns:a="http://schemas.openxmlformats.org/drawingml/2006/main"/>
           <a:p xmlns:a="http://schemas.openxmlformats.org/drawingml/2006/main">
             <a:pPr algn="l">
+              <a:buNone/>
               <a:defRPr sz="1050" b="1">
                 <a:solidFill>
                   <a:srgbClr val="6E7A90"/>
@@ -1925,6 +1926,7 @@
           <a:lstStyle xmlns:a="http://schemas.openxmlformats.org/drawingml/2006/main"/>
           <a:p xmlns:a="http://schemas.openxmlformats.org/drawingml/2006/main">
             <a:pPr algn="l">
+              <a:buNone/>
               <a:defRPr sz="3000" b="1">
                 <a:solidFill>
                   <a:srgbClr val="111C31"/>
@@ -2008,6 +2010,7 @@
           <a:lstStyle xmlns:a="http://schemas.openxmlformats.org/drawingml/2006/main"/>
           <a:p xmlns:a="http://schemas.openxmlformats.org/drawingml/2006/main">
             <a:pPr algn="r">
+              <a:buNone/>
               <a:defRPr sz="1350" b="1">
                 <a:solidFill>
                   <a:srgbClr val="1D2B46"/>
@@ -2060,6 +2063,7 @@
           <a:lstStyle xmlns:a="http://schemas.openxmlformats.org/drawingml/2006/main"/>
           <a:p xmlns:a="http://schemas.openxmlformats.org/drawingml/2006/main">
             <a:pPr algn="ctr">
+              <a:buNone/>
               <a:defRPr sz="2850" b="1">
                 <a:solidFill>
                   <a:srgbClr val="C48800"/>
@@ -2112,6 +2116,7 @@
           <a:lstStyle xmlns:a="http://schemas.openxmlformats.org/drawingml/2006/main"/>
           <a:p xmlns:a="http://schemas.openxmlformats.org/drawingml/2006/main">
             <a:pPr algn="l">
+              <a:buNone/>
               <a:defRPr sz="1350" b="1">
                 <a:solidFill>
                   <a:srgbClr val="1D2B46"/>
@@ -2296,6 +2301,7 @@
           <a:lstStyle xmlns:a="http://schemas.openxmlformats.org/drawingml/2006/main"/>
           <a:p xmlns:a="http://schemas.openxmlformats.org/drawingml/2006/main">
             <a:pPr algn="ctr">
+              <a:buNone/>
               <a:defRPr sz="975" b="1">
                 <a:solidFill>
                   <a:srgbClr val="FFFFFF"/>
@@ -2348,6 +2354,7 @@
           <a:lstStyle xmlns:a="http://schemas.openxmlformats.org/drawingml/2006/main"/>
           <a:p xmlns:a="http://schemas.openxmlformats.org/drawingml/2006/main">
             <a:pPr algn="l">
+              <a:buNone/>
               <a:defRPr sz="1275" b="1">
                 <a:solidFill>
                   <a:srgbClr val="111C31"/>
@@ -2431,6 +2438,7 @@
           <a:lstStyle xmlns:a="http://schemas.openxmlformats.org/drawingml/2006/main"/>
           <a:p xmlns:a="http://schemas.openxmlformats.org/drawingml/2006/main">
             <a:pPr algn="l">
+              <a:buNone/>
               <a:defRPr sz="1013" b="0">
                 <a:solidFill>
                   <a:srgbClr val="1D2B46"/>
@@ -2582,6 +2590,7 @@
           <a:lstStyle xmlns:a="http://schemas.openxmlformats.org/drawingml/2006/main"/>
           <a:p xmlns:a="http://schemas.openxmlformats.org/drawingml/2006/main">
             <a:pPr algn="ctr">
+              <a:buNone/>
               <a:defRPr sz="975" b="1">
                 <a:solidFill>
                   <a:srgbClr val="FFFFFF"/>
@@ -2634,6 +2643,7 @@
           <a:lstStyle xmlns:a="http://schemas.openxmlformats.org/drawingml/2006/main"/>
           <a:p xmlns:a="http://schemas.openxmlformats.org/drawingml/2006/main">
             <a:pPr algn="l">
+              <a:buNone/>
               <a:defRPr sz="1275" b="1">
                 <a:solidFill>
                   <a:srgbClr val="111C31"/>
@@ -2717,6 +2727,7 @@
           <a:lstStyle xmlns:a="http://schemas.openxmlformats.org/drawingml/2006/main"/>
           <a:p xmlns:a="http://schemas.openxmlformats.org/drawingml/2006/main">
             <a:pPr algn="l">
+              <a:buNone/>
               <a:defRPr sz="1013" b="0">
                 <a:solidFill>
                   <a:srgbClr val="1D2B46"/>
@@ -2868,6 +2879,7 @@
           <a:lstStyle xmlns:a="http://schemas.openxmlformats.org/drawingml/2006/main"/>
           <a:p xmlns:a="http://schemas.openxmlformats.org/drawingml/2006/main">
             <a:pPr algn="ctr">
+              <a:buNone/>
               <a:defRPr sz="975" b="1">
                 <a:solidFill>
                   <a:srgbClr val="FFFFFF"/>
@@ -2920,6 +2932,7 @@
           <a:lstStyle xmlns:a="http://schemas.openxmlformats.org/drawingml/2006/main"/>
           <a:p xmlns:a="http://schemas.openxmlformats.org/drawingml/2006/main">
             <a:pPr algn="l">
+              <a:buNone/>
               <a:defRPr sz="1275" b="1">
                 <a:solidFill>
                   <a:srgbClr val="111C31"/>
@@ -3003,6 +3016,7 @@
           <a:lstStyle xmlns:a="http://schemas.openxmlformats.org/drawingml/2006/main"/>
           <a:p xmlns:a="http://schemas.openxmlformats.org/drawingml/2006/main">
             <a:pPr algn="l">
+              <a:buNone/>
               <a:defRPr sz="1013" b="0">
                 <a:solidFill>
                   <a:srgbClr val="1D2B46"/>
@@ -3154,6 +3168,7 @@
           <a:lstStyle xmlns:a="http://schemas.openxmlformats.org/drawingml/2006/main"/>
           <a:p xmlns:a="http://schemas.openxmlformats.org/drawingml/2006/main">
             <a:pPr algn="ctr">
+              <a:buNone/>
               <a:defRPr sz="975" b="1">
                 <a:solidFill>
                   <a:srgbClr val="FFFFFF"/>
@@ -3206,6 +3221,7 @@
           <a:lstStyle xmlns:a="http://schemas.openxmlformats.org/drawingml/2006/main"/>
           <a:p xmlns:a="http://schemas.openxmlformats.org/drawingml/2006/main">
             <a:pPr algn="l">
+              <a:buNone/>
               <a:defRPr sz="1275" b="1">
                 <a:solidFill>
                   <a:srgbClr val="111C31"/>
@@ -3289,6 +3305,7 @@
           <a:lstStyle xmlns:a="http://schemas.openxmlformats.org/drawingml/2006/main"/>
           <a:p xmlns:a="http://schemas.openxmlformats.org/drawingml/2006/main">
             <a:pPr algn="l">
+              <a:buNone/>
               <a:defRPr sz="1013" b="0">
                 <a:solidFill>
                   <a:srgbClr val="1D2B46"/>
@@ -3440,6 +3457,7 @@
           <a:lstStyle xmlns:a="http://schemas.openxmlformats.org/drawingml/2006/main"/>
           <a:p xmlns:a="http://schemas.openxmlformats.org/drawingml/2006/main">
             <a:pPr algn="ctr">
+              <a:buNone/>
               <a:defRPr sz="975" b="1">
                 <a:solidFill>
                   <a:srgbClr val="FFFFFF"/>
@@ -3492,6 +3510,7 @@
           <a:lstStyle xmlns:a="http://schemas.openxmlformats.org/drawingml/2006/main"/>
           <a:p xmlns:a="http://schemas.openxmlformats.org/drawingml/2006/main">
             <a:pPr algn="l">
+              <a:buNone/>
               <a:defRPr sz="1275" b="1">
                 <a:solidFill>
                   <a:srgbClr val="111C31"/>
@@ -3575,6 +3594,7 @@
           <a:lstStyle xmlns:a="http://schemas.openxmlformats.org/drawingml/2006/main"/>
           <a:p xmlns:a="http://schemas.openxmlformats.org/drawingml/2006/main">
             <a:pPr algn="l">
+              <a:buNone/>
               <a:defRPr sz="1013" b="0">
                 <a:solidFill>
                   <a:srgbClr val="1D2B46"/>
@@ -3658,6 +3678,7 @@
           <a:lstStyle xmlns:a="http://schemas.openxmlformats.org/drawingml/2006/main"/>
           <a:p xmlns:a="http://schemas.openxmlformats.org/drawingml/2006/main">
             <a:pPr algn="l">
+              <a:buNone/>
               <a:defRPr sz="2325" b="1">
                 <a:solidFill>
                   <a:srgbClr val="111C31"/>
@@ -3743,6 +3764,7 @@
           <a:lstStyle xmlns:a="http://schemas.openxmlformats.org/drawingml/2006/main"/>
           <a:p xmlns:a="http://schemas.openxmlformats.org/drawingml/2006/main">
             <a:pPr algn="l">
+              <a:buNone/>
               <a:defRPr sz="2025" b="1">
                 <a:solidFill>
                   <a:srgbClr val="C48800"/>
@@ -3828,6 +3850,7 @@
           <a:lstStyle xmlns:a="http://schemas.openxmlformats.org/drawingml/2006/main"/>
           <a:p xmlns:a="http://schemas.openxmlformats.org/drawingml/2006/main">
             <a:pPr algn="r">
+              <a:buNone/>
               <a:defRPr sz="750" b="0">
                 <a:solidFill>
                   <a:srgbClr val="6E7A90"/>
@@ -3861,7 +3884,7 @@
     <p:bg>
       <p:bgPr>
         <a:solidFill xmlns:a="http://schemas.openxmlformats.org/drawingml/2006/main">
-          <a:srgbClr val="FFFFFF"/>
+          <a:srgbClr val="FCFCFB"/>
         </a:solidFill>
       </p:bgPr>
     </p:bg>
@@ -3876,1606 +3899,6 @@
       </p:grpSpPr>
       <p:sp>
         <p:nvSpPr>
-          <p:cNvPr id="1" name="kicker">
-            <a:extLst xmlns:a="http://schemas.openxmlformats.org/drawingml/2006/main">
-              <a:ext uri="{FF2B5EF4-FFF2-40B4-BE49-F238E27FC236}">
-                <a16:creationId xmlns:a16="http://schemas.microsoft.com/office/drawing/2014/main" id="{AEFFADB3-C24B-464A-A482-53E431FC053A}"/>
-              </a:ext>
-            </a:extLst>
-          </p:cNvPr>
-          <p:cNvSpPr>
-            <a:spLocks xmlns:a="http://schemas.openxmlformats.org/drawingml/2006/main" noGrp="1"/>
-          </p:cNvSpPr>
-          <p:nvPr/>
-        </p:nvSpPr>
-        <p:spPr>
-          <a:xfrm xmlns:a="http://schemas.openxmlformats.org/drawingml/2006/main">
-            <a:off x="533400" y="323850"/>
-            <a:ext cx="6858000" cy="266700"/>
-          </a:xfrm>
-          <a:prstGeom xmlns:a="http://schemas.openxmlformats.org/drawingml/2006/main" prst="rect">
-            <a:avLst/>
-          </a:prstGeom>
-          <a:noFill xmlns:a="http://schemas.openxmlformats.org/drawingml/2006/main"/>
-          <a:ln xmlns:a="http://schemas.openxmlformats.org/drawingml/2006/main" w="0">
-            <a:noFill/>
-            <a:prstDash val="solid"/>
-          </a:ln>
-        </p:spPr>
-        <p:txBody>
-          <a:bodyPr xmlns:a="http://schemas.openxmlformats.org/drawingml/2006/main" anchor="t">
-            <a:normAutofit fontScale="95833"/>
-          </a:bodyPr>
-          <a:lstStyle xmlns:a="http://schemas.openxmlformats.org/drawingml/2006/main"/>
-          <a:p xmlns:a="http://schemas.openxmlformats.org/drawingml/2006/main">
-            <a:pPr algn="l">
-              <a:buNone/>
-              <a:defRPr sz="1200" b="1">
-                <a:solidFill>
-                  <a:srgbClr val="667085"/>
-                </a:solidFill>
-                <a:latin typeface="PingFang SC"/>
-                <a:ea typeface="PingFang SC"/>
-                <a:cs typeface="PingFang SC"/>
-              </a:defRPr>
-            </a:pPr>
-            <a:r>
-              <a:rPr sz="1200" b="1">
-                <a:solidFill>
-                  <a:srgbClr val="667085"/>
-                </a:solidFill>
-                <a:latin typeface="PingFang SC"/>
-                <a:ea typeface="PingFang SC"/>
-                <a:cs typeface="PingFang SC"/>
-              </a:rPr>
-              <a:t>EVALCALL · 外呼模型上线前的自动化指令遵循评测</a:t>
-            </a:r>
-          </a:p>
-        </p:txBody>
-      </p:sp>
-      <p:sp>
-        <p:nvSpPr>
-          <p:cNvPr id="2" name="title">
-            <a:extLst xmlns:a="http://schemas.openxmlformats.org/drawingml/2006/main">
-              <a:ext uri="{FF2B5EF4-FFF2-40B4-BE49-F238E27FC236}">
-                <a16:creationId xmlns:a16="http://schemas.microsoft.com/office/drawing/2014/main" id="{165D2154-B96E-43F0-B2E9-7CEAA53D049D}"/>
-              </a:ext>
-            </a:extLst>
-          </p:cNvPr>
-          <p:cNvSpPr>
-            <a:spLocks xmlns:a="http://schemas.openxmlformats.org/drawingml/2006/main" noGrp="1"/>
-          </p:cNvSpPr>
-          <p:nvPr/>
-        </p:nvSpPr>
-        <p:spPr>
-          <a:xfrm xmlns:a="http://schemas.openxmlformats.org/drawingml/2006/main">
-            <a:off x="533400" y="666750"/>
-            <a:ext cx="11125200" cy="742950"/>
-          </a:xfrm>
-          <a:prstGeom xmlns:a="http://schemas.openxmlformats.org/drawingml/2006/main" prst="rect">
-            <a:avLst/>
-          </a:prstGeom>
-          <a:noFill xmlns:a="http://schemas.openxmlformats.org/drawingml/2006/main"/>
-          <a:ln xmlns:a="http://schemas.openxmlformats.org/drawingml/2006/main" w="0">
-            <a:noFill/>
-            <a:prstDash val="solid"/>
-          </a:ln>
-        </p:spPr>
-        <p:txBody>
-          <a:bodyPr xmlns:a="http://schemas.openxmlformats.org/drawingml/2006/main" anchor="t">
-            <a:normAutofit fontScale="100000"/>
-          </a:bodyPr>
-          <a:lstStyle xmlns:a="http://schemas.openxmlformats.org/drawingml/2006/main"/>
-          <a:p xmlns:a="http://schemas.openxmlformats.org/drawingml/2006/main">
-            <a:pPr algn="l">
-              <a:buNone/>
-              <a:defRPr sz="3150" b="1">
-                <a:solidFill>
-                  <a:srgbClr val="111827"/>
-                </a:solidFill>
-                <a:latin typeface="PingFang SC"/>
-                <a:ea typeface="PingFang SC"/>
-                <a:cs typeface="PingFang SC"/>
-              </a:defRPr>
-            </a:pPr>
-            <a:r>
-              <a:rPr sz="3150" b="1">
-                <a:solidFill>
-                  <a:srgbClr val="111827"/>
-                </a:solidFill>
-                <a:latin typeface="PingFang SC"/>
-                <a:ea typeface="PingFang SC"/>
-                <a:cs typeface="PingFang SC"/>
-              </a:rPr>
-              <a:t>让外呼模型在上线前，先失败十次</a:t>
-            </a:r>
-          </a:p>
-        </p:txBody>
-      </p:sp>
-      <p:sp>
-        <p:nvSpPr>
-          <p:cNvPr id="3" name="title-rule">
-            <a:extLst xmlns:a="http://schemas.openxmlformats.org/drawingml/2006/main">
-              <a:ext uri="{FF2B5EF4-FFF2-40B4-BE49-F238E27FC236}">
-                <a16:creationId xmlns:a16="http://schemas.microsoft.com/office/drawing/2014/main" id="{7866D9FB-778F-4E38-BBD2-5560C320B2CA}"/>
-              </a:ext>
-            </a:extLst>
-          </p:cNvPr>
-          <p:cNvSpPr>
-            <a:spLocks xmlns:a="http://schemas.openxmlformats.org/drawingml/2006/main" noGrp="1"/>
-          </p:cNvSpPr>
-          <p:nvPr/>
-        </p:nvSpPr>
-        <p:spPr>
-          <a:xfrm xmlns:a="http://schemas.openxmlformats.org/drawingml/2006/main">
-            <a:off x="533400" y="1457325"/>
-            <a:ext cx="11125200" cy="19050"/>
-          </a:xfrm>
-          <a:prstGeom xmlns:a="http://schemas.openxmlformats.org/drawingml/2006/main" prst="rect">
-            <a:avLst/>
-          </a:prstGeom>
-          <a:solidFill xmlns:a="http://schemas.openxmlformats.org/drawingml/2006/main">
-            <a:srgbClr val="111827"/>
-          </a:solidFill>
-          <a:ln xmlns:a="http://schemas.openxmlformats.org/drawingml/2006/main" w="0">
-            <a:noFill/>
-            <a:prstDash val="solid"/>
-          </a:ln>
-        </p:spPr>
-      </p:sp>
-      <p:sp>
-        <p:nvSpPr>
-          <p:cNvPr id="4" name="page">
-            <a:extLst xmlns:a="http://schemas.openxmlformats.org/drawingml/2006/main">
-              <a:ext uri="{FF2B5EF4-FFF2-40B4-BE49-F238E27FC236}">
-                <a16:creationId xmlns:a16="http://schemas.microsoft.com/office/drawing/2014/main" id="{B9DC85EB-6A27-49A6-A6DB-FF60299953B8}"/>
-              </a:ext>
-            </a:extLst>
-          </p:cNvPr>
-          <p:cNvSpPr>
-            <a:spLocks xmlns:a="http://schemas.openxmlformats.org/drawingml/2006/main" noGrp="1"/>
-          </p:cNvSpPr>
-          <p:nvPr/>
-        </p:nvSpPr>
-        <p:spPr>
-          <a:xfrm xmlns:a="http://schemas.openxmlformats.org/drawingml/2006/main">
-            <a:off x="11144250" y="6381750"/>
-            <a:ext cx="514350" cy="209550"/>
-          </a:xfrm>
-          <a:prstGeom xmlns:a="http://schemas.openxmlformats.org/drawingml/2006/main" prst="rect">
-            <a:avLst/>
-          </a:prstGeom>
-          <a:noFill xmlns:a="http://schemas.openxmlformats.org/drawingml/2006/main"/>
-          <a:ln xmlns:a="http://schemas.openxmlformats.org/drawingml/2006/main" w="0">
-            <a:noFill/>
-            <a:prstDash val="solid"/>
-          </a:ln>
-        </p:spPr>
-        <p:txBody>
-          <a:bodyPr xmlns:a="http://schemas.openxmlformats.org/drawingml/2006/main" anchor="t">
-            <a:normAutofit fontScale="73809"/>
-          </a:bodyPr>
-          <a:lstStyle xmlns:a="http://schemas.openxmlformats.org/drawingml/2006/main"/>
-          <a:p xmlns:a="http://schemas.openxmlformats.org/drawingml/2006/main">
-            <a:pPr algn="r">
-              <a:buNone/>
-              <a:defRPr sz="1050" b="0">
-                <a:solidFill>
-                  <a:srgbClr val="667085"/>
-                </a:solidFill>
-                <a:latin typeface="PingFang SC"/>
-                <a:ea typeface="PingFang SC"/>
-                <a:cs typeface="PingFang SC"/>
-              </a:defRPr>
-            </a:pPr>
-            <a:r>
-              <a:rPr sz="1050" b="0">
-                <a:solidFill>
-                  <a:srgbClr val="667085"/>
-                </a:solidFill>
-                <a:latin typeface="PingFang SC"/>
-                <a:ea typeface="PingFang SC"/>
-                <a:cs typeface="PingFang SC"/>
-              </a:rPr>
-              <a:t>03</a:t>
-            </a:r>
-          </a:p>
-        </p:txBody>
-      </p:sp>
-      <p:sp>
-        <p:nvSpPr>
-          <p:cNvPr id="5" name="flow-line">
-            <a:extLst xmlns:a="http://schemas.openxmlformats.org/drawingml/2006/main">
-              <a:ext uri="{FF2B5EF4-FFF2-40B4-BE49-F238E27FC236}">
-                <a16:creationId xmlns:a16="http://schemas.microsoft.com/office/drawing/2014/main" id="{A7B0684F-3DE1-469F-B089-30FA9B47F2EB}"/>
-              </a:ext>
-            </a:extLst>
-          </p:cNvPr>
-          <p:cNvSpPr>
-            <a:spLocks xmlns:a="http://schemas.openxmlformats.org/drawingml/2006/main" noGrp="1"/>
-          </p:cNvSpPr>
-          <p:nvPr/>
-        </p:nvSpPr>
-        <p:spPr>
-          <a:xfrm xmlns:a="http://schemas.openxmlformats.org/drawingml/2006/main">
-            <a:off x="1981200" y="2428875"/>
-            <a:ext cx="7600950" cy="38100"/>
-          </a:xfrm>
-          <a:prstGeom xmlns:a="http://schemas.openxmlformats.org/drawingml/2006/main" prst="rect">
-            <a:avLst/>
-          </a:prstGeom>
-          <a:solidFill xmlns:a="http://schemas.openxmlformats.org/drawingml/2006/main">
-            <a:srgbClr val="C9CDD4"/>
-          </a:solidFill>
-          <a:ln xmlns:a="http://schemas.openxmlformats.org/drawingml/2006/main" w="0">
-            <a:noFill/>
-            <a:prstDash val="solid"/>
-          </a:ln>
-        </p:spPr>
-      </p:sp>
-      <p:sp>
-        <p:nvSpPr>
-          <p:cNvPr id="6" name="step-dot-0">
-            <a:extLst xmlns:a="http://schemas.openxmlformats.org/drawingml/2006/main">
-              <a:ext uri="{FF2B5EF4-FFF2-40B4-BE49-F238E27FC236}">
-                <a16:creationId xmlns:a16="http://schemas.microsoft.com/office/drawing/2014/main" id="{3727BDF2-CC2A-4F3C-AA91-4F0E6BFD84B8}"/>
-              </a:ext>
-            </a:extLst>
-          </p:cNvPr>
-          <p:cNvSpPr>
-            <a:spLocks xmlns:a="http://schemas.openxmlformats.org/drawingml/2006/main" noGrp="1"/>
-          </p:cNvSpPr>
-          <p:nvPr/>
-        </p:nvSpPr>
-        <p:spPr>
-          <a:xfrm xmlns:a="http://schemas.openxmlformats.org/drawingml/2006/main">
-            <a:off x="1666875" y="2133600"/>
-            <a:ext cx="628650" cy="628650"/>
-          </a:xfrm>
-          <a:prstGeom xmlns:a="http://schemas.openxmlformats.org/drawingml/2006/main" prst="roundRect">
-            <a:avLst>
-              <a:gd name="adj" fmla="val 18182"/>
-            </a:avLst>
-          </a:prstGeom>
-          <a:solidFill xmlns:a="http://schemas.openxmlformats.org/drawingml/2006/main">
-            <a:srgbClr val="111827"/>
-          </a:solidFill>
-          <a:ln xmlns:a="http://schemas.openxmlformats.org/drawingml/2006/main" w="0">
-            <a:noFill/>
-            <a:prstDash val="solid"/>
-          </a:ln>
-        </p:spPr>
-      </p:sp>
-      <p:sp>
-        <p:nvSpPr>
-          <p:cNvPr id="7" name="step-n-0">
-            <a:extLst xmlns:a="http://schemas.openxmlformats.org/drawingml/2006/main">
-              <a:ext uri="{FF2B5EF4-FFF2-40B4-BE49-F238E27FC236}">
-                <a16:creationId xmlns:a16="http://schemas.microsoft.com/office/drawing/2014/main" id="{20F518E8-7FC6-4EAD-A44E-6E969E72B027}"/>
-              </a:ext>
-            </a:extLst>
-          </p:cNvPr>
-          <p:cNvSpPr>
-            <a:spLocks xmlns:a="http://schemas.openxmlformats.org/drawingml/2006/main" noGrp="1"/>
-          </p:cNvSpPr>
-          <p:nvPr/>
-        </p:nvSpPr>
-        <p:spPr>
-          <a:xfrm xmlns:a="http://schemas.openxmlformats.org/drawingml/2006/main">
-            <a:off x="1666875" y="2190750"/>
-            <a:ext cx="628650" cy="495300"/>
-          </a:xfrm>
-          <a:prstGeom xmlns:a="http://schemas.openxmlformats.org/drawingml/2006/main" prst="rect">
-            <a:avLst/>
-          </a:prstGeom>
-          <a:noFill xmlns:a="http://schemas.openxmlformats.org/drawingml/2006/main"/>
-          <a:ln xmlns:a="http://schemas.openxmlformats.org/drawingml/2006/main" w="0">
-            <a:noFill/>
-            <a:prstDash val="solid"/>
-          </a:ln>
-        </p:spPr>
-        <p:txBody>
-          <a:bodyPr xmlns:a="http://schemas.openxmlformats.org/drawingml/2006/main" anchor="ctr">
-            <a:normAutofit fontScale="100000"/>
-          </a:bodyPr>
-          <a:lstStyle xmlns:a="http://schemas.openxmlformats.org/drawingml/2006/main"/>
-          <a:p xmlns:a="http://schemas.openxmlformats.org/drawingml/2006/main">
-            <a:pPr algn="ctr">
-              <a:buNone/>
-              <a:defRPr sz="2025" b="1">
-                <a:solidFill>
-                  <a:srgbClr val="FFFFFF"/>
-                </a:solidFill>
-                <a:latin typeface="PingFang SC"/>
-                <a:ea typeface="PingFang SC"/>
-                <a:cs typeface="PingFang SC"/>
-              </a:defRPr>
-            </a:pPr>
-            <a:r>
-              <a:rPr sz="2025" b="1">
-                <a:solidFill>
-                  <a:srgbClr val="FFFFFF"/>
-                </a:solidFill>
-                <a:latin typeface="PingFang SC"/>
-                <a:ea typeface="PingFang SC"/>
-                <a:cs typeface="PingFang SC"/>
-              </a:rPr>
-              <a:t>1</a:t>
-            </a:r>
-          </a:p>
-        </p:txBody>
-      </p:sp>
-      <p:sp>
-        <p:nvSpPr>
-          <p:cNvPr id="8" name="step-title-0">
-            <a:extLst xmlns:a="http://schemas.openxmlformats.org/drawingml/2006/main">
-              <a:ext uri="{FF2B5EF4-FFF2-40B4-BE49-F238E27FC236}">
-                <a16:creationId xmlns:a16="http://schemas.microsoft.com/office/drawing/2014/main" id="{51765322-5A09-483C-A66A-C4834132A815}"/>
-              </a:ext>
-            </a:extLst>
-          </p:cNvPr>
-          <p:cNvSpPr>
-            <a:spLocks xmlns:a="http://schemas.openxmlformats.org/drawingml/2006/main" noGrp="1"/>
-          </p:cNvSpPr>
-          <p:nvPr/>
-        </p:nvSpPr>
-        <p:spPr>
-          <a:xfrm xmlns:a="http://schemas.openxmlformats.org/drawingml/2006/main">
-            <a:off x="838200" y="2895600"/>
-            <a:ext cx="2286000" cy="361950"/>
-          </a:xfrm>
-          <a:prstGeom xmlns:a="http://schemas.openxmlformats.org/drawingml/2006/main" prst="rect">
-            <a:avLst/>
-          </a:prstGeom>
-          <a:noFill xmlns:a="http://schemas.openxmlformats.org/drawingml/2006/main"/>
-          <a:ln xmlns:a="http://schemas.openxmlformats.org/drawingml/2006/main" w="0">
-            <a:noFill/>
-            <a:prstDash val="solid"/>
-          </a:ln>
-        </p:spPr>
-        <p:txBody>
-          <a:bodyPr xmlns:a="http://schemas.openxmlformats.org/drawingml/2006/main" anchor="t">
-            <a:normAutofit fontScale="91026"/>
-          </a:bodyPr>
-          <a:lstStyle xmlns:a="http://schemas.openxmlformats.org/drawingml/2006/main"/>
-          <a:p xmlns:a="http://schemas.openxmlformats.org/drawingml/2006/main">
-            <a:pPr algn="ctr">
-              <a:buNone/>
-              <a:defRPr sz="1950" b="1">
-                <a:solidFill>
-                  <a:srgbClr val="111827"/>
-                </a:solidFill>
-                <a:latin typeface="PingFang SC"/>
-                <a:ea typeface="PingFang SC"/>
-                <a:cs typeface="PingFang SC"/>
-              </a:defRPr>
-            </a:pPr>
-            <a:r>
-              <a:rPr sz="1950" b="1">
-                <a:solidFill>
-                  <a:srgbClr val="111827"/>
-                </a:solidFill>
-                <a:latin typeface="PingFang SC"/>
-                <a:ea typeface="PingFang SC"/>
-                <a:cs typeface="PingFang SC"/>
-              </a:rPr>
-              <a:t>冻结测试任务</a:t>
-            </a:r>
-          </a:p>
-        </p:txBody>
-      </p:sp>
-      <p:sp>
-        <p:nvSpPr>
-          <p:cNvPr id="9" name="step-body-0">
-            <a:extLst xmlns:a="http://schemas.openxmlformats.org/drawingml/2006/main">
-              <a:ext uri="{FF2B5EF4-FFF2-40B4-BE49-F238E27FC236}">
-                <a16:creationId xmlns:a16="http://schemas.microsoft.com/office/drawing/2014/main" id="{81D68444-C300-41DA-957D-0CADF615BB22}"/>
-              </a:ext>
-            </a:extLst>
-          </p:cNvPr>
-          <p:cNvSpPr>
-            <a:spLocks xmlns:a="http://schemas.openxmlformats.org/drawingml/2006/main" noGrp="1"/>
-          </p:cNvSpPr>
-          <p:nvPr/>
-        </p:nvSpPr>
-        <p:spPr>
-          <a:xfrm xmlns:a="http://schemas.openxmlformats.org/drawingml/2006/main">
-            <a:off x="742950" y="3314700"/>
-            <a:ext cx="2476500" cy="400050"/>
-          </a:xfrm>
-          <a:prstGeom xmlns:a="http://schemas.openxmlformats.org/drawingml/2006/main" prst="rect">
-            <a:avLst/>
-          </a:prstGeom>
-          <a:noFill xmlns:a="http://schemas.openxmlformats.org/drawingml/2006/main"/>
-          <a:ln xmlns:a="http://schemas.openxmlformats.org/drawingml/2006/main" w="0">
-            <a:noFill/>
-            <a:prstDash val="solid"/>
-          </a:ln>
-        </p:spPr>
-        <p:txBody>
-          <a:bodyPr xmlns:a="http://schemas.openxmlformats.org/drawingml/2006/main" anchor="t">
-            <a:normAutofit fontScale="100000"/>
-          </a:bodyPr>
-          <a:lstStyle xmlns:a="http://schemas.openxmlformats.org/drawingml/2006/main"/>
-          <a:p xmlns:a="http://schemas.openxmlformats.org/drawingml/2006/main">
-            <a:pPr algn="ctr">
-              <a:buNone/>
-              <a:defRPr sz="1350" b="0">
-                <a:solidFill>
-                  <a:srgbClr val="667085"/>
-                </a:solidFill>
-                <a:latin typeface="PingFang SC"/>
-                <a:ea typeface="PingFang SC"/>
-                <a:cs typeface="PingFang SC"/>
-              </a:defRPr>
-            </a:pPr>
-            <a:r>
-              <a:rPr sz="1350" b="0">
-                <a:solidFill>
-                  <a:srgbClr val="667085"/>
-                </a:solidFill>
-                <a:latin typeface="PingFang SC"/>
-                <a:ea typeface="PingFang SC"/>
-                <a:cs typeface="PingFang SC"/>
-              </a:rPr>
-              <a:t>模型 / 输入 / SOP / hash</a:t>
-            </a:r>
-          </a:p>
-        </p:txBody>
-      </p:sp>
-      <p:sp>
-        <p:nvSpPr>
-          <p:cNvPr id="10" name="step-dot-1">
-            <a:extLst xmlns:a="http://schemas.openxmlformats.org/drawingml/2006/main">
-              <a:ext uri="{FF2B5EF4-FFF2-40B4-BE49-F238E27FC236}">
-                <a16:creationId xmlns:a16="http://schemas.microsoft.com/office/drawing/2014/main" id="{C1DF2A64-EBDD-4012-8140-CB091C1FE385}"/>
-              </a:ext>
-            </a:extLst>
-          </p:cNvPr>
-          <p:cNvSpPr>
-            <a:spLocks xmlns:a="http://schemas.openxmlformats.org/drawingml/2006/main" noGrp="1"/>
-          </p:cNvSpPr>
-          <p:nvPr/>
-        </p:nvSpPr>
-        <p:spPr>
-          <a:xfrm xmlns:a="http://schemas.openxmlformats.org/drawingml/2006/main">
-            <a:off x="5467350" y="2133600"/>
-            <a:ext cx="628650" cy="628650"/>
-          </a:xfrm>
-          <a:prstGeom xmlns:a="http://schemas.openxmlformats.org/drawingml/2006/main" prst="roundRect">
-            <a:avLst>
-              <a:gd name="adj" fmla="val 18182"/>
-            </a:avLst>
-          </a:prstGeom>
-          <a:solidFill xmlns:a="http://schemas.openxmlformats.org/drawingml/2006/main">
-            <a:srgbClr val="111827"/>
-          </a:solidFill>
-          <a:ln xmlns:a="http://schemas.openxmlformats.org/drawingml/2006/main" w="0">
-            <a:noFill/>
-            <a:prstDash val="solid"/>
-          </a:ln>
-        </p:spPr>
-      </p:sp>
-      <p:sp>
-        <p:nvSpPr>
-          <p:cNvPr id="11" name="step-n-1">
-            <a:extLst xmlns:a="http://schemas.openxmlformats.org/drawingml/2006/main">
-              <a:ext uri="{FF2B5EF4-FFF2-40B4-BE49-F238E27FC236}">
-                <a16:creationId xmlns:a16="http://schemas.microsoft.com/office/drawing/2014/main" id="{9020754C-4655-4B67-93A1-D6945B1572E0}"/>
-              </a:ext>
-            </a:extLst>
-          </p:cNvPr>
-          <p:cNvSpPr>
-            <a:spLocks xmlns:a="http://schemas.openxmlformats.org/drawingml/2006/main" noGrp="1"/>
-          </p:cNvSpPr>
-          <p:nvPr/>
-        </p:nvSpPr>
-        <p:spPr>
-          <a:xfrm xmlns:a="http://schemas.openxmlformats.org/drawingml/2006/main">
-            <a:off x="5467350" y="2190750"/>
-            <a:ext cx="628650" cy="495300"/>
-          </a:xfrm>
-          <a:prstGeom xmlns:a="http://schemas.openxmlformats.org/drawingml/2006/main" prst="rect">
-            <a:avLst/>
-          </a:prstGeom>
-          <a:noFill xmlns:a="http://schemas.openxmlformats.org/drawingml/2006/main"/>
-          <a:ln xmlns:a="http://schemas.openxmlformats.org/drawingml/2006/main" w="0">
-            <a:noFill/>
-            <a:prstDash val="solid"/>
-          </a:ln>
-        </p:spPr>
-        <p:txBody>
-          <a:bodyPr xmlns:a="http://schemas.openxmlformats.org/drawingml/2006/main" anchor="ctr">
-            <a:normAutofit fontScale="100000"/>
-          </a:bodyPr>
-          <a:lstStyle xmlns:a="http://schemas.openxmlformats.org/drawingml/2006/main"/>
-          <a:p xmlns:a="http://schemas.openxmlformats.org/drawingml/2006/main">
-            <a:pPr algn="ctr">
-              <a:buNone/>
-              <a:defRPr sz="2025" b="1">
-                <a:solidFill>
-                  <a:srgbClr val="FFFFFF"/>
-                </a:solidFill>
-                <a:latin typeface="PingFang SC"/>
-                <a:ea typeface="PingFang SC"/>
-                <a:cs typeface="PingFang SC"/>
-              </a:defRPr>
-            </a:pPr>
-            <a:r>
-              <a:rPr sz="2025" b="1">
-                <a:solidFill>
-                  <a:srgbClr val="FFFFFF"/>
-                </a:solidFill>
-                <a:latin typeface="PingFang SC"/>
-                <a:ea typeface="PingFang SC"/>
-                <a:cs typeface="PingFang SC"/>
-              </a:rPr>
-              <a:t>2</a:t>
-            </a:r>
-          </a:p>
-        </p:txBody>
-      </p:sp>
-      <p:sp>
-        <p:nvSpPr>
-          <p:cNvPr id="12" name="step-title-1">
-            <a:extLst xmlns:a="http://schemas.openxmlformats.org/drawingml/2006/main">
-              <a:ext uri="{FF2B5EF4-FFF2-40B4-BE49-F238E27FC236}">
-                <a16:creationId xmlns:a16="http://schemas.microsoft.com/office/drawing/2014/main" id="{42C15ABA-AF5B-4574-A693-1AE5E7C682AD}"/>
-              </a:ext>
-            </a:extLst>
-          </p:cNvPr>
-          <p:cNvSpPr>
-            <a:spLocks xmlns:a="http://schemas.openxmlformats.org/drawingml/2006/main" noGrp="1"/>
-          </p:cNvSpPr>
-          <p:nvPr/>
-        </p:nvSpPr>
-        <p:spPr>
-          <a:xfrm xmlns:a="http://schemas.openxmlformats.org/drawingml/2006/main">
-            <a:off x="4638675" y="2895600"/>
-            <a:ext cx="2286000" cy="361950"/>
-          </a:xfrm>
-          <a:prstGeom xmlns:a="http://schemas.openxmlformats.org/drawingml/2006/main" prst="rect">
-            <a:avLst/>
-          </a:prstGeom>
-          <a:noFill xmlns:a="http://schemas.openxmlformats.org/drawingml/2006/main"/>
-          <a:ln xmlns:a="http://schemas.openxmlformats.org/drawingml/2006/main" w="0">
-            <a:noFill/>
-            <a:prstDash val="solid"/>
-          </a:ln>
-        </p:spPr>
-        <p:txBody>
-          <a:bodyPr xmlns:a="http://schemas.openxmlformats.org/drawingml/2006/main" anchor="t">
-            <a:normAutofit fontScale="91026"/>
-          </a:bodyPr>
-          <a:lstStyle xmlns:a="http://schemas.openxmlformats.org/drawingml/2006/main"/>
-          <a:p xmlns:a="http://schemas.openxmlformats.org/drawingml/2006/main">
-            <a:pPr algn="ctr">
-              <a:buNone/>
-              <a:defRPr sz="1950" b="1">
-                <a:solidFill>
-                  <a:srgbClr val="111827"/>
-                </a:solidFill>
-                <a:latin typeface="PingFang SC"/>
-                <a:ea typeface="PingFang SC"/>
-                <a:cs typeface="PingFang SC"/>
-              </a:defRPr>
-            </a:pPr>
-            <a:r>
-              <a:rPr sz="1950" b="1">
-                <a:solidFill>
-                  <a:srgbClr val="111827"/>
-                </a:solidFill>
-                <a:latin typeface="PingFang SC"/>
-                <a:ea typeface="PingFang SC"/>
-                <a:cs typeface="PingFang SC"/>
-              </a:rPr>
-              <a:t>编译评分合同</a:t>
-            </a:r>
-          </a:p>
-        </p:txBody>
-      </p:sp>
-      <p:sp>
-        <p:nvSpPr>
-          <p:cNvPr id="13" name="step-body-1">
-            <a:extLst xmlns:a="http://schemas.openxmlformats.org/drawingml/2006/main">
-              <a:ext uri="{FF2B5EF4-FFF2-40B4-BE49-F238E27FC236}">
-                <a16:creationId xmlns:a16="http://schemas.microsoft.com/office/drawing/2014/main" id="{CC81D6D1-3A42-4375-A2DB-05B84F35605D}"/>
-              </a:ext>
-            </a:extLst>
-          </p:cNvPr>
-          <p:cNvSpPr>
-            <a:spLocks xmlns:a="http://schemas.openxmlformats.org/drawingml/2006/main" noGrp="1"/>
-          </p:cNvSpPr>
-          <p:nvPr/>
-        </p:nvSpPr>
-        <p:spPr>
-          <a:xfrm xmlns:a="http://schemas.openxmlformats.org/drawingml/2006/main">
-            <a:off x="4543425" y="3314700"/>
-            <a:ext cx="2476500" cy="400050"/>
-          </a:xfrm>
-          <a:prstGeom xmlns:a="http://schemas.openxmlformats.org/drawingml/2006/main" prst="rect">
-            <a:avLst/>
-          </a:prstGeom>
-          <a:noFill xmlns:a="http://schemas.openxmlformats.org/drawingml/2006/main"/>
-          <a:ln xmlns:a="http://schemas.openxmlformats.org/drawingml/2006/main" w="0">
-            <a:noFill/>
-            <a:prstDash val="solid"/>
-          </a:ln>
-        </p:spPr>
-        <p:txBody>
-          <a:bodyPr xmlns:a="http://schemas.openxmlformats.org/drawingml/2006/main" anchor="t">
-            <a:normAutofit fontScale="100000"/>
-          </a:bodyPr>
-          <a:lstStyle xmlns:a="http://schemas.openxmlformats.org/drawingml/2006/main"/>
-          <a:p xmlns:a="http://schemas.openxmlformats.org/drawingml/2006/main">
-            <a:pPr algn="ctr">
-              <a:buNone/>
-              <a:defRPr sz="1350" b="0">
-                <a:solidFill>
-                  <a:srgbClr val="667085"/>
-                </a:solidFill>
-                <a:latin typeface="PingFang SC"/>
-                <a:ea typeface="PingFang SC"/>
-                <a:cs typeface="PingFang SC"/>
-              </a:defRPr>
-            </a:pPr>
-            <a:r>
-              <a:rPr sz="1350" b="0">
-                <a:solidFill>
-                  <a:srgbClr val="667085"/>
-                </a:solidFill>
-                <a:latin typeface="PingFang SC"/>
-                <a:ea typeface="PingFang SC"/>
-                <a:cs typeface="PingFang SC"/>
-              </a:rPr>
-              <a:t>L0 安全 + L1 业务</a:t>
-            </a:r>
-          </a:p>
-        </p:txBody>
-      </p:sp>
-      <p:sp>
-        <p:nvSpPr>
-          <p:cNvPr id="14" name="step-dot-2">
-            <a:extLst xmlns:a="http://schemas.openxmlformats.org/drawingml/2006/main">
-              <a:ext uri="{FF2B5EF4-FFF2-40B4-BE49-F238E27FC236}">
-                <a16:creationId xmlns:a16="http://schemas.microsoft.com/office/drawing/2014/main" id="{8B21AB0A-0540-4BED-B85C-74B3C3C57000}"/>
-              </a:ext>
-            </a:extLst>
-          </p:cNvPr>
-          <p:cNvSpPr>
-            <a:spLocks xmlns:a="http://schemas.openxmlformats.org/drawingml/2006/main" noGrp="1"/>
-          </p:cNvSpPr>
-          <p:nvPr/>
-        </p:nvSpPr>
-        <p:spPr>
-          <a:xfrm xmlns:a="http://schemas.openxmlformats.org/drawingml/2006/main">
-            <a:off x="9267825" y="2133600"/>
-            <a:ext cx="628650" cy="628650"/>
-          </a:xfrm>
-          <a:prstGeom xmlns:a="http://schemas.openxmlformats.org/drawingml/2006/main" prst="roundRect">
-            <a:avLst>
-              <a:gd name="adj" fmla="val 18182"/>
-            </a:avLst>
-          </a:prstGeom>
-          <a:solidFill xmlns:a="http://schemas.openxmlformats.org/drawingml/2006/main">
-            <a:srgbClr val="111827"/>
-          </a:solidFill>
-          <a:ln xmlns:a="http://schemas.openxmlformats.org/drawingml/2006/main" w="0">
-            <a:noFill/>
-            <a:prstDash val="solid"/>
-          </a:ln>
-        </p:spPr>
-      </p:sp>
-      <p:sp>
-        <p:nvSpPr>
-          <p:cNvPr id="15" name="step-n-2">
-            <a:extLst xmlns:a="http://schemas.openxmlformats.org/drawingml/2006/main">
-              <a:ext uri="{FF2B5EF4-FFF2-40B4-BE49-F238E27FC236}">
-                <a16:creationId xmlns:a16="http://schemas.microsoft.com/office/drawing/2014/main" id="{BE7D4578-4A77-4ECD-A191-6C6D7285889F}"/>
-              </a:ext>
-            </a:extLst>
-          </p:cNvPr>
-          <p:cNvSpPr>
-            <a:spLocks xmlns:a="http://schemas.openxmlformats.org/drawingml/2006/main" noGrp="1"/>
-          </p:cNvSpPr>
-          <p:nvPr/>
-        </p:nvSpPr>
-        <p:spPr>
-          <a:xfrm xmlns:a="http://schemas.openxmlformats.org/drawingml/2006/main">
-            <a:off x="9267825" y="2190750"/>
-            <a:ext cx="628650" cy="495300"/>
-          </a:xfrm>
-          <a:prstGeom xmlns:a="http://schemas.openxmlformats.org/drawingml/2006/main" prst="rect">
-            <a:avLst/>
-          </a:prstGeom>
-          <a:noFill xmlns:a="http://schemas.openxmlformats.org/drawingml/2006/main"/>
-          <a:ln xmlns:a="http://schemas.openxmlformats.org/drawingml/2006/main" w="0">
-            <a:noFill/>
-            <a:prstDash val="solid"/>
-          </a:ln>
-        </p:spPr>
-        <p:txBody>
-          <a:bodyPr xmlns:a="http://schemas.openxmlformats.org/drawingml/2006/main" anchor="ctr">
-            <a:normAutofit fontScale="100000"/>
-          </a:bodyPr>
-          <a:lstStyle xmlns:a="http://schemas.openxmlformats.org/drawingml/2006/main"/>
-          <a:p xmlns:a="http://schemas.openxmlformats.org/drawingml/2006/main">
-            <a:pPr algn="ctr">
-              <a:buNone/>
-              <a:defRPr sz="2025" b="1">
-                <a:solidFill>
-                  <a:srgbClr val="FFFFFF"/>
-                </a:solidFill>
-                <a:latin typeface="PingFang SC"/>
-                <a:ea typeface="PingFang SC"/>
-                <a:cs typeface="PingFang SC"/>
-              </a:defRPr>
-            </a:pPr>
-            <a:r>
-              <a:rPr sz="2025" b="1">
-                <a:solidFill>
-                  <a:srgbClr val="FFFFFF"/>
-                </a:solidFill>
-                <a:latin typeface="PingFang SC"/>
-                <a:ea typeface="PingFang SC"/>
-                <a:cs typeface="PingFang SC"/>
-              </a:rPr>
-              <a:t>3</a:t>
-            </a:r>
-          </a:p>
-        </p:txBody>
-      </p:sp>
-      <p:sp>
-        <p:nvSpPr>
-          <p:cNvPr id="16" name="step-title-2">
-            <a:extLst xmlns:a="http://schemas.openxmlformats.org/drawingml/2006/main">
-              <a:ext uri="{FF2B5EF4-FFF2-40B4-BE49-F238E27FC236}">
-                <a16:creationId xmlns:a16="http://schemas.microsoft.com/office/drawing/2014/main" id="{B5412980-B5B8-41C5-BBC7-CC881B86EDE9}"/>
-              </a:ext>
-            </a:extLst>
-          </p:cNvPr>
-          <p:cNvSpPr>
-            <a:spLocks xmlns:a="http://schemas.openxmlformats.org/drawingml/2006/main" noGrp="1"/>
-          </p:cNvSpPr>
-          <p:nvPr/>
-        </p:nvSpPr>
-        <p:spPr>
-          <a:xfrm xmlns:a="http://schemas.openxmlformats.org/drawingml/2006/main">
-            <a:off x="8439150" y="2895600"/>
-            <a:ext cx="2286000" cy="361950"/>
-          </a:xfrm>
-          <a:prstGeom xmlns:a="http://schemas.openxmlformats.org/drawingml/2006/main" prst="rect">
-            <a:avLst/>
-          </a:prstGeom>
-          <a:noFill xmlns:a="http://schemas.openxmlformats.org/drawingml/2006/main"/>
-          <a:ln xmlns:a="http://schemas.openxmlformats.org/drawingml/2006/main" w="0">
-            <a:noFill/>
-            <a:prstDash val="solid"/>
-          </a:ln>
-        </p:spPr>
-        <p:txBody>
-          <a:bodyPr xmlns:a="http://schemas.openxmlformats.org/drawingml/2006/main" anchor="t">
-            <a:normAutofit fontScale="91026"/>
-          </a:bodyPr>
-          <a:lstStyle xmlns:a="http://schemas.openxmlformats.org/drawingml/2006/main"/>
-          <a:p xmlns:a="http://schemas.openxmlformats.org/drawingml/2006/main">
-            <a:pPr algn="ctr">
-              <a:buNone/>
-              <a:defRPr sz="1950" b="1">
-                <a:solidFill>
-                  <a:srgbClr val="111827"/>
-                </a:solidFill>
-                <a:latin typeface="PingFang SC"/>
-                <a:ea typeface="PingFang SC"/>
-                <a:cs typeface="PingFang SC"/>
-              </a:defRPr>
-            </a:pPr>
-            <a:r>
-              <a:rPr sz="1950" b="1">
-                <a:solidFill>
-                  <a:srgbClr val="111827"/>
-                </a:solidFill>
-                <a:latin typeface="PingFang SC"/>
-                <a:ea typeface="PingFang SC"/>
-                <a:cs typeface="PingFang SC"/>
-              </a:rPr>
-              <a:t>主动测试模型</a:t>
-            </a:r>
-          </a:p>
-        </p:txBody>
-      </p:sp>
-      <p:sp>
-        <p:nvSpPr>
-          <p:cNvPr id="17" name="step-body-2">
-            <a:extLst xmlns:a="http://schemas.openxmlformats.org/drawingml/2006/main">
-              <a:ext uri="{FF2B5EF4-FFF2-40B4-BE49-F238E27FC236}">
-                <a16:creationId xmlns:a16="http://schemas.microsoft.com/office/drawing/2014/main" id="{0472E68F-8D8B-4A37-AF40-5384BD04277E}"/>
-              </a:ext>
-            </a:extLst>
-          </p:cNvPr>
-          <p:cNvSpPr>
-            <a:spLocks xmlns:a="http://schemas.openxmlformats.org/drawingml/2006/main" noGrp="1"/>
-          </p:cNvSpPr>
-          <p:nvPr/>
-        </p:nvSpPr>
-        <p:spPr>
-          <a:xfrm xmlns:a="http://schemas.openxmlformats.org/drawingml/2006/main">
-            <a:off x="8343900" y="3314700"/>
-            <a:ext cx="2476500" cy="400050"/>
-          </a:xfrm>
-          <a:prstGeom xmlns:a="http://schemas.openxmlformats.org/drawingml/2006/main" prst="rect">
-            <a:avLst/>
-          </a:prstGeom>
-          <a:noFill xmlns:a="http://schemas.openxmlformats.org/drawingml/2006/main"/>
-          <a:ln xmlns:a="http://schemas.openxmlformats.org/drawingml/2006/main" w="0">
-            <a:noFill/>
-            <a:prstDash val="solid"/>
-          </a:ln>
-        </p:spPr>
-        <p:txBody>
-          <a:bodyPr xmlns:a="http://schemas.openxmlformats.org/drawingml/2006/main" anchor="t">
-            <a:normAutofit fontScale="100000"/>
-          </a:bodyPr>
-          <a:lstStyle xmlns:a="http://schemas.openxmlformats.org/drawingml/2006/main"/>
-          <a:p xmlns:a="http://schemas.openxmlformats.org/drawingml/2006/main">
-            <a:pPr algn="ctr">
-              <a:buNone/>
-              <a:defRPr sz="1350" b="0">
-                <a:solidFill>
-                  <a:srgbClr val="667085"/>
-                </a:solidFill>
-                <a:latin typeface="PingFang SC"/>
-                <a:ea typeface="PingFang SC"/>
-                <a:cs typeface="PingFang SC"/>
-              </a:defRPr>
-            </a:pPr>
-            <a:r>
-              <a:rPr sz="1350" b="0">
-                <a:solidFill>
-                  <a:srgbClr val="667085"/>
-                </a:solidFill>
-                <a:latin typeface="PingFang SC"/>
-                <a:ea typeface="PingFang SC"/>
-                <a:cs typeface="PingFang SC"/>
-              </a:rPr>
-              <a:t>Persona × 对抗分支</a:t>
-            </a:r>
-          </a:p>
-        </p:txBody>
-      </p:sp>
-      <p:sp>
-        <p:nvSpPr>
-          <p:cNvPr id="18" name="step-dot-3">
-            <a:extLst xmlns:a="http://schemas.openxmlformats.org/drawingml/2006/main">
-              <a:ext uri="{FF2B5EF4-FFF2-40B4-BE49-F238E27FC236}">
-                <a16:creationId xmlns:a16="http://schemas.microsoft.com/office/drawing/2014/main" id="{4F4ED39A-5F4D-4827-A0E0-05B192C4F398}"/>
-              </a:ext>
-            </a:extLst>
-          </p:cNvPr>
-          <p:cNvSpPr>
-            <a:spLocks xmlns:a="http://schemas.openxmlformats.org/drawingml/2006/main" noGrp="1"/>
-          </p:cNvSpPr>
-          <p:nvPr/>
-        </p:nvSpPr>
-        <p:spPr>
-          <a:xfrm xmlns:a="http://schemas.openxmlformats.org/drawingml/2006/main">
-            <a:off x="1666875" y="4095750"/>
-            <a:ext cx="628650" cy="628650"/>
-          </a:xfrm>
-          <a:prstGeom xmlns:a="http://schemas.openxmlformats.org/drawingml/2006/main" prst="roundRect">
-            <a:avLst>
-              <a:gd name="adj" fmla="val 18182"/>
-            </a:avLst>
-          </a:prstGeom>
-          <a:solidFill xmlns:a="http://schemas.openxmlformats.org/drawingml/2006/main">
-            <a:srgbClr val="FFD100"/>
-          </a:solidFill>
-          <a:ln xmlns:a="http://schemas.openxmlformats.org/drawingml/2006/main" w="0">
-            <a:noFill/>
-            <a:prstDash val="solid"/>
-          </a:ln>
-        </p:spPr>
-      </p:sp>
-      <p:sp>
-        <p:nvSpPr>
-          <p:cNvPr id="19" name="step-n-3">
-            <a:extLst xmlns:a="http://schemas.openxmlformats.org/drawingml/2006/main">
-              <a:ext uri="{FF2B5EF4-FFF2-40B4-BE49-F238E27FC236}">
-                <a16:creationId xmlns:a16="http://schemas.microsoft.com/office/drawing/2014/main" id="{F52B6353-AD90-4D20-ADD2-6BAE145C2618}"/>
-              </a:ext>
-            </a:extLst>
-          </p:cNvPr>
-          <p:cNvSpPr>
-            <a:spLocks xmlns:a="http://schemas.openxmlformats.org/drawingml/2006/main" noGrp="1"/>
-          </p:cNvSpPr>
-          <p:nvPr/>
-        </p:nvSpPr>
-        <p:spPr>
-          <a:xfrm xmlns:a="http://schemas.openxmlformats.org/drawingml/2006/main">
-            <a:off x="1666875" y="4152900"/>
-            <a:ext cx="628650" cy="495300"/>
-          </a:xfrm>
-          <a:prstGeom xmlns:a="http://schemas.openxmlformats.org/drawingml/2006/main" prst="rect">
-            <a:avLst/>
-          </a:prstGeom>
-          <a:noFill xmlns:a="http://schemas.openxmlformats.org/drawingml/2006/main"/>
-          <a:ln xmlns:a="http://schemas.openxmlformats.org/drawingml/2006/main" w="0">
-            <a:noFill/>
-            <a:prstDash val="solid"/>
-          </a:ln>
-        </p:spPr>
-        <p:txBody>
-          <a:bodyPr xmlns:a="http://schemas.openxmlformats.org/drawingml/2006/main" anchor="ctr">
-            <a:normAutofit fontScale="100000"/>
-          </a:bodyPr>
-          <a:lstStyle xmlns:a="http://schemas.openxmlformats.org/drawingml/2006/main"/>
-          <a:p xmlns:a="http://schemas.openxmlformats.org/drawingml/2006/main">
-            <a:pPr algn="ctr">
-              <a:buNone/>
-              <a:defRPr sz="2025" b="1">
-                <a:solidFill>
-                  <a:srgbClr val="111827"/>
-                </a:solidFill>
-                <a:latin typeface="PingFang SC"/>
-                <a:ea typeface="PingFang SC"/>
-                <a:cs typeface="PingFang SC"/>
-              </a:defRPr>
-            </a:pPr>
-            <a:r>
-              <a:rPr sz="2025" b="1">
-                <a:solidFill>
-                  <a:srgbClr val="111827"/>
-                </a:solidFill>
-                <a:latin typeface="PingFang SC"/>
-                <a:ea typeface="PingFang SC"/>
-                <a:cs typeface="PingFang SC"/>
-              </a:rPr>
-              <a:t>4</a:t>
-            </a:r>
-          </a:p>
-        </p:txBody>
-      </p:sp>
-      <p:sp>
-        <p:nvSpPr>
-          <p:cNvPr id="20" name="step-title-3">
-            <a:extLst xmlns:a="http://schemas.openxmlformats.org/drawingml/2006/main">
-              <a:ext uri="{FF2B5EF4-FFF2-40B4-BE49-F238E27FC236}">
-                <a16:creationId xmlns:a16="http://schemas.microsoft.com/office/drawing/2014/main" id="{D97F5F26-12C6-452C-A2DF-1949CF7AFA1D}"/>
-              </a:ext>
-            </a:extLst>
-          </p:cNvPr>
-          <p:cNvSpPr>
-            <a:spLocks xmlns:a="http://schemas.openxmlformats.org/drawingml/2006/main" noGrp="1"/>
-          </p:cNvSpPr>
-          <p:nvPr/>
-        </p:nvSpPr>
-        <p:spPr>
-          <a:xfrm xmlns:a="http://schemas.openxmlformats.org/drawingml/2006/main">
-            <a:off x="838200" y="4857750"/>
-            <a:ext cx="2286000" cy="361950"/>
-          </a:xfrm>
-          <a:prstGeom xmlns:a="http://schemas.openxmlformats.org/drawingml/2006/main" prst="rect">
-            <a:avLst/>
-          </a:prstGeom>
-          <a:noFill xmlns:a="http://schemas.openxmlformats.org/drawingml/2006/main"/>
-          <a:ln xmlns:a="http://schemas.openxmlformats.org/drawingml/2006/main" w="0">
-            <a:noFill/>
-            <a:prstDash val="solid"/>
-          </a:ln>
-        </p:spPr>
-        <p:txBody>
-          <a:bodyPr xmlns:a="http://schemas.openxmlformats.org/drawingml/2006/main" anchor="t">
-            <a:normAutofit fontScale="91026"/>
-          </a:bodyPr>
-          <a:lstStyle xmlns:a="http://schemas.openxmlformats.org/drawingml/2006/main"/>
-          <a:p xmlns:a="http://schemas.openxmlformats.org/drawingml/2006/main">
-            <a:pPr algn="ctr">
-              <a:buNone/>
-              <a:defRPr sz="1950" b="1">
-                <a:solidFill>
-                  <a:srgbClr val="111827"/>
-                </a:solidFill>
-                <a:latin typeface="PingFang SC"/>
-                <a:ea typeface="PingFang SC"/>
-                <a:cs typeface="PingFang SC"/>
-              </a:defRPr>
-            </a:pPr>
-            <a:r>
-              <a:rPr sz="1950" b="1">
-                <a:solidFill>
-                  <a:srgbClr val="111827"/>
-                </a:solidFill>
-                <a:latin typeface="PingFang SC"/>
-                <a:ea typeface="PingFang SC"/>
-                <a:cs typeface="PingFang SC"/>
-              </a:rPr>
-              <a:t>决定是否上线</a:t>
-            </a:r>
-          </a:p>
-        </p:txBody>
-      </p:sp>
-      <p:sp>
-        <p:nvSpPr>
-          <p:cNvPr id="21" name="step-body-3">
-            <a:extLst xmlns:a="http://schemas.openxmlformats.org/drawingml/2006/main">
-              <a:ext uri="{FF2B5EF4-FFF2-40B4-BE49-F238E27FC236}">
-                <a16:creationId xmlns:a16="http://schemas.microsoft.com/office/drawing/2014/main" id="{A8E3E6EE-C136-46CD-9B40-5D5E42AF102B}"/>
-              </a:ext>
-            </a:extLst>
-          </p:cNvPr>
-          <p:cNvSpPr>
-            <a:spLocks xmlns:a="http://schemas.openxmlformats.org/drawingml/2006/main" noGrp="1"/>
-          </p:cNvSpPr>
-          <p:nvPr/>
-        </p:nvSpPr>
-        <p:spPr>
-          <a:xfrm xmlns:a="http://schemas.openxmlformats.org/drawingml/2006/main">
-            <a:off x="742950" y="5276850"/>
-            <a:ext cx="2476500" cy="400050"/>
-          </a:xfrm>
-          <a:prstGeom xmlns:a="http://schemas.openxmlformats.org/drawingml/2006/main" prst="rect">
-            <a:avLst/>
-          </a:prstGeom>
-          <a:noFill xmlns:a="http://schemas.openxmlformats.org/drawingml/2006/main"/>
-          <a:ln xmlns:a="http://schemas.openxmlformats.org/drawingml/2006/main" w="0">
-            <a:noFill/>
-            <a:prstDash val="solid"/>
-          </a:ln>
-        </p:spPr>
-        <p:txBody>
-          <a:bodyPr xmlns:a="http://schemas.openxmlformats.org/drawingml/2006/main" anchor="t">
-            <a:normAutofit fontScale="100000"/>
-          </a:bodyPr>
-          <a:lstStyle xmlns:a="http://schemas.openxmlformats.org/drawingml/2006/main"/>
-          <a:p xmlns:a="http://schemas.openxmlformats.org/drawingml/2006/main">
-            <a:pPr algn="ctr">
-              <a:buNone/>
-              <a:defRPr sz="1350" b="0">
-                <a:solidFill>
-                  <a:srgbClr val="667085"/>
-                </a:solidFill>
-                <a:latin typeface="PingFang SC"/>
-                <a:ea typeface="PingFang SC"/>
-                <a:cs typeface="PingFang SC"/>
-              </a:defRPr>
-            </a:pPr>
-            <a:r>
-              <a:rPr sz="1350" b="0">
-                <a:solidFill>
-                  <a:srgbClr val="667085"/>
-                </a:solidFill>
-                <a:latin typeface="PingFang SC"/>
-                <a:ea typeface="PingFang SC"/>
-                <a:cs typeface="PingFang SC"/>
-              </a:rPr>
-              <a:t>门禁 / 履约 / P0 / 证据</a:t>
-            </a:r>
-          </a:p>
-        </p:txBody>
-      </p:sp>
-      <p:sp>
-        <p:nvSpPr>
-          <p:cNvPr id="22" name="decision-note">
-            <a:extLst xmlns:a="http://schemas.openxmlformats.org/drawingml/2006/main">
-              <a:ext uri="{FF2B5EF4-FFF2-40B4-BE49-F238E27FC236}">
-                <a16:creationId xmlns:a16="http://schemas.microsoft.com/office/drawing/2014/main" id="{85B92780-0A54-4176-AE54-80AED4CD714D}"/>
-              </a:ext>
-            </a:extLst>
-          </p:cNvPr>
-          <p:cNvSpPr>
-            <a:spLocks xmlns:a="http://schemas.openxmlformats.org/drawingml/2006/main" noGrp="1"/>
-          </p:cNvSpPr>
-          <p:nvPr/>
-        </p:nvSpPr>
-        <p:spPr>
-          <a:xfrm xmlns:a="http://schemas.openxmlformats.org/drawingml/2006/main">
-            <a:off x="1143000" y="5810250"/>
-            <a:ext cx="9906000" cy="323850"/>
-          </a:xfrm>
-          <a:prstGeom xmlns:a="http://schemas.openxmlformats.org/drawingml/2006/main" prst="rect">
-            <a:avLst/>
-          </a:prstGeom>
-          <a:noFill xmlns:a="http://schemas.openxmlformats.org/drawingml/2006/main"/>
-          <a:ln xmlns:a="http://schemas.openxmlformats.org/drawingml/2006/main" w="0">
-            <a:noFill/>
-            <a:prstDash val="solid"/>
-          </a:ln>
-        </p:spPr>
-        <p:txBody>
-          <a:bodyPr xmlns:a="http://schemas.openxmlformats.org/drawingml/2006/main" anchor="t">
-            <a:normAutofit fontScale="100000"/>
-          </a:bodyPr>
-          <a:lstStyle xmlns:a="http://schemas.openxmlformats.org/drawingml/2006/main"/>
-          <a:p xmlns:a="http://schemas.openxmlformats.org/drawingml/2006/main">
-            <a:pPr algn="ctr">
-              <a:buNone/>
-              <a:defRPr sz="1500" b="1">
-                <a:solidFill>
-                  <a:srgbClr val="111827"/>
-                </a:solidFill>
-                <a:latin typeface="PingFang SC"/>
-                <a:ea typeface="PingFang SC"/>
-                <a:cs typeface="PingFang SC"/>
-              </a:defRPr>
-            </a:pPr>
-            <a:r>
-              <a:rPr sz="1500" b="1">
-                <a:solidFill>
-                  <a:srgbClr val="111827"/>
-                </a:solidFill>
-                <a:latin typeface="PingFang SC"/>
-                <a:ea typeface="PingFang SC"/>
-                <a:cs typeface="PingFang SC"/>
-              </a:rPr>
-              <a:t>跑完六步，精确回答三个问题：能不能上线？失败在哪里？到底该改谁？</a:t>
-            </a:r>
-          </a:p>
-        </p:txBody>
-      </p:sp>
-      <p:sp>
-        <p:nvSpPr>
-          <p:cNvPr id="23" name="source">
-            <a:extLst xmlns:a="http://schemas.openxmlformats.org/drawingml/2006/main">
-              <a:ext uri="{FF2B5EF4-FFF2-40B4-BE49-F238E27FC236}">
-                <a16:creationId xmlns:a16="http://schemas.microsoft.com/office/drawing/2014/main" id="{E648FF3C-1484-417E-9F5E-498A0B757CEE}"/>
-              </a:ext>
-            </a:extLst>
-          </p:cNvPr>
-          <p:cNvSpPr>
-            <a:spLocks xmlns:a="http://schemas.openxmlformats.org/drawingml/2006/main" noGrp="1"/>
-          </p:cNvSpPr>
-          <p:nvPr/>
-        </p:nvSpPr>
-        <p:spPr>
-          <a:xfrm xmlns:a="http://schemas.openxmlformats.org/drawingml/2006/main">
-            <a:off x="533400" y="6372225"/>
-            <a:ext cx="9906000" cy="190500"/>
-          </a:xfrm>
-          <a:prstGeom xmlns:a="http://schemas.openxmlformats.org/drawingml/2006/main" prst="rect">
-            <a:avLst/>
-          </a:prstGeom>
-          <a:noFill xmlns:a="http://schemas.openxmlformats.org/drawingml/2006/main"/>
-          <a:ln xmlns:a="http://schemas.openxmlformats.org/drawingml/2006/main" w="0">
-            <a:noFill/>
-            <a:prstDash val="solid"/>
-          </a:ln>
-        </p:spPr>
-        <p:txBody>
-          <a:bodyPr xmlns:a="http://schemas.openxmlformats.org/drawingml/2006/main" anchor="t">
-            <a:normAutofit fontScale="72222"/>
-          </a:bodyPr>
-          <a:lstStyle xmlns:a="http://schemas.openxmlformats.org/drawingml/2006/main"/>
-          <a:p xmlns:a="http://schemas.openxmlformats.org/drawingml/2006/main">
-            <a:pPr algn="l">
-              <a:buNone/>
-              <a:defRPr sz="900" b="0">
-                <a:solidFill>
-                  <a:srgbClr val="667085"/>
-                </a:solidFill>
-                <a:latin typeface="PingFang SC"/>
-                <a:ea typeface="PingFang SC"/>
-                <a:cs typeface="PingFang SC"/>
-              </a:defRPr>
-            </a:pPr>
-            <a:r>
-              <a:rPr sz="900" b="0">
-                <a:solidFill>
-                  <a:srgbClr val="667085"/>
-                </a:solidFill>
-                <a:latin typeface="PingFang SC"/>
-                <a:ea typeface="PingFang SC"/>
-                <a:cs typeface="PingFang SC"/>
-              </a:rPr>
-              <a:t>PPT 解释为什么这样设计 · Demo 证明真实运行 · 报告与产物负责结果复核</a:t>
-            </a:r>
-          </a:p>
-        </p:txBody>
-      </p:sp>
-      <p:sp>
-        <p:nvSpPr>
-          <p:cNvPr id="24" name="flow-line-row-2">
-            <a:extLst xmlns:a="http://schemas.openxmlformats.org/drawingml/2006/main">
-              <a:ext uri="{FF2B5EF4-FFF2-40B4-BE49-F238E27FC236}">
-                <a16:creationId xmlns:a16="http://schemas.microsoft.com/office/drawing/2014/main" id="{9FF7EABC-BEE2-4BDE-96F0-2075FF5DBD3E}"/>
-              </a:ext>
-            </a:extLst>
-          </p:cNvPr>
-          <p:cNvSpPr>
-            <a:spLocks xmlns:a="http://schemas.openxmlformats.org/drawingml/2006/main" noGrp="1"/>
-          </p:cNvSpPr>
-          <p:nvPr/>
-        </p:nvSpPr>
-        <p:spPr>
-          <a:xfrm xmlns:a="http://schemas.openxmlformats.org/drawingml/2006/main">
-            <a:off x="1981200" y="4391025"/>
-            <a:ext cx="7600950" cy="38100"/>
-          </a:xfrm>
-          <a:prstGeom xmlns:a="http://schemas.openxmlformats.org/drawingml/2006/main" prst="rect">
-            <a:avLst/>
-          </a:prstGeom>
-          <a:solidFill xmlns:a="http://schemas.openxmlformats.org/drawingml/2006/main">
-            <a:srgbClr val="CBD5E1"/>
-          </a:solidFill>
-          <a:ln xmlns:a="http://schemas.openxmlformats.org/drawingml/2006/main" w="0">
-            <a:noFill/>
-            <a:prstDash val="solid"/>
-          </a:ln>
-        </p:spPr>
-      </p:sp>
-      <p:sp>
-        <p:nvSpPr>
-          <p:cNvPr id="25" name="step-dot-5">
-            <a:extLst xmlns:a="http://schemas.openxmlformats.org/drawingml/2006/main">
-              <a:ext uri="{FF2B5EF4-FFF2-40B4-BE49-F238E27FC236}">
-                <a16:creationId xmlns:a16="http://schemas.microsoft.com/office/drawing/2014/main" id="{F9E6E76D-3B64-4136-83D1-EDAB2A48275D}"/>
-              </a:ext>
-            </a:extLst>
-          </p:cNvPr>
-          <p:cNvSpPr>
-            <a:spLocks xmlns:a="http://schemas.openxmlformats.org/drawingml/2006/main" noGrp="1"/>
-          </p:cNvSpPr>
-          <p:nvPr/>
-        </p:nvSpPr>
-        <p:spPr>
-          <a:xfrm xmlns:a="http://schemas.openxmlformats.org/drawingml/2006/main">
-            <a:off x="5467350" y="4095750"/>
-            <a:ext cx="628650" cy="628650"/>
-          </a:xfrm>
-          <a:prstGeom xmlns:a="http://schemas.openxmlformats.org/drawingml/2006/main" prst="ellipse">
-            <a:avLst/>
-          </a:prstGeom>
-          <a:solidFill xmlns:a="http://schemas.openxmlformats.org/drawingml/2006/main">
-            <a:srgbClr val="111827"/>
-          </a:solidFill>
-          <a:ln xmlns:a="http://schemas.openxmlformats.org/drawingml/2006/main" w="9525">
-            <a:solidFill>
-              <a:srgbClr val="111827"/>
-            </a:solidFill>
-            <a:prstDash val="solid"/>
-          </a:ln>
-        </p:spPr>
-      </p:sp>
-      <p:sp>
-        <p:nvSpPr>
-          <p:cNvPr id="26" name="step-n-5">
-            <a:extLst xmlns:a="http://schemas.openxmlformats.org/drawingml/2006/main">
-              <a:ext uri="{FF2B5EF4-FFF2-40B4-BE49-F238E27FC236}">
-                <a16:creationId xmlns:a16="http://schemas.microsoft.com/office/drawing/2014/main" id="{A480B850-43FF-4E9C-8036-9539608A5708}"/>
-              </a:ext>
-            </a:extLst>
-          </p:cNvPr>
-          <p:cNvSpPr>
-            <a:spLocks xmlns:a="http://schemas.openxmlformats.org/drawingml/2006/main" noGrp="1"/>
-          </p:cNvSpPr>
-          <p:nvPr/>
-        </p:nvSpPr>
-        <p:spPr>
-          <a:xfrm xmlns:a="http://schemas.openxmlformats.org/drawingml/2006/main">
-            <a:off x="5467350" y="4152900"/>
-            <a:ext cx="628650" cy="495300"/>
-          </a:xfrm>
-          <a:prstGeom xmlns:a="http://schemas.openxmlformats.org/drawingml/2006/main" prst="rect">
-            <a:avLst/>
-          </a:prstGeom>
-          <a:noFill xmlns:a="http://schemas.openxmlformats.org/drawingml/2006/main"/>
-          <a:ln xmlns:a="http://schemas.openxmlformats.org/drawingml/2006/main" w="0">
-            <a:noFill/>
-            <a:prstDash val="solid"/>
-          </a:ln>
-        </p:spPr>
-        <p:txBody>
-          <a:bodyPr xmlns:a="http://schemas.openxmlformats.org/drawingml/2006/main" anchor="ctr"/>
-          <a:lstStyle xmlns:a="http://schemas.openxmlformats.org/drawingml/2006/main"/>
-          <a:p xmlns:a="http://schemas.openxmlformats.org/drawingml/2006/main">
-            <a:pPr algn="ctr">
-              <a:buNone/>
-              <a:defRPr sz="1350" b="1">
-                <a:solidFill>
-                  <a:srgbClr val="FFFFFF"/>
-                </a:solidFill>
-              </a:defRPr>
-            </a:pPr>
-            <a:r>
-              <a:rPr sz="1350" b="1">
-                <a:solidFill>
-                  <a:srgbClr val="FFFFFF"/>
-                </a:solidFill>
-              </a:rPr>
-              <a:t>5</a:t>
-            </a:r>
-          </a:p>
-        </p:txBody>
-      </p:sp>
-      <p:sp>
-        <p:nvSpPr>
-          <p:cNvPr id="27" name="step-title-5">
-            <a:extLst xmlns:a="http://schemas.openxmlformats.org/drawingml/2006/main">
-              <a:ext uri="{FF2B5EF4-FFF2-40B4-BE49-F238E27FC236}">
-                <a16:creationId xmlns:a16="http://schemas.microsoft.com/office/drawing/2014/main" id="{4879BEE7-933F-434D-9BC8-9F5EF41EB9B3}"/>
-              </a:ext>
-            </a:extLst>
-          </p:cNvPr>
-          <p:cNvSpPr>
-            <a:spLocks xmlns:a="http://schemas.openxmlformats.org/drawingml/2006/main" noGrp="1"/>
-          </p:cNvSpPr>
-          <p:nvPr/>
-        </p:nvSpPr>
-        <p:spPr>
-          <a:xfrm xmlns:a="http://schemas.openxmlformats.org/drawingml/2006/main">
-            <a:off x="4638675" y="4857750"/>
-            <a:ext cx="2286000" cy="361950"/>
-          </a:xfrm>
-          <a:prstGeom xmlns:a="http://schemas.openxmlformats.org/drawingml/2006/main" prst="rect">
-            <a:avLst/>
-          </a:prstGeom>
-          <a:noFill xmlns:a="http://schemas.openxmlformats.org/drawingml/2006/main"/>
-          <a:ln xmlns:a="http://schemas.openxmlformats.org/drawingml/2006/main" w="0">
-            <a:noFill/>
-            <a:prstDash val="solid"/>
-          </a:ln>
-        </p:spPr>
-        <p:txBody>
-          <a:bodyPr xmlns:a="http://schemas.openxmlformats.org/drawingml/2006/main"/>
-          <a:lstStyle xmlns:a="http://schemas.openxmlformats.org/drawingml/2006/main"/>
-          <a:p xmlns:a="http://schemas.openxmlformats.org/drawingml/2006/main">
-            <a:pPr algn="ctr">
-              <a:buNone/>
-              <a:defRPr sz="1500" b="1">
-                <a:solidFill>
-                  <a:srgbClr val="111827"/>
-                </a:solidFill>
-              </a:defRPr>
-            </a:pPr>
-            <a:r>
-              <a:rPr sz="1500" b="1">
-                <a:solidFill>
-                  <a:srgbClr val="111827"/>
-                </a:solidFill>
-              </a:rPr>
-              <a:t>分离真实根因</a:t>
-            </a:r>
-          </a:p>
-        </p:txBody>
-      </p:sp>
-      <p:sp>
-        <p:nvSpPr>
-          <p:cNvPr id="28" name="step-body-5">
-            <a:extLst xmlns:a="http://schemas.openxmlformats.org/drawingml/2006/main">
-              <a:ext uri="{FF2B5EF4-FFF2-40B4-BE49-F238E27FC236}">
-                <a16:creationId xmlns:a16="http://schemas.microsoft.com/office/drawing/2014/main" id="{6A2887F8-74C4-4104-8D6A-242A585D4AA6}"/>
-              </a:ext>
-            </a:extLst>
-          </p:cNvPr>
-          <p:cNvSpPr>
-            <a:spLocks xmlns:a="http://schemas.openxmlformats.org/drawingml/2006/main" noGrp="1"/>
-          </p:cNvSpPr>
-          <p:nvPr/>
-        </p:nvSpPr>
-        <p:spPr>
-          <a:xfrm xmlns:a="http://schemas.openxmlformats.org/drawingml/2006/main">
-            <a:off x="4543425" y="5276850"/>
-            <a:ext cx="2476500" cy="400050"/>
-          </a:xfrm>
-          <a:prstGeom xmlns:a="http://schemas.openxmlformats.org/drawingml/2006/main" prst="rect">
-            <a:avLst/>
-          </a:prstGeom>
-          <a:noFill xmlns:a="http://schemas.openxmlformats.org/drawingml/2006/main"/>
-          <a:ln xmlns:a="http://schemas.openxmlformats.org/drawingml/2006/main" w="0">
-            <a:noFill/>
-            <a:prstDash val="solid"/>
-          </a:ln>
-        </p:spPr>
-        <p:txBody>
-          <a:bodyPr xmlns:a="http://schemas.openxmlformats.org/drawingml/2006/main"/>
-          <a:lstStyle xmlns:a="http://schemas.openxmlformats.org/drawingml/2006/main"/>
-          <a:p xmlns:a="http://schemas.openxmlformats.org/drawingml/2006/main">
-            <a:pPr algn="ctr">
-              <a:buNone/>
-              <a:defRPr sz="900">
-                <a:solidFill>
-                  <a:srgbClr val="64748B"/>
-                </a:solidFill>
-              </a:defRPr>
-            </a:pPr>
-            <a:r>
-              <a:rPr sz="900">
-                <a:solidFill>
-                  <a:srgbClr val="64748B"/>
-                </a:solidFill>
-              </a:rPr>
-              <a:t>模型 / SOP / 裁判 / 数据</a:t>
-            </a:r>
-          </a:p>
-        </p:txBody>
-      </p:sp>
-      <p:sp>
-        <p:nvSpPr>
-          <p:cNvPr id="29" name="step-dot-6">
-            <a:extLst xmlns:a="http://schemas.openxmlformats.org/drawingml/2006/main">
-              <a:ext uri="{FF2B5EF4-FFF2-40B4-BE49-F238E27FC236}">
-                <a16:creationId xmlns:a16="http://schemas.microsoft.com/office/drawing/2014/main" id="{23E73DBE-3366-4643-901F-4A27567DF65A}"/>
-              </a:ext>
-            </a:extLst>
-          </p:cNvPr>
-          <p:cNvSpPr>
-            <a:spLocks xmlns:a="http://schemas.openxmlformats.org/drawingml/2006/main" noGrp="1"/>
-          </p:cNvSpPr>
-          <p:nvPr/>
-        </p:nvSpPr>
-        <p:spPr>
-          <a:xfrm xmlns:a="http://schemas.openxmlformats.org/drawingml/2006/main">
-            <a:off x="9267825" y="4095750"/>
-            <a:ext cx="628650" cy="628650"/>
-          </a:xfrm>
-          <a:prstGeom xmlns:a="http://schemas.openxmlformats.org/drawingml/2006/main" prst="ellipse">
-            <a:avLst/>
-          </a:prstGeom>
-          <a:solidFill xmlns:a="http://schemas.openxmlformats.org/drawingml/2006/main">
-            <a:srgbClr val="FFCC00"/>
-          </a:solidFill>
-          <a:ln xmlns:a="http://schemas.openxmlformats.org/drawingml/2006/main" w="9525">
-            <a:solidFill>
-              <a:srgbClr val="FFCC00"/>
-            </a:solidFill>
-            <a:prstDash val="solid"/>
-          </a:ln>
-        </p:spPr>
-      </p:sp>
-      <p:sp>
-        <p:nvSpPr>
-          <p:cNvPr id="30" name="step-n-6">
-            <a:extLst xmlns:a="http://schemas.openxmlformats.org/drawingml/2006/main">
-              <a:ext uri="{FF2B5EF4-FFF2-40B4-BE49-F238E27FC236}">
-                <a16:creationId xmlns:a16="http://schemas.microsoft.com/office/drawing/2014/main" id="{0AF895B3-0C7D-4F4A-AD53-77115BEBA63A}"/>
-              </a:ext>
-            </a:extLst>
-          </p:cNvPr>
-          <p:cNvSpPr>
-            <a:spLocks xmlns:a="http://schemas.openxmlformats.org/drawingml/2006/main" noGrp="1"/>
-          </p:cNvSpPr>
-          <p:nvPr/>
-        </p:nvSpPr>
-        <p:spPr>
-          <a:xfrm xmlns:a="http://schemas.openxmlformats.org/drawingml/2006/main">
-            <a:off x="9267825" y="4152900"/>
-            <a:ext cx="628650" cy="495300"/>
-          </a:xfrm>
-          <a:prstGeom xmlns:a="http://schemas.openxmlformats.org/drawingml/2006/main" prst="rect">
-            <a:avLst/>
-          </a:prstGeom>
-          <a:noFill xmlns:a="http://schemas.openxmlformats.org/drawingml/2006/main"/>
-          <a:ln xmlns:a="http://schemas.openxmlformats.org/drawingml/2006/main" w="0">
-            <a:noFill/>
-            <a:prstDash val="solid"/>
-          </a:ln>
-        </p:spPr>
-        <p:txBody>
-          <a:bodyPr xmlns:a="http://schemas.openxmlformats.org/drawingml/2006/main" anchor="ctr"/>
-          <a:lstStyle xmlns:a="http://schemas.openxmlformats.org/drawingml/2006/main"/>
-          <a:p xmlns:a="http://schemas.openxmlformats.org/drawingml/2006/main">
-            <a:pPr algn="ctr">
-              <a:buNone/>
-              <a:defRPr sz="1350" b="1">
-                <a:solidFill>
-                  <a:srgbClr val="111827"/>
-                </a:solidFill>
-              </a:defRPr>
-            </a:pPr>
-            <a:r>
-              <a:rPr sz="1350" b="1">
-                <a:solidFill>
-                  <a:srgbClr val="111827"/>
-                </a:solidFill>
-              </a:rPr>
-              <a:t>6</a:t>
-            </a:r>
-          </a:p>
-        </p:txBody>
-      </p:sp>
-      <p:sp>
-        <p:nvSpPr>
-          <p:cNvPr id="31" name="step-title-6">
-            <a:extLst xmlns:a="http://schemas.openxmlformats.org/drawingml/2006/main">
-              <a:ext uri="{FF2B5EF4-FFF2-40B4-BE49-F238E27FC236}">
-                <a16:creationId xmlns:a16="http://schemas.microsoft.com/office/drawing/2014/main" id="{52A093D1-21A9-4D21-AA78-5E4C7BFEB39C}"/>
-              </a:ext>
-            </a:extLst>
-          </p:cNvPr>
-          <p:cNvSpPr>
-            <a:spLocks xmlns:a="http://schemas.openxmlformats.org/drawingml/2006/main" noGrp="1"/>
-          </p:cNvSpPr>
-          <p:nvPr/>
-        </p:nvSpPr>
-        <p:spPr>
-          <a:xfrm xmlns:a="http://schemas.openxmlformats.org/drawingml/2006/main">
-            <a:off x="8439150" y="4857750"/>
-            <a:ext cx="2286000" cy="361950"/>
-          </a:xfrm>
-          <a:prstGeom xmlns:a="http://schemas.openxmlformats.org/drawingml/2006/main" prst="rect">
-            <a:avLst/>
-          </a:prstGeom>
-          <a:noFill xmlns:a="http://schemas.openxmlformats.org/drawingml/2006/main"/>
-          <a:ln xmlns:a="http://schemas.openxmlformats.org/drawingml/2006/main" w="0">
-            <a:noFill/>
-            <a:prstDash val="solid"/>
-          </a:ln>
-        </p:spPr>
-        <p:txBody>
-          <a:bodyPr xmlns:a="http://schemas.openxmlformats.org/drawingml/2006/main"/>
-          <a:lstStyle xmlns:a="http://schemas.openxmlformats.org/drawingml/2006/main"/>
-          <a:p xmlns:a="http://schemas.openxmlformats.org/drawingml/2006/main">
-            <a:pPr algn="ctr">
-              <a:buNone/>
-              <a:defRPr sz="1500" b="1">
-                <a:solidFill>
-                  <a:srgbClr val="111827"/>
-                </a:solidFill>
-              </a:defRPr>
-            </a:pPr>
-            <a:r>
-              <a:rPr sz="1500" b="1">
-                <a:solidFill>
-                  <a:srgbClr val="111827"/>
-                </a:solidFill>
-              </a:rPr>
-              <a:t>同尺回归闭环</a:t>
-            </a:r>
-          </a:p>
-        </p:txBody>
-      </p:sp>
-      <p:sp>
-        <p:nvSpPr>
-          <p:cNvPr id="32" name="step-body-6">
-            <a:extLst xmlns:a="http://schemas.openxmlformats.org/drawingml/2006/main">
-              <a:ext uri="{FF2B5EF4-FFF2-40B4-BE49-F238E27FC236}">
-                <a16:creationId xmlns:a16="http://schemas.microsoft.com/office/drawing/2014/main" id="{230A79F8-88BC-4067-BD59-AED39F7BAC2D}"/>
-              </a:ext>
-            </a:extLst>
-          </p:cNvPr>
-          <p:cNvSpPr>
-            <a:spLocks xmlns:a="http://schemas.openxmlformats.org/drawingml/2006/main" noGrp="1"/>
-          </p:cNvSpPr>
-          <p:nvPr/>
-        </p:nvSpPr>
-        <p:spPr>
-          <a:xfrm xmlns:a="http://schemas.openxmlformats.org/drawingml/2006/main">
-            <a:off x="8343900" y="5276850"/>
-            <a:ext cx="2476500" cy="400050"/>
-          </a:xfrm>
-          <a:prstGeom xmlns:a="http://schemas.openxmlformats.org/drawingml/2006/main" prst="rect">
-            <a:avLst/>
-          </a:prstGeom>
-          <a:noFill xmlns:a="http://schemas.openxmlformats.org/drawingml/2006/main"/>
-          <a:ln xmlns:a="http://schemas.openxmlformats.org/drawingml/2006/main" w="0">
-            <a:noFill/>
-            <a:prstDash val="solid"/>
-          </a:ln>
-        </p:spPr>
-        <p:txBody>
-          <a:bodyPr xmlns:a="http://schemas.openxmlformats.org/drawingml/2006/main"/>
-          <a:lstStyle xmlns:a="http://schemas.openxmlformats.org/drawingml/2006/main"/>
-          <a:p xmlns:a="http://schemas.openxmlformats.org/drawingml/2006/main">
-            <a:pPr algn="ctr">
-              <a:buNone/>
-              <a:defRPr sz="900">
-                <a:solidFill>
-                  <a:srgbClr val="64748B"/>
-                </a:solidFill>
-              </a:defRPr>
-            </a:pPr>
-            <a:r>
-              <a:rPr sz="900">
-                <a:solidFill>
-                  <a:srgbClr val="64748B"/>
-                </a:solidFill>
-              </a:rPr>
-              <a:t>只改责任对象，再测一次</a:t>
-            </a:r>
-          </a:p>
-        </p:txBody>
-      </p:sp>
-      <p:sp>
-        <p:nvSpPr>
           <p:cNvPr id="33" name="live-demo-link-1">
             <a:extLst xmlns:a="http://schemas.openxmlformats.org/drawingml/2006/main">
               <a:ext uri="{FF2B5EF4-FFF2-40B4-BE49-F238E27FC236}">
@@ -5525,7 +3948,7 @@
                 <a:latin typeface="PingFang SC"/>
                 <a:ea typeface="PingFang SC"/>
                 <a:cs typeface="PingFang SC"/>
-                <a:hlinkClick xmlns:r="http://schemas.openxmlformats.org/officeDocument/2006/relationships" r:id="R3352234bac2c4730"/>
+                <a:hlinkClick xmlns:r="http://schemas.openxmlformats.org/officeDocument/2006/relationships" r:id="R03820dcd81b74ead"/>
               </a:rPr>
               <a:t>▶ 在线 Demo</a:t>
             </a:r>
@@ -5577,9 +4000,1580 @@
                 <a:latin typeface="PingFang SC"/>
                 <a:ea typeface="PingFang SC"/>
                 <a:cs typeface="PingFang SC"/>
-                <a:hlinkClick xmlns:r="http://schemas.openxmlformats.org/officeDocument/2006/relationships" r:id="Re1b8640b4fd648ce"/>
+                <a:hlinkClick xmlns:r="http://schemas.openxmlformats.org/officeDocument/2006/relationships" r:id="R4914a3298ce74a05"/>
               </a:rPr>
               <a:t>结果备份 ↗</a:t>
+            </a:r>
+          </a:p>
+        </p:txBody>
+      </p:sp>
+      <p:sp>
+        <p:nvSpPr>
+          <p:cNvPr id="35" name="kicker">
+            <a:extLst xmlns:a="http://schemas.openxmlformats.org/drawingml/2006/main">
+              <a:ext uri="{FF2B5EF4-FFF2-40B4-BE49-F238E27FC236}">
+                <a16:creationId xmlns:a16="http://schemas.microsoft.com/office/drawing/2014/main" id="{E4EA4601-0682-4B94-A3C5-0C99A0C704C9}"/>
+              </a:ext>
+            </a:extLst>
+          </p:cNvPr>
+          <p:cNvSpPr>
+            <a:spLocks xmlns:a="http://schemas.openxmlformats.org/drawingml/2006/main" noGrp="1"/>
+          </p:cNvSpPr>
+          <p:nvPr/>
+        </p:nvSpPr>
+        <p:spPr>
+          <a:xfrm xmlns:a="http://schemas.openxmlformats.org/drawingml/2006/main">
+            <a:off x="533400" y="285750"/>
+            <a:ext cx="4762500" cy="238125"/>
+          </a:xfrm>
+          <a:prstGeom xmlns:a="http://schemas.openxmlformats.org/drawingml/2006/main" prst="rect">
+            <a:avLst/>
+          </a:prstGeom>
+          <a:noFill xmlns:a="http://schemas.openxmlformats.org/drawingml/2006/main"/>
+          <a:ln xmlns:a="http://schemas.openxmlformats.org/drawingml/2006/main" w="0">
+            <a:noFill/>
+            <a:prstDash val="solid"/>
+          </a:ln>
+        </p:spPr>
+        <p:txBody>
+          <a:bodyPr xmlns:a="http://schemas.openxmlformats.org/drawingml/2006/main" wrap="square" lIns="0" tIns="0" rIns="0" bIns="0" anchor="ctr">
+            <a:normAutofit fontScale="100000"/>
+          </a:bodyPr>
+          <a:lstStyle xmlns:a="http://schemas.openxmlformats.org/drawingml/2006/main"/>
+          <a:p xmlns:a="http://schemas.openxmlformats.org/drawingml/2006/main">
+            <a:pPr algn="l">
+              <a:defRPr sz="1050" b="1">
+                <a:solidFill>
+                  <a:srgbClr val="6E7A90"/>
+                </a:solidFill>
+              </a:defRPr>
+            </a:pPr>
+            <a:r>
+              <a:rPr sz="1050" b="1">
+                <a:solidFill>
+                  <a:srgbClr val="6E7A90"/>
+                </a:solidFill>
+              </a:rPr>
+              <a:t>EVALCALL · 六步自我评测迭代系统</a:t>
+            </a:r>
+          </a:p>
+        </p:txBody>
+      </p:sp>
+      <p:sp>
+        <p:nvSpPr>
+          <p:cNvPr id="36" name="title">
+            <a:extLst xmlns:a="http://schemas.openxmlformats.org/drawingml/2006/main">
+              <a:ext uri="{FF2B5EF4-FFF2-40B4-BE49-F238E27FC236}">
+                <a16:creationId xmlns:a16="http://schemas.microsoft.com/office/drawing/2014/main" id="{974D7CE7-BF20-4DD4-97A9-44721BC74C7A}"/>
+              </a:ext>
+            </a:extLst>
+          </p:cNvPr>
+          <p:cNvSpPr>
+            <a:spLocks xmlns:a="http://schemas.openxmlformats.org/drawingml/2006/main" noGrp="1"/>
+          </p:cNvSpPr>
+          <p:nvPr/>
+        </p:nvSpPr>
+        <p:spPr>
+          <a:xfrm xmlns:a="http://schemas.openxmlformats.org/drawingml/2006/main">
+            <a:off x="533400" y="647700"/>
+            <a:ext cx="11125200" cy="609600"/>
+          </a:xfrm>
+          <a:prstGeom xmlns:a="http://schemas.openxmlformats.org/drawingml/2006/main" prst="rect">
+            <a:avLst/>
+          </a:prstGeom>
+          <a:noFill xmlns:a="http://schemas.openxmlformats.org/drawingml/2006/main"/>
+          <a:ln xmlns:a="http://schemas.openxmlformats.org/drawingml/2006/main" w="0">
+            <a:noFill/>
+            <a:prstDash val="solid"/>
+          </a:ln>
+        </p:spPr>
+        <p:txBody>
+          <a:bodyPr xmlns:a="http://schemas.openxmlformats.org/drawingml/2006/main" wrap="square" lIns="0" tIns="0" rIns="0" bIns="0" anchor="ctr">
+            <a:normAutofit fontScale="100000"/>
+          </a:bodyPr>
+          <a:lstStyle xmlns:a="http://schemas.openxmlformats.org/drawingml/2006/main"/>
+          <a:p xmlns:a="http://schemas.openxmlformats.org/drawingml/2006/main">
+            <a:pPr algn="l">
+              <a:defRPr sz="2850" b="1">
+                <a:solidFill>
+                  <a:srgbClr val="111C31"/>
+                </a:solidFill>
+              </a:defRPr>
+            </a:pPr>
+            <a:r>
+              <a:rPr sz="2850" b="1">
+                <a:solidFill>
+                  <a:srgbClr val="111C31"/>
+                </a:solidFill>
+              </a:rPr>
+              <a:t>为了解决刚刚出现的问题，设计的六步自我评测迭代系统</a:t>
+            </a:r>
+          </a:p>
+        </p:txBody>
+      </p:sp>
+      <p:sp>
+        <p:nvSpPr>
+          <p:cNvPr id="37" name="title-rule">
+            <a:extLst xmlns:a="http://schemas.openxmlformats.org/drawingml/2006/main">
+              <a:ext uri="{FF2B5EF4-FFF2-40B4-BE49-F238E27FC236}">
+                <a16:creationId xmlns:a16="http://schemas.microsoft.com/office/drawing/2014/main" id="{98E0F8BE-E8DF-45A7-B8AB-B7C7F2D96016}"/>
+              </a:ext>
+            </a:extLst>
+          </p:cNvPr>
+          <p:cNvSpPr>
+            <a:spLocks xmlns:a="http://schemas.openxmlformats.org/drawingml/2006/main" noGrp="1"/>
+          </p:cNvSpPr>
+          <p:nvPr/>
+        </p:nvSpPr>
+        <p:spPr>
+          <a:xfrm xmlns:a="http://schemas.openxmlformats.org/drawingml/2006/main">
+            <a:off x="533400" y="1381125"/>
+            <a:ext cx="11125200" cy="19050"/>
+          </a:xfrm>
+          <a:prstGeom xmlns:a="http://schemas.openxmlformats.org/drawingml/2006/main" prst="rect">
+            <a:avLst/>
+          </a:prstGeom>
+          <a:solidFill xmlns:a="http://schemas.openxmlformats.org/drawingml/2006/main">
+            <a:srgbClr val="111C31"/>
+          </a:solidFill>
+          <a:ln xmlns:a="http://schemas.openxmlformats.org/drawingml/2006/main" w="0">
+            <a:noFill/>
+            <a:prstDash val="solid"/>
+          </a:ln>
+        </p:spPr>
+      </p:sp>
+      <p:sp>
+        <p:nvSpPr>
+          <p:cNvPr id="38" name="arrow-1-2">
+            <a:extLst xmlns:a="http://schemas.openxmlformats.org/drawingml/2006/main">
+              <a:ext uri="{FF2B5EF4-FFF2-40B4-BE49-F238E27FC236}">
+                <a16:creationId xmlns:a16="http://schemas.microsoft.com/office/drawing/2014/main" id="{E1D9927E-5286-4280-B4D5-F405C2690A26}"/>
+              </a:ext>
+            </a:extLst>
+          </p:cNvPr>
+          <p:cNvSpPr>
+            <a:spLocks xmlns:a="http://schemas.openxmlformats.org/drawingml/2006/main" noGrp="1"/>
+          </p:cNvSpPr>
+          <p:nvPr/>
+        </p:nvSpPr>
+        <p:spPr>
+          <a:xfrm xmlns:a="http://schemas.openxmlformats.org/drawingml/2006/main">
+            <a:off x="2724150" y="2343150"/>
+            <a:ext cx="2457450" cy="171450"/>
+          </a:xfrm>
+          <a:prstGeom xmlns:a="http://schemas.openxmlformats.org/drawingml/2006/main" prst="rightArrow">
+            <a:avLst/>
+          </a:prstGeom>
+          <a:solidFill xmlns:a="http://schemas.openxmlformats.org/drawingml/2006/main">
+            <a:srgbClr val="FFF4BD"/>
+          </a:solidFill>
+          <a:ln xmlns:a="http://schemas.openxmlformats.org/drawingml/2006/main" w="0">
+            <a:noFill/>
+            <a:prstDash val="solid"/>
+          </a:ln>
+        </p:spPr>
+      </p:sp>
+      <p:sp>
+        <p:nvSpPr>
+          <p:cNvPr id="39" name="arrow-2-3">
+            <a:extLst xmlns:a="http://schemas.openxmlformats.org/drawingml/2006/main">
+              <a:ext uri="{FF2B5EF4-FFF2-40B4-BE49-F238E27FC236}">
+                <a16:creationId xmlns:a16="http://schemas.microsoft.com/office/drawing/2014/main" id="{8AC199E6-39C1-4A20-B37E-692666FEB0E0}"/>
+              </a:ext>
+            </a:extLst>
+          </p:cNvPr>
+          <p:cNvSpPr>
+            <a:spLocks xmlns:a="http://schemas.openxmlformats.org/drawingml/2006/main" noGrp="1"/>
+          </p:cNvSpPr>
+          <p:nvPr/>
+        </p:nvSpPr>
+        <p:spPr>
+          <a:xfrm xmlns:a="http://schemas.openxmlformats.org/drawingml/2006/main">
+            <a:off x="6724650" y="2343150"/>
+            <a:ext cx="2457450" cy="171450"/>
+          </a:xfrm>
+          <a:prstGeom xmlns:a="http://schemas.openxmlformats.org/drawingml/2006/main" prst="rightArrow">
+            <a:avLst/>
+          </a:prstGeom>
+          <a:solidFill xmlns:a="http://schemas.openxmlformats.org/drawingml/2006/main">
+            <a:srgbClr val="FFF4BD"/>
+          </a:solidFill>
+          <a:ln xmlns:a="http://schemas.openxmlformats.org/drawingml/2006/main" w="0">
+            <a:noFill/>
+            <a:prstDash val="solid"/>
+          </a:ln>
+        </p:spPr>
+      </p:sp>
+      <p:sp>
+        <p:nvSpPr>
+          <p:cNvPr id="40" name="arrow-3-4">
+            <a:extLst xmlns:a="http://schemas.openxmlformats.org/drawingml/2006/main">
+              <a:ext uri="{FF2B5EF4-FFF2-40B4-BE49-F238E27FC236}">
+                <a16:creationId xmlns:a16="http://schemas.microsoft.com/office/drawing/2014/main" id="{DFA1DE85-0313-496F-AA0D-57A447733D87}"/>
+              </a:ext>
+            </a:extLst>
+          </p:cNvPr>
+          <p:cNvSpPr>
+            <a:spLocks xmlns:a="http://schemas.openxmlformats.org/drawingml/2006/main" noGrp="1"/>
+          </p:cNvSpPr>
+          <p:nvPr/>
+        </p:nvSpPr>
+        <p:spPr>
+          <a:xfrm xmlns:a="http://schemas.openxmlformats.org/drawingml/2006/main">
+            <a:off x="9791700" y="3086100"/>
+            <a:ext cx="228600" cy="590550"/>
+          </a:xfrm>
+          <a:prstGeom xmlns:a="http://schemas.openxmlformats.org/drawingml/2006/main" prst="downArrow">
+            <a:avLst/>
+          </a:prstGeom>
+          <a:solidFill xmlns:a="http://schemas.openxmlformats.org/drawingml/2006/main">
+            <a:srgbClr val="FFF4BD"/>
+          </a:solidFill>
+          <a:ln xmlns:a="http://schemas.openxmlformats.org/drawingml/2006/main" w="0">
+            <a:noFill/>
+            <a:prstDash val="solid"/>
+          </a:ln>
+        </p:spPr>
+      </p:sp>
+      <p:sp>
+        <p:nvSpPr>
+          <p:cNvPr id="41" name="arrow-4-5">
+            <a:extLst xmlns:a="http://schemas.openxmlformats.org/drawingml/2006/main">
+              <a:ext uri="{FF2B5EF4-FFF2-40B4-BE49-F238E27FC236}">
+                <a16:creationId xmlns:a16="http://schemas.microsoft.com/office/drawing/2014/main" id="{3501520E-4E46-4E67-B560-77F095EE6B32}"/>
+              </a:ext>
+            </a:extLst>
+          </p:cNvPr>
+          <p:cNvSpPr>
+            <a:spLocks xmlns:a="http://schemas.openxmlformats.org/drawingml/2006/main" noGrp="1"/>
+          </p:cNvSpPr>
+          <p:nvPr/>
+        </p:nvSpPr>
+        <p:spPr>
+          <a:xfrm xmlns:a="http://schemas.openxmlformats.org/drawingml/2006/main">
+            <a:off x="6724650" y="4286250"/>
+            <a:ext cx="2457450" cy="171450"/>
+          </a:xfrm>
+          <a:prstGeom xmlns:a="http://schemas.openxmlformats.org/drawingml/2006/main" prst="leftArrow">
+            <a:avLst/>
+          </a:prstGeom>
+          <a:solidFill xmlns:a="http://schemas.openxmlformats.org/drawingml/2006/main">
+            <a:srgbClr val="FFF4BD"/>
+          </a:solidFill>
+          <a:ln xmlns:a="http://schemas.openxmlformats.org/drawingml/2006/main" w="0">
+            <a:noFill/>
+            <a:prstDash val="solid"/>
+          </a:ln>
+        </p:spPr>
+      </p:sp>
+      <p:sp>
+        <p:nvSpPr>
+          <p:cNvPr id="42" name="arrow-5-6">
+            <a:extLst xmlns:a="http://schemas.openxmlformats.org/drawingml/2006/main">
+              <a:ext uri="{FF2B5EF4-FFF2-40B4-BE49-F238E27FC236}">
+                <a16:creationId xmlns:a16="http://schemas.microsoft.com/office/drawing/2014/main" id="{7D0EB317-95CE-419F-BBD8-98F655EEAE8B}"/>
+              </a:ext>
+            </a:extLst>
+          </p:cNvPr>
+          <p:cNvSpPr>
+            <a:spLocks xmlns:a="http://schemas.openxmlformats.org/drawingml/2006/main" noGrp="1"/>
+          </p:cNvSpPr>
+          <p:nvPr/>
+        </p:nvSpPr>
+        <p:spPr>
+          <a:xfrm xmlns:a="http://schemas.openxmlformats.org/drawingml/2006/main">
+            <a:off x="2724150" y="4286250"/>
+            <a:ext cx="2457450" cy="171450"/>
+          </a:xfrm>
+          <a:prstGeom xmlns:a="http://schemas.openxmlformats.org/drawingml/2006/main" prst="leftArrow">
+            <a:avLst/>
+          </a:prstGeom>
+          <a:solidFill xmlns:a="http://schemas.openxmlformats.org/drawingml/2006/main">
+            <a:srgbClr val="FFF4BD"/>
+          </a:solidFill>
+          <a:ln xmlns:a="http://schemas.openxmlformats.org/drawingml/2006/main" w="0">
+            <a:noFill/>
+            <a:prstDash val="solid"/>
+          </a:ln>
+        </p:spPr>
+      </p:sp>
+      <p:sp>
+        <p:nvSpPr>
+          <p:cNvPr id="43" name="label-1-2">
+            <a:extLst xmlns:a="http://schemas.openxmlformats.org/drawingml/2006/main">
+              <a:ext uri="{FF2B5EF4-FFF2-40B4-BE49-F238E27FC236}">
+                <a16:creationId xmlns:a16="http://schemas.microsoft.com/office/drawing/2014/main" id="{01C69AAF-2342-4C4D-A361-FB6E16CAE35F}"/>
+              </a:ext>
+            </a:extLst>
+          </p:cNvPr>
+          <p:cNvSpPr>
+            <a:spLocks xmlns:a="http://schemas.openxmlformats.org/drawingml/2006/main" noGrp="1"/>
+          </p:cNvSpPr>
+          <p:nvPr/>
+        </p:nvSpPr>
+        <p:spPr>
+          <a:xfrm xmlns:a="http://schemas.openxmlformats.org/drawingml/2006/main">
+            <a:off x="3162300" y="2057400"/>
+            <a:ext cx="1619250" cy="228600"/>
+          </a:xfrm>
+          <a:prstGeom xmlns:a="http://schemas.openxmlformats.org/drawingml/2006/main" prst="rect">
+            <a:avLst/>
+          </a:prstGeom>
+          <a:noFill xmlns:a="http://schemas.openxmlformats.org/drawingml/2006/main"/>
+          <a:ln xmlns:a="http://schemas.openxmlformats.org/drawingml/2006/main" w="0">
+            <a:noFill/>
+            <a:prstDash val="solid"/>
+          </a:ln>
+        </p:spPr>
+        <p:txBody>
+          <a:bodyPr xmlns:a="http://schemas.openxmlformats.org/drawingml/2006/main" wrap="square" lIns="0" tIns="0" rIns="0" bIns="0" anchor="ctr">
+            <a:normAutofit fontScale="100000"/>
+          </a:bodyPr>
+          <a:lstStyle xmlns:a="http://schemas.openxmlformats.org/drawingml/2006/main"/>
+          <a:p xmlns:a="http://schemas.openxmlformats.org/drawingml/2006/main">
+            <a:pPr algn="ctr">
+              <a:defRPr sz="975" b="1">
+                <a:solidFill>
+                  <a:srgbClr val="6E7A90"/>
+                </a:solidFill>
+              </a:defRPr>
+            </a:pPr>
+            <a:r>
+              <a:rPr sz="975" b="1">
+                <a:solidFill>
+                  <a:srgbClr val="6E7A90"/>
+                </a:solidFill>
+              </a:rPr>
+              <a:t>冻结输入与版本</a:t>
+            </a:r>
+          </a:p>
+        </p:txBody>
+      </p:sp>
+      <p:sp>
+        <p:nvSpPr>
+          <p:cNvPr id="44" name="label-2-3">
+            <a:extLst xmlns:a="http://schemas.openxmlformats.org/drawingml/2006/main">
+              <a:ext uri="{FF2B5EF4-FFF2-40B4-BE49-F238E27FC236}">
+                <a16:creationId xmlns:a16="http://schemas.microsoft.com/office/drawing/2014/main" id="{602ACFEE-7594-43A0-8850-CEE34E2F50FB}"/>
+              </a:ext>
+            </a:extLst>
+          </p:cNvPr>
+          <p:cNvSpPr>
+            <a:spLocks xmlns:a="http://schemas.openxmlformats.org/drawingml/2006/main" noGrp="1"/>
+          </p:cNvSpPr>
+          <p:nvPr/>
+        </p:nvSpPr>
+        <p:spPr>
+          <a:xfrm xmlns:a="http://schemas.openxmlformats.org/drawingml/2006/main">
+            <a:off x="7124700" y="2057400"/>
+            <a:ext cx="1714500" cy="228600"/>
+          </a:xfrm>
+          <a:prstGeom xmlns:a="http://schemas.openxmlformats.org/drawingml/2006/main" prst="rect">
+            <a:avLst/>
+          </a:prstGeom>
+          <a:noFill xmlns:a="http://schemas.openxmlformats.org/drawingml/2006/main"/>
+          <a:ln xmlns:a="http://schemas.openxmlformats.org/drawingml/2006/main" w="0">
+            <a:noFill/>
+            <a:prstDash val="solid"/>
+          </a:ln>
+        </p:spPr>
+        <p:txBody>
+          <a:bodyPr xmlns:a="http://schemas.openxmlformats.org/drawingml/2006/main" wrap="square" lIns="0" tIns="0" rIns="0" bIns="0" anchor="ctr">
+            <a:normAutofit fontScale="100000"/>
+          </a:bodyPr>
+          <a:lstStyle xmlns:a="http://schemas.openxmlformats.org/drawingml/2006/main"/>
+          <a:p xmlns:a="http://schemas.openxmlformats.org/drawingml/2006/main">
+            <a:pPr algn="ctr">
+              <a:defRPr sz="975" b="1">
+                <a:solidFill>
+                  <a:srgbClr val="6E7A90"/>
+                </a:solidFill>
+              </a:defRPr>
+            </a:pPr>
+            <a:r>
+              <a:rPr sz="975" b="1">
+                <a:solidFill>
+                  <a:srgbClr val="6E7A90"/>
+                </a:solidFill>
+              </a:rPr>
+              <a:t>编译成统一评分尺</a:t>
+            </a:r>
+          </a:p>
+        </p:txBody>
+      </p:sp>
+      <p:sp>
+        <p:nvSpPr>
+          <p:cNvPr id="45" name="label-3-4">
+            <a:extLst xmlns:a="http://schemas.openxmlformats.org/drawingml/2006/main">
+              <a:ext uri="{FF2B5EF4-FFF2-40B4-BE49-F238E27FC236}">
+                <a16:creationId xmlns:a16="http://schemas.microsoft.com/office/drawing/2014/main" id="{923FFD88-016C-4C7E-A581-3A49DC3EA7CE}"/>
+              </a:ext>
+            </a:extLst>
+          </p:cNvPr>
+          <p:cNvSpPr>
+            <a:spLocks xmlns:a="http://schemas.openxmlformats.org/drawingml/2006/main" noGrp="1"/>
+          </p:cNvSpPr>
+          <p:nvPr/>
+        </p:nvSpPr>
+        <p:spPr>
+          <a:xfrm xmlns:a="http://schemas.openxmlformats.org/drawingml/2006/main">
+            <a:off x="10077450" y="3219450"/>
+            <a:ext cx="1428750" cy="266700"/>
+          </a:xfrm>
+          <a:prstGeom xmlns:a="http://schemas.openxmlformats.org/drawingml/2006/main" prst="rect">
+            <a:avLst/>
+          </a:prstGeom>
+          <a:noFill xmlns:a="http://schemas.openxmlformats.org/drawingml/2006/main"/>
+          <a:ln xmlns:a="http://schemas.openxmlformats.org/drawingml/2006/main" w="0">
+            <a:noFill/>
+            <a:prstDash val="solid"/>
+          </a:ln>
+        </p:spPr>
+        <p:txBody>
+          <a:bodyPr xmlns:a="http://schemas.openxmlformats.org/drawingml/2006/main" wrap="square" lIns="0" tIns="0" rIns="0" bIns="0" anchor="ctr">
+            <a:normAutofit fontScale="100000"/>
+          </a:bodyPr>
+          <a:lstStyle xmlns:a="http://schemas.openxmlformats.org/drawingml/2006/main"/>
+          <a:p xmlns:a="http://schemas.openxmlformats.org/drawingml/2006/main">
+            <a:pPr algn="l">
+              <a:defRPr sz="975" b="1">
+                <a:solidFill>
+                  <a:srgbClr val="6E7A90"/>
+                </a:solidFill>
+              </a:defRPr>
+            </a:pPr>
+            <a:r>
+              <a:rPr sz="975" b="1">
+                <a:solidFill>
+                  <a:srgbClr val="6E7A90"/>
+                </a:solidFill>
+              </a:rPr>
+              <a:t>生成 / 导入对话</a:t>
+            </a:r>
+          </a:p>
+        </p:txBody>
+      </p:sp>
+      <p:sp>
+        <p:nvSpPr>
+          <p:cNvPr id="46" name="label-4-5">
+            <a:extLst xmlns:a="http://schemas.openxmlformats.org/drawingml/2006/main">
+              <a:ext uri="{FF2B5EF4-FFF2-40B4-BE49-F238E27FC236}">
+                <a16:creationId xmlns:a16="http://schemas.microsoft.com/office/drawing/2014/main" id="{BC28B85B-EDD5-4CDC-93B3-5AC2FDEFEF88}"/>
+              </a:ext>
+            </a:extLst>
+          </p:cNvPr>
+          <p:cNvSpPr>
+            <a:spLocks xmlns:a="http://schemas.openxmlformats.org/drawingml/2006/main" noGrp="1"/>
+          </p:cNvSpPr>
+          <p:nvPr/>
+        </p:nvSpPr>
+        <p:spPr>
+          <a:xfrm xmlns:a="http://schemas.openxmlformats.org/drawingml/2006/main">
+            <a:off x="7124700" y="4552950"/>
+            <a:ext cx="1714500" cy="228600"/>
+          </a:xfrm>
+          <a:prstGeom xmlns:a="http://schemas.openxmlformats.org/drawingml/2006/main" prst="rect">
+            <a:avLst/>
+          </a:prstGeom>
+          <a:noFill xmlns:a="http://schemas.openxmlformats.org/drawingml/2006/main"/>
+          <a:ln xmlns:a="http://schemas.openxmlformats.org/drawingml/2006/main" w="0">
+            <a:noFill/>
+            <a:prstDash val="solid"/>
+          </a:ln>
+        </p:spPr>
+        <p:txBody>
+          <a:bodyPr xmlns:a="http://schemas.openxmlformats.org/drawingml/2006/main" wrap="square" lIns="0" tIns="0" rIns="0" bIns="0" anchor="ctr">
+            <a:normAutofit fontScale="100000"/>
+          </a:bodyPr>
+          <a:lstStyle xmlns:a="http://schemas.openxmlformats.org/drawingml/2006/main"/>
+          <a:p xmlns:a="http://schemas.openxmlformats.org/drawingml/2006/main">
+            <a:pPr algn="ctr">
+              <a:defRPr sz="975" b="1">
+                <a:solidFill>
+                  <a:srgbClr val="6E7A90"/>
+                </a:solidFill>
+              </a:defRPr>
+            </a:pPr>
+            <a:r>
+              <a:rPr sz="975" b="1">
+                <a:solidFill>
+                  <a:srgbClr val="6E7A90"/>
+                </a:solidFill>
+              </a:rPr>
+              <a:t>汇总门禁与证据</a:t>
+            </a:r>
+          </a:p>
+        </p:txBody>
+      </p:sp>
+      <p:sp>
+        <p:nvSpPr>
+          <p:cNvPr id="47" name="label-5-6">
+            <a:extLst xmlns:a="http://schemas.openxmlformats.org/drawingml/2006/main">
+              <a:ext uri="{FF2B5EF4-FFF2-40B4-BE49-F238E27FC236}">
+                <a16:creationId xmlns:a16="http://schemas.microsoft.com/office/drawing/2014/main" id="{F6E88536-54A3-4B0E-89D8-D1C7E91E4EA1}"/>
+              </a:ext>
+            </a:extLst>
+          </p:cNvPr>
+          <p:cNvSpPr>
+            <a:spLocks xmlns:a="http://schemas.openxmlformats.org/drawingml/2006/main" noGrp="1"/>
+          </p:cNvSpPr>
+          <p:nvPr/>
+        </p:nvSpPr>
+        <p:spPr>
+          <a:xfrm xmlns:a="http://schemas.openxmlformats.org/drawingml/2006/main">
+            <a:off x="3086100" y="4552950"/>
+            <a:ext cx="1809750" cy="228600"/>
+          </a:xfrm>
+          <a:prstGeom xmlns:a="http://schemas.openxmlformats.org/drawingml/2006/main" prst="rect">
+            <a:avLst/>
+          </a:prstGeom>
+          <a:noFill xmlns:a="http://schemas.openxmlformats.org/drawingml/2006/main"/>
+          <a:ln xmlns:a="http://schemas.openxmlformats.org/drawingml/2006/main" w="0">
+            <a:noFill/>
+            <a:prstDash val="solid"/>
+          </a:ln>
+        </p:spPr>
+        <p:txBody>
+          <a:bodyPr xmlns:a="http://schemas.openxmlformats.org/drawingml/2006/main" wrap="square" lIns="0" tIns="0" rIns="0" bIns="0" anchor="ctr">
+            <a:normAutofit fontScale="100000"/>
+          </a:bodyPr>
+          <a:lstStyle xmlns:a="http://schemas.openxmlformats.org/drawingml/2006/main"/>
+          <a:p xmlns:a="http://schemas.openxmlformats.org/drawingml/2006/main">
+            <a:pPr algn="ctr">
+              <a:defRPr sz="975" b="1">
+                <a:solidFill>
+                  <a:srgbClr val="6E7A90"/>
+                </a:solidFill>
+              </a:defRPr>
+            </a:pPr>
+            <a:r>
+              <a:rPr sz="975" b="1">
+                <a:solidFill>
+                  <a:srgbClr val="6E7A90"/>
+                </a:solidFill>
+              </a:rPr>
+              <a:t>比较信号，定位责任</a:t>
+            </a:r>
+          </a:p>
+        </p:txBody>
+      </p:sp>
+      <p:sp>
+        <p:nvSpPr>
+          <p:cNvPr id="48" name="node-1">
+            <a:extLst xmlns:a="http://schemas.openxmlformats.org/drawingml/2006/main">
+              <a:ext uri="{FF2B5EF4-FFF2-40B4-BE49-F238E27FC236}">
+                <a16:creationId xmlns:a16="http://schemas.microsoft.com/office/drawing/2014/main" id="{02382F0B-0C88-4EED-A2BD-FA6EE5352A1D}"/>
+              </a:ext>
+            </a:extLst>
+          </p:cNvPr>
+          <p:cNvSpPr>
+            <a:spLocks xmlns:a="http://schemas.openxmlformats.org/drawingml/2006/main" noGrp="1"/>
+          </p:cNvSpPr>
+          <p:nvPr/>
+        </p:nvSpPr>
+        <p:spPr>
+          <a:xfrm xmlns:a="http://schemas.openxmlformats.org/drawingml/2006/main">
+            <a:off x="1790700" y="2133600"/>
+            <a:ext cx="609600" cy="609600"/>
+          </a:xfrm>
+          <a:prstGeom xmlns:a="http://schemas.openxmlformats.org/drawingml/2006/main" prst="roundRect">
+            <a:avLst>
+              <a:gd name="adj" fmla="val 28125"/>
+            </a:avLst>
+          </a:prstGeom>
+          <a:solidFill xmlns:a="http://schemas.openxmlformats.org/drawingml/2006/main">
+            <a:srgbClr val="111C31"/>
+          </a:solidFill>
+          <a:ln xmlns:a="http://schemas.openxmlformats.org/drawingml/2006/main" w="0">
+            <a:noFill/>
+            <a:prstDash val="solid"/>
+          </a:ln>
+        </p:spPr>
+      </p:sp>
+      <p:sp>
+        <p:nvSpPr>
+          <p:cNvPr id="49" name="node-number-1">
+            <a:extLst xmlns:a="http://schemas.openxmlformats.org/drawingml/2006/main">
+              <a:ext uri="{FF2B5EF4-FFF2-40B4-BE49-F238E27FC236}">
+                <a16:creationId xmlns:a16="http://schemas.microsoft.com/office/drawing/2014/main" id="{DD2D366C-3862-4AE8-9D66-FB892F55B8AA}"/>
+              </a:ext>
+            </a:extLst>
+          </p:cNvPr>
+          <p:cNvSpPr>
+            <a:spLocks xmlns:a="http://schemas.openxmlformats.org/drawingml/2006/main" noGrp="1"/>
+          </p:cNvSpPr>
+          <p:nvPr/>
+        </p:nvSpPr>
+        <p:spPr>
+          <a:xfrm xmlns:a="http://schemas.openxmlformats.org/drawingml/2006/main">
+            <a:off x="1790700" y="2133600"/>
+            <a:ext cx="609600" cy="609600"/>
+          </a:xfrm>
+          <a:prstGeom xmlns:a="http://schemas.openxmlformats.org/drawingml/2006/main" prst="rect">
+            <a:avLst/>
+          </a:prstGeom>
+          <a:noFill xmlns:a="http://schemas.openxmlformats.org/drawingml/2006/main"/>
+          <a:ln xmlns:a="http://schemas.openxmlformats.org/drawingml/2006/main" w="0">
+            <a:noFill/>
+            <a:prstDash val="solid"/>
+          </a:ln>
+        </p:spPr>
+        <p:txBody>
+          <a:bodyPr xmlns:a="http://schemas.openxmlformats.org/drawingml/2006/main" wrap="square" lIns="0" tIns="0" rIns="0" bIns="0" anchor="ctr">
+            <a:normAutofit fontScale="100000"/>
+          </a:bodyPr>
+          <a:lstStyle xmlns:a="http://schemas.openxmlformats.org/drawingml/2006/main"/>
+          <a:p xmlns:a="http://schemas.openxmlformats.org/drawingml/2006/main">
+            <a:pPr algn="ctr">
+              <a:defRPr sz="1950" b="1">
+                <a:solidFill>
+                  <a:srgbClr val="FFFFFF"/>
+                </a:solidFill>
+              </a:defRPr>
+            </a:pPr>
+            <a:r>
+              <a:rPr sz="1950" b="1">
+                <a:solidFill>
+                  <a:srgbClr val="FFFFFF"/>
+                </a:solidFill>
+              </a:rPr>
+              <a:t>1</a:t>
+            </a:r>
+          </a:p>
+        </p:txBody>
+      </p:sp>
+      <p:sp>
+        <p:nvSpPr>
+          <p:cNvPr id="50" name="node-title-1">
+            <a:extLst xmlns:a="http://schemas.openxmlformats.org/drawingml/2006/main">
+              <a:ext uri="{FF2B5EF4-FFF2-40B4-BE49-F238E27FC236}">
+                <a16:creationId xmlns:a16="http://schemas.microsoft.com/office/drawing/2014/main" id="{11CF5C54-AB5E-4306-AAF8-F464B1A8603B}"/>
+              </a:ext>
+            </a:extLst>
+          </p:cNvPr>
+          <p:cNvSpPr>
+            <a:spLocks xmlns:a="http://schemas.openxmlformats.org/drawingml/2006/main" noGrp="1"/>
+          </p:cNvSpPr>
+          <p:nvPr/>
+        </p:nvSpPr>
+        <p:spPr>
+          <a:xfrm xmlns:a="http://schemas.openxmlformats.org/drawingml/2006/main">
+            <a:off x="1028700" y="2819400"/>
+            <a:ext cx="2133600" cy="400050"/>
+          </a:xfrm>
+          <a:prstGeom xmlns:a="http://schemas.openxmlformats.org/drawingml/2006/main" prst="rect">
+            <a:avLst/>
+          </a:prstGeom>
+          <a:noFill xmlns:a="http://schemas.openxmlformats.org/drawingml/2006/main"/>
+          <a:ln xmlns:a="http://schemas.openxmlformats.org/drawingml/2006/main" w="0">
+            <a:noFill/>
+            <a:prstDash val="solid"/>
+          </a:ln>
+        </p:spPr>
+        <p:txBody>
+          <a:bodyPr xmlns:a="http://schemas.openxmlformats.org/drawingml/2006/main" wrap="square" lIns="0" tIns="0" rIns="0" bIns="0" anchor="ctr">
+            <a:normAutofit fontScale="100000"/>
+          </a:bodyPr>
+          <a:lstStyle xmlns:a="http://schemas.openxmlformats.org/drawingml/2006/main"/>
+          <a:p xmlns:a="http://schemas.openxmlformats.org/drawingml/2006/main">
+            <a:pPr algn="ctr">
+              <a:defRPr sz="1500" b="1">
+                <a:solidFill>
+                  <a:srgbClr val="111C31"/>
+                </a:solidFill>
+              </a:defRPr>
+            </a:pPr>
+            <a:r>
+              <a:rPr sz="1500" b="1">
+                <a:solidFill>
+                  <a:srgbClr val="111C31"/>
+                </a:solidFill>
+              </a:rPr>
+              <a:t>配置测试任务</a:t>
+            </a:r>
+          </a:p>
+        </p:txBody>
+      </p:sp>
+      <p:sp>
+        <p:nvSpPr>
+          <p:cNvPr id="51" name="node-2">
+            <a:extLst xmlns:a="http://schemas.openxmlformats.org/drawingml/2006/main">
+              <a:ext uri="{FF2B5EF4-FFF2-40B4-BE49-F238E27FC236}">
+                <a16:creationId xmlns:a16="http://schemas.microsoft.com/office/drawing/2014/main" id="{7FD16E6E-FFAB-4B64-8024-291C3229FFF2}"/>
+              </a:ext>
+            </a:extLst>
+          </p:cNvPr>
+          <p:cNvSpPr>
+            <a:spLocks xmlns:a="http://schemas.openxmlformats.org/drawingml/2006/main" noGrp="1"/>
+          </p:cNvSpPr>
+          <p:nvPr/>
+        </p:nvSpPr>
+        <p:spPr>
+          <a:xfrm xmlns:a="http://schemas.openxmlformats.org/drawingml/2006/main">
+            <a:off x="5791200" y="2133600"/>
+            <a:ext cx="609600" cy="609600"/>
+          </a:xfrm>
+          <a:prstGeom xmlns:a="http://schemas.openxmlformats.org/drawingml/2006/main" prst="roundRect">
+            <a:avLst>
+              <a:gd name="adj" fmla="val 28125"/>
+            </a:avLst>
+          </a:prstGeom>
+          <a:solidFill xmlns:a="http://schemas.openxmlformats.org/drawingml/2006/main">
+            <a:srgbClr val="111C31"/>
+          </a:solidFill>
+          <a:ln xmlns:a="http://schemas.openxmlformats.org/drawingml/2006/main" w="0">
+            <a:noFill/>
+            <a:prstDash val="solid"/>
+          </a:ln>
+        </p:spPr>
+      </p:sp>
+      <p:sp>
+        <p:nvSpPr>
+          <p:cNvPr id="52" name="node-number-2">
+            <a:extLst xmlns:a="http://schemas.openxmlformats.org/drawingml/2006/main">
+              <a:ext uri="{FF2B5EF4-FFF2-40B4-BE49-F238E27FC236}">
+                <a16:creationId xmlns:a16="http://schemas.microsoft.com/office/drawing/2014/main" id="{353FAA51-7E37-40A5-92A5-C1DB9A55DB39}"/>
+              </a:ext>
+            </a:extLst>
+          </p:cNvPr>
+          <p:cNvSpPr>
+            <a:spLocks xmlns:a="http://schemas.openxmlformats.org/drawingml/2006/main" noGrp="1"/>
+          </p:cNvSpPr>
+          <p:nvPr/>
+        </p:nvSpPr>
+        <p:spPr>
+          <a:xfrm xmlns:a="http://schemas.openxmlformats.org/drawingml/2006/main">
+            <a:off x="5791200" y="2133600"/>
+            <a:ext cx="609600" cy="609600"/>
+          </a:xfrm>
+          <a:prstGeom xmlns:a="http://schemas.openxmlformats.org/drawingml/2006/main" prst="rect">
+            <a:avLst/>
+          </a:prstGeom>
+          <a:noFill xmlns:a="http://schemas.openxmlformats.org/drawingml/2006/main"/>
+          <a:ln xmlns:a="http://schemas.openxmlformats.org/drawingml/2006/main" w="0">
+            <a:noFill/>
+            <a:prstDash val="solid"/>
+          </a:ln>
+        </p:spPr>
+        <p:txBody>
+          <a:bodyPr xmlns:a="http://schemas.openxmlformats.org/drawingml/2006/main" wrap="square" lIns="0" tIns="0" rIns="0" bIns="0" anchor="ctr">
+            <a:normAutofit fontScale="100000"/>
+          </a:bodyPr>
+          <a:lstStyle xmlns:a="http://schemas.openxmlformats.org/drawingml/2006/main"/>
+          <a:p xmlns:a="http://schemas.openxmlformats.org/drawingml/2006/main">
+            <a:pPr algn="ctr">
+              <a:defRPr sz="1950" b="1">
+                <a:solidFill>
+                  <a:srgbClr val="FFFFFF"/>
+                </a:solidFill>
+              </a:defRPr>
+            </a:pPr>
+            <a:r>
+              <a:rPr sz="1950" b="1">
+                <a:solidFill>
+                  <a:srgbClr val="FFFFFF"/>
+                </a:solidFill>
+              </a:rPr>
+              <a:t>2</a:t>
+            </a:r>
+          </a:p>
+        </p:txBody>
+      </p:sp>
+      <p:sp>
+        <p:nvSpPr>
+          <p:cNvPr id="53" name="node-title-2">
+            <a:extLst xmlns:a="http://schemas.openxmlformats.org/drawingml/2006/main">
+              <a:ext uri="{FF2B5EF4-FFF2-40B4-BE49-F238E27FC236}">
+                <a16:creationId xmlns:a16="http://schemas.microsoft.com/office/drawing/2014/main" id="{CF81628D-7607-41B7-AD09-1B4E96E7E33D}"/>
+              </a:ext>
+            </a:extLst>
+          </p:cNvPr>
+          <p:cNvSpPr>
+            <a:spLocks xmlns:a="http://schemas.openxmlformats.org/drawingml/2006/main" noGrp="1"/>
+          </p:cNvSpPr>
+          <p:nvPr/>
+        </p:nvSpPr>
+        <p:spPr>
+          <a:xfrm xmlns:a="http://schemas.openxmlformats.org/drawingml/2006/main">
+            <a:off x="5029200" y="2819400"/>
+            <a:ext cx="2133600" cy="400050"/>
+          </a:xfrm>
+          <a:prstGeom xmlns:a="http://schemas.openxmlformats.org/drawingml/2006/main" prst="rect">
+            <a:avLst/>
+          </a:prstGeom>
+          <a:noFill xmlns:a="http://schemas.openxmlformats.org/drawingml/2006/main"/>
+          <a:ln xmlns:a="http://schemas.openxmlformats.org/drawingml/2006/main" w="0">
+            <a:noFill/>
+            <a:prstDash val="solid"/>
+          </a:ln>
+        </p:spPr>
+        <p:txBody>
+          <a:bodyPr xmlns:a="http://schemas.openxmlformats.org/drawingml/2006/main" wrap="square" lIns="0" tIns="0" rIns="0" bIns="0" anchor="ctr">
+            <a:normAutofit fontScale="100000"/>
+          </a:bodyPr>
+          <a:lstStyle xmlns:a="http://schemas.openxmlformats.org/drawingml/2006/main"/>
+          <a:p xmlns:a="http://schemas.openxmlformats.org/drawingml/2006/main">
+            <a:pPr algn="ctr">
+              <a:defRPr sz="1500" b="1">
+                <a:solidFill>
+                  <a:srgbClr val="111C31"/>
+                </a:solidFill>
+              </a:defRPr>
+            </a:pPr>
+            <a:r>
+              <a:rPr sz="1500" b="1">
+                <a:solidFill>
+                  <a:srgbClr val="111C31"/>
+                </a:solidFill>
+              </a:rPr>
+              <a:t>建立评分标准</a:t>
+            </a:r>
+          </a:p>
+        </p:txBody>
+      </p:sp>
+      <p:sp>
+        <p:nvSpPr>
+          <p:cNvPr id="54" name="node-3">
+            <a:extLst xmlns:a="http://schemas.openxmlformats.org/drawingml/2006/main">
+              <a:ext uri="{FF2B5EF4-FFF2-40B4-BE49-F238E27FC236}">
+                <a16:creationId xmlns:a16="http://schemas.microsoft.com/office/drawing/2014/main" id="{DD1A01E4-A1F0-488A-B348-CE820547B791}"/>
+              </a:ext>
+            </a:extLst>
+          </p:cNvPr>
+          <p:cNvSpPr>
+            <a:spLocks xmlns:a="http://schemas.openxmlformats.org/drawingml/2006/main" noGrp="1"/>
+          </p:cNvSpPr>
+          <p:nvPr/>
+        </p:nvSpPr>
+        <p:spPr>
+          <a:xfrm xmlns:a="http://schemas.openxmlformats.org/drawingml/2006/main">
+            <a:off x="9791700" y="2133600"/>
+            <a:ext cx="609600" cy="609600"/>
+          </a:xfrm>
+          <a:prstGeom xmlns:a="http://schemas.openxmlformats.org/drawingml/2006/main" prst="roundRect">
+            <a:avLst>
+              <a:gd name="adj" fmla="val 28125"/>
+            </a:avLst>
+          </a:prstGeom>
+          <a:solidFill xmlns:a="http://schemas.openxmlformats.org/drawingml/2006/main">
+            <a:srgbClr val="111C31"/>
+          </a:solidFill>
+          <a:ln xmlns:a="http://schemas.openxmlformats.org/drawingml/2006/main" w="0">
+            <a:noFill/>
+            <a:prstDash val="solid"/>
+          </a:ln>
+        </p:spPr>
+      </p:sp>
+      <p:sp>
+        <p:nvSpPr>
+          <p:cNvPr id="55" name="node-number-3">
+            <a:extLst xmlns:a="http://schemas.openxmlformats.org/drawingml/2006/main">
+              <a:ext uri="{FF2B5EF4-FFF2-40B4-BE49-F238E27FC236}">
+                <a16:creationId xmlns:a16="http://schemas.microsoft.com/office/drawing/2014/main" id="{C6AAF6E3-895F-476E-AF6B-84FEC9956ACC}"/>
+              </a:ext>
+            </a:extLst>
+          </p:cNvPr>
+          <p:cNvSpPr>
+            <a:spLocks xmlns:a="http://schemas.openxmlformats.org/drawingml/2006/main" noGrp="1"/>
+          </p:cNvSpPr>
+          <p:nvPr/>
+        </p:nvSpPr>
+        <p:spPr>
+          <a:xfrm xmlns:a="http://schemas.openxmlformats.org/drawingml/2006/main">
+            <a:off x="9791700" y="2133600"/>
+            <a:ext cx="609600" cy="609600"/>
+          </a:xfrm>
+          <a:prstGeom xmlns:a="http://schemas.openxmlformats.org/drawingml/2006/main" prst="rect">
+            <a:avLst/>
+          </a:prstGeom>
+          <a:noFill xmlns:a="http://schemas.openxmlformats.org/drawingml/2006/main"/>
+          <a:ln xmlns:a="http://schemas.openxmlformats.org/drawingml/2006/main" w="0">
+            <a:noFill/>
+            <a:prstDash val="solid"/>
+          </a:ln>
+        </p:spPr>
+        <p:txBody>
+          <a:bodyPr xmlns:a="http://schemas.openxmlformats.org/drawingml/2006/main" wrap="square" lIns="0" tIns="0" rIns="0" bIns="0" anchor="ctr">
+            <a:normAutofit fontScale="100000"/>
+          </a:bodyPr>
+          <a:lstStyle xmlns:a="http://schemas.openxmlformats.org/drawingml/2006/main"/>
+          <a:p xmlns:a="http://schemas.openxmlformats.org/drawingml/2006/main">
+            <a:pPr algn="ctr">
+              <a:defRPr sz="1950" b="1">
+                <a:solidFill>
+                  <a:srgbClr val="FFFFFF"/>
+                </a:solidFill>
+              </a:defRPr>
+            </a:pPr>
+            <a:r>
+              <a:rPr sz="1950" b="1">
+                <a:solidFill>
+                  <a:srgbClr val="FFFFFF"/>
+                </a:solidFill>
+              </a:rPr>
+              <a:t>3</a:t>
+            </a:r>
+          </a:p>
+        </p:txBody>
+      </p:sp>
+      <p:sp>
+        <p:nvSpPr>
+          <p:cNvPr id="56" name="node-title-3">
+            <a:extLst xmlns:a="http://schemas.openxmlformats.org/drawingml/2006/main">
+              <a:ext uri="{FF2B5EF4-FFF2-40B4-BE49-F238E27FC236}">
+                <a16:creationId xmlns:a16="http://schemas.microsoft.com/office/drawing/2014/main" id="{A7F9E758-2EDC-4F10-A1E6-AE90FFA22162}"/>
+              </a:ext>
+            </a:extLst>
+          </p:cNvPr>
+          <p:cNvSpPr>
+            <a:spLocks xmlns:a="http://schemas.openxmlformats.org/drawingml/2006/main" noGrp="1"/>
+          </p:cNvSpPr>
+          <p:nvPr/>
+        </p:nvSpPr>
+        <p:spPr>
+          <a:xfrm xmlns:a="http://schemas.openxmlformats.org/drawingml/2006/main">
+            <a:off x="9029700" y="2819400"/>
+            <a:ext cx="2133600" cy="400050"/>
+          </a:xfrm>
+          <a:prstGeom xmlns:a="http://schemas.openxmlformats.org/drawingml/2006/main" prst="rect">
+            <a:avLst/>
+          </a:prstGeom>
+          <a:noFill xmlns:a="http://schemas.openxmlformats.org/drawingml/2006/main"/>
+          <a:ln xmlns:a="http://schemas.openxmlformats.org/drawingml/2006/main" w="0">
+            <a:noFill/>
+            <a:prstDash val="solid"/>
+          </a:ln>
+        </p:spPr>
+        <p:txBody>
+          <a:bodyPr xmlns:a="http://schemas.openxmlformats.org/drawingml/2006/main" wrap="square" lIns="0" tIns="0" rIns="0" bIns="0" anchor="ctr">
+            <a:normAutofit fontScale="100000"/>
+          </a:bodyPr>
+          <a:lstStyle xmlns:a="http://schemas.openxmlformats.org/drawingml/2006/main"/>
+          <a:p xmlns:a="http://schemas.openxmlformats.org/drawingml/2006/main">
+            <a:pPr algn="ctr">
+              <a:defRPr sz="1500" b="1">
+                <a:solidFill>
+                  <a:srgbClr val="111C31"/>
+                </a:solidFill>
+              </a:defRPr>
+            </a:pPr>
+            <a:r>
+              <a:rPr sz="1500" b="1">
+                <a:solidFill>
+                  <a:srgbClr val="111C31"/>
+                </a:solidFill>
+              </a:rPr>
+              <a:t>测试外呼模型</a:t>
+            </a:r>
+          </a:p>
+        </p:txBody>
+      </p:sp>
+      <p:sp>
+        <p:nvSpPr>
+          <p:cNvPr id="57" name="node-4">
+            <a:extLst xmlns:a="http://schemas.openxmlformats.org/drawingml/2006/main">
+              <a:ext uri="{FF2B5EF4-FFF2-40B4-BE49-F238E27FC236}">
+                <a16:creationId xmlns:a16="http://schemas.microsoft.com/office/drawing/2014/main" id="{E0D91AC4-85F2-4D9A-95AD-0C1CF784C170}"/>
+              </a:ext>
+            </a:extLst>
+          </p:cNvPr>
+          <p:cNvSpPr>
+            <a:spLocks xmlns:a="http://schemas.openxmlformats.org/drawingml/2006/main" noGrp="1"/>
+          </p:cNvSpPr>
+          <p:nvPr/>
+        </p:nvSpPr>
+        <p:spPr>
+          <a:xfrm xmlns:a="http://schemas.openxmlformats.org/drawingml/2006/main">
+            <a:off x="9791700" y="4000500"/>
+            <a:ext cx="609600" cy="609600"/>
+          </a:xfrm>
+          <a:prstGeom xmlns:a="http://schemas.openxmlformats.org/drawingml/2006/main" prst="roundRect">
+            <a:avLst>
+              <a:gd name="adj" fmla="val 28125"/>
+            </a:avLst>
+          </a:prstGeom>
+          <a:solidFill xmlns:a="http://schemas.openxmlformats.org/drawingml/2006/main">
+            <a:srgbClr val="FFC300"/>
+          </a:solidFill>
+          <a:ln xmlns:a="http://schemas.openxmlformats.org/drawingml/2006/main" w="0">
+            <a:noFill/>
+            <a:prstDash val="solid"/>
+          </a:ln>
+        </p:spPr>
+      </p:sp>
+      <p:sp>
+        <p:nvSpPr>
+          <p:cNvPr id="58" name="node-number-4">
+            <a:extLst xmlns:a="http://schemas.openxmlformats.org/drawingml/2006/main">
+              <a:ext uri="{FF2B5EF4-FFF2-40B4-BE49-F238E27FC236}">
+                <a16:creationId xmlns:a16="http://schemas.microsoft.com/office/drawing/2014/main" id="{63258A44-D205-4F25-A715-FB61F4960B18}"/>
+              </a:ext>
+            </a:extLst>
+          </p:cNvPr>
+          <p:cNvSpPr>
+            <a:spLocks xmlns:a="http://schemas.openxmlformats.org/drawingml/2006/main" noGrp="1"/>
+          </p:cNvSpPr>
+          <p:nvPr/>
+        </p:nvSpPr>
+        <p:spPr>
+          <a:xfrm xmlns:a="http://schemas.openxmlformats.org/drawingml/2006/main">
+            <a:off x="9791700" y="4000500"/>
+            <a:ext cx="609600" cy="609600"/>
+          </a:xfrm>
+          <a:prstGeom xmlns:a="http://schemas.openxmlformats.org/drawingml/2006/main" prst="rect">
+            <a:avLst/>
+          </a:prstGeom>
+          <a:noFill xmlns:a="http://schemas.openxmlformats.org/drawingml/2006/main"/>
+          <a:ln xmlns:a="http://schemas.openxmlformats.org/drawingml/2006/main" w="0">
+            <a:noFill/>
+            <a:prstDash val="solid"/>
+          </a:ln>
+        </p:spPr>
+        <p:txBody>
+          <a:bodyPr xmlns:a="http://schemas.openxmlformats.org/drawingml/2006/main" wrap="square" lIns="0" tIns="0" rIns="0" bIns="0" anchor="ctr">
+            <a:normAutofit fontScale="100000"/>
+          </a:bodyPr>
+          <a:lstStyle xmlns:a="http://schemas.openxmlformats.org/drawingml/2006/main"/>
+          <a:p xmlns:a="http://schemas.openxmlformats.org/drawingml/2006/main">
+            <a:pPr algn="ctr">
+              <a:defRPr sz="1950" b="1">
+                <a:solidFill>
+                  <a:srgbClr val="111C31"/>
+                </a:solidFill>
+              </a:defRPr>
+            </a:pPr>
+            <a:r>
+              <a:rPr sz="1950" b="1">
+                <a:solidFill>
+                  <a:srgbClr val="111C31"/>
+                </a:solidFill>
+              </a:rPr>
+              <a:t>4</a:t>
+            </a:r>
+          </a:p>
+        </p:txBody>
+      </p:sp>
+      <p:sp>
+        <p:nvSpPr>
+          <p:cNvPr id="59" name="node-title-4">
+            <a:extLst xmlns:a="http://schemas.openxmlformats.org/drawingml/2006/main">
+              <a:ext uri="{FF2B5EF4-FFF2-40B4-BE49-F238E27FC236}">
+                <a16:creationId xmlns:a16="http://schemas.microsoft.com/office/drawing/2014/main" id="{F86759BB-574D-43F9-9C8E-C7044D4938E7}"/>
+              </a:ext>
+            </a:extLst>
+          </p:cNvPr>
+          <p:cNvSpPr>
+            <a:spLocks xmlns:a="http://schemas.openxmlformats.org/drawingml/2006/main" noGrp="1"/>
+          </p:cNvSpPr>
+          <p:nvPr/>
+        </p:nvSpPr>
+        <p:spPr>
+          <a:xfrm xmlns:a="http://schemas.openxmlformats.org/drawingml/2006/main">
+            <a:off x="9029700" y="4686300"/>
+            <a:ext cx="2133600" cy="400050"/>
+          </a:xfrm>
+          <a:prstGeom xmlns:a="http://schemas.openxmlformats.org/drawingml/2006/main" prst="rect">
+            <a:avLst/>
+          </a:prstGeom>
+          <a:noFill xmlns:a="http://schemas.openxmlformats.org/drawingml/2006/main"/>
+          <a:ln xmlns:a="http://schemas.openxmlformats.org/drawingml/2006/main" w="0">
+            <a:noFill/>
+            <a:prstDash val="solid"/>
+          </a:ln>
+        </p:spPr>
+        <p:txBody>
+          <a:bodyPr xmlns:a="http://schemas.openxmlformats.org/drawingml/2006/main" wrap="square" lIns="0" tIns="0" rIns="0" bIns="0" anchor="ctr">
+            <a:normAutofit fontScale="100000"/>
+          </a:bodyPr>
+          <a:lstStyle xmlns:a="http://schemas.openxmlformats.org/drawingml/2006/main"/>
+          <a:p xmlns:a="http://schemas.openxmlformats.org/drawingml/2006/main">
+            <a:pPr algn="ctr">
+              <a:defRPr sz="1500" b="1">
+                <a:solidFill>
+                  <a:srgbClr val="111C31"/>
+                </a:solidFill>
+              </a:defRPr>
+            </a:pPr>
+            <a:r>
+              <a:rPr sz="1500" b="1">
+                <a:solidFill>
+                  <a:srgbClr val="111C31"/>
+                </a:solidFill>
+              </a:rPr>
+              <a:t>输出模型评测报告</a:t>
+            </a:r>
+          </a:p>
+        </p:txBody>
+      </p:sp>
+      <p:sp>
+        <p:nvSpPr>
+          <p:cNvPr id="60" name="node-5">
+            <a:extLst xmlns:a="http://schemas.openxmlformats.org/drawingml/2006/main">
+              <a:ext uri="{FF2B5EF4-FFF2-40B4-BE49-F238E27FC236}">
+                <a16:creationId xmlns:a16="http://schemas.microsoft.com/office/drawing/2014/main" id="{F3B769D1-2794-4A05-9920-BF6D55ECFE70}"/>
+              </a:ext>
+            </a:extLst>
+          </p:cNvPr>
+          <p:cNvSpPr>
+            <a:spLocks xmlns:a="http://schemas.openxmlformats.org/drawingml/2006/main" noGrp="1"/>
+          </p:cNvSpPr>
+          <p:nvPr/>
+        </p:nvSpPr>
+        <p:spPr>
+          <a:xfrm xmlns:a="http://schemas.openxmlformats.org/drawingml/2006/main">
+            <a:off x="5791200" y="4000500"/>
+            <a:ext cx="609600" cy="609600"/>
+          </a:xfrm>
+          <a:prstGeom xmlns:a="http://schemas.openxmlformats.org/drawingml/2006/main" prst="roundRect">
+            <a:avLst>
+              <a:gd name="adj" fmla="val 28125"/>
+            </a:avLst>
+          </a:prstGeom>
+          <a:solidFill xmlns:a="http://schemas.openxmlformats.org/drawingml/2006/main">
+            <a:srgbClr val="111C31"/>
+          </a:solidFill>
+          <a:ln xmlns:a="http://schemas.openxmlformats.org/drawingml/2006/main" w="0">
+            <a:noFill/>
+            <a:prstDash val="solid"/>
+          </a:ln>
+        </p:spPr>
+      </p:sp>
+      <p:sp>
+        <p:nvSpPr>
+          <p:cNvPr id="61" name="node-number-5">
+            <a:extLst xmlns:a="http://schemas.openxmlformats.org/drawingml/2006/main">
+              <a:ext uri="{FF2B5EF4-FFF2-40B4-BE49-F238E27FC236}">
+                <a16:creationId xmlns:a16="http://schemas.microsoft.com/office/drawing/2014/main" id="{882FA535-9930-4F88-8F68-FA0EBDCE9C5F}"/>
+              </a:ext>
+            </a:extLst>
+          </p:cNvPr>
+          <p:cNvSpPr>
+            <a:spLocks xmlns:a="http://schemas.openxmlformats.org/drawingml/2006/main" noGrp="1"/>
+          </p:cNvSpPr>
+          <p:nvPr/>
+        </p:nvSpPr>
+        <p:spPr>
+          <a:xfrm xmlns:a="http://schemas.openxmlformats.org/drawingml/2006/main">
+            <a:off x="5791200" y="4000500"/>
+            <a:ext cx="609600" cy="609600"/>
+          </a:xfrm>
+          <a:prstGeom xmlns:a="http://schemas.openxmlformats.org/drawingml/2006/main" prst="rect">
+            <a:avLst/>
+          </a:prstGeom>
+          <a:noFill xmlns:a="http://schemas.openxmlformats.org/drawingml/2006/main"/>
+          <a:ln xmlns:a="http://schemas.openxmlformats.org/drawingml/2006/main" w="0">
+            <a:noFill/>
+            <a:prstDash val="solid"/>
+          </a:ln>
+        </p:spPr>
+        <p:txBody>
+          <a:bodyPr xmlns:a="http://schemas.openxmlformats.org/drawingml/2006/main" wrap="square" lIns="0" tIns="0" rIns="0" bIns="0" anchor="ctr">
+            <a:normAutofit fontScale="100000"/>
+          </a:bodyPr>
+          <a:lstStyle xmlns:a="http://schemas.openxmlformats.org/drawingml/2006/main"/>
+          <a:p xmlns:a="http://schemas.openxmlformats.org/drawingml/2006/main">
+            <a:pPr algn="ctr">
+              <a:defRPr sz="1950" b="1">
+                <a:solidFill>
+                  <a:srgbClr val="FFFFFF"/>
+                </a:solidFill>
+              </a:defRPr>
+            </a:pPr>
+            <a:r>
+              <a:rPr sz="1950" b="1">
+                <a:solidFill>
+                  <a:srgbClr val="FFFFFF"/>
+                </a:solidFill>
+              </a:rPr>
+              <a:t>5</a:t>
+            </a:r>
+          </a:p>
+        </p:txBody>
+      </p:sp>
+      <p:sp>
+        <p:nvSpPr>
+          <p:cNvPr id="62" name="node-title-5">
+            <a:extLst xmlns:a="http://schemas.openxmlformats.org/drawingml/2006/main">
+              <a:ext uri="{FF2B5EF4-FFF2-40B4-BE49-F238E27FC236}">
+                <a16:creationId xmlns:a16="http://schemas.microsoft.com/office/drawing/2014/main" id="{6B0D4D68-414E-4138-9E0F-331EB0A091E5}"/>
+              </a:ext>
+            </a:extLst>
+          </p:cNvPr>
+          <p:cNvSpPr>
+            <a:spLocks xmlns:a="http://schemas.openxmlformats.org/drawingml/2006/main" noGrp="1"/>
+          </p:cNvSpPr>
+          <p:nvPr/>
+        </p:nvSpPr>
+        <p:spPr>
+          <a:xfrm xmlns:a="http://schemas.openxmlformats.org/drawingml/2006/main">
+            <a:off x="5029200" y="4686300"/>
+            <a:ext cx="2133600" cy="400050"/>
+          </a:xfrm>
+          <a:prstGeom xmlns:a="http://schemas.openxmlformats.org/drawingml/2006/main" prst="rect">
+            <a:avLst/>
+          </a:prstGeom>
+          <a:noFill xmlns:a="http://schemas.openxmlformats.org/drawingml/2006/main"/>
+          <a:ln xmlns:a="http://schemas.openxmlformats.org/drawingml/2006/main" w="0">
+            <a:noFill/>
+            <a:prstDash val="solid"/>
+          </a:ln>
+        </p:spPr>
+        <p:txBody>
+          <a:bodyPr xmlns:a="http://schemas.openxmlformats.org/drawingml/2006/main" wrap="square" lIns="0" tIns="0" rIns="0" bIns="0" anchor="ctr">
+            <a:normAutofit fontScale="100000"/>
+          </a:bodyPr>
+          <a:lstStyle xmlns:a="http://schemas.openxmlformats.org/drawingml/2006/main"/>
+          <a:p xmlns:a="http://schemas.openxmlformats.org/drawingml/2006/main">
+            <a:pPr algn="ctr">
+              <a:defRPr sz="1500" b="1">
+                <a:solidFill>
+                  <a:srgbClr val="111C31"/>
+                </a:solidFill>
+              </a:defRPr>
+            </a:pPr>
+            <a:r>
+              <a:rPr sz="1500" b="1">
+                <a:solidFill>
+                  <a:srgbClr val="111C31"/>
+                </a:solidFill>
+              </a:rPr>
+              <a:t>分析失败原因</a:t>
+            </a:r>
+          </a:p>
+        </p:txBody>
+      </p:sp>
+      <p:sp>
+        <p:nvSpPr>
+          <p:cNvPr id="63" name="node-6">
+            <a:extLst xmlns:a="http://schemas.openxmlformats.org/drawingml/2006/main">
+              <a:ext uri="{FF2B5EF4-FFF2-40B4-BE49-F238E27FC236}">
+                <a16:creationId xmlns:a16="http://schemas.microsoft.com/office/drawing/2014/main" id="{8BB69760-1426-4F04-8FAE-AD54F5C664EA}"/>
+              </a:ext>
+            </a:extLst>
+          </p:cNvPr>
+          <p:cNvSpPr>
+            <a:spLocks xmlns:a="http://schemas.openxmlformats.org/drawingml/2006/main" noGrp="1"/>
+          </p:cNvSpPr>
+          <p:nvPr/>
+        </p:nvSpPr>
+        <p:spPr>
+          <a:xfrm xmlns:a="http://schemas.openxmlformats.org/drawingml/2006/main">
+            <a:off x="1790700" y="4000500"/>
+            <a:ext cx="609600" cy="609600"/>
+          </a:xfrm>
+          <a:prstGeom xmlns:a="http://schemas.openxmlformats.org/drawingml/2006/main" prst="roundRect">
+            <a:avLst>
+              <a:gd name="adj" fmla="val 28125"/>
+            </a:avLst>
+          </a:prstGeom>
+          <a:solidFill xmlns:a="http://schemas.openxmlformats.org/drawingml/2006/main">
+            <a:srgbClr val="FFC300"/>
+          </a:solidFill>
+          <a:ln xmlns:a="http://schemas.openxmlformats.org/drawingml/2006/main" w="0">
+            <a:noFill/>
+            <a:prstDash val="solid"/>
+          </a:ln>
+        </p:spPr>
+      </p:sp>
+      <p:sp>
+        <p:nvSpPr>
+          <p:cNvPr id="64" name="node-number-6">
+            <a:extLst xmlns:a="http://schemas.openxmlformats.org/drawingml/2006/main">
+              <a:ext uri="{FF2B5EF4-FFF2-40B4-BE49-F238E27FC236}">
+                <a16:creationId xmlns:a16="http://schemas.microsoft.com/office/drawing/2014/main" id="{7DC90F89-3B5D-4A9E-BBF9-C5682D3B3A88}"/>
+              </a:ext>
+            </a:extLst>
+          </p:cNvPr>
+          <p:cNvSpPr>
+            <a:spLocks xmlns:a="http://schemas.openxmlformats.org/drawingml/2006/main" noGrp="1"/>
+          </p:cNvSpPr>
+          <p:nvPr/>
+        </p:nvSpPr>
+        <p:spPr>
+          <a:xfrm xmlns:a="http://schemas.openxmlformats.org/drawingml/2006/main">
+            <a:off x="1790700" y="4000500"/>
+            <a:ext cx="609600" cy="609600"/>
+          </a:xfrm>
+          <a:prstGeom xmlns:a="http://schemas.openxmlformats.org/drawingml/2006/main" prst="rect">
+            <a:avLst/>
+          </a:prstGeom>
+          <a:noFill xmlns:a="http://schemas.openxmlformats.org/drawingml/2006/main"/>
+          <a:ln xmlns:a="http://schemas.openxmlformats.org/drawingml/2006/main" w="0">
+            <a:noFill/>
+            <a:prstDash val="solid"/>
+          </a:ln>
+        </p:spPr>
+        <p:txBody>
+          <a:bodyPr xmlns:a="http://schemas.openxmlformats.org/drawingml/2006/main" wrap="square" lIns="0" tIns="0" rIns="0" bIns="0" anchor="ctr">
+            <a:normAutofit fontScale="100000"/>
+          </a:bodyPr>
+          <a:lstStyle xmlns:a="http://schemas.openxmlformats.org/drawingml/2006/main"/>
+          <a:p xmlns:a="http://schemas.openxmlformats.org/drawingml/2006/main">
+            <a:pPr algn="ctr">
+              <a:defRPr sz="1950" b="1">
+                <a:solidFill>
+                  <a:srgbClr val="111C31"/>
+                </a:solidFill>
+              </a:defRPr>
+            </a:pPr>
+            <a:r>
+              <a:rPr sz="1950" b="1">
+                <a:solidFill>
+                  <a:srgbClr val="111C31"/>
+                </a:solidFill>
+              </a:rPr>
+              <a:t>6</a:t>
+            </a:r>
+          </a:p>
+        </p:txBody>
+      </p:sp>
+      <p:sp>
+        <p:nvSpPr>
+          <p:cNvPr id="65" name="node-title-6">
+            <a:extLst xmlns:a="http://schemas.openxmlformats.org/drawingml/2006/main">
+              <a:ext uri="{FF2B5EF4-FFF2-40B4-BE49-F238E27FC236}">
+                <a16:creationId xmlns:a16="http://schemas.microsoft.com/office/drawing/2014/main" id="{1B5CCFE9-2A14-4046-9297-2D0A20330CD2}"/>
+              </a:ext>
+            </a:extLst>
+          </p:cNvPr>
+          <p:cNvSpPr>
+            <a:spLocks xmlns:a="http://schemas.openxmlformats.org/drawingml/2006/main" noGrp="1"/>
+          </p:cNvSpPr>
+          <p:nvPr/>
+        </p:nvSpPr>
+        <p:spPr>
+          <a:xfrm xmlns:a="http://schemas.openxmlformats.org/drawingml/2006/main">
+            <a:off x="1028700" y="4686300"/>
+            <a:ext cx="2133600" cy="400050"/>
+          </a:xfrm>
+          <a:prstGeom xmlns:a="http://schemas.openxmlformats.org/drawingml/2006/main" prst="rect">
+            <a:avLst/>
+          </a:prstGeom>
+          <a:noFill xmlns:a="http://schemas.openxmlformats.org/drawingml/2006/main"/>
+          <a:ln xmlns:a="http://schemas.openxmlformats.org/drawingml/2006/main" w="0">
+            <a:noFill/>
+            <a:prstDash val="solid"/>
+          </a:ln>
+        </p:spPr>
+        <p:txBody>
+          <a:bodyPr xmlns:a="http://schemas.openxmlformats.org/drawingml/2006/main" wrap="square" lIns="0" tIns="0" rIns="0" bIns="0" anchor="ctr">
+            <a:normAutofit fontScale="100000"/>
+          </a:bodyPr>
+          <a:lstStyle xmlns:a="http://schemas.openxmlformats.org/drawingml/2006/main"/>
+          <a:p xmlns:a="http://schemas.openxmlformats.org/drawingml/2006/main">
+            <a:pPr algn="ctr">
+              <a:defRPr sz="1500" b="1">
+                <a:solidFill>
+                  <a:srgbClr val="111C31"/>
+                </a:solidFill>
+              </a:defRPr>
+            </a:pPr>
+            <a:r>
+              <a:rPr sz="1500" b="1">
+                <a:solidFill>
+                  <a:srgbClr val="111C31"/>
+                </a:solidFill>
+              </a:rPr>
+              <a:t>优化与同尺回归</a:t>
+            </a:r>
+          </a:p>
+        </p:txBody>
+      </p:sp>
+      <p:sp>
+        <p:nvSpPr>
+          <p:cNvPr id="66" name="loop-band">
+            <a:extLst xmlns:a="http://schemas.openxmlformats.org/drawingml/2006/main">
+              <a:ext uri="{FF2B5EF4-FFF2-40B4-BE49-F238E27FC236}">
+                <a16:creationId xmlns:a16="http://schemas.microsoft.com/office/drawing/2014/main" id="{A5606C01-E9B1-4C95-A1D4-5B640CC911F8}"/>
+              </a:ext>
+            </a:extLst>
+          </p:cNvPr>
+          <p:cNvSpPr>
+            <a:spLocks xmlns:a="http://schemas.openxmlformats.org/drawingml/2006/main" noGrp="1"/>
+          </p:cNvSpPr>
+          <p:nvPr/>
+        </p:nvSpPr>
+        <p:spPr>
+          <a:xfrm xmlns:a="http://schemas.openxmlformats.org/drawingml/2006/main">
+            <a:off x="3143250" y="5410200"/>
+            <a:ext cx="6858000" cy="476250"/>
+          </a:xfrm>
+          <a:prstGeom xmlns:a="http://schemas.openxmlformats.org/drawingml/2006/main" prst="roundRect">
+            <a:avLst>
+              <a:gd name="adj" fmla="val 32000"/>
+            </a:avLst>
+          </a:prstGeom>
+          <a:solidFill xmlns:a="http://schemas.openxmlformats.org/drawingml/2006/main">
+            <a:srgbClr val="FFF4BD"/>
+          </a:solidFill>
+          <a:ln xmlns:a="http://schemas.openxmlformats.org/drawingml/2006/main" w="0">
+            <a:noFill/>
+            <a:prstDash val="solid"/>
+          </a:ln>
+        </p:spPr>
+      </p:sp>
+      <p:sp>
+        <p:nvSpPr>
+          <p:cNvPr id="67" name="loop-copy">
+            <a:extLst xmlns:a="http://schemas.openxmlformats.org/drawingml/2006/main">
+              <a:ext uri="{FF2B5EF4-FFF2-40B4-BE49-F238E27FC236}">
+                <a16:creationId xmlns:a16="http://schemas.microsoft.com/office/drawing/2014/main" id="{B288B09B-9034-40A3-A71A-E90FE0FC6570}"/>
+              </a:ext>
+            </a:extLst>
+          </p:cNvPr>
+          <p:cNvSpPr>
+            <a:spLocks xmlns:a="http://schemas.openxmlformats.org/drawingml/2006/main" noGrp="1"/>
+          </p:cNvSpPr>
+          <p:nvPr/>
+        </p:nvSpPr>
+        <p:spPr>
+          <a:xfrm xmlns:a="http://schemas.openxmlformats.org/drawingml/2006/main">
+            <a:off x="3333750" y="5410200"/>
+            <a:ext cx="6477000" cy="476250"/>
+          </a:xfrm>
+          <a:prstGeom xmlns:a="http://schemas.openxmlformats.org/drawingml/2006/main" prst="rect">
+            <a:avLst/>
+          </a:prstGeom>
+          <a:noFill xmlns:a="http://schemas.openxmlformats.org/drawingml/2006/main"/>
+          <a:ln xmlns:a="http://schemas.openxmlformats.org/drawingml/2006/main" w="0">
+            <a:noFill/>
+            <a:prstDash val="solid"/>
+          </a:ln>
+        </p:spPr>
+        <p:txBody>
+          <a:bodyPr xmlns:a="http://schemas.openxmlformats.org/drawingml/2006/main" wrap="square" lIns="0" tIns="0" rIns="0" bIns="0" anchor="ctr">
+            <a:normAutofit fontScale="100000"/>
+          </a:bodyPr>
+          <a:lstStyle xmlns:a="http://schemas.openxmlformats.org/drawingml/2006/main"/>
+          <a:p xmlns:a="http://schemas.openxmlformats.org/drawingml/2006/main">
+            <a:pPr algn="ctr">
+              <a:defRPr sz="1350" b="1">
+                <a:solidFill>
+                  <a:srgbClr val="111C31"/>
+                </a:solidFill>
+              </a:defRPr>
+            </a:pPr>
+            <a:r>
+              <a:rPr sz="1350" b="1">
+                <a:solidFill>
+                  <a:srgbClr val="111C31"/>
+                </a:solidFill>
+              </a:rPr>
+              <a:t>↻  只改责任对象 · 锁定同一把尺 · 返回第3步重新测试</a:t>
+            </a:r>
+          </a:p>
+        </p:txBody>
+      </p:sp>
+      <p:sp>
+        <p:nvSpPr>
+          <p:cNvPr id="68" name="loop-in">
+            <a:extLst xmlns:a="http://schemas.openxmlformats.org/drawingml/2006/main">
+              <a:ext uri="{FF2B5EF4-FFF2-40B4-BE49-F238E27FC236}">
+                <a16:creationId xmlns:a16="http://schemas.microsoft.com/office/drawing/2014/main" id="{4E47B5C4-E282-44C4-B4FD-6E9D79E04AAF}"/>
+              </a:ext>
+            </a:extLst>
+          </p:cNvPr>
+          <p:cNvSpPr>
+            <a:spLocks xmlns:a="http://schemas.openxmlformats.org/drawingml/2006/main" noGrp="1"/>
+          </p:cNvSpPr>
+          <p:nvPr/>
+        </p:nvSpPr>
+        <p:spPr>
+          <a:xfrm xmlns:a="http://schemas.openxmlformats.org/drawingml/2006/main">
+            <a:off x="2381250" y="5562600"/>
+            <a:ext cx="723900" cy="171450"/>
+          </a:xfrm>
+          <a:prstGeom xmlns:a="http://schemas.openxmlformats.org/drawingml/2006/main" prst="rightArrow">
+            <a:avLst/>
+          </a:prstGeom>
+          <a:solidFill xmlns:a="http://schemas.openxmlformats.org/drawingml/2006/main">
+            <a:srgbClr val="FFC300"/>
+          </a:solidFill>
+          <a:ln xmlns:a="http://schemas.openxmlformats.org/drawingml/2006/main" w="0">
+            <a:noFill/>
+            <a:prstDash val="solid"/>
+          </a:ln>
+        </p:spPr>
+      </p:sp>
+      <p:sp>
+        <p:nvSpPr>
+          <p:cNvPr id="69" name="loop-out">
+            <a:extLst xmlns:a="http://schemas.openxmlformats.org/drawingml/2006/main">
+              <a:ext uri="{FF2B5EF4-FFF2-40B4-BE49-F238E27FC236}">
+                <a16:creationId xmlns:a16="http://schemas.microsoft.com/office/drawing/2014/main" id="{9E116495-D445-4126-9464-A8BF26AFD992}"/>
+              </a:ext>
+            </a:extLst>
+          </p:cNvPr>
+          <p:cNvSpPr>
+            <a:spLocks xmlns:a="http://schemas.openxmlformats.org/drawingml/2006/main" noGrp="1"/>
+          </p:cNvSpPr>
+          <p:nvPr/>
+        </p:nvSpPr>
+        <p:spPr>
+          <a:xfrm xmlns:a="http://schemas.openxmlformats.org/drawingml/2006/main">
+            <a:off x="10039350" y="4933950"/>
+            <a:ext cx="228600" cy="685800"/>
+          </a:xfrm>
+          <a:prstGeom xmlns:a="http://schemas.openxmlformats.org/drawingml/2006/main" prst="upArrow">
+            <a:avLst/>
+          </a:prstGeom>
+          <a:solidFill xmlns:a="http://schemas.openxmlformats.org/drawingml/2006/main">
+            <a:srgbClr val="FFC300"/>
+          </a:solidFill>
+          <a:ln xmlns:a="http://schemas.openxmlformats.org/drawingml/2006/main" w="0">
+            <a:noFill/>
+            <a:prstDash val="solid"/>
+          </a:ln>
+        </p:spPr>
+      </p:sp>
+      <p:sp>
+        <p:nvSpPr>
+          <p:cNvPr id="70" name="page">
+            <a:extLst xmlns:a="http://schemas.openxmlformats.org/drawingml/2006/main">
+              <a:ext uri="{FF2B5EF4-FFF2-40B4-BE49-F238E27FC236}">
+                <a16:creationId xmlns:a16="http://schemas.microsoft.com/office/drawing/2014/main" id="{2EF8497E-5FE8-4075-AB08-3ECB10EF8892}"/>
+              </a:ext>
+            </a:extLst>
+          </p:cNvPr>
+          <p:cNvSpPr>
+            <a:spLocks xmlns:a="http://schemas.openxmlformats.org/drawingml/2006/main" noGrp="1"/>
+          </p:cNvSpPr>
+          <p:nvPr/>
+        </p:nvSpPr>
+        <p:spPr>
+          <a:xfrm xmlns:a="http://schemas.openxmlformats.org/drawingml/2006/main">
+            <a:off x="11144250" y="6419850"/>
+            <a:ext cx="514350" cy="190500"/>
+          </a:xfrm>
+          <a:prstGeom xmlns:a="http://schemas.openxmlformats.org/drawingml/2006/main" prst="rect">
+            <a:avLst/>
+          </a:prstGeom>
+          <a:noFill xmlns:a="http://schemas.openxmlformats.org/drawingml/2006/main"/>
+          <a:ln xmlns:a="http://schemas.openxmlformats.org/drawingml/2006/main" w="0">
+            <a:noFill/>
+            <a:prstDash val="solid"/>
+          </a:ln>
+        </p:spPr>
+        <p:txBody>
+          <a:bodyPr xmlns:a="http://schemas.openxmlformats.org/drawingml/2006/main" wrap="square" lIns="0" tIns="0" rIns="0" bIns="0" anchor="ctr">
+            <a:normAutofit fontScale="100000"/>
+          </a:bodyPr>
+          <a:lstStyle xmlns:a="http://schemas.openxmlformats.org/drawingml/2006/main"/>
+          <a:p xmlns:a="http://schemas.openxmlformats.org/drawingml/2006/main">
+            <a:pPr algn="r">
+              <a:defRPr sz="750" b="0">
+                <a:solidFill>
+                  <a:srgbClr val="6E7A90"/>
+                </a:solidFill>
+              </a:defRPr>
+            </a:pPr>
+            <a:r>
+              <a:rPr sz="750" b="0">
+                <a:solidFill>
+                  <a:srgbClr val="6E7A90"/>
+                </a:solidFill>
+              </a:rPr>
+              <a:t>03</a:t>
             </a:r>
           </a:p>
         </p:txBody>
@@ -6124,14 +6118,14 @@
       </p:sp>
       <p:pic>
         <p:nvPicPr>
-          <p:cNvPr id="41" name=""/>
+          <p:cNvPr id="42" name=""/>
           <p:cNvPicPr>
             <a:picLocks xmlns:a="http://schemas.openxmlformats.org/drawingml/2006/main" noChangeAspect="1"/>
           </p:cNvPicPr>
           <p:nvPr/>
         </p:nvPicPr>
         <p:blipFill>
-          <a:blip xmlns:r="http://schemas.openxmlformats.org/officeDocument/2006/relationships" xmlns:a="http://schemas.openxmlformats.org/drawingml/2006/main" r:embed="R40f1130f7a0f4557"/>
+          <a:blip xmlns:r="http://schemas.openxmlformats.org/officeDocument/2006/relationships" xmlns:a="http://schemas.openxmlformats.org/drawingml/2006/main" r:embed="R8085ad5ec3224e6e"/>
           <a:srcRect xmlns:a="http://schemas.openxmlformats.org/drawingml/2006/main" l="0" t="2174" r="0" b="2174"/>
           <a:stretch xmlns:a="http://schemas.openxmlformats.org/drawingml/2006/main">
             <a:fillRect l="0" t="0" r="0" b="0"/>
@@ -6200,7 +6194,7 @@
                 <a:latin typeface="PingFang SC"/>
                 <a:ea typeface="PingFang SC"/>
                 <a:cs typeface="PingFang SC"/>
-                <a:hlinkClick xmlns:r="http://schemas.openxmlformats.org/officeDocument/2006/relationships" r:id="Rd6b8bc8f5cd04c62"/>
+                <a:hlinkClick xmlns:r="http://schemas.openxmlformats.org/officeDocument/2006/relationships" r:id="R40c1af5816514d7c"/>
               </a:rPr>
               <a:t>▶ 在线 Demo</a:t>
             </a:r>
@@ -6252,7 +6246,7 @@
                 <a:latin typeface="PingFang SC"/>
                 <a:ea typeface="PingFang SC"/>
                 <a:cs typeface="PingFang SC"/>
-                <a:hlinkClick xmlns:r="http://schemas.openxmlformats.org/officeDocument/2006/relationships" r:id="R9d682da392b548a8"/>
+                <a:hlinkClick xmlns:r="http://schemas.openxmlformats.org/officeDocument/2006/relationships" r:id="Re8be0e8d9496440a"/>
               </a:rPr>
               <a:t>结果备份 ↗</a:t>
             </a:r>
@@ -6327,6 +6321,7 @@
           <a:lstStyle xmlns:a="http://schemas.openxmlformats.org/drawingml/2006/main"/>
           <a:p xmlns:a="http://schemas.openxmlformats.org/drawingml/2006/main">
             <a:pPr algn="l">
+              <a:buNone/>
               <a:defRPr sz="1725" b="1">
                 <a:solidFill>
                   <a:srgbClr val="111C31"/>
@@ -6379,6 +6374,7 @@
           <a:lstStyle xmlns:a="http://schemas.openxmlformats.org/drawingml/2006/main"/>
           <a:p xmlns:a="http://schemas.openxmlformats.org/drawingml/2006/main">
             <a:pPr algn="l">
+              <a:buNone/>
               <a:defRPr sz="1238" b="0">
                 <a:solidFill>
                   <a:srgbClr val="6E7A90"/>
@@ -6464,6 +6460,7 @@
           <a:lstStyle xmlns:a="http://schemas.openxmlformats.org/drawingml/2006/main"/>
           <a:p xmlns:a="http://schemas.openxmlformats.org/drawingml/2006/main">
             <a:pPr algn="l">
+              <a:buNone/>
               <a:defRPr sz="1725" b="1">
                 <a:solidFill>
                   <a:srgbClr val="111C31"/>
@@ -6516,6 +6513,7 @@
           <a:lstStyle xmlns:a="http://schemas.openxmlformats.org/drawingml/2006/main"/>
           <a:p xmlns:a="http://schemas.openxmlformats.org/drawingml/2006/main">
             <a:pPr algn="l">
+              <a:buNone/>
               <a:defRPr sz="1238" b="0">
                 <a:solidFill>
                   <a:srgbClr val="6E7A90"/>
@@ -6601,6 +6599,7 @@
           <a:lstStyle xmlns:a="http://schemas.openxmlformats.org/drawingml/2006/main"/>
           <a:p xmlns:a="http://schemas.openxmlformats.org/drawingml/2006/main">
             <a:pPr algn="l">
+              <a:buNone/>
               <a:defRPr sz="1725" b="1">
                 <a:solidFill>
                   <a:srgbClr val="111C31"/>
@@ -6653,6 +6652,7 @@
           <a:lstStyle xmlns:a="http://schemas.openxmlformats.org/drawingml/2006/main"/>
           <a:p xmlns:a="http://schemas.openxmlformats.org/drawingml/2006/main">
             <a:pPr algn="l">
+              <a:buNone/>
               <a:defRPr sz="1238" b="0">
                 <a:solidFill>
                   <a:srgbClr val="6E7A90"/>
@@ -7210,14 +7210,14 @@
       </p:sp>
       <p:pic>
         <p:nvPicPr>
-          <p:cNvPr id="41" name=""/>
+          <p:cNvPr id="42" name=""/>
           <p:cNvPicPr>
             <a:picLocks xmlns:a="http://schemas.openxmlformats.org/drawingml/2006/main" noChangeAspect="1"/>
           </p:cNvPicPr>
           <p:nvPr/>
         </p:nvPicPr>
         <p:blipFill>
-          <a:blip xmlns:r="http://schemas.openxmlformats.org/officeDocument/2006/relationships" xmlns:a="http://schemas.openxmlformats.org/drawingml/2006/main" r:embed="R76bf847efd034428"/>
+          <a:blip xmlns:r="http://schemas.openxmlformats.org/officeDocument/2006/relationships" xmlns:a="http://schemas.openxmlformats.org/drawingml/2006/main" r:embed="R5b9c019baddd46bf"/>
           <a:srcRect xmlns:a="http://schemas.openxmlformats.org/drawingml/2006/main" l="0" t="2174" r="0" b="2174"/>
           <a:stretch xmlns:a="http://schemas.openxmlformats.org/drawingml/2006/main">
             <a:fillRect l="0" t="0" r="0" b="0"/>
@@ -7286,7 +7286,7 @@
                 <a:latin typeface="PingFang SC"/>
                 <a:ea typeface="PingFang SC"/>
                 <a:cs typeface="PingFang SC"/>
-                <a:hlinkClick xmlns:r="http://schemas.openxmlformats.org/officeDocument/2006/relationships" r:id="R146525409b7646cd"/>
+                <a:hlinkClick xmlns:r="http://schemas.openxmlformats.org/officeDocument/2006/relationships" r:id="Rfa8c4044328249f7"/>
               </a:rPr>
               <a:t>▶ 在线 Demo</a:t>
             </a:r>
@@ -7338,7 +7338,7 @@
                 <a:latin typeface="PingFang SC"/>
                 <a:ea typeface="PingFang SC"/>
                 <a:cs typeface="PingFang SC"/>
-                <a:hlinkClick xmlns:r="http://schemas.openxmlformats.org/officeDocument/2006/relationships" r:id="R7760256aa0c64fa5"/>
+                <a:hlinkClick xmlns:r="http://schemas.openxmlformats.org/officeDocument/2006/relationships" r:id="R939a5b3b9b9348a2"/>
               </a:rPr>
               <a:t>结果备份 ↗</a:t>
             </a:r>
@@ -7413,6 +7413,7 @@
           <a:lstStyle xmlns:a="http://schemas.openxmlformats.org/drawingml/2006/main"/>
           <a:p xmlns:a="http://schemas.openxmlformats.org/drawingml/2006/main">
             <a:pPr algn="l">
+              <a:buNone/>
               <a:defRPr sz="1725" b="1">
                 <a:solidFill>
                   <a:srgbClr val="111C31"/>
@@ -7465,6 +7466,7 @@
           <a:lstStyle xmlns:a="http://schemas.openxmlformats.org/drawingml/2006/main"/>
           <a:p xmlns:a="http://schemas.openxmlformats.org/drawingml/2006/main">
             <a:pPr algn="l">
+              <a:buNone/>
               <a:defRPr sz="1238" b="0">
                 <a:solidFill>
                   <a:srgbClr val="6E7A90"/>
@@ -7550,6 +7552,7 @@
           <a:lstStyle xmlns:a="http://schemas.openxmlformats.org/drawingml/2006/main"/>
           <a:p xmlns:a="http://schemas.openxmlformats.org/drawingml/2006/main">
             <a:pPr algn="l">
+              <a:buNone/>
               <a:defRPr sz="1725" b="1">
                 <a:solidFill>
                   <a:srgbClr val="111C31"/>
@@ -7602,6 +7605,7 @@
           <a:lstStyle xmlns:a="http://schemas.openxmlformats.org/drawingml/2006/main"/>
           <a:p xmlns:a="http://schemas.openxmlformats.org/drawingml/2006/main">
             <a:pPr algn="l">
+              <a:buNone/>
               <a:defRPr sz="1238" b="0">
                 <a:solidFill>
                   <a:srgbClr val="6E7A90"/>
@@ -7687,6 +7691,7 @@
           <a:lstStyle xmlns:a="http://schemas.openxmlformats.org/drawingml/2006/main"/>
           <a:p xmlns:a="http://schemas.openxmlformats.org/drawingml/2006/main">
             <a:pPr algn="l">
+              <a:buNone/>
               <a:defRPr sz="1725" b="1">
                 <a:solidFill>
                   <a:srgbClr val="111C31"/>
@@ -7739,6 +7744,7 @@
           <a:lstStyle xmlns:a="http://schemas.openxmlformats.org/drawingml/2006/main"/>
           <a:p xmlns:a="http://schemas.openxmlformats.org/drawingml/2006/main">
             <a:pPr algn="l">
+              <a:buNone/>
               <a:defRPr sz="1238" b="0">
                 <a:solidFill>
                   <a:srgbClr val="6E7A90"/>
@@ -8296,14 +8302,14 @@
       </p:sp>
       <p:pic>
         <p:nvPicPr>
-          <p:cNvPr id="41" name=""/>
+          <p:cNvPr id="42" name=""/>
           <p:cNvPicPr>
             <a:picLocks xmlns:a="http://schemas.openxmlformats.org/drawingml/2006/main" noChangeAspect="1"/>
           </p:cNvPicPr>
           <p:nvPr/>
         </p:nvPicPr>
         <p:blipFill>
-          <a:blip xmlns:r="http://schemas.openxmlformats.org/officeDocument/2006/relationships" xmlns:a="http://schemas.openxmlformats.org/drawingml/2006/main" r:embed="Re8c5d0cf7a694fb9"/>
+          <a:blip xmlns:r="http://schemas.openxmlformats.org/officeDocument/2006/relationships" xmlns:a="http://schemas.openxmlformats.org/drawingml/2006/main" r:embed="R66948803f0be472d"/>
           <a:srcRect xmlns:a="http://schemas.openxmlformats.org/drawingml/2006/main" l="0" t="2174" r="0" b="2174"/>
           <a:stretch xmlns:a="http://schemas.openxmlformats.org/drawingml/2006/main">
             <a:fillRect l="0" t="0" r="0" b="0"/>
@@ -8372,7 +8378,7 @@
                 <a:latin typeface="PingFang SC"/>
                 <a:ea typeface="PingFang SC"/>
                 <a:cs typeface="PingFang SC"/>
-                <a:hlinkClick xmlns:r="http://schemas.openxmlformats.org/officeDocument/2006/relationships" r:id="Rfaa5e54138d74062"/>
+                <a:hlinkClick xmlns:r="http://schemas.openxmlformats.org/officeDocument/2006/relationships" r:id="R2b80941209464b7e"/>
               </a:rPr>
               <a:t>▶ 在线跑六步</a:t>
             </a:r>
@@ -8424,7 +8430,7 @@
                 <a:latin typeface="PingFang SC"/>
                 <a:ea typeface="PingFang SC"/>
                 <a:cs typeface="PingFang SC"/>
-                <a:hlinkClick xmlns:r="http://schemas.openxmlformats.org/officeDocument/2006/relationships" r:id="Re0fe6c5662284923"/>
+                <a:hlinkClick xmlns:r="http://schemas.openxmlformats.org/officeDocument/2006/relationships" r:id="R5813971fd8844019"/>
               </a:rPr>
               <a:t>结果备份 ↗</a:t>
             </a:r>
@@ -8499,6 +8505,7 @@
           <a:lstStyle xmlns:a="http://schemas.openxmlformats.org/drawingml/2006/main"/>
           <a:p xmlns:a="http://schemas.openxmlformats.org/drawingml/2006/main">
             <a:pPr algn="l">
+              <a:buNone/>
               <a:defRPr sz="1725" b="1">
                 <a:solidFill>
                   <a:srgbClr val="111C31"/>
@@ -8551,6 +8558,7 @@
           <a:lstStyle xmlns:a="http://schemas.openxmlformats.org/drawingml/2006/main"/>
           <a:p xmlns:a="http://schemas.openxmlformats.org/drawingml/2006/main">
             <a:pPr algn="l">
+              <a:buNone/>
               <a:defRPr sz="1238" b="0">
                 <a:solidFill>
                   <a:srgbClr val="6E7A90"/>
@@ -8636,6 +8644,7 @@
           <a:lstStyle xmlns:a="http://schemas.openxmlformats.org/drawingml/2006/main"/>
           <a:p xmlns:a="http://schemas.openxmlformats.org/drawingml/2006/main">
             <a:pPr algn="l">
+              <a:buNone/>
               <a:defRPr sz="1725" b="1">
                 <a:solidFill>
                   <a:srgbClr val="111C31"/>
@@ -8688,6 +8697,7 @@
           <a:lstStyle xmlns:a="http://schemas.openxmlformats.org/drawingml/2006/main"/>
           <a:p xmlns:a="http://schemas.openxmlformats.org/drawingml/2006/main">
             <a:pPr algn="l">
+              <a:buNone/>
               <a:defRPr sz="1238" b="0">
                 <a:solidFill>
                   <a:srgbClr val="6E7A90"/>
@@ -8773,6 +8783,7 @@
           <a:lstStyle xmlns:a="http://schemas.openxmlformats.org/drawingml/2006/main"/>
           <a:p xmlns:a="http://schemas.openxmlformats.org/drawingml/2006/main">
             <a:pPr algn="l">
+              <a:buNone/>
               <a:defRPr sz="1725" b="1">
                 <a:solidFill>
                   <a:srgbClr val="111C31"/>
@@ -8825,6 +8836,7 @@
           <a:lstStyle xmlns:a="http://schemas.openxmlformats.org/drawingml/2006/main"/>
           <a:p xmlns:a="http://schemas.openxmlformats.org/drawingml/2006/main">
             <a:pPr algn="l">
+              <a:buNone/>
               <a:defRPr sz="1238" b="0">
                 <a:solidFill>
                   <a:srgbClr val="6E7A90"/>
@@ -9382,14 +9394,14 @@
       </p:sp>
       <p:pic>
         <p:nvPicPr>
-          <p:cNvPr id="41" name=""/>
+          <p:cNvPr id="42" name=""/>
           <p:cNvPicPr>
             <a:picLocks xmlns:a="http://schemas.openxmlformats.org/drawingml/2006/main" noChangeAspect="1"/>
           </p:cNvPicPr>
           <p:nvPr/>
         </p:nvPicPr>
         <p:blipFill>
-          <a:blip xmlns:r="http://schemas.openxmlformats.org/officeDocument/2006/relationships" xmlns:a="http://schemas.openxmlformats.org/drawingml/2006/main" r:embed="R17ef752269df43fd"/>
+          <a:blip xmlns:r="http://schemas.openxmlformats.org/officeDocument/2006/relationships" xmlns:a="http://schemas.openxmlformats.org/drawingml/2006/main" r:embed="R2d4913c9b9b34d0a"/>
           <a:srcRect xmlns:a="http://schemas.openxmlformats.org/drawingml/2006/main" l="0" t="8152" r="0" b="8152"/>
           <a:stretch xmlns:a="http://schemas.openxmlformats.org/drawingml/2006/main">
             <a:fillRect l="0" t="0" r="0" b="0"/>
@@ -9458,7 +9470,7 @@
                 <a:latin typeface="PingFang SC"/>
                 <a:ea typeface="PingFang SC"/>
                 <a:cs typeface="PingFang SC"/>
-                <a:hlinkClick xmlns:r="http://schemas.openxmlformats.org/officeDocument/2006/relationships" r:id="R2a9b2d98098e4c29"/>
+                <a:hlinkClick xmlns:r="http://schemas.openxmlformats.org/officeDocument/2006/relationships" r:id="R3070979f640549f9"/>
               </a:rPr>
               <a:t>▶ 在线 Demo</a:t>
             </a:r>
@@ -9510,7 +9522,7 @@
                 <a:latin typeface="PingFang SC"/>
                 <a:ea typeface="PingFang SC"/>
                 <a:cs typeface="PingFang SC"/>
-                <a:hlinkClick xmlns:r="http://schemas.openxmlformats.org/officeDocument/2006/relationships" r:id="R4514b347417642a8"/>
+                <a:hlinkClick xmlns:r="http://schemas.openxmlformats.org/officeDocument/2006/relationships" r:id="R2b84486177f742a0"/>
               </a:rPr>
               <a:t>结果备份 ↗</a:t>
             </a:r>
@@ -9585,6 +9597,7 @@
           <a:lstStyle xmlns:a="http://schemas.openxmlformats.org/drawingml/2006/main"/>
           <a:p xmlns:a="http://schemas.openxmlformats.org/drawingml/2006/main">
             <a:pPr algn="l">
+              <a:buNone/>
               <a:defRPr sz="1725" b="1">
                 <a:solidFill>
                   <a:srgbClr val="111C31"/>
@@ -9637,6 +9650,7 @@
           <a:lstStyle xmlns:a="http://schemas.openxmlformats.org/drawingml/2006/main"/>
           <a:p xmlns:a="http://schemas.openxmlformats.org/drawingml/2006/main">
             <a:pPr algn="l">
+              <a:buNone/>
               <a:defRPr sz="1238" b="0">
                 <a:solidFill>
                   <a:srgbClr val="6E7A90"/>
@@ -9722,6 +9736,7 @@
           <a:lstStyle xmlns:a="http://schemas.openxmlformats.org/drawingml/2006/main"/>
           <a:p xmlns:a="http://schemas.openxmlformats.org/drawingml/2006/main">
             <a:pPr algn="l">
+              <a:buNone/>
               <a:defRPr sz="1725" b="1">
                 <a:solidFill>
                   <a:srgbClr val="111C31"/>
@@ -9774,6 +9789,7 @@
           <a:lstStyle xmlns:a="http://schemas.openxmlformats.org/drawingml/2006/main"/>
           <a:p xmlns:a="http://schemas.openxmlformats.org/drawingml/2006/main">
             <a:pPr algn="l">
+              <a:buNone/>
               <a:defRPr sz="1238" b="0">
                 <a:solidFill>
                   <a:srgbClr val="6E7A90"/>
@@ -9859,6 +9875,7 @@
           <a:lstStyle xmlns:a="http://schemas.openxmlformats.org/drawingml/2006/main"/>
           <a:p xmlns:a="http://schemas.openxmlformats.org/drawingml/2006/main">
             <a:pPr algn="l">
+              <a:buNone/>
               <a:defRPr sz="1725" b="1">
                 <a:solidFill>
                   <a:srgbClr val="111C31"/>
@@ -9911,6 +9928,7 @@
           <a:lstStyle xmlns:a="http://schemas.openxmlformats.org/drawingml/2006/main"/>
           <a:p xmlns:a="http://schemas.openxmlformats.org/drawingml/2006/main">
             <a:pPr algn="l">
+              <a:buNone/>
               <a:defRPr sz="1238" b="0">
                 <a:solidFill>
                   <a:srgbClr val="6E7A90"/>
@@ -10468,14 +10486,14 @@
       </p:sp>
       <p:pic>
         <p:nvPicPr>
-          <p:cNvPr id="41" name=""/>
+          <p:cNvPr id="42" name=""/>
           <p:cNvPicPr>
             <a:picLocks xmlns:a="http://schemas.openxmlformats.org/drawingml/2006/main" noChangeAspect="1"/>
           </p:cNvPicPr>
           <p:nvPr/>
         </p:nvPicPr>
         <p:blipFill>
-          <a:blip xmlns:r="http://schemas.openxmlformats.org/officeDocument/2006/relationships" xmlns:a="http://schemas.openxmlformats.org/drawingml/2006/main" r:embed="R4576bd49b12848c7"/>
+          <a:blip xmlns:r="http://schemas.openxmlformats.org/officeDocument/2006/relationships" xmlns:a="http://schemas.openxmlformats.org/drawingml/2006/main" r:embed="R19db4d48e7554858"/>
           <a:srcRect xmlns:a="http://schemas.openxmlformats.org/drawingml/2006/main" l="0" t="2174" r="0" b="2174"/>
           <a:stretch xmlns:a="http://schemas.openxmlformats.org/drawingml/2006/main">
             <a:fillRect l="0" t="0" r="0" b="0"/>
@@ -10544,7 +10562,7 @@
                 <a:latin typeface="PingFang SC"/>
                 <a:ea typeface="PingFang SC"/>
                 <a:cs typeface="PingFang SC"/>
-                <a:hlinkClick xmlns:r="http://schemas.openxmlformats.org/officeDocument/2006/relationships" r:id="Rc70b3bfbb9cf4f0b"/>
+                <a:hlinkClick xmlns:r="http://schemas.openxmlformats.org/officeDocument/2006/relationships" r:id="Rff31fb86fa01495e"/>
               </a:rPr>
               <a:t>▶ 在线 Demo</a:t>
             </a:r>
@@ -10596,7 +10614,7 @@
                 <a:latin typeface="PingFang SC"/>
                 <a:ea typeface="PingFang SC"/>
                 <a:cs typeface="PingFang SC"/>
-                <a:hlinkClick xmlns:r="http://schemas.openxmlformats.org/officeDocument/2006/relationships" r:id="Rf723d50c0ef74891"/>
+                <a:hlinkClick xmlns:r="http://schemas.openxmlformats.org/officeDocument/2006/relationships" r:id="Rce631c926e3b49e3"/>
               </a:rPr>
               <a:t>结果备份 ↗</a:t>
             </a:r>
@@ -10671,6 +10689,7 @@
           <a:lstStyle xmlns:a="http://schemas.openxmlformats.org/drawingml/2006/main"/>
           <a:p xmlns:a="http://schemas.openxmlformats.org/drawingml/2006/main">
             <a:pPr algn="l">
+              <a:buNone/>
               <a:defRPr sz="1725" b="1">
                 <a:solidFill>
                   <a:srgbClr val="111C31"/>
@@ -10723,6 +10742,7 @@
           <a:lstStyle xmlns:a="http://schemas.openxmlformats.org/drawingml/2006/main"/>
           <a:p xmlns:a="http://schemas.openxmlformats.org/drawingml/2006/main">
             <a:pPr algn="l">
+              <a:buNone/>
               <a:defRPr sz="1238" b="0">
                 <a:solidFill>
                   <a:srgbClr val="6E7A90"/>
@@ -10808,6 +10828,7 @@
           <a:lstStyle xmlns:a="http://schemas.openxmlformats.org/drawingml/2006/main"/>
           <a:p xmlns:a="http://schemas.openxmlformats.org/drawingml/2006/main">
             <a:pPr algn="l">
+              <a:buNone/>
               <a:defRPr sz="1725" b="1">
                 <a:solidFill>
                   <a:srgbClr val="111C31"/>
@@ -10860,6 +10881,7 @@
           <a:lstStyle xmlns:a="http://schemas.openxmlformats.org/drawingml/2006/main"/>
           <a:p xmlns:a="http://schemas.openxmlformats.org/drawingml/2006/main">
             <a:pPr algn="l">
+              <a:buNone/>
               <a:defRPr sz="1238" b="0">
                 <a:solidFill>
                   <a:srgbClr val="6E7A90"/>
@@ -10945,6 +10967,7 @@
           <a:lstStyle xmlns:a="http://schemas.openxmlformats.org/drawingml/2006/main"/>
           <a:p xmlns:a="http://schemas.openxmlformats.org/drawingml/2006/main">
             <a:pPr algn="l">
+              <a:buNone/>
               <a:defRPr sz="1725" b="1">
                 <a:solidFill>
                   <a:srgbClr val="111C31"/>
@@ -10997,6 +11020,7 @@
           <a:lstStyle xmlns:a="http://schemas.openxmlformats.org/drawingml/2006/main"/>
           <a:p xmlns:a="http://schemas.openxmlformats.org/drawingml/2006/main">
             <a:pPr algn="l">
+              <a:buNone/>
               <a:defRPr sz="1238" b="0">
                 <a:solidFill>
                   <a:srgbClr val="6E7A90"/>
@@ -11554,14 +11578,14 @@
       </p:sp>
       <p:pic>
         <p:nvPicPr>
-          <p:cNvPr id="41" name=""/>
+          <p:cNvPr id="42" name=""/>
           <p:cNvPicPr>
             <a:picLocks xmlns:a="http://schemas.openxmlformats.org/drawingml/2006/main" noChangeAspect="1"/>
           </p:cNvPicPr>
           <p:nvPr/>
         </p:nvPicPr>
         <p:blipFill>
-          <a:blip xmlns:r="http://schemas.openxmlformats.org/officeDocument/2006/relationships" xmlns:a="http://schemas.openxmlformats.org/drawingml/2006/main" r:embed="Rc95162b325864c92"/>
+          <a:blip xmlns:r="http://schemas.openxmlformats.org/officeDocument/2006/relationships" xmlns:a="http://schemas.openxmlformats.org/drawingml/2006/main" r:embed="Rfebf4aa03b654fc0"/>
           <a:srcRect xmlns:a="http://schemas.openxmlformats.org/drawingml/2006/main" l="0" t="8152" r="0" b="8152"/>
           <a:stretch xmlns:a="http://schemas.openxmlformats.org/drawingml/2006/main">
             <a:fillRect l="0" t="0" r="0" b="0"/>
@@ -11630,7 +11654,7 @@
                 <a:latin typeface="PingFang SC"/>
                 <a:ea typeface="PingFang SC"/>
                 <a:cs typeface="PingFang SC"/>
-                <a:hlinkClick xmlns:r="http://schemas.openxmlformats.org/officeDocument/2006/relationships" r:id="R74b7230a8d954be4"/>
+                <a:hlinkClick xmlns:r="http://schemas.openxmlformats.org/officeDocument/2006/relationships" r:id="R53e5d50961254881"/>
               </a:rPr>
               <a:t>▶ 在线 Demo</a:t>
             </a:r>
@@ -11682,7 +11706,7 @@
                 <a:latin typeface="PingFang SC"/>
                 <a:ea typeface="PingFang SC"/>
                 <a:cs typeface="PingFang SC"/>
-                <a:hlinkClick xmlns:r="http://schemas.openxmlformats.org/officeDocument/2006/relationships" r:id="Rfe1196de1277461b"/>
+                <a:hlinkClick xmlns:r="http://schemas.openxmlformats.org/officeDocument/2006/relationships" r:id="Rb298058611de4da2"/>
               </a:rPr>
               <a:t>结果备份 ↗</a:t>
             </a:r>
@@ -11757,6 +11781,7 @@
           <a:lstStyle xmlns:a="http://schemas.openxmlformats.org/drawingml/2006/main"/>
           <a:p xmlns:a="http://schemas.openxmlformats.org/drawingml/2006/main">
             <a:pPr algn="l">
+              <a:buNone/>
               <a:defRPr sz="1725" b="1">
                 <a:solidFill>
                   <a:srgbClr val="111C31"/>
@@ -11809,6 +11834,7 @@
           <a:lstStyle xmlns:a="http://schemas.openxmlformats.org/drawingml/2006/main"/>
           <a:p xmlns:a="http://schemas.openxmlformats.org/drawingml/2006/main">
             <a:pPr algn="l">
+              <a:buNone/>
               <a:defRPr sz="1238" b="0">
                 <a:solidFill>
                   <a:srgbClr val="6E7A90"/>
@@ -11894,6 +11920,7 @@
           <a:lstStyle xmlns:a="http://schemas.openxmlformats.org/drawingml/2006/main"/>
           <a:p xmlns:a="http://schemas.openxmlformats.org/drawingml/2006/main">
             <a:pPr algn="l">
+              <a:buNone/>
               <a:defRPr sz="1725" b="1">
                 <a:solidFill>
                   <a:srgbClr val="111C31"/>
@@ -11946,6 +11973,7 @@
           <a:lstStyle xmlns:a="http://schemas.openxmlformats.org/drawingml/2006/main"/>
           <a:p xmlns:a="http://schemas.openxmlformats.org/drawingml/2006/main">
             <a:pPr algn="l">
+              <a:buNone/>
               <a:defRPr sz="1238" b="0">
                 <a:solidFill>
                   <a:srgbClr val="6E7A90"/>
@@ -12031,6 +12059,7 @@
           <a:lstStyle xmlns:a="http://schemas.openxmlformats.org/drawingml/2006/main"/>
           <a:p xmlns:a="http://schemas.openxmlformats.org/drawingml/2006/main">
             <a:pPr algn="l">
+              <a:buNone/>
               <a:defRPr sz="1725" b="1">
                 <a:solidFill>
                   <a:srgbClr val="111C31"/>
@@ -12083,6 +12112,7 @@
           <a:lstStyle xmlns:a="http://schemas.openxmlformats.org/drawingml/2006/main"/>
           <a:p xmlns:a="http://schemas.openxmlformats.org/drawingml/2006/main">
             <a:pPr algn="l">
+              <a:buNone/>
               <a:defRPr sz="1238" b="0">
                 <a:solidFill>
                   <a:srgbClr val="6E7A90"/>

--- a/submission/EvalCall决赛提交包-20260715/01_EvalCall决赛PPT-最终提交版.pptx
+++ b/submission/EvalCall决赛提交包-20260715/01_EvalCall决赛PPT-最终提交版.pptx
@@ -2,21 +2,21 @@
 <file path=ppt/presentation.xml><?xml version="1.0" encoding="utf-8"?>
 <p:presentation xmlns:p="http://schemas.openxmlformats.org/presentationml/2006/main">
   <p:sldMasterIdLst>
-    <p:sldMasterId xmlns:r="http://schemas.openxmlformats.org/officeDocument/2006/relationships" id="2147483648" r:id="Raccf9b20c2d845a7"/>
+    <p:sldMasterId xmlns:r="http://schemas.openxmlformats.org/officeDocument/2006/relationships" id="2147483648" r:id="R5d0627675b83420e"/>
   </p:sldMasterIdLst>
   <p:notesMasterIdLst>
-    <p:notesMasterId xmlns:r="http://schemas.openxmlformats.org/officeDocument/2006/relationships" r:id="Ra877ad6c90384a43"/>
+    <p:notesMasterId xmlns:r="http://schemas.openxmlformats.org/officeDocument/2006/relationships" r:id="Rbda9cb0d8a8f4807"/>
   </p:notesMasterIdLst>
   <p:sldIdLst>
-    <p:sldId xmlns:r="http://schemas.openxmlformats.org/officeDocument/2006/relationships" id="256" r:id="R20738b59c50d436f"/>
-    <p:sldId xmlns:r="http://schemas.openxmlformats.org/officeDocument/2006/relationships" id="257" r:id="R0f1a63dca1c14cdf"/>
-    <p:sldId xmlns:r="http://schemas.openxmlformats.org/officeDocument/2006/relationships" id="258" r:id="R1ecb4381e19140e8"/>
-    <p:sldId xmlns:r="http://schemas.openxmlformats.org/officeDocument/2006/relationships" id="259" r:id="R7f3ef8aec69d4ecd"/>
-    <p:sldId xmlns:r="http://schemas.openxmlformats.org/officeDocument/2006/relationships" id="260" r:id="R5fec3e7b371b4619"/>
-    <p:sldId xmlns:r="http://schemas.openxmlformats.org/officeDocument/2006/relationships" id="261" r:id="Rd48c294b4c0a432f"/>
-    <p:sldId xmlns:r="http://schemas.openxmlformats.org/officeDocument/2006/relationships" id="262" r:id="Re33e345d80de4b55"/>
-    <p:sldId xmlns:r="http://schemas.openxmlformats.org/officeDocument/2006/relationships" id="263" r:id="Red15dd8fc50d48b3"/>
-    <p:sldId xmlns:r="http://schemas.openxmlformats.org/officeDocument/2006/relationships" id="264" r:id="R2c813f8b44574722"/>
+    <p:sldId xmlns:r="http://schemas.openxmlformats.org/officeDocument/2006/relationships" id="256" r:id="R02b8ab2037e9416e"/>
+    <p:sldId xmlns:r="http://schemas.openxmlformats.org/officeDocument/2006/relationships" id="257" r:id="R19961b8e0e744c7c"/>
+    <p:sldId xmlns:r="http://schemas.openxmlformats.org/officeDocument/2006/relationships" id="258" r:id="R8432e9d5364e4f93"/>
+    <p:sldId xmlns:r="http://schemas.openxmlformats.org/officeDocument/2006/relationships" id="259" r:id="R2c9a2eb38e154143"/>
+    <p:sldId xmlns:r="http://schemas.openxmlformats.org/officeDocument/2006/relationships" id="260" r:id="Rb6adecab27954998"/>
+    <p:sldId xmlns:r="http://schemas.openxmlformats.org/officeDocument/2006/relationships" id="261" r:id="R1a5a7d249fc84401"/>
+    <p:sldId xmlns:r="http://schemas.openxmlformats.org/officeDocument/2006/relationships" id="262" r:id="R4e15b107001b48fa"/>
+    <p:sldId xmlns:r="http://schemas.openxmlformats.org/officeDocument/2006/relationships" id="263" r:id="R3917fcd3b0b141aa"/>
+    <p:sldId xmlns:r="http://schemas.openxmlformats.org/officeDocument/2006/relationships" id="264" r:id="R4d433e1fab8e4e29"/>
   </p:sldIdLst>
   <p:sldSz cx="12192000" cy="6858000"/>
   <p:notesSz cx="6858000" cy="9144000"/>
@@ -1238,7 +1238,7 @@
   </p:cSld>
   <p:clrMap bg1="lt1" tx1="dk1" bg2="lt2" tx2="dk2" accent1="accent1" accent2="accent2" accent3="accent3" accent4="accent4" accent5="accent5" accent6="accent6" hlink="hlink" folHlink="folHlink"/>
   <p:sldLayoutIdLst>
-    <p:sldLayoutId xmlns:r="http://schemas.openxmlformats.org/officeDocument/2006/relationships" id="2147483649" r:id="R2078dab3c8f54e11"/>
+    <p:sldLayoutId xmlns:r="http://schemas.openxmlformats.org/officeDocument/2006/relationships" id="2147483649" r:id="R844a27c395bc4dea"/>
   </p:sldLayoutIdLst>
   <p:txStyles>
     <p:titleStyle>
@@ -1793,7 +1793,7 @@
           <p:nvPr/>
         </p:nvPicPr>
         <p:blipFill>
-          <a:blip xmlns:r="http://schemas.openxmlformats.org/officeDocument/2006/relationships" xmlns:a="http://schemas.openxmlformats.org/drawingml/2006/main" r:embed="R842447d322514666"/>
+          <a:blip xmlns:r="http://schemas.openxmlformats.org/officeDocument/2006/relationships" xmlns:a="http://schemas.openxmlformats.org/drawingml/2006/main" r:embed="R8fde023e631849dd"/>
           <a:srcRect xmlns:a="http://schemas.openxmlformats.org/drawingml/2006/main" l="0" t="27" r="0" b="27"/>
           <a:stretch xmlns:a="http://schemas.openxmlformats.org/drawingml/2006/main">
             <a:fillRect l="0" t="0" r="0" b="0"/>
@@ -3948,7 +3948,7 @@
                 <a:latin typeface="PingFang SC"/>
                 <a:ea typeface="PingFang SC"/>
                 <a:cs typeface="PingFang SC"/>
-                <a:hlinkClick xmlns:r="http://schemas.openxmlformats.org/officeDocument/2006/relationships" r:id="R03820dcd81b74ead"/>
+                <a:hlinkClick xmlns:r="http://schemas.openxmlformats.org/officeDocument/2006/relationships" r:id="Rf667beebe14f4e5c"/>
               </a:rPr>
               <a:t>▶ 在线 Demo</a:t>
             </a:r>
@@ -4000,7 +4000,7 @@
                 <a:latin typeface="PingFang SC"/>
                 <a:ea typeface="PingFang SC"/>
                 <a:cs typeface="PingFang SC"/>
-                <a:hlinkClick xmlns:r="http://schemas.openxmlformats.org/officeDocument/2006/relationships" r:id="R4914a3298ce74a05"/>
+                <a:hlinkClick xmlns:r="http://schemas.openxmlformats.org/officeDocument/2006/relationships" r:id="Rf70e0b62d9364fc9"/>
               </a:rPr>
               <a:t>结果备份 ↗</a:t>
             </a:r>
@@ -4042,6 +4042,7 @@
           <a:lstStyle xmlns:a="http://schemas.openxmlformats.org/drawingml/2006/main"/>
           <a:p xmlns:a="http://schemas.openxmlformats.org/drawingml/2006/main">
             <a:pPr algn="l">
+              <a:buNone/>
               <a:defRPr sz="1050" b="1">
                 <a:solidFill>
                   <a:srgbClr val="6E7A90"/>
@@ -4094,6 +4095,7 @@
           <a:lstStyle xmlns:a="http://schemas.openxmlformats.org/drawingml/2006/main"/>
           <a:p xmlns:a="http://schemas.openxmlformats.org/drawingml/2006/main">
             <a:pPr algn="l">
+              <a:buNone/>
               <a:defRPr sz="2850" b="1">
                 <a:solidFill>
                   <a:srgbClr val="111C31"/>
@@ -4332,6 +4334,7 @@
           <a:lstStyle xmlns:a="http://schemas.openxmlformats.org/drawingml/2006/main"/>
           <a:p xmlns:a="http://schemas.openxmlformats.org/drawingml/2006/main">
             <a:pPr algn="ctr">
+              <a:buNone/>
               <a:defRPr sz="975" b="1">
                 <a:solidFill>
                   <a:srgbClr val="6E7A90"/>
@@ -4384,6 +4387,7 @@
           <a:lstStyle xmlns:a="http://schemas.openxmlformats.org/drawingml/2006/main"/>
           <a:p xmlns:a="http://schemas.openxmlformats.org/drawingml/2006/main">
             <a:pPr algn="ctr">
+              <a:buNone/>
               <a:defRPr sz="975" b="1">
                 <a:solidFill>
                   <a:srgbClr val="6E7A90"/>
@@ -4436,6 +4440,7 @@
           <a:lstStyle xmlns:a="http://schemas.openxmlformats.org/drawingml/2006/main"/>
           <a:p xmlns:a="http://schemas.openxmlformats.org/drawingml/2006/main">
             <a:pPr algn="l">
+              <a:buNone/>
               <a:defRPr sz="975" b="1">
                 <a:solidFill>
                   <a:srgbClr val="6E7A90"/>
@@ -4488,6 +4493,7 @@
           <a:lstStyle xmlns:a="http://schemas.openxmlformats.org/drawingml/2006/main"/>
           <a:p xmlns:a="http://schemas.openxmlformats.org/drawingml/2006/main">
             <a:pPr algn="ctr">
+              <a:buNone/>
               <a:defRPr sz="975" b="1">
                 <a:solidFill>
                   <a:srgbClr val="6E7A90"/>
@@ -4540,6 +4546,7 @@
           <a:lstStyle xmlns:a="http://schemas.openxmlformats.org/drawingml/2006/main"/>
           <a:p xmlns:a="http://schemas.openxmlformats.org/drawingml/2006/main">
             <a:pPr algn="ctr">
+              <a:buNone/>
               <a:defRPr sz="975" b="1">
                 <a:solidFill>
                   <a:srgbClr val="6E7A90"/>
@@ -4625,6 +4632,7 @@
           <a:lstStyle xmlns:a="http://schemas.openxmlformats.org/drawingml/2006/main"/>
           <a:p xmlns:a="http://schemas.openxmlformats.org/drawingml/2006/main">
             <a:pPr algn="ctr">
+              <a:buNone/>
               <a:defRPr sz="1950" b="1">
                 <a:solidFill>
                   <a:srgbClr val="FFFFFF"/>
@@ -4677,6 +4685,7 @@
           <a:lstStyle xmlns:a="http://schemas.openxmlformats.org/drawingml/2006/main"/>
           <a:p xmlns:a="http://schemas.openxmlformats.org/drawingml/2006/main">
             <a:pPr algn="ctr">
+              <a:buNone/>
               <a:defRPr sz="1500" b="1">
                 <a:solidFill>
                   <a:srgbClr val="111C31"/>
@@ -4762,6 +4771,7 @@
           <a:lstStyle xmlns:a="http://schemas.openxmlformats.org/drawingml/2006/main"/>
           <a:p xmlns:a="http://schemas.openxmlformats.org/drawingml/2006/main">
             <a:pPr algn="ctr">
+              <a:buNone/>
               <a:defRPr sz="1950" b="1">
                 <a:solidFill>
                   <a:srgbClr val="FFFFFF"/>
@@ -4814,6 +4824,7 @@
           <a:lstStyle xmlns:a="http://schemas.openxmlformats.org/drawingml/2006/main"/>
           <a:p xmlns:a="http://schemas.openxmlformats.org/drawingml/2006/main">
             <a:pPr algn="ctr">
+              <a:buNone/>
               <a:defRPr sz="1500" b="1">
                 <a:solidFill>
                   <a:srgbClr val="111C31"/>
@@ -4899,6 +4910,7 @@
           <a:lstStyle xmlns:a="http://schemas.openxmlformats.org/drawingml/2006/main"/>
           <a:p xmlns:a="http://schemas.openxmlformats.org/drawingml/2006/main">
             <a:pPr algn="ctr">
+              <a:buNone/>
               <a:defRPr sz="1950" b="1">
                 <a:solidFill>
                   <a:srgbClr val="FFFFFF"/>
@@ -4951,6 +4963,7 @@
           <a:lstStyle xmlns:a="http://schemas.openxmlformats.org/drawingml/2006/main"/>
           <a:p xmlns:a="http://schemas.openxmlformats.org/drawingml/2006/main">
             <a:pPr algn="ctr">
+              <a:buNone/>
               <a:defRPr sz="1500" b="1">
                 <a:solidFill>
                   <a:srgbClr val="111C31"/>
@@ -5036,6 +5049,7 @@
           <a:lstStyle xmlns:a="http://schemas.openxmlformats.org/drawingml/2006/main"/>
           <a:p xmlns:a="http://schemas.openxmlformats.org/drawingml/2006/main">
             <a:pPr algn="ctr">
+              <a:buNone/>
               <a:defRPr sz="1950" b="1">
                 <a:solidFill>
                   <a:srgbClr val="111C31"/>
@@ -5088,6 +5102,7 @@
           <a:lstStyle xmlns:a="http://schemas.openxmlformats.org/drawingml/2006/main"/>
           <a:p xmlns:a="http://schemas.openxmlformats.org/drawingml/2006/main">
             <a:pPr algn="ctr">
+              <a:buNone/>
               <a:defRPr sz="1500" b="1">
                 <a:solidFill>
                   <a:srgbClr val="111C31"/>
@@ -5173,6 +5188,7 @@
           <a:lstStyle xmlns:a="http://schemas.openxmlformats.org/drawingml/2006/main"/>
           <a:p xmlns:a="http://schemas.openxmlformats.org/drawingml/2006/main">
             <a:pPr algn="ctr">
+              <a:buNone/>
               <a:defRPr sz="1950" b="1">
                 <a:solidFill>
                   <a:srgbClr val="FFFFFF"/>
@@ -5225,6 +5241,7 @@
           <a:lstStyle xmlns:a="http://schemas.openxmlformats.org/drawingml/2006/main"/>
           <a:p xmlns:a="http://schemas.openxmlformats.org/drawingml/2006/main">
             <a:pPr algn="ctr">
+              <a:buNone/>
               <a:defRPr sz="1500" b="1">
                 <a:solidFill>
                   <a:srgbClr val="111C31"/>
@@ -5310,6 +5327,7 @@
           <a:lstStyle xmlns:a="http://schemas.openxmlformats.org/drawingml/2006/main"/>
           <a:p xmlns:a="http://schemas.openxmlformats.org/drawingml/2006/main">
             <a:pPr algn="ctr">
+              <a:buNone/>
               <a:defRPr sz="1950" b="1">
                 <a:solidFill>
                   <a:srgbClr val="111C31"/>
@@ -5362,6 +5380,7 @@
           <a:lstStyle xmlns:a="http://schemas.openxmlformats.org/drawingml/2006/main"/>
           <a:p xmlns:a="http://schemas.openxmlformats.org/drawingml/2006/main">
             <a:pPr algn="ctr">
+              <a:buNone/>
               <a:defRPr sz="1500" b="1">
                 <a:solidFill>
                   <a:srgbClr val="111C31"/>
@@ -5447,6 +5466,7 @@
           <a:lstStyle xmlns:a="http://schemas.openxmlformats.org/drawingml/2006/main"/>
           <a:p xmlns:a="http://schemas.openxmlformats.org/drawingml/2006/main">
             <a:pPr algn="ctr">
+              <a:buNone/>
               <a:defRPr sz="1350" b="1">
                 <a:solidFill>
                   <a:srgbClr val="111C31"/>
@@ -5561,6 +5581,7 @@
           <a:lstStyle xmlns:a="http://schemas.openxmlformats.org/drawingml/2006/main"/>
           <a:p xmlns:a="http://schemas.openxmlformats.org/drawingml/2006/main">
             <a:pPr algn="r">
+              <a:buNone/>
               <a:defRPr sz="750" b="0">
                 <a:solidFill>
                   <a:srgbClr val="6E7A90"/>
@@ -6125,7 +6146,7 @@
           <p:nvPr/>
         </p:nvPicPr>
         <p:blipFill>
-          <a:blip xmlns:r="http://schemas.openxmlformats.org/officeDocument/2006/relationships" xmlns:a="http://schemas.openxmlformats.org/drawingml/2006/main" r:embed="R8085ad5ec3224e6e"/>
+          <a:blip xmlns:r="http://schemas.openxmlformats.org/officeDocument/2006/relationships" xmlns:a="http://schemas.openxmlformats.org/drawingml/2006/main" r:embed="R01cd5a33f4b94c95"/>
           <a:srcRect xmlns:a="http://schemas.openxmlformats.org/drawingml/2006/main" l="0" t="2174" r="0" b="2174"/>
           <a:stretch xmlns:a="http://schemas.openxmlformats.org/drawingml/2006/main">
             <a:fillRect l="0" t="0" r="0" b="0"/>
@@ -6194,7 +6215,7 @@
                 <a:latin typeface="PingFang SC"/>
                 <a:ea typeface="PingFang SC"/>
                 <a:cs typeface="PingFang SC"/>
-                <a:hlinkClick xmlns:r="http://schemas.openxmlformats.org/officeDocument/2006/relationships" r:id="R40c1af5816514d7c"/>
+                <a:hlinkClick xmlns:r="http://schemas.openxmlformats.org/officeDocument/2006/relationships" r:id="Rfe1f8d2ad3664188"/>
               </a:rPr>
               <a:t>▶ 在线 Demo</a:t>
             </a:r>
@@ -6246,7 +6267,7 @@
                 <a:latin typeface="PingFang SC"/>
                 <a:ea typeface="PingFang SC"/>
                 <a:cs typeface="PingFang SC"/>
-                <a:hlinkClick xmlns:r="http://schemas.openxmlformats.org/officeDocument/2006/relationships" r:id="Re8be0e8d9496440a"/>
+                <a:hlinkClick xmlns:r="http://schemas.openxmlformats.org/officeDocument/2006/relationships" r:id="Rdfd34c3ae79a4460"/>
               </a:rPr>
               <a:t>结果备份 ↗</a:t>
             </a:r>
@@ -6387,7 +6408,7 @@
                   <a:srgbClr val="6E7A90"/>
                 </a:solidFill>
               </a:rPr>
-              <a:t>评测输入和版本经常变化，导致不同模型结果无法公平比较。</a:t>
+              <a:t>不同模型缺少统一测试条件，无法判断版本是否真正提升。</a:t>
             </a:r>
           </a:p>
         </p:txBody>
@@ -6473,7 +6494,7 @@
                   <a:srgbClr val="111C31"/>
                 </a:solidFill>
               </a:rPr>
-              <a:t>这么设计是怎么实现的</a:t>
+              <a:t>怎么实现</a:t>
             </a:r>
           </a:p>
         </p:txBody>
@@ -6526,7 +6547,7 @@
                   <a:srgbClr val="6E7A90"/>
                 </a:solidFill>
               </a:rPr>
-              <a:t>同时支持模拟测试和已有日志；将模型、SOP、用户批次统一写入任务包并计算哈希。</a:t>
+              <a:t>编排器统一封装模型、SOP、Persona和测试批次，并生成版本哈希。</a:t>
             </a:r>
           </a:p>
         </p:txBody>
@@ -6612,7 +6633,7 @@
                   <a:srgbClr val="111C31"/>
                 </a:solidFill>
               </a:rPr>
-              <a:t>这么设计的优势</a:t>
+              <a:t>设计优势</a:t>
             </a:r>
           </a:p>
         </p:txBody>
@@ -6665,7 +6686,7 @@
                   <a:srgbClr val="6E7A90"/>
                 </a:solidFill>
               </a:rPr>
-              <a:t>六步始终复用同一份输入事实，结果可复现、可追踪，也能进行真实版本对比。</a:t>
+              <a:t>控制测试变量，让不同模型能够公平比较、复现和追踪。</a:t>
             </a:r>
           </a:p>
         </p:txBody>
@@ -7217,7 +7238,7 @@
           <p:nvPr/>
         </p:nvPicPr>
         <p:blipFill>
-          <a:blip xmlns:r="http://schemas.openxmlformats.org/officeDocument/2006/relationships" xmlns:a="http://schemas.openxmlformats.org/drawingml/2006/main" r:embed="R5b9c019baddd46bf"/>
+          <a:blip xmlns:r="http://schemas.openxmlformats.org/officeDocument/2006/relationships" xmlns:a="http://schemas.openxmlformats.org/drawingml/2006/main" r:embed="R3fe1064bd83f4af7"/>
           <a:srcRect xmlns:a="http://schemas.openxmlformats.org/drawingml/2006/main" l="0" t="2174" r="0" b="2174"/>
           <a:stretch xmlns:a="http://schemas.openxmlformats.org/drawingml/2006/main">
             <a:fillRect l="0" t="0" r="0" b="0"/>
@@ -7286,7 +7307,7 @@
                 <a:latin typeface="PingFang SC"/>
                 <a:ea typeface="PingFang SC"/>
                 <a:cs typeface="PingFang SC"/>
-                <a:hlinkClick xmlns:r="http://schemas.openxmlformats.org/officeDocument/2006/relationships" r:id="Rfa8c4044328249f7"/>
+                <a:hlinkClick xmlns:r="http://schemas.openxmlformats.org/officeDocument/2006/relationships" r:id="R322533cfccbd4dce"/>
               </a:rPr>
               <a:t>▶ 在线 Demo</a:t>
             </a:r>
@@ -7338,7 +7359,7 @@
                 <a:latin typeface="PingFang SC"/>
                 <a:ea typeface="PingFang SC"/>
                 <a:cs typeface="PingFang SC"/>
-                <a:hlinkClick xmlns:r="http://schemas.openxmlformats.org/officeDocument/2006/relationships" r:id="R939a5b3b9b9348a2"/>
+                <a:hlinkClick xmlns:r="http://schemas.openxmlformats.org/officeDocument/2006/relationships" r:id="R21edcde5a4904598"/>
               </a:rPr>
               <a:t>结果备份 ↗</a:t>
             </a:r>
@@ -7479,7 +7500,7 @@
                   <a:srgbClr val="6E7A90"/>
                 </a:solidFill>
               </a:rPr>
-              <a:t>自然语言SOP存在歧义，Judge可能每次按照不同标准打分。</a:t>
+              <a:t>自然语言指令无法直接用于规模化判断模型是否逐条遵循。</a:t>
             </a:r>
           </a:p>
         </p:txBody>
@@ -7565,7 +7586,7 @@
                   <a:srgbClr val="111C31"/>
                 </a:solidFill>
               </a:rPr>
-              <a:t>这么设计是怎么实现的</a:t>
+              <a:t>怎么实现</a:t>
             </a:r>
           </a:p>
         </p:txBody>
@@ -7618,7 +7639,7 @@
                   <a:srgbClr val="6E7A90"/>
                 </a:solidFill>
               </a:rPr>
-              <a:t>把SOP编译成L0通用红线与L1业务规则；每个检查点保留来源、条件和严重度。</a:t>
+              <a:t>Checklist Agent将SOP编译成L0安全规则与L1业务检查点。</a:t>
             </a:r>
           </a:p>
         </p:txBody>
@@ -7704,7 +7725,7 @@
                   <a:srgbClr val="111C31"/>
                 </a:solidFill>
               </a:rPr>
-              <a:t>这么设计的优势</a:t>
+              <a:t>设计优势</a:t>
             </a:r>
           </a:p>
         </p:txBody>
@@ -7757,7 +7778,7 @@
                   <a:srgbClr val="6E7A90"/>
                 </a:solidFill>
               </a:rPr>
-              <a:t>评分标准从提示词变成可执行合同，既能自动评分，也能逐项审计和复核。</a:t>
+              <a:t>把模糊要求变成统一、可执行、可追溯的评分契约。</a:t>
             </a:r>
           </a:p>
         </p:txBody>
@@ -8309,7 +8330,7 @@
           <p:nvPr/>
         </p:nvPicPr>
         <p:blipFill>
-          <a:blip xmlns:r="http://schemas.openxmlformats.org/officeDocument/2006/relationships" xmlns:a="http://schemas.openxmlformats.org/drawingml/2006/main" r:embed="R66948803f0be472d"/>
+          <a:blip xmlns:r="http://schemas.openxmlformats.org/officeDocument/2006/relationships" xmlns:a="http://schemas.openxmlformats.org/drawingml/2006/main" r:embed="R4b21587e42904222"/>
           <a:srcRect xmlns:a="http://schemas.openxmlformats.org/drawingml/2006/main" l="0" t="2174" r="0" b="2174"/>
           <a:stretch xmlns:a="http://schemas.openxmlformats.org/drawingml/2006/main">
             <a:fillRect l="0" t="0" r="0" b="0"/>
@@ -8378,7 +8399,7 @@
                 <a:latin typeface="PingFang SC"/>
                 <a:ea typeface="PingFang SC"/>
                 <a:cs typeface="PingFang SC"/>
-                <a:hlinkClick xmlns:r="http://schemas.openxmlformats.org/officeDocument/2006/relationships" r:id="R2b80941209464b7e"/>
+                <a:hlinkClick xmlns:r="http://schemas.openxmlformats.org/officeDocument/2006/relationships" r:id="Rd6190458e5af44dc"/>
               </a:rPr>
               <a:t>▶ 在线跑六步</a:t>
             </a:r>
@@ -8430,7 +8451,7 @@
                 <a:latin typeface="PingFang SC"/>
                 <a:ea typeface="PingFang SC"/>
                 <a:cs typeface="PingFang SC"/>
-                <a:hlinkClick xmlns:r="http://schemas.openxmlformats.org/officeDocument/2006/relationships" r:id="R5813971fd8844019"/>
+                <a:hlinkClick xmlns:r="http://schemas.openxmlformats.org/officeDocument/2006/relationships" r:id="R0b305e3a67cf4b9b"/>
               </a:rPr>
               <a:t>结果备份 ↗</a:t>
             </a:r>
@@ -8571,7 +8592,7 @@
                   <a:srgbClr val="6E7A90"/>
                 </a:solidFill>
               </a:rPr>
-              <a:t>历史日志覆盖不到拒绝、打断、质疑等高风险对话边界。</a:t>
+              <a:t>历史日志覆盖不足，难以提前暴露高风险对话缺陷。</a:t>
             </a:r>
           </a:p>
         </p:txBody>
@@ -8657,7 +8678,7 @@
                   <a:srgbClr val="111C31"/>
                 </a:solidFill>
               </a:rPr>
-              <a:t>这么设计是怎么实现的</a:t>
+              <a:t>怎么实现</a:t>
             </a:r>
           </a:p>
         </p:txBody>
@@ -8710,7 +8731,7 @@
                   <a:srgbClr val="6E7A90"/>
                 </a:solidFill>
               </a:rPr>
-              <a:t>用户模拟器组合Persona、对抗目标和固定Seed，主动生成可复现的多轮测试对话。</a:t>
+              <a:t>用户模拟器根据Persona生成多轮对话，并追踪检查点覆盖率。</a:t>
             </a:r>
           </a:p>
         </p:txBody>
@@ -8796,7 +8817,7 @@
                   <a:srgbClr val="111C31"/>
                 </a:solidFill>
               </a:rPr>
-              <a:t>这么设计的优势</a:t>
+              <a:t>设计优势</a:t>
             </a:r>
           </a:p>
         </p:txBody>
@@ -8849,7 +8870,7 @@
                   <a:srgbClr val="6E7A90"/>
                 </a:solidFill>
               </a:rPr>
-              <a:t>上线前主动暴露脆弱点，同时保证两个模型版本面对完全相同的测试场景。</a:t>
+              <a:t>从被动抽查升级为主动测试，同时兼容已有日志质检。</a:t>
             </a:r>
           </a:p>
         </p:txBody>
@@ -9401,7 +9422,7 @@
           <p:nvPr/>
         </p:nvPicPr>
         <p:blipFill>
-          <a:blip xmlns:r="http://schemas.openxmlformats.org/officeDocument/2006/relationships" xmlns:a="http://schemas.openxmlformats.org/drawingml/2006/main" r:embed="R2d4913c9b9b34d0a"/>
+          <a:blip xmlns:r="http://schemas.openxmlformats.org/officeDocument/2006/relationships" xmlns:a="http://schemas.openxmlformats.org/drawingml/2006/main" r:embed="R22d60cd08c5646aa"/>
           <a:srcRect xmlns:a="http://schemas.openxmlformats.org/drawingml/2006/main" l="0" t="8152" r="0" b="8152"/>
           <a:stretch xmlns:a="http://schemas.openxmlformats.org/drawingml/2006/main">
             <a:fillRect l="0" t="0" r="0" b="0"/>
@@ -9470,7 +9491,7 @@
                 <a:latin typeface="PingFang SC"/>
                 <a:ea typeface="PingFang SC"/>
                 <a:cs typeface="PingFang SC"/>
-                <a:hlinkClick xmlns:r="http://schemas.openxmlformats.org/officeDocument/2006/relationships" r:id="R3070979f640549f9"/>
+                <a:hlinkClick xmlns:r="http://schemas.openxmlformats.org/officeDocument/2006/relationships" r:id="R03303ae739da4743"/>
               </a:rPr>
               <a:t>▶ 在线 Demo</a:t>
             </a:r>
@@ -9522,7 +9543,7 @@
                 <a:latin typeface="PingFang SC"/>
                 <a:ea typeface="PingFang SC"/>
                 <a:cs typeface="PingFang SC"/>
-                <a:hlinkClick xmlns:r="http://schemas.openxmlformats.org/officeDocument/2006/relationships" r:id="R2b84486177f742a0"/>
+                <a:hlinkClick xmlns:r="http://schemas.openxmlformats.org/officeDocument/2006/relationships" r:id="R987213c3eae54a6f"/>
               </a:rPr>
               <a:t>结果备份 ↗</a:t>
             </a:r>
@@ -9663,7 +9684,7 @@
                   <a:srgbClr val="6E7A90"/>
                 </a:solidFill>
               </a:rPr>
-              <a:t>平均分会掩盖P0、隐私泄露和关键流程中断，无法直接回答能否上线。</a:t>
+              <a:t>平均分无法反映P0风险，也无法直接支持上线决策。</a:t>
             </a:r>
           </a:p>
         </p:txBody>
@@ -9749,7 +9770,7 @@
                   <a:srgbClr val="111C31"/>
                 </a:solidFill>
               </a:rPr>
-              <a:t>这么设计是怎么实现的</a:t>
+              <a:t>怎么实现</a:t>
             </a:r>
           </a:p>
         </p:txBody>
@@ -9802,7 +9823,7 @@
                   <a:srgbClr val="6E7A90"/>
                 </a:solidFill>
               </a:rPr>
-              <a:t>同时计算门禁、履约率、P0和关键失败，并把每个结论绑定到原始对话证据。</a:t>
+              <a:t>Judge逐项引用证据判定，程序汇总履约、P0、覆盖率和门禁。</a:t>
             </a:r>
           </a:p>
         </p:txBody>
@@ -9888,7 +9909,7 @@
                   <a:srgbClr val="111C31"/>
                 </a:solidFill>
               </a:rPr>
-              <a:t>这么设计的优势</a:t>
+              <a:t>设计优势</a:t>
             </a:r>
           </a:p>
         </p:txBody>
@@ -9941,7 +9962,7 @@
                   <a:srgbClr val="6E7A90"/>
                 </a:solidFill>
               </a:rPr>
-              <a:t>报告直接支持发布决策；评委既能看到结论，也能追溯每一次打回的原因。</a:t>
+              <a:t>直接回答能否上线、失败在哪里，以及对应证据是什么。</a:t>
             </a:r>
           </a:p>
         </p:txBody>
@@ -10493,7 +10514,7 @@
           <p:nvPr/>
         </p:nvPicPr>
         <p:blipFill>
-          <a:blip xmlns:r="http://schemas.openxmlformats.org/officeDocument/2006/relationships" xmlns:a="http://schemas.openxmlformats.org/drawingml/2006/main" r:embed="R19db4d48e7554858"/>
+          <a:blip xmlns:r="http://schemas.openxmlformats.org/officeDocument/2006/relationships" xmlns:a="http://schemas.openxmlformats.org/drawingml/2006/main" r:embed="R93ee6c1fbc754254"/>
           <a:srcRect xmlns:a="http://schemas.openxmlformats.org/drawingml/2006/main" l="0" t="2174" r="0" b="2174"/>
           <a:stretch xmlns:a="http://schemas.openxmlformats.org/drawingml/2006/main">
             <a:fillRect l="0" t="0" r="0" b="0"/>
@@ -10562,7 +10583,7 @@
                 <a:latin typeface="PingFang SC"/>
                 <a:ea typeface="PingFang SC"/>
                 <a:cs typeface="PingFang SC"/>
-                <a:hlinkClick xmlns:r="http://schemas.openxmlformats.org/officeDocument/2006/relationships" r:id="Rff31fb86fa01495e"/>
+                <a:hlinkClick xmlns:r="http://schemas.openxmlformats.org/officeDocument/2006/relationships" r:id="R0aca70c6f8e34ec7"/>
               </a:rPr>
               <a:t>▶ 在线 Demo</a:t>
             </a:r>
@@ -10614,7 +10635,7 @@
                 <a:latin typeface="PingFang SC"/>
                 <a:ea typeface="PingFang SC"/>
                 <a:cs typeface="PingFang SC"/>
-                <a:hlinkClick xmlns:r="http://schemas.openxmlformats.org/officeDocument/2006/relationships" r:id="Rce631c926e3b49e3"/>
+                <a:hlinkClick xmlns:r="http://schemas.openxmlformats.org/officeDocument/2006/relationships" r:id="R116f25c1455243fc"/>
               </a:rPr>
               <a:t>结果备份 ↗</a:t>
             </a:r>
@@ -10755,7 +10776,7 @@
                   <a:srgbClr val="6E7A90"/>
                 </a:solidFill>
               </a:rPr>
-              <a:t>低分不一定来自模型，也可能是SOP、裁判或测试覆盖的问题。</a:t>
+              <a:t>低分不一定来自模型，错误归因会导致修改错误对象。</a:t>
             </a:r>
           </a:p>
         </p:txBody>
@@ -10841,7 +10862,7 @@
                   <a:srgbClr val="111C31"/>
                 </a:solidFill>
               </a:rPr>
-              <a:t>这么设计是怎么实现的</a:t>
+              <a:t>怎么实现</a:t>
             </a:r>
           </a:p>
         </p:txBody>
@@ -10894,7 +10915,7 @@
                   <a:srgbClr val="6E7A90"/>
                 </a:solidFill>
               </a:rPr>
-              <a:t>综合打回率、履约率、P0、SOP健康度、NA率与裁判分歧率进行多信号归因。</a:t>
+              <a:t>综合模型表现、SOP健康度、裁判分歧和测试覆盖进行归因。</a:t>
             </a:r>
           </a:p>
         </p:txBody>
@@ -10980,7 +11001,7 @@
                   <a:srgbClr val="111C31"/>
                 </a:solidFill>
               </a:rPr>
-              <a:t>这么设计的优势</a:t>
+              <a:t>设计优势</a:t>
             </a:r>
           </a:p>
         </p:txBody>
@@ -11033,7 +11054,7 @@
                   <a:srgbClr val="6E7A90"/>
                 </a:solidFill>
               </a:rPr>
-              <a:t>避免把系统问题错怪给模型，让优化资源真正投入责任对象。</a:t>
+              <a:t>区分模型、SOP、裁判与测试数据，避免错误归责。</a:t>
             </a:r>
           </a:p>
         </p:txBody>
@@ -11585,7 +11606,7 @@
           <p:nvPr/>
         </p:nvPicPr>
         <p:blipFill>
-          <a:blip xmlns:r="http://schemas.openxmlformats.org/officeDocument/2006/relationships" xmlns:a="http://schemas.openxmlformats.org/drawingml/2006/main" r:embed="Rfebf4aa03b654fc0"/>
+          <a:blip xmlns:r="http://schemas.openxmlformats.org/officeDocument/2006/relationships" xmlns:a="http://schemas.openxmlformats.org/drawingml/2006/main" r:embed="R12d71c291de74625"/>
           <a:srcRect xmlns:a="http://schemas.openxmlformats.org/drawingml/2006/main" l="0" t="8152" r="0" b="8152"/>
           <a:stretch xmlns:a="http://schemas.openxmlformats.org/drawingml/2006/main">
             <a:fillRect l="0" t="0" r="0" b="0"/>
@@ -11654,7 +11675,7 @@
                 <a:latin typeface="PingFang SC"/>
                 <a:ea typeface="PingFang SC"/>
                 <a:cs typeface="PingFang SC"/>
-                <a:hlinkClick xmlns:r="http://schemas.openxmlformats.org/officeDocument/2006/relationships" r:id="R53e5d50961254881"/>
+                <a:hlinkClick xmlns:r="http://schemas.openxmlformats.org/officeDocument/2006/relationships" r:id="Rd5ae7edf3fd4475d"/>
               </a:rPr>
               <a:t>▶ 在线 Demo</a:t>
             </a:r>
@@ -11706,7 +11727,7 @@
                 <a:latin typeface="PingFang SC"/>
                 <a:ea typeface="PingFang SC"/>
                 <a:cs typeface="PingFang SC"/>
-                <a:hlinkClick xmlns:r="http://schemas.openxmlformats.org/officeDocument/2006/relationships" r:id="Rb298058611de4da2"/>
+                <a:hlinkClick xmlns:r="http://schemas.openxmlformats.org/officeDocument/2006/relationships" r:id="Ra5e6f9c5a8644988"/>
               </a:rPr>
               <a:t>结果备份 ↗</a:t>
             </a:r>
@@ -11847,7 +11868,7 @@
                   <a:srgbClr val="6E7A90"/>
                 </a:solidFill>
               </a:rPr>
-              <a:t>模型和评分尺同时变化时，无法证明性能提升究竟由谁造成。</a:t>
+              <a:t>同时改变多个变量，无法证明优化是否真正有效。</a:t>
             </a:r>
           </a:p>
         </p:txBody>
@@ -11933,7 +11954,7 @@
                   <a:srgbClr val="111C31"/>
                 </a:solidFill>
               </a:rPr>
-              <a:t>这么设计是怎么实现的</a:t>
+              <a:t>怎么实现</a:t>
             </a:r>
           </a:p>
         </p:txBody>
@@ -11986,7 +12007,7 @@
                   <a:srgbClr val="6E7A90"/>
                 </a:solidFill>
               </a:rPr>
-              <a:t>只改根因对应对象，锁定SOP、Checklist、Judge与用户批次，再回到第3步回归。</a:t>
+              <a:t>只修改首要责任对象，并锁定其余版本返回对应步骤回归。</a:t>
             </a:r>
           </a:p>
         </p:txBody>
@@ -12072,7 +12093,7 @@
                   <a:srgbClr val="111C31"/>
                 </a:solidFill>
               </a:rPr>
-              <a:t>这么设计的优势</a:t>
+              <a:t>设计优势</a:t>
             </a:r>
           </a:p>
         </p:txBody>
@@ -12125,7 +12146,7 @@
                   <a:srgbClr val="6E7A90"/>
                 </a:solidFill>
               </a:rPr>
-              <a:t>形成单变量、同尺、可审计的改进证据，证明优化有效且没有偷换标准。</a:t>
+              <a:t>形成“定位—修改—验证”闭环，准确证明版本提升。</a:t>
             </a:r>
           </a:p>
         </p:txBody>
